--- a/activities/Activity-05-Transform-Excel-Data-into-a-Native-PowerPoint-Story/A05-Transform-Excel-Data-into-a-Native-PowerPoint-Story-Sample.pptx
+++ b/activities/Activity-05-Transform-Excel-Data-into-a-Native-PowerPoint-Story/A05-Transform-Excel-Data-into-a-Native-PowerPoint-Story-Sample.pptx
@@ -10,6 +10,8 @@
     <p:sldId id="258" r:id="rId9"/>
     <p:sldId id="259" r:id="rId10"/>
     <p:sldId id="260" r:id="rId11"/>
+    <p:sldId id="261" r:id="rId12"/>
+    <p:sldId id="262" r:id="rId13"/>
   </p:sldIdLst>
   <p:sldSz cx="12191695" cy="6858000" type="screen4x3"/>
   <p:notesSz cx="6858000" cy="9144000"/>
@@ -111,6 +113,167 @@
 </p:presentation>
 </file>
 
+<file path=ppt/charts/chart1.xml><?xml version="1.0" encoding="utf-8"?>
+<c:chartSpace xmlns:c="http://schemas.openxmlformats.org/drawingml/2006/chart" xmlns:a="http://schemas.openxmlformats.org/drawingml/2006/main" xmlns:r="http://schemas.openxmlformats.org/officeDocument/2006/relationships">
+  <c:date1904 val="0"/>
+  <c:chart>
+    <c:title>
+      <c:tx>
+        <c:rich>
+          <a:bodyPr/>
+          <a:lstStyle/>
+          <a:p>
+            <a:r>
+              <a:t>Ready Meals closes the revenue gap</a:t>
+            </a:r>
+          </a:p>
+        </c:rich>
+      </c:tx>
+      <c:layout/>
+      <c:overlay val="0"/>
+    </c:title>
+    <c:autoTitleDeleted val="0"/>
+    <c:plotArea>
+      <c:barChart>
+        <c:barDir val="col"/>
+        <c:grouping val="clustered"/>
+        <c:ser>
+          <c:idx val="0"/>
+          <c:order val="0"/>
+          <c:tx>
+            <c:strRef>
+              <c:f>Sheet1!$B$1</c:f>
+              <c:strCache>
+                <c:ptCount val="1"/>
+                <c:pt idx="0">
+                  <c:v>Jan–Jun revenue (SGD '000)</c:v>
+                </c:pt>
+              </c:strCache>
+            </c:strRef>
+          </c:tx>
+          <c:cat>
+            <c:strRef>
+              <c:f>Sheet1!$A$2:$A$5</c:f>
+              <c:strCache>
+                <c:ptCount val="4"/>
+                <c:pt idx="0">
+                  <c:v>Beverages</c:v>
+                </c:pt>
+                <c:pt idx="1">
+                  <c:v>Ready Meals</c:v>
+                </c:pt>
+                <c:pt idx="2">
+                  <c:v>Snacks</c:v>
+                </c:pt>
+                <c:pt idx="3">
+                  <c:v>Household</c:v>
+                </c:pt>
+              </c:strCache>
+            </c:strRef>
+          </c:cat>
+          <c:val>
+            <c:numRef>
+              <c:f>Sheet1!$B$2:$B$5</c:f>
+              <c:numCache>
+                <c:formatCode>General</c:formatCode>
+                <c:ptCount val="4"/>
+                <c:pt idx="0">
+                  <c:v>0.0</c:v>
+                </c:pt>
+                <c:pt idx="1">
+                  <c:v>0.0</c:v>
+                </c:pt>
+                <c:pt idx="2">
+                  <c:v>0.0</c:v>
+                </c:pt>
+                <c:pt idx="3">
+                  <c:v>0.0</c:v>
+                </c:pt>
+              </c:numCache>
+            </c:numRef>
+          </c:val>
+        </c:ser>
+        <c:axId val="-2068027336"/>
+        <c:axId val="-2113994440"/>
+      </c:barChart>
+      <c:catAx>
+        <c:axId val="-2068027336"/>
+        <c:scaling>
+          <c:orientation val="minMax"/>
+        </c:scaling>
+        <c:delete val="0"/>
+        <c:axPos val="b"/>
+        <c:title>
+          <c:tx>
+            <c:rich>
+              <a:bodyPr/>
+              <a:lstStyle/>
+              <a:p>
+                <a:r>
+                  <a:t>Category</a:t>
+                </a:r>
+              </a:p>
+            </c:rich>
+          </c:tx>
+          <c:layout/>
+          <c:overlay val="0"/>
+        </c:title>
+        <c:majorTickMark val="out"/>
+        <c:minorTickMark val="none"/>
+        <c:tickLblPos val="nextTo"/>
+        <c:crossAx val="-2113994440"/>
+        <c:crosses val="autoZero"/>
+        <c:auto val="1"/>
+        <c:lblAlgn val="ctr"/>
+        <c:lblOffset val="100"/>
+        <c:noMultiLvlLbl val="0"/>
+      </c:catAx>
+      <c:valAx>
+        <c:axId val="-2113994440"/>
+        <c:scaling/>
+        <c:delete val="0"/>
+        <c:axPos val="l"/>
+        <c:majorGridlines/>
+        <c:title>
+          <c:tx>
+            <c:rich>
+              <a:bodyPr/>
+              <a:lstStyle/>
+              <a:p>
+                <a:r>
+                  <a:t>Revenue (SGD '000)</a:t>
+                </a:r>
+              </a:p>
+            </c:rich>
+          </c:tx>
+          <c:layout/>
+          <c:overlay val="0"/>
+        </c:title>
+        <c:majorTickMark val="out"/>
+        <c:minorTickMark val="none"/>
+        <c:tickLblPos val="nextTo"/>
+        <c:crossAx val="-2068027336"/>
+        <c:crosses val="autoZero"/>
+      </c:valAx>
+    </c:plotArea>
+    <c:dispBlanksAs val="gap"/>
+  </c:chart>
+  <c:txPr>
+    <a:bodyPr/>
+    <a:lstStyle/>
+    <a:p>
+      <a:pPr>
+        <a:defRPr sz="1800"/>
+      </a:pPr>
+      <a:endParaRPr lang="en-US"/>
+    </a:p>
+  </c:txPr>
+  <c:externalData r:id="rId1">
+    <c:autoUpdate val="0"/>
+  </c:externalData>
+</c:chartSpace>
+</file>
+
 <file path=ppt/slideLayouts/slideLayout1.xml><?xml version="1.0" encoding="utf-8"?>
 <p:sldLayout xmlns:a="http://schemas.openxmlformats.org/drawingml/2006/main" xmlns:r="http://schemas.openxmlformats.org/officeDocument/2006/relationships" xmlns:p="http://schemas.openxmlformats.org/presentationml/2006/main" type="title" preserve="1">
   <p:cSld name="Title Slide">
@@ -3292,7 +3455,7 @@
                 </a:solidFill>
                 <a:latin typeface="Arial"/>
               </a:rPr>
-              <a:t>Transform Excel Data into a Native PowerPoint Story</a:t>
+              <a:t>Use AI Analysis to Build a Native PowerPoint Data Story</a:t>
             </a:r>
           </a:p>
         </p:txBody>
@@ -3442,7 +3605,7 @@
                 </a:solidFill>
                 <a:latin typeface="Arial"/>
               </a:rPr>
-              <a:t>Excel + native PowerPoint chart</a:t>
+              <a:t>Approved AI assistant + Excel + native PowerPoint chart</a:t>
             </a:r>
           </a:p>
         </p:txBody>
@@ -3525,6 +3688,246 @@
             <a:avLst/>
           </a:prstGeom>
           <a:solidFill>
+            <a:srgbClr val="7C3AED"/>
+          </a:solidFill>
+          <a:ln>
+            <a:solidFill>
+              <a:srgbClr val="7C3AED"/>
+            </a:solidFill>
+          </a:ln>
+        </p:spPr>
+        <p:style>
+          <a:lnRef idx="1">
+            <a:schemeClr val="accent1"/>
+          </a:lnRef>
+          <a:fillRef idx="3">
+            <a:schemeClr val="accent1"/>
+          </a:fillRef>
+          <a:effectRef idx="2">
+            <a:schemeClr val="accent1"/>
+          </a:effectRef>
+          <a:fontRef idx="minor">
+            <a:schemeClr val="lt1"/>
+          </a:fontRef>
+        </p:style>
+        <p:txBody>
+          <a:bodyPr rtlCol="0" anchor="ctr"/>
+          <a:lstStyle/>
+          <a:p>
+            <a:pPr algn="ctr"/>
+          </a:p>
+        </p:txBody>
+      </p:sp>
+      <p:sp>
+        <p:nvSpPr>
+          <p:cNvPr id="4" name="TextBox 3"/>
+          <p:cNvSpPr txBox="1"/>
+          <p:nvPr/>
+        </p:nvSpPr>
+        <p:spPr>
+          <a:xfrm>
+            <a:off x="658368" y="384048"/>
+            <a:ext cx="10789920" cy="320040"/>
+          </a:xfrm>
+          <a:prstGeom prst="rect">
+            <a:avLst/>
+          </a:prstGeom>
+          <a:noFill/>
+        </p:spPr>
+        <p:txBody>
+          <a:bodyPr wrap="square" anchor="t">
+            <a:spAutoFit/>
+          </a:bodyPr>
+          <a:lstStyle/>
+          <a:p>
+            <a:pPr algn="l"/>
+            <a:r>
+              <a:rPr sz="1100" b="1">
+                <a:solidFill>
+                  <a:srgbClr val="7C3AED"/>
+                </a:solidFill>
+                <a:latin typeface="Arial"/>
+              </a:rPr>
+              <a:t>ACTIVITY 05 · FULL COPY-READY TEXT IN PROMPTS.MD AND AI PROMPT LAB</a:t>
+            </a:r>
+          </a:p>
+        </p:txBody>
+      </p:sp>
+      <p:sp>
+        <p:nvSpPr>
+          <p:cNvPr id="5" name="TextBox 4"/>
+          <p:cNvSpPr txBox="1"/>
+          <p:nvPr/>
+        </p:nvSpPr>
+        <p:spPr>
+          <a:xfrm>
+            <a:off x="658368" y="749808"/>
+            <a:ext cx="10789920" cy="658368"/>
+          </a:xfrm>
+          <a:prstGeom prst="rect">
+            <a:avLst/>
+          </a:prstGeom>
+          <a:noFill/>
+        </p:spPr>
+        <p:txBody>
+          <a:bodyPr wrap="square" anchor="t">
+            <a:spAutoFit/>
+          </a:bodyPr>
+          <a:lstStyle/>
+          <a:p>
+            <a:pPr algn="l"/>
+            <a:r>
+              <a:rPr sz="2700" b="1">
+                <a:solidFill>
+                  <a:srgbClr val="161B26"/>
+                </a:solidFill>
+                <a:latin typeface="Arial"/>
+              </a:rPr>
+              <a:t>AI Prompt Starters</a:t>
+            </a:r>
+          </a:p>
+        </p:txBody>
+      </p:sp>
+      <p:sp>
+        <p:nvSpPr>
+          <p:cNvPr id="6" name="Rectangle 5"/>
+          <p:cNvSpPr/>
+          <p:nvPr/>
+        </p:nvSpPr>
+        <p:spPr>
+          <a:xfrm>
+            <a:off x="658368" y="1444752"/>
+            <a:ext cx="10881360" cy="18288"/>
+          </a:xfrm>
+          <a:prstGeom prst="rect">
+            <a:avLst/>
+          </a:prstGeom>
+          <a:solidFill>
+            <a:srgbClr val="E2E8F0"/>
+          </a:solidFill>
+          <a:ln>
+            <a:solidFill>
+              <a:srgbClr val="E2E8F0"/>
+            </a:solidFill>
+          </a:ln>
+        </p:spPr>
+        <p:style>
+          <a:lnRef idx="1">
+            <a:schemeClr val="accent1"/>
+          </a:lnRef>
+          <a:fillRef idx="3">
+            <a:schemeClr val="accent1"/>
+          </a:fillRef>
+          <a:effectRef idx="2">
+            <a:schemeClr val="accent1"/>
+          </a:effectRef>
+          <a:fontRef idx="minor">
+            <a:schemeClr val="lt1"/>
+          </a:fontRef>
+        </p:style>
+        <p:txBody>
+          <a:bodyPr rtlCol="0" anchor="ctr"/>
+          <a:lstStyle/>
+          <a:p>
+            <a:pPr algn="ctr"/>
+          </a:p>
+        </p:txBody>
+      </p:sp>
+      <p:sp>
+        <p:nvSpPr>
+          <p:cNvPr id="7" name="TextBox 6"/>
+          <p:cNvSpPr txBox="1"/>
+          <p:nvPr/>
+        </p:nvSpPr>
+        <p:spPr>
+          <a:xfrm>
+            <a:off x="658368" y="6473952"/>
+            <a:ext cx="9875520" cy="201168"/>
+          </a:xfrm>
+          <a:prstGeom prst="rect">
+            <a:avLst/>
+          </a:prstGeom>
+          <a:noFill/>
+        </p:spPr>
+        <p:txBody>
+          <a:bodyPr wrap="square" anchor="t">
+            <a:spAutoFit/>
+          </a:bodyPr>
+          <a:lstStyle/>
+          <a:p>
+            <a:pPr algn="l"/>
+            <a:r>
+              <a:rPr sz="800" b="0">
+                <a:solidFill>
+                  <a:srgbClr val="5B6372"/>
+                </a:solidFill>
+                <a:latin typeface="Arial"/>
+              </a:rPr>
+              <a:t>TGS-2026064178 · ACTIVITY PRACTICE · Tertiary Infotech Academy Pte Ltd</a:t>
+            </a:r>
+          </a:p>
+        </p:txBody>
+      </p:sp>
+      <p:sp>
+        <p:nvSpPr>
+          <p:cNvPr id="8" name="Rounded Rectangle 7"/>
+          <p:cNvSpPr/>
+          <p:nvPr/>
+        </p:nvSpPr>
+        <p:spPr>
+          <a:xfrm>
+            <a:off x="731520" y="1755648"/>
+            <a:ext cx="5166360" cy="1847088"/>
+          </a:xfrm>
+          <a:prstGeom prst="roundRect">
+            <a:avLst/>
+          </a:prstGeom>
+          <a:solidFill>
+            <a:srgbClr val="F5F8FC"/>
+          </a:solidFill>
+          <a:ln>
+            <a:solidFill>
+              <a:srgbClr val="E2E8F0"/>
+            </a:solidFill>
+          </a:ln>
+        </p:spPr>
+        <p:style>
+          <a:lnRef idx="1">
+            <a:schemeClr val="accent1"/>
+          </a:lnRef>
+          <a:fillRef idx="3">
+            <a:schemeClr val="accent1"/>
+          </a:fillRef>
+          <a:effectRef idx="2">
+            <a:schemeClr val="accent1"/>
+          </a:effectRef>
+          <a:fontRef idx="minor">
+            <a:schemeClr val="lt1"/>
+          </a:fontRef>
+        </p:style>
+        <p:txBody>
+          <a:bodyPr rtlCol="0" anchor="ctr"/>
+          <a:lstStyle/>
+          <a:p>
+            <a:pPr algn="ctr"/>
+          </a:p>
+        </p:txBody>
+      </p:sp>
+      <p:sp>
+        <p:nvSpPr>
+          <p:cNvPr id="9" name="Rectangle 8"/>
+          <p:cNvSpPr/>
+          <p:nvPr/>
+        </p:nvSpPr>
+        <p:spPr>
+          <a:xfrm>
+            <a:off x="731520" y="1755648"/>
+            <a:ext cx="73152" cy="1847088"/>
+          </a:xfrm>
+          <a:prstGeom prst="rect">
+            <a:avLst/>
+          </a:prstGeom>
+          <a:solidFill>
             <a:srgbClr val="1F6FEB"/>
           </a:solidFill>
           <a:ln>
@@ -3557,14 +3960,94 @@
       </p:sp>
       <p:sp>
         <p:nvSpPr>
-          <p:cNvPr id="4" name="TextBox 3"/>
+          <p:cNvPr id="10" name="Rounded Rectangle 9"/>
+          <p:cNvSpPr/>
+          <p:nvPr/>
+        </p:nvSpPr>
+        <p:spPr>
+          <a:xfrm>
+            <a:off x="932688" y="1975104"/>
+            <a:ext cx="438912" cy="438912"/>
+          </a:xfrm>
+          <a:prstGeom prst="roundRect">
+            <a:avLst/>
+          </a:prstGeom>
+          <a:solidFill>
+            <a:srgbClr val="1F6FEB"/>
+          </a:solidFill>
+          <a:ln>
+            <a:solidFill>
+              <a:srgbClr val="1F6FEB"/>
+            </a:solidFill>
+          </a:ln>
+        </p:spPr>
+        <p:style>
+          <a:lnRef idx="1">
+            <a:schemeClr val="accent1"/>
+          </a:lnRef>
+          <a:fillRef idx="3">
+            <a:schemeClr val="accent1"/>
+          </a:fillRef>
+          <a:effectRef idx="2">
+            <a:schemeClr val="accent1"/>
+          </a:effectRef>
+          <a:fontRef idx="minor">
+            <a:schemeClr val="lt1"/>
+          </a:fontRef>
+        </p:style>
+        <p:txBody>
+          <a:bodyPr rtlCol="0" anchor="ctr"/>
+          <a:lstStyle/>
+          <a:p>
+            <a:pPr algn="ctr"/>
+          </a:p>
+        </p:txBody>
+      </p:sp>
+      <p:sp>
+        <p:nvSpPr>
+          <p:cNvPr id="11" name="TextBox 10"/>
           <p:cNvSpPr txBox="1"/>
           <p:nvPr/>
         </p:nvSpPr>
         <p:spPr>
           <a:xfrm>
-            <a:off x="658368" y="384048"/>
-            <a:ext cx="10789920" cy="320040"/>
+            <a:off x="932688" y="1984248"/>
+            <a:ext cx="438912" cy="420624"/>
+          </a:xfrm>
+          <a:prstGeom prst="rect">
+            <a:avLst/>
+          </a:prstGeom>
+          <a:noFill/>
+        </p:spPr>
+        <p:txBody>
+          <a:bodyPr wrap="square" anchor="ctr">
+            <a:spAutoFit/>
+          </a:bodyPr>
+          <a:lstStyle/>
+          <a:p>
+            <a:pPr algn="ctr"/>
+            <a:r>
+              <a:rPr sz="1400" b="1">
+                <a:solidFill>
+                  <a:srgbClr val="FFFFFF"/>
+                </a:solidFill>
+                <a:latin typeface="Arial"/>
+              </a:rPr>
+              <a:t>1</a:t>
+            </a:r>
+          </a:p>
+        </p:txBody>
+      </p:sp>
+      <p:sp>
+        <p:nvSpPr>
+          <p:cNvPr id="12" name="TextBox 11"/>
+          <p:cNvSpPr txBox="1"/>
+          <p:nvPr/>
+        </p:nvSpPr>
+        <p:spPr>
+          <a:xfrm>
+            <a:off x="1536192" y="1938528"/>
+            <a:ext cx="4178808" cy="329184"/>
           </a:xfrm>
           <a:prstGeom prst="rect">
             <a:avLst/>
@@ -3579,27 +4062,27 @@
           <a:p>
             <a:pPr algn="l"/>
             <a:r>
-              <a:rPr sz="1100" b="1">
+              <a:rPr sz="1400" b="1">
                 <a:solidFill>
                   <a:srgbClr val="1F6FEB"/>
                 </a:solidFill>
                 <a:latin typeface="Arial"/>
               </a:rPr>
-              <a:t>ACTIVITY 05 · CONTEXT</a:t>
-            </a:r>
-          </a:p>
-        </p:txBody>
-      </p:sp>
-      <p:sp>
-        <p:nvSpPr>
-          <p:cNvPr id="5" name="TextBox 4"/>
+              <a:t>Data analyst</a:t>
+            </a:r>
+          </a:p>
+        </p:txBody>
+      </p:sp>
+      <p:sp>
+        <p:nvSpPr>
+          <p:cNvPr id="13" name="TextBox 12"/>
           <p:cNvSpPr txBox="1"/>
           <p:nvPr/>
         </p:nvSpPr>
         <p:spPr>
           <a:xfrm>
-            <a:off x="658368" y="749808"/>
-            <a:ext cx="10789920" cy="658368"/>
+            <a:off x="1536192" y="2322576"/>
+            <a:ext cx="4178808" cy="1133856"/>
           </a:xfrm>
           <a:prstGeom prst="rect">
             <a:avLst/>
@@ -3614,33 +4097,33 @@
           <a:p>
             <a:pPr algn="l"/>
             <a:r>
-              <a:rPr sz="2700" b="1">
+              <a:rPr sz="1150" b="0">
                 <a:solidFill>
                   <a:srgbClr val="161B26"/>
                 </a:solidFill>
                 <a:latin typeface="Arial"/>
               </a:rPr>
-              <a:t>The Scenario</a:t>
-            </a:r>
-          </a:p>
-        </p:txBody>
-      </p:sp>
-      <p:sp>
-        <p:nvSpPr>
-          <p:cNvPr id="6" name="Rectangle 5"/>
+              <a:t>Using only the attached approved sources, create a source register, identify duplicates or conflicting definitions, clean the table, show formulas or transformations, and return five candidate insights with citations, caveats and a con…</a:t>
+            </a:r>
+          </a:p>
+        </p:txBody>
+      </p:sp>
+      <p:sp>
+        <p:nvSpPr>
+          <p:cNvPr id="14" name="Rounded Rectangle 13"/>
           <p:cNvSpPr/>
           <p:nvPr/>
         </p:nvSpPr>
         <p:spPr>
           <a:xfrm>
-            <a:off x="658368" y="1444752"/>
-            <a:ext cx="10881360" cy="18288"/>
-          </a:xfrm>
-          <a:prstGeom prst="rect">
-            <a:avLst/>
-          </a:prstGeom>
-          <a:solidFill>
-            <a:srgbClr val="E2E8F0"/>
+            <a:off x="6144768" y="1755648"/>
+            <a:ext cx="5166360" cy="1847088"/>
+          </a:xfrm>
+          <a:prstGeom prst="roundRect">
+            <a:avLst/>
+          </a:prstGeom>
+          <a:solidFill>
+            <a:srgbClr val="F5F8FC"/>
           </a:solidFill>
           <a:ln>
             <a:solidFill>
@@ -3672,14 +4155,139 @@
       </p:sp>
       <p:sp>
         <p:nvSpPr>
-          <p:cNvPr id="7" name="TextBox 6"/>
+          <p:cNvPr id="15" name="Rectangle 14"/>
+          <p:cNvSpPr/>
+          <p:nvPr/>
+        </p:nvSpPr>
+        <p:spPr>
+          <a:xfrm>
+            <a:off x="6144768" y="1755648"/>
+            <a:ext cx="73152" cy="1847088"/>
+          </a:xfrm>
+          <a:prstGeom prst="rect">
+            <a:avLst/>
+          </a:prstGeom>
+          <a:solidFill>
+            <a:srgbClr val="10B981"/>
+          </a:solidFill>
+          <a:ln>
+            <a:solidFill>
+              <a:srgbClr val="10B981"/>
+            </a:solidFill>
+          </a:ln>
+        </p:spPr>
+        <p:style>
+          <a:lnRef idx="1">
+            <a:schemeClr val="accent1"/>
+          </a:lnRef>
+          <a:fillRef idx="3">
+            <a:schemeClr val="accent1"/>
+          </a:fillRef>
+          <a:effectRef idx="2">
+            <a:schemeClr val="accent1"/>
+          </a:effectRef>
+          <a:fontRef idx="minor">
+            <a:schemeClr val="lt1"/>
+          </a:fontRef>
+        </p:style>
+        <p:txBody>
+          <a:bodyPr rtlCol="0" anchor="ctr"/>
+          <a:lstStyle/>
+          <a:p>
+            <a:pPr algn="ctr"/>
+          </a:p>
+        </p:txBody>
+      </p:sp>
+      <p:sp>
+        <p:nvSpPr>
+          <p:cNvPr id="16" name="Rounded Rectangle 15"/>
+          <p:cNvSpPr/>
+          <p:nvPr/>
+        </p:nvSpPr>
+        <p:spPr>
+          <a:xfrm>
+            <a:off x="6345936" y="1975104"/>
+            <a:ext cx="438912" cy="438912"/>
+          </a:xfrm>
+          <a:prstGeom prst="roundRect">
+            <a:avLst/>
+          </a:prstGeom>
+          <a:solidFill>
+            <a:srgbClr val="10B981"/>
+          </a:solidFill>
+          <a:ln>
+            <a:solidFill>
+              <a:srgbClr val="10B981"/>
+            </a:solidFill>
+          </a:ln>
+        </p:spPr>
+        <p:style>
+          <a:lnRef idx="1">
+            <a:schemeClr val="accent1"/>
+          </a:lnRef>
+          <a:fillRef idx="3">
+            <a:schemeClr val="accent1"/>
+          </a:fillRef>
+          <a:effectRef idx="2">
+            <a:schemeClr val="accent1"/>
+          </a:effectRef>
+          <a:fontRef idx="minor">
+            <a:schemeClr val="lt1"/>
+          </a:fontRef>
+        </p:style>
+        <p:txBody>
+          <a:bodyPr rtlCol="0" anchor="ctr"/>
+          <a:lstStyle/>
+          <a:p>
+            <a:pPr algn="ctr"/>
+          </a:p>
+        </p:txBody>
+      </p:sp>
+      <p:sp>
+        <p:nvSpPr>
+          <p:cNvPr id="17" name="TextBox 16"/>
           <p:cNvSpPr txBox="1"/>
           <p:nvPr/>
         </p:nvSpPr>
         <p:spPr>
           <a:xfrm>
-            <a:off x="658368" y="6473952"/>
-            <a:ext cx="9875520" cy="201168"/>
+            <a:off x="6345936" y="1984248"/>
+            <a:ext cx="438912" cy="420624"/>
+          </a:xfrm>
+          <a:prstGeom prst="rect">
+            <a:avLst/>
+          </a:prstGeom>
+          <a:noFill/>
+        </p:spPr>
+        <p:txBody>
+          <a:bodyPr wrap="square" anchor="ctr">
+            <a:spAutoFit/>
+          </a:bodyPr>
+          <a:lstStyle/>
+          <a:p>
+            <a:pPr algn="ctr"/>
+            <a:r>
+              <a:rPr sz="1400" b="1">
+                <a:solidFill>
+                  <a:srgbClr val="FFFFFF"/>
+                </a:solidFill>
+                <a:latin typeface="Arial"/>
+              </a:rPr>
+              <a:t>2</a:t>
+            </a:r>
+          </a:p>
+        </p:txBody>
+      </p:sp>
+      <p:sp>
+        <p:nvSpPr>
+          <p:cNvPr id="18" name="TextBox 17"/>
+          <p:cNvSpPr txBox="1"/>
+          <p:nvPr/>
+        </p:nvSpPr>
+        <p:spPr>
+          <a:xfrm>
+            <a:off x="6949440" y="1938528"/>
+            <a:ext cx="4178808" cy="329184"/>
           </a:xfrm>
           <a:prstGeom prst="rect">
             <a:avLst/>
@@ -3694,27 +4302,62 @@
           <a:p>
             <a:pPr algn="l"/>
             <a:r>
-              <a:rPr sz="800" b="0">
-                <a:solidFill>
-                  <a:srgbClr val="5B6372"/>
+              <a:rPr sz="1400" b="1">
+                <a:solidFill>
+                  <a:srgbClr val="10B981"/>
                 </a:solidFill>
                 <a:latin typeface="Arial"/>
               </a:rPr>
-              <a:t>TGS-2024048310 · ACTIVITY PRACTICE · Tertiary Infotech Academy Pte Ltd</a:t>
-            </a:r>
-          </a:p>
-        </p:txBody>
-      </p:sp>
-      <p:sp>
-        <p:nvSpPr>
-          <p:cNvPr id="8" name="Rounded Rectangle 7"/>
+              <a:t>Infographic</a:t>
+            </a:r>
+          </a:p>
+        </p:txBody>
+      </p:sp>
+      <p:sp>
+        <p:nvSpPr>
+          <p:cNvPr id="19" name="TextBox 18"/>
+          <p:cNvSpPr txBox="1"/>
+          <p:nvPr/>
+        </p:nvSpPr>
+        <p:spPr>
+          <a:xfrm>
+            <a:off x="6949440" y="2322576"/>
+            <a:ext cx="4178808" cy="1133856"/>
+          </a:xfrm>
+          <a:prstGeom prst="rect">
+            <a:avLst/>
+          </a:prstGeom>
+          <a:noFill/>
+        </p:spPr>
+        <p:txBody>
+          <a:bodyPr wrap="square" anchor="t">
+            <a:spAutoFit/>
+          </a:bodyPr>
+          <a:lstStyle/>
+          <a:p>
+            <a:pPr algn="l"/>
+            <a:r>
+              <a:rPr sz="1150" b="0">
+                <a:solidFill>
+                  <a:srgbClr val="161B26"/>
+                </a:solidFill>
+                <a:latin typeface="Arial"/>
+              </a:rPr>
+              <a:t>Create a one-page executive infographic for Singapore retail managers. Lead with one decision insight, show three supporting metrics, include a five-stage flow and a source footer. Use a clean professional style, strong hierarchy and n…</a:t>
+            </a:r>
+          </a:p>
+        </p:txBody>
+      </p:sp>
+      <p:sp>
+        <p:nvSpPr>
+          <p:cNvPr id="20" name="Rounded Rectangle 19"/>
           <p:cNvSpPr/>
           <p:nvPr/>
         </p:nvSpPr>
         <p:spPr>
           <a:xfrm>
-            <a:off x="731520" y="1783080"/>
-            <a:ext cx="10698480" cy="1691640"/>
+            <a:off x="731520" y="3877056"/>
+            <a:ext cx="5166360" cy="1847088"/>
           </a:xfrm>
           <a:prstGeom prst="roundRect">
             <a:avLst/>
@@ -3752,24 +4395,24 @@
       </p:sp>
       <p:sp>
         <p:nvSpPr>
-          <p:cNvPr id="9" name="Rectangle 8"/>
+          <p:cNvPr id="21" name="Rectangle 20"/>
           <p:cNvSpPr/>
           <p:nvPr/>
         </p:nvSpPr>
         <p:spPr>
           <a:xfrm>
-            <a:off x="731520" y="1783080"/>
-            <a:ext cx="73152" cy="1691640"/>
-          </a:xfrm>
-          <a:prstGeom prst="rect">
-            <a:avLst/>
-          </a:prstGeom>
-          <a:solidFill>
-            <a:srgbClr val="1F6FEB"/>
+            <a:off x="731520" y="3877056"/>
+            <a:ext cx="73152" cy="1847088"/>
+          </a:xfrm>
+          <a:prstGeom prst="rect">
+            <a:avLst/>
+          </a:prstGeom>
+          <a:solidFill>
+            <a:srgbClr val="7C3AED"/>
           </a:solidFill>
           <a:ln>
             <a:solidFill>
-              <a:srgbClr val="1F6FEB"/>
+              <a:srgbClr val="7C3AED"/>
             </a:solidFill>
           </a:ln>
         </p:spPr>
@@ -3797,24 +4440,24 @@
       </p:sp>
       <p:sp>
         <p:nvSpPr>
-          <p:cNvPr id="10" name="Rounded Rectangle 9"/>
+          <p:cNvPr id="22" name="Rounded Rectangle 21"/>
           <p:cNvSpPr/>
           <p:nvPr/>
         </p:nvSpPr>
         <p:spPr>
           <a:xfrm>
-            <a:off x="932688" y="2002536"/>
+            <a:off x="932688" y="4096512"/>
             <a:ext cx="438912" cy="438912"/>
           </a:xfrm>
           <a:prstGeom prst="roundRect">
             <a:avLst/>
           </a:prstGeom>
           <a:solidFill>
-            <a:srgbClr val="1F6FEB"/>
+            <a:srgbClr val="7C3AED"/>
           </a:solidFill>
           <a:ln>
             <a:solidFill>
-              <a:srgbClr val="1F6FEB"/>
+              <a:srgbClr val="7C3AED"/>
             </a:solidFill>
           </a:ln>
         </p:spPr>
@@ -3842,13 +4485,13 @@
       </p:sp>
       <p:sp>
         <p:nvSpPr>
-          <p:cNvPr id="11" name="TextBox 10"/>
+          <p:cNvPr id="23" name="TextBox 22"/>
           <p:cNvSpPr txBox="1"/>
           <p:nvPr/>
         </p:nvSpPr>
         <p:spPr>
           <a:xfrm>
-            <a:off x="932688" y="2011680"/>
+            <a:off x="932688" y="4105656"/>
             <a:ext cx="438912" cy="420624"/>
           </a:xfrm>
           <a:prstGeom prst="rect">
@@ -3870,21 +4513,21 @@
                 </a:solidFill>
                 <a:latin typeface="Arial"/>
               </a:rPr>
-              <a:t>1</a:t>
-            </a:r>
-          </a:p>
-        </p:txBody>
-      </p:sp>
-      <p:sp>
-        <p:nvSpPr>
-          <p:cNvPr id="12" name="TextBox 11"/>
+              <a:t>3</a:t>
+            </a:r>
+          </a:p>
+        </p:txBody>
+      </p:sp>
+      <p:sp>
+        <p:nvSpPr>
+          <p:cNvPr id="24" name="TextBox 23"/>
           <p:cNvSpPr txBox="1"/>
           <p:nvPr/>
         </p:nvSpPr>
         <p:spPr>
           <a:xfrm>
-            <a:off x="1536192" y="1965960"/>
-            <a:ext cx="9710928" cy="329184"/>
+            <a:off x="1536192" y="4059936"/>
+            <a:ext cx="4178808" cy="329184"/>
           </a:xfrm>
           <a:prstGeom prst="rect">
             <a:avLst/>
@@ -3901,25 +4544,25 @@
             <a:r>
               <a:rPr sz="1400" b="1">
                 <a:solidFill>
-                  <a:srgbClr val="1F6FEB"/>
+                  <a:srgbClr val="7C3AED"/>
                 </a:solidFill>
                 <a:latin typeface="Arial"/>
               </a:rPr>
-              <a:t>Context</a:t>
-            </a:r>
-          </a:p>
-        </p:txBody>
-      </p:sp>
-      <p:sp>
-        <p:nvSpPr>
-          <p:cNvPr id="13" name="TextBox 12"/>
+              <a:t>Text to image</a:t>
+            </a:r>
+          </a:p>
+        </p:txBody>
+      </p:sp>
+      <p:sp>
+        <p:nvSpPr>
+          <p:cNvPr id="25" name="TextBox 24"/>
           <p:cNvSpPr txBox="1"/>
           <p:nvPr/>
         </p:nvSpPr>
         <p:spPr>
           <a:xfrm>
-            <a:off x="1536192" y="2350008"/>
-            <a:ext cx="9710928" cy="978408"/>
+            <a:off x="1536192" y="4443984"/>
+            <a:ext cx="4178808" cy="1133856"/>
           </a:xfrm>
           <a:prstGeom prst="rect">
             <a:avLst/>
@@ -3940,21 +4583,21 @@
                 </a:solidFill>
                 <a:latin typeface="Arial"/>
               </a:rPr>
-              <a:t>Northstar's marketing team must choose one product family for the next promotion. The supplied workbook contains monthly revenue, units, margin and returns for four categories.</a:t>
-            </a:r>
-          </a:p>
-        </p:txBody>
-      </p:sp>
-      <p:sp>
-        <p:nvSpPr>
-          <p:cNvPr id="14" name="Rounded Rectangle 13"/>
+              <a:t>Create a clean vector-like sustainability delivery illustration for a PowerPoint infographic: one electric van, one reusable parcel, a simple route and a feedback symbol. Transparent background, consistent blue/teal/violet/amber palett…</a:t>
+            </a:r>
+          </a:p>
+        </p:txBody>
+      </p:sp>
+      <p:sp>
+        <p:nvSpPr>
+          <p:cNvPr id="26" name="Rounded Rectangle 25"/>
           <p:cNvSpPr/>
           <p:nvPr/>
         </p:nvSpPr>
         <p:spPr>
           <a:xfrm>
-            <a:off x="731520" y="3776472"/>
-            <a:ext cx="10698480" cy="1691640"/>
+            <a:off x="6144768" y="3877056"/>
+            <a:ext cx="5166360" cy="1847088"/>
           </a:xfrm>
           <a:prstGeom prst="roundRect">
             <a:avLst/>
@@ -3992,24 +4635,24 @@
       </p:sp>
       <p:sp>
         <p:nvSpPr>
-          <p:cNvPr id="15" name="Rectangle 14"/>
+          <p:cNvPr id="27" name="Rectangle 26"/>
           <p:cNvSpPr/>
           <p:nvPr/>
         </p:nvSpPr>
         <p:spPr>
           <a:xfrm>
-            <a:off x="731520" y="3776472"/>
-            <a:ext cx="73152" cy="1691640"/>
-          </a:xfrm>
-          <a:prstGeom prst="rect">
-            <a:avLst/>
-          </a:prstGeom>
-          <a:solidFill>
-            <a:srgbClr val="10B981"/>
+            <a:off x="6144768" y="3877056"/>
+            <a:ext cx="73152" cy="1847088"/>
+          </a:xfrm>
+          <a:prstGeom prst="rect">
+            <a:avLst/>
+          </a:prstGeom>
+          <a:solidFill>
+            <a:srgbClr val="F59E0B"/>
           </a:solidFill>
           <a:ln>
             <a:solidFill>
-              <a:srgbClr val="10B981"/>
+              <a:srgbClr val="F59E0B"/>
             </a:solidFill>
           </a:ln>
         </p:spPr>
@@ -4037,24 +4680,24 @@
       </p:sp>
       <p:sp>
         <p:nvSpPr>
-          <p:cNvPr id="16" name="Rounded Rectangle 15"/>
+          <p:cNvPr id="28" name="Rounded Rectangle 27"/>
           <p:cNvSpPr/>
           <p:nvPr/>
         </p:nvSpPr>
         <p:spPr>
           <a:xfrm>
-            <a:off x="932688" y="3995928"/>
+            <a:off x="6345936" y="4096512"/>
             <a:ext cx="438912" cy="438912"/>
           </a:xfrm>
           <a:prstGeom prst="roundRect">
             <a:avLst/>
           </a:prstGeom>
           <a:solidFill>
-            <a:srgbClr val="10B981"/>
+            <a:srgbClr val="F59E0B"/>
           </a:solidFill>
           <a:ln>
             <a:solidFill>
-              <a:srgbClr val="10B981"/>
+              <a:srgbClr val="F59E0B"/>
             </a:solidFill>
           </a:ln>
         </p:spPr>
@@ -4082,13 +4725,13 @@
       </p:sp>
       <p:sp>
         <p:nvSpPr>
-          <p:cNvPr id="17" name="TextBox 16"/>
+          <p:cNvPr id="29" name="TextBox 28"/>
           <p:cNvSpPr txBox="1"/>
           <p:nvPr/>
         </p:nvSpPr>
         <p:spPr>
           <a:xfrm>
-            <a:off x="932688" y="4005072"/>
+            <a:off x="6345936" y="4105656"/>
             <a:ext cx="438912" cy="420624"/>
           </a:xfrm>
           <a:prstGeom prst="rect">
@@ -4110,21 +4753,21 @@
                 </a:solidFill>
                 <a:latin typeface="Arial"/>
               </a:rPr>
-              <a:t>2</a:t>
-            </a:r>
-          </a:p>
-        </p:txBody>
-      </p:sp>
-      <p:sp>
-        <p:nvSpPr>
-          <p:cNvPr id="18" name="TextBox 17"/>
+              <a:t>4</a:t>
+            </a:r>
+          </a:p>
+        </p:txBody>
+      </p:sp>
+      <p:sp>
+        <p:nvSpPr>
+          <p:cNvPr id="30" name="TextBox 29"/>
           <p:cNvSpPr txBox="1"/>
           <p:nvPr/>
         </p:nvSpPr>
         <p:spPr>
           <a:xfrm>
-            <a:off x="1536192" y="3959352"/>
-            <a:ext cx="9710928" cy="329184"/>
+            <a:off x="6949440" y="4059936"/>
+            <a:ext cx="4178808" cy="329184"/>
           </a:xfrm>
           <a:prstGeom prst="rect">
             <a:avLst/>
@@ -4141,25 +4784,25 @@
             <a:r>
               <a:rPr sz="1400" b="1">
                 <a:solidFill>
-                  <a:srgbClr val="10B981"/>
+                  <a:srgbClr val="F59E0B"/>
                 </a:solidFill>
                 <a:latin typeface="Arial"/>
               </a:rPr>
-              <a:t>Decision pressure</a:t>
-            </a:r>
-          </a:p>
-        </p:txBody>
-      </p:sp>
-      <p:sp>
-        <p:nvSpPr>
-          <p:cNvPr id="19" name="TextBox 18"/>
+              <a:t>Gemini Notebook deck</a:t>
+            </a:r>
+          </a:p>
+        </p:txBody>
+      </p:sp>
+      <p:sp>
+        <p:nvSpPr>
+          <p:cNvPr id="31" name="TextBox 30"/>
           <p:cNvSpPr txBox="1"/>
           <p:nvPr/>
         </p:nvSpPr>
         <p:spPr>
           <a:xfrm>
-            <a:off x="1536192" y="4343400"/>
-            <a:ext cx="9710928" cy="978408"/>
+            <a:off x="6949440" y="4443984"/>
+            <a:ext cx="4178808" cy="1133856"/>
           </a:xfrm>
           <a:prstGeom prst="rect">
             <a:avLst/>
@@ -4180,7 +4823,7 @@
                 </a:solidFill>
                 <a:latin typeface="Arial"/>
               </a:rPr>
-              <a:t>Create an editable PowerPoint chart that combines the right metric with an explicit decision implication. Do not paste a screenshot-only chart.</a:t>
+              <a:t>Create Presenter Slides for business stakeholders. Focus on the verified decision insight, use a concise professional style, include source-grounded comparisons and a final recommendation. Avoid claims not supported by selected sources…</a:t>
             </a:r>
           </a:p>
         </p:txBody>
@@ -4263,6 +4906,486 @@
             <a:avLst/>
           </a:prstGeom>
           <a:solidFill>
+            <a:srgbClr val="1F6FEB"/>
+          </a:solidFill>
+          <a:ln>
+            <a:solidFill>
+              <a:srgbClr val="1F6FEB"/>
+            </a:solidFill>
+          </a:ln>
+        </p:spPr>
+        <p:style>
+          <a:lnRef idx="1">
+            <a:schemeClr val="accent1"/>
+          </a:lnRef>
+          <a:fillRef idx="3">
+            <a:schemeClr val="accent1"/>
+          </a:fillRef>
+          <a:effectRef idx="2">
+            <a:schemeClr val="accent1"/>
+          </a:effectRef>
+          <a:fontRef idx="minor">
+            <a:schemeClr val="lt1"/>
+          </a:fontRef>
+        </p:style>
+        <p:txBody>
+          <a:bodyPr rtlCol="0" anchor="ctr"/>
+          <a:lstStyle/>
+          <a:p>
+            <a:pPr algn="ctr"/>
+          </a:p>
+        </p:txBody>
+      </p:sp>
+      <p:sp>
+        <p:nvSpPr>
+          <p:cNvPr id="4" name="TextBox 3"/>
+          <p:cNvSpPr txBox="1"/>
+          <p:nvPr/>
+        </p:nvSpPr>
+        <p:spPr>
+          <a:xfrm>
+            <a:off x="658368" y="384048"/>
+            <a:ext cx="10789920" cy="320040"/>
+          </a:xfrm>
+          <a:prstGeom prst="rect">
+            <a:avLst/>
+          </a:prstGeom>
+          <a:noFill/>
+        </p:spPr>
+        <p:txBody>
+          <a:bodyPr wrap="square" anchor="t">
+            <a:spAutoFit/>
+          </a:bodyPr>
+          <a:lstStyle/>
+          <a:p>
+            <a:pPr algn="l"/>
+            <a:r>
+              <a:rPr sz="1100" b="1">
+                <a:solidFill>
+                  <a:srgbClr val="1F6FEB"/>
+                </a:solidFill>
+                <a:latin typeface="Arial"/>
+              </a:rPr>
+              <a:t>ACTIVITY 05 · CONTEXT</a:t>
+            </a:r>
+          </a:p>
+        </p:txBody>
+      </p:sp>
+      <p:sp>
+        <p:nvSpPr>
+          <p:cNvPr id="5" name="TextBox 4"/>
+          <p:cNvSpPr txBox="1"/>
+          <p:nvPr/>
+        </p:nvSpPr>
+        <p:spPr>
+          <a:xfrm>
+            <a:off x="658368" y="749808"/>
+            <a:ext cx="10789920" cy="658368"/>
+          </a:xfrm>
+          <a:prstGeom prst="rect">
+            <a:avLst/>
+          </a:prstGeom>
+          <a:noFill/>
+        </p:spPr>
+        <p:txBody>
+          <a:bodyPr wrap="square" anchor="t">
+            <a:spAutoFit/>
+          </a:bodyPr>
+          <a:lstStyle/>
+          <a:p>
+            <a:pPr algn="l"/>
+            <a:r>
+              <a:rPr sz="2700" b="1">
+                <a:solidFill>
+                  <a:srgbClr val="161B26"/>
+                </a:solidFill>
+                <a:latin typeface="Arial"/>
+              </a:rPr>
+              <a:t>The Scenario</a:t>
+            </a:r>
+          </a:p>
+        </p:txBody>
+      </p:sp>
+      <p:sp>
+        <p:nvSpPr>
+          <p:cNvPr id="6" name="Rectangle 5"/>
+          <p:cNvSpPr/>
+          <p:nvPr/>
+        </p:nvSpPr>
+        <p:spPr>
+          <a:xfrm>
+            <a:off x="658368" y="1444752"/>
+            <a:ext cx="10881360" cy="18288"/>
+          </a:xfrm>
+          <a:prstGeom prst="rect">
+            <a:avLst/>
+          </a:prstGeom>
+          <a:solidFill>
+            <a:srgbClr val="E2E8F0"/>
+          </a:solidFill>
+          <a:ln>
+            <a:solidFill>
+              <a:srgbClr val="E2E8F0"/>
+            </a:solidFill>
+          </a:ln>
+        </p:spPr>
+        <p:style>
+          <a:lnRef idx="1">
+            <a:schemeClr val="accent1"/>
+          </a:lnRef>
+          <a:fillRef idx="3">
+            <a:schemeClr val="accent1"/>
+          </a:fillRef>
+          <a:effectRef idx="2">
+            <a:schemeClr val="accent1"/>
+          </a:effectRef>
+          <a:fontRef idx="minor">
+            <a:schemeClr val="lt1"/>
+          </a:fontRef>
+        </p:style>
+        <p:txBody>
+          <a:bodyPr rtlCol="0" anchor="ctr"/>
+          <a:lstStyle/>
+          <a:p>
+            <a:pPr algn="ctr"/>
+          </a:p>
+        </p:txBody>
+      </p:sp>
+      <p:sp>
+        <p:nvSpPr>
+          <p:cNvPr id="7" name="TextBox 6"/>
+          <p:cNvSpPr txBox="1"/>
+          <p:nvPr/>
+        </p:nvSpPr>
+        <p:spPr>
+          <a:xfrm>
+            <a:off x="658368" y="6473952"/>
+            <a:ext cx="9875520" cy="201168"/>
+          </a:xfrm>
+          <a:prstGeom prst="rect">
+            <a:avLst/>
+          </a:prstGeom>
+          <a:noFill/>
+        </p:spPr>
+        <p:txBody>
+          <a:bodyPr wrap="square" anchor="t">
+            <a:spAutoFit/>
+          </a:bodyPr>
+          <a:lstStyle/>
+          <a:p>
+            <a:pPr algn="l"/>
+            <a:r>
+              <a:rPr sz="800" b="0">
+                <a:solidFill>
+                  <a:srgbClr val="5B6372"/>
+                </a:solidFill>
+                <a:latin typeface="Arial"/>
+              </a:rPr>
+              <a:t>TGS-2026064178 · ACTIVITY PRACTICE · Tertiary Infotech Academy Pte Ltd</a:t>
+            </a:r>
+          </a:p>
+        </p:txBody>
+      </p:sp>
+      <p:sp>
+        <p:nvSpPr>
+          <p:cNvPr id="8" name="Rounded Rectangle 7"/>
+          <p:cNvSpPr/>
+          <p:nvPr/>
+        </p:nvSpPr>
+        <p:spPr>
+          <a:xfrm>
+            <a:off x="731520" y="1783080"/>
+            <a:ext cx="10698480" cy="1691640"/>
+          </a:xfrm>
+          <a:prstGeom prst="roundRect">
+            <a:avLst/>
+          </a:prstGeom>
+          <a:solidFill>
+            <a:srgbClr val="F5F8FC"/>
+          </a:solidFill>
+          <a:ln>
+            <a:solidFill>
+              <a:srgbClr val="E2E8F0"/>
+            </a:solidFill>
+          </a:ln>
+        </p:spPr>
+        <p:style>
+          <a:lnRef idx="1">
+            <a:schemeClr val="accent1"/>
+          </a:lnRef>
+          <a:fillRef idx="3">
+            <a:schemeClr val="accent1"/>
+          </a:fillRef>
+          <a:effectRef idx="2">
+            <a:schemeClr val="accent1"/>
+          </a:effectRef>
+          <a:fontRef idx="minor">
+            <a:schemeClr val="lt1"/>
+          </a:fontRef>
+        </p:style>
+        <p:txBody>
+          <a:bodyPr rtlCol="0" anchor="ctr"/>
+          <a:lstStyle/>
+          <a:p>
+            <a:pPr algn="ctr"/>
+          </a:p>
+        </p:txBody>
+      </p:sp>
+      <p:sp>
+        <p:nvSpPr>
+          <p:cNvPr id="9" name="Rectangle 8"/>
+          <p:cNvSpPr/>
+          <p:nvPr/>
+        </p:nvSpPr>
+        <p:spPr>
+          <a:xfrm>
+            <a:off x="731520" y="1783080"/>
+            <a:ext cx="73152" cy="1691640"/>
+          </a:xfrm>
+          <a:prstGeom prst="rect">
+            <a:avLst/>
+          </a:prstGeom>
+          <a:solidFill>
+            <a:srgbClr val="1F6FEB"/>
+          </a:solidFill>
+          <a:ln>
+            <a:solidFill>
+              <a:srgbClr val="1F6FEB"/>
+            </a:solidFill>
+          </a:ln>
+        </p:spPr>
+        <p:style>
+          <a:lnRef idx="1">
+            <a:schemeClr val="accent1"/>
+          </a:lnRef>
+          <a:fillRef idx="3">
+            <a:schemeClr val="accent1"/>
+          </a:fillRef>
+          <a:effectRef idx="2">
+            <a:schemeClr val="accent1"/>
+          </a:effectRef>
+          <a:fontRef idx="minor">
+            <a:schemeClr val="lt1"/>
+          </a:fontRef>
+        </p:style>
+        <p:txBody>
+          <a:bodyPr rtlCol="0" anchor="ctr"/>
+          <a:lstStyle/>
+          <a:p>
+            <a:pPr algn="ctr"/>
+          </a:p>
+        </p:txBody>
+      </p:sp>
+      <p:sp>
+        <p:nvSpPr>
+          <p:cNvPr id="10" name="Rounded Rectangle 9"/>
+          <p:cNvSpPr/>
+          <p:nvPr/>
+        </p:nvSpPr>
+        <p:spPr>
+          <a:xfrm>
+            <a:off x="932688" y="2002536"/>
+            <a:ext cx="438912" cy="438912"/>
+          </a:xfrm>
+          <a:prstGeom prst="roundRect">
+            <a:avLst/>
+          </a:prstGeom>
+          <a:solidFill>
+            <a:srgbClr val="1F6FEB"/>
+          </a:solidFill>
+          <a:ln>
+            <a:solidFill>
+              <a:srgbClr val="1F6FEB"/>
+            </a:solidFill>
+          </a:ln>
+        </p:spPr>
+        <p:style>
+          <a:lnRef idx="1">
+            <a:schemeClr val="accent1"/>
+          </a:lnRef>
+          <a:fillRef idx="3">
+            <a:schemeClr val="accent1"/>
+          </a:fillRef>
+          <a:effectRef idx="2">
+            <a:schemeClr val="accent1"/>
+          </a:effectRef>
+          <a:fontRef idx="minor">
+            <a:schemeClr val="lt1"/>
+          </a:fontRef>
+        </p:style>
+        <p:txBody>
+          <a:bodyPr rtlCol="0" anchor="ctr"/>
+          <a:lstStyle/>
+          <a:p>
+            <a:pPr algn="ctr"/>
+          </a:p>
+        </p:txBody>
+      </p:sp>
+      <p:sp>
+        <p:nvSpPr>
+          <p:cNvPr id="11" name="TextBox 10"/>
+          <p:cNvSpPr txBox="1"/>
+          <p:nvPr/>
+        </p:nvSpPr>
+        <p:spPr>
+          <a:xfrm>
+            <a:off x="932688" y="2011680"/>
+            <a:ext cx="438912" cy="420624"/>
+          </a:xfrm>
+          <a:prstGeom prst="rect">
+            <a:avLst/>
+          </a:prstGeom>
+          <a:noFill/>
+        </p:spPr>
+        <p:txBody>
+          <a:bodyPr wrap="square" anchor="ctr">
+            <a:spAutoFit/>
+          </a:bodyPr>
+          <a:lstStyle/>
+          <a:p>
+            <a:pPr algn="ctr"/>
+            <a:r>
+              <a:rPr sz="1400" b="1">
+                <a:solidFill>
+                  <a:srgbClr val="FFFFFF"/>
+                </a:solidFill>
+                <a:latin typeface="Arial"/>
+              </a:rPr>
+              <a:t>1</a:t>
+            </a:r>
+          </a:p>
+        </p:txBody>
+      </p:sp>
+      <p:sp>
+        <p:nvSpPr>
+          <p:cNvPr id="12" name="TextBox 11"/>
+          <p:cNvSpPr txBox="1"/>
+          <p:nvPr/>
+        </p:nvSpPr>
+        <p:spPr>
+          <a:xfrm>
+            <a:off x="1536192" y="1965960"/>
+            <a:ext cx="9710928" cy="329184"/>
+          </a:xfrm>
+          <a:prstGeom prst="rect">
+            <a:avLst/>
+          </a:prstGeom>
+          <a:noFill/>
+        </p:spPr>
+        <p:txBody>
+          <a:bodyPr wrap="square" anchor="t">
+            <a:spAutoFit/>
+          </a:bodyPr>
+          <a:lstStyle/>
+          <a:p>
+            <a:pPr algn="l"/>
+            <a:r>
+              <a:rPr sz="1400" b="1">
+                <a:solidFill>
+                  <a:srgbClr val="1F6FEB"/>
+                </a:solidFill>
+                <a:latin typeface="Arial"/>
+              </a:rPr>
+              <a:t>Context</a:t>
+            </a:r>
+          </a:p>
+        </p:txBody>
+      </p:sp>
+      <p:sp>
+        <p:nvSpPr>
+          <p:cNvPr id="13" name="TextBox 12"/>
+          <p:cNvSpPr txBox="1"/>
+          <p:nvPr/>
+        </p:nvSpPr>
+        <p:spPr>
+          <a:xfrm>
+            <a:off x="1536192" y="2350008"/>
+            <a:ext cx="9710928" cy="978408"/>
+          </a:xfrm>
+          <a:prstGeom prst="rect">
+            <a:avLst/>
+          </a:prstGeom>
+          <a:noFill/>
+        </p:spPr>
+        <p:txBody>
+          <a:bodyPr wrap="square" anchor="t">
+            <a:spAutoFit/>
+          </a:bodyPr>
+          <a:lstStyle/>
+          <a:p>
+            <a:pPr algn="l"/>
+            <a:r>
+              <a:rPr sz="1150" b="0">
+                <a:solidFill>
+                  <a:srgbClr val="161B26"/>
+                </a:solidFill>
+                <a:latin typeface="Arial"/>
+              </a:rPr>
+              <a:t>Northstar's marketing team must choose one product family for the next promotion. The supplied workbook contains monthly revenue, units, margin and returns for four categories.</a:t>
+            </a:r>
+          </a:p>
+        </p:txBody>
+      </p:sp>
+      <p:sp>
+        <p:nvSpPr>
+          <p:cNvPr id="14" name="Rounded Rectangle 13"/>
+          <p:cNvSpPr/>
+          <p:nvPr/>
+        </p:nvSpPr>
+        <p:spPr>
+          <a:xfrm>
+            <a:off x="731520" y="3776472"/>
+            <a:ext cx="10698480" cy="1691640"/>
+          </a:xfrm>
+          <a:prstGeom prst="roundRect">
+            <a:avLst/>
+          </a:prstGeom>
+          <a:solidFill>
+            <a:srgbClr val="F5F8FC"/>
+          </a:solidFill>
+          <a:ln>
+            <a:solidFill>
+              <a:srgbClr val="E2E8F0"/>
+            </a:solidFill>
+          </a:ln>
+        </p:spPr>
+        <p:style>
+          <a:lnRef idx="1">
+            <a:schemeClr val="accent1"/>
+          </a:lnRef>
+          <a:fillRef idx="3">
+            <a:schemeClr val="accent1"/>
+          </a:fillRef>
+          <a:effectRef idx="2">
+            <a:schemeClr val="accent1"/>
+          </a:effectRef>
+          <a:fontRef idx="minor">
+            <a:schemeClr val="lt1"/>
+          </a:fontRef>
+        </p:style>
+        <p:txBody>
+          <a:bodyPr rtlCol="0" anchor="ctr"/>
+          <a:lstStyle/>
+          <a:p>
+            <a:pPr algn="ctr"/>
+          </a:p>
+        </p:txBody>
+      </p:sp>
+      <p:sp>
+        <p:nvSpPr>
+          <p:cNvPr id="15" name="Rectangle 14"/>
+          <p:cNvSpPr/>
+          <p:nvPr/>
+        </p:nvSpPr>
+        <p:spPr>
+          <a:xfrm>
+            <a:off x="731520" y="3776472"/>
+            <a:ext cx="73152" cy="1691640"/>
+          </a:xfrm>
+          <a:prstGeom prst="rect">
+            <a:avLst/>
+          </a:prstGeom>
+          <a:solidFill>
             <a:srgbClr val="10B981"/>
           </a:solidFill>
           <a:ln>
@@ -4295,94 +5418,24 @@
       </p:sp>
       <p:sp>
         <p:nvSpPr>
-          <p:cNvPr id="4" name="TextBox 3"/>
-          <p:cNvSpPr txBox="1"/>
-          <p:nvPr/>
-        </p:nvSpPr>
-        <p:spPr>
-          <a:xfrm>
-            <a:off x="658368" y="384048"/>
-            <a:ext cx="10789920" cy="320040"/>
-          </a:xfrm>
-          <a:prstGeom prst="rect">
-            <a:avLst/>
-          </a:prstGeom>
-          <a:noFill/>
-        </p:spPr>
-        <p:txBody>
-          <a:bodyPr wrap="square" anchor="t">
-            <a:spAutoFit/>
-          </a:bodyPr>
-          <a:lstStyle/>
-          <a:p>
-            <a:pPr algn="l"/>
-            <a:r>
-              <a:rPr sz="1100" b="1">
-                <a:solidFill>
-                  <a:srgbClr val="10B981"/>
-                </a:solidFill>
-                <a:latin typeface="Arial"/>
-              </a:rPr>
-              <a:t>ACTIVITY 05 · FRAMEWORK</a:t>
-            </a:r>
-          </a:p>
-        </p:txBody>
-      </p:sp>
-      <p:sp>
-        <p:nvSpPr>
-          <p:cNvPr id="5" name="TextBox 4"/>
-          <p:cNvSpPr txBox="1"/>
-          <p:nvPr/>
-        </p:nvSpPr>
-        <p:spPr>
-          <a:xfrm>
-            <a:off x="658368" y="749808"/>
-            <a:ext cx="10789920" cy="658368"/>
-          </a:xfrm>
-          <a:prstGeom prst="rect">
-            <a:avLst/>
-          </a:prstGeom>
-          <a:noFill/>
-        </p:spPr>
-        <p:txBody>
-          <a:bodyPr wrap="square" anchor="t">
-            <a:spAutoFit/>
-          </a:bodyPr>
-          <a:lstStyle/>
-          <a:p>
-            <a:pPr algn="l"/>
-            <a:r>
-              <a:rPr sz="2700" b="1">
-                <a:solidFill>
-                  <a:srgbClr val="161B26"/>
-                </a:solidFill>
-                <a:latin typeface="Arial"/>
-              </a:rPr>
-              <a:t>Data-to-Decision Chart</a:t>
-            </a:r>
-          </a:p>
-        </p:txBody>
-      </p:sp>
-      <p:sp>
-        <p:nvSpPr>
-          <p:cNvPr id="6" name="Rectangle 5"/>
+          <p:cNvPr id="16" name="Rounded Rectangle 15"/>
           <p:cNvSpPr/>
           <p:nvPr/>
         </p:nvSpPr>
         <p:spPr>
           <a:xfrm>
-            <a:off x="658368" y="1444752"/>
-            <a:ext cx="10881360" cy="18288"/>
-          </a:xfrm>
-          <a:prstGeom prst="rect">
-            <a:avLst/>
-          </a:prstGeom>
-          <a:solidFill>
-            <a:srgbClr val="E2E8F0"/>
+            <a:off x="932688" y="3995928"/>
+            <a:ext cx="438912" cy="438912"/>
+          </a:xfrm>
+          <a:prstGeom prst="roundRect">
+            <a:avLst/>
+          </a:prstGeom>
+          <a:solidFill>
+            <a:srgbClr val="10B981"/>
           </a:solidFill>
           <a:ln>
             <a:solidFill>
-              <a:srgbClr val="E2E8F0"/>
+              <a:srgbClr val="10B981"/>
             </a:solidFill>
           </a:ln>
         </p:spPr>
@@ -4410,14 +5463,49 @@
       </p:sp>
       <p:sp>
         <p:nvSpPr>
-          <p:cNvPr id="7" name="TextBox 6"/>
+          <p:cNvPr id="17" name="TextBox 16"/>
           <p:cNvSpPr txBox="1"/>
           <p:nvPr/>
         </p:nvSpPr>
         <p:spPr>
           <a:xfrm>
-            <a:off x="658368" y="6473952"/>
-            <a:ext cx="9875520" cy="201168"/>
+            <a:off x="932688" y="4005072"/>
+            <a:ext cx="438912" cy="420624"/>
+          </a:xfrm>
+          <a:prstGeom prst="rect">
+            <a:avLst/>
+          </a:prstGeom>
+          <a:noFill/>
+        </p:spPr>
+        <p:txBody>
+          <a:bodyPr wrap="square" anchor="ctr">
+            <a:spAutoFit/>
+          </a:bodyPr>
+          <a:lstStyle/>
+          <a:p>
+            <a:pPr algn="ctr"/>
+            <a:r>
+              <a:rPr sz="1400" b="1">
+                <a:solidFill>
+                  <a:srgbClr val="FFFFFF"/>
+                </a:solidFill>
+                <a:latin typeface="Arial"/>
+              </a:rPr>
+              <a:t>2</a:t>
+            </a:r>
+          </a:p>
+        </p:txBody>
+      </p:sp>
+      <p:sp>
+        <p:nvSpPr>
+          <p:cNvPr id="18" name="TextBox 17"/>
+          <p:cNvSpPr txBox="1"/>
+          <p:nvPr/>
+        </p:nvSpPr>
+        <p:spPr>
+          <a:xfrm>
+            <a:off x="1536192" y="3959352"/>
+            <a:ext cx="9710928" cy="329184"/>
           </a:xfrm>
           <a:prstGeom prst="rect">
             <a:avLst/>
@@ -4432,197 +5520,27 @@
           <a:p>
             <a:pPr algn="l"/>
             <a:r>
-              <a:rPr sz="800" b="0">
-                <a:solidFill>
-                  <a:srgbClr val="5B6372"/>
+              <a:rPr sz="1400" b="1">
+                <a:solidFill>
+                  <a:srgbClr val="10B981"/>
                 </a:solidFill>
                 <a:latin typeface="Arial"/>
               </a:rPr>
-              <a:t>TGS-2024048310 · ACTIVITY PRACTICE · Tertiary Infotech Academy Pte Ltd</a:t>
-            </a:r>
-          </a:p>
-        </p:txBody>
-      </p:sp>
-      <p:sp>
-        <p:nvSpPr>
-          <p:cNvPr id="8" name="Rounded Rectangle 7"/>
-          <p:cNvSpPr/>
-          <p:nvPr/>
-        </p:nvSpPr>
-        <p:spPr>
-          <a:xfrm>
-            <a:off x="685800" y="1920240"/>
-            <a:ext cx="1997049" cy="3566160"/>
-          </a:xfrm>
-          <a:prstGeom prst="roundRect">
-            <a:avLst/>
-          </a:prstGeom>
-          <a:solidFill>
-            <a:srgbClr val="F5F8FC"/>
-          </a:solidFill>
-          <a:ln>
-            <a:solidFill>
-              <a:srgbClr val="E2E8F0"/>
-            </a:solidFill>
-          </a:ln>
-        </p:spPr>
-        <p:style>
-          <a:lnRef idx="1">
-            <a:schemeClr val="accent1"/>
-          </a:lnRef>
-          <a:fillRef idx="3">
-            <a:schemeClr val="accent1"/>
-          </a:fillRef>
-          <a:effectRef idx="2">
-            <a:schemeClr val="accent1"/>
-          </a:effectRef>
-          <a:fontRef idx="minor">
-            <a:schemeClr val="lt1"/>
-          </a:fontRef>
-        </p:style>
-        <p:txBody>
-          <a:bodyPr rtlCol="0" anchor="ctr"/>
-          <a:lstStyle/>
-          <a:p>
-            <a:pPr algn="ctr"/>
-          </a:p>
-        </p:txBody>
-      </p:sp>
-      <p:sp>
-        <p:nvSpPr>
-          <p:cNvPr id="9" name="Rectangle 8"/>
-          <p:cNvSpPr/>
-          <p:nvPr/>
-        </p:nvSpPr>
-        <p:spPr>
-          <a:xfrm>
-            <a:off x="685800" y="1920240"/>
-            <a:ext cx="73152" cy="3566160"/>
-          </a:xfrm>
-          <a:prstGeom prst="rect">
-            <a:avLst/>
-          </a:prstGeom>
-          <a:solidFill>
-            <a:srgbClr val="1F6FEB"/>
-          </a:solidFill>
-          <a:ln>
-            <a:solidFill>
-              <a:srgbClr val="1F6FEB"/>
-            </a:solidFill>
-          </a:ln>
-        </p:spPr>
-        <p:style>
-          <a:lnRef idx="1">
-            <a:schemeClr val="accent1"/>
-          </a:lnRef>
-          <a:fillRef idx="3">
-            <a:schemeClr val="accent1"/>
-          </a:fillRef>
-          <a:effectRef idx="2">
-            <a:schemeClr val="accent1"/>
-          </a:effectRef>
-          <a:fontRef idx="minor">
-            <a:schemeClr val="lt1"/>
-          </a:fontRef>
-        </p:style>
-        <p:txBody>
-          <a:bodyPr rtlCol="0" anchor="ctr"/>
-          <a:lstStyle/>
-          <a:p>
-            <a:pPr algn="ctr"/>
-          </a:p>
-        </p:txBody>
-      </p:sp>
-      <p:sp>
-        <p:nvSpPr>
-          <p:cNvPr id="10" name="Rounded Rectangle 9"/>
-          <p:cNvSpPr/>
-          <p:nvPr/>
-        </p:nvSpPr>
-        <p:spPr>
-          <a:xfrm>
-            <a:off x="886968" y="2139696"/>
-            <a:ext cx="438912" cy="438912"/>
-          </a:xfrm>
-          <a:prstGeom prst="roundRect">
-            <a:avLst/>
-          </a:prstGeom>
-          <a:solidFill>
-            <a:srgbClr val="1F6FEB"/>
-          </a:solidFill>
-          <a:ln>
-            <a:solidFill>
-              <a:srgbClr val="1F6FEB"/>
-            </a:solidFill>
-          </a:ln>
-        </p:spPr>
-        <p:style>
-          <a:lnRef idx="1">
-            <a:schemeClr val="accent1"/>
-          </a:lnRef>
-          <a:fillRef idx="3">
-            <a:schemeClr val="accent1"/>
-          </a:fillRef>
-          <a:effectRef idx="2">
-            <a:schemeClr val="accent1"/>
-          </a:effectRef>
-          <a:fontRef idx="minor">
-            <a:schemeClr val="lt1"/>
-          </a:fontRef>
-        </p:style>
-        <p:txBody>
-          <a:bodyPr rtlCol="0" anchor="ctr"/>
-          <a:lstStyle/>
-          <a:p>
-            <a:pPr algn="ctr"/>
-          </a:p>
-        </p:txBody>
-      </p:sp>
-      <p:sp>
-        <p:nvSpPr>
-          <p:cNvPr id="11" name="TextBox 10"/>
+              <a:t>Decision pressure</a:t>
+            </a:r>
+          </a:p>
+        </p:txBody>
+      </p:sp>
+      <p:sp>
+        <p:nvSpPr>
+          <p:cNvPr id="19" name="TextBox 18"/>
           <p:cNvSpPr txBox="1"/>
           <p:nvPr/>
         </p:nvSpPr>
         <p:spPr>
           <a:xfrm>
-            <a:off x="886968" y="2148840"/>
-            <a:ext cx="438912" cy="420624"/>
-          </a:xfrm>
-          <a:prstGeom prst="rect">
-            <a:avLst/>
-          </a:prstGeom>
-          <a:noFill/>
-        </p:spPr>
-        <p:txBody>
-          <a:bodyPr wrap="square" anchor="ctr">
-            <a:spAutoFit/>
-          </a:bodyPr>
-          <a:lstStyle/>
-          <a:p>
-            <a:pPr algn="ctr"/>
-            <a:r>
-              <a:rPr sz="1400" b="1">
-                <a:solidFill>
-                  <a:srgbClr val="FFFFFF"/>
-                </a:solidFill>
-                <a:latin typeface="Arial"/>
-              </a:rPr>
-              <a:t>1</a:t>
-            </a:r>
-          </a:p>
-        </p:txBody>
-      </p:sp>
-      <p:sp>
-        <p:nvSpPr>
-          <p:cNvPr id="12" name="TextBox 11"/>
-          <p:cNvSpPr txBox="1"/>
-          <p:nvPr/>
-        </p:nvSpPr>
-        <p:spPr>
-          <a:xfrm>
-            <a:off x="1490472" y="2103120"/>
-            <a:ext cx="1009497" cy="329184"/>
+            <a:off x="1536192" y="4343400"/>
+            <a:ext cx="9710928" cy="978408"/>
           </a:xfrm>
           <a:prstGeom prst="rect">
             <a:avLst/>
@@ -4637,1008 +5555,13 @@
           <a:p>
             <a:pPr algn="l"/>
             <a:r>
-              <a:rPr sz="1400" b="1">
-                <a:solidFill>
-                  <a:srgbClr val="1F6FEB"/>
+              <a:rPr sz="1150" b="0">
+                <a:solidFill>
+                  <a:srgbClr val="161B26"/>
                 </a:solidFill>
                 <a:latin typeface="Arial"/>
               </a:rPr>
-              <a:t>Question</a:t>
-            </a:r>
-          </a:p>
-        </p:txBody>
-      </p:sp>
-      <p:sp>
-        <p:nvSpPr>
-          <p:cNvPr id="13" name="TextBox 12"/>
-          <p:cNvSpPr txBox="1"/>
-          <p:nvPr/>
-        </p:nvSpPr>
-        <p:spPr>
-          <a:xfrm>
-            <a:off x="1490472" y="2487168"/>
-            <a:ext cx="1009497" cy="2852928"/>
-          </a:xfrm>
-          <a:prstGeom prst="rect">
-            <a:avLst/>
-          </a:prstGeom>
-          <a:noFill/>
-        </p:spPr>
-        <p:txBody>
-          <a:bodyPr wrap="square" anchor="t">
-            <a:spAutoFit/>
-          </a:bodyPr>
-          <a:lstStyle/>
-          <a:p>
-            <a:pPr algn="l"/>
-            <a:r>
-              <a:rPr sz="1150" b="0">
-                <a:solidFill>
-                  <a:srgbClr val="161B26"/>
-                </a:solidFill>
-                <a:latin typeface="Arial"/>
-              </a:rPr>
-              <a:t>Define which products to promote and why.</a:t>
-            </a:r>
-          </a:p>
-        </p:txBody>
-      </p:sp>
-      <p:sp>
-        <p:nvSpPr>
-          <p:cNvPr id="14" name="Rounded Rectangle 13"/>
-          <p:cNvSpPr/>
-          <p:nvPr/>
-        </p:nvSpPr>
-        <p:spPr>
-          <a:xfrm>
-            <a:off x="2884017" y="1920240"/>
-            <a:ext cx="1997049" cy="3566160"/>
-          </a:xfrm>
-          <a:prstGeom prst="roundRect">
-            <a:avLst/>
-          </a:prstGeom>
-          <a:solidFill>
-            <a:srgbClr val="F5F8FC"/>
-          </a:solidFill>
-          <a:ln>
-            <a:solidFill>
-              <a:srgbClr val="E2E8F0"/>
-            </a:solidFill>
-          </a:ln>
-        </p:spPr>
-        <p:style>
-          <a:lnRef idx="1">
-            <a:schemeClr val="accent1"/>
-          </a:lnRef>
-          <a:fillRef idx="3">
-            <a:schemeClr val="accent1"/>
-          </a:fillRef>
-          <a:effectRef idx="2">
-            <a:schemeClr val="accent1"/>
-          </a:effectRef>
-          <a:fontRef idx="minor">
-            <a:schemeClr val="lt1"/>
-          </a:fontRef>
-        </p:style>
-        <p:txBody>
-          <a:bodyPr rtlCol="0" anchor="ctr"/>
-          <a:lstStyle/>
-          <a:p>
-            <a:pPr algn="ctr"/>
-          </a:p>
-        </p:txBody>
-      </p:sp>
-      <p:sp>
-        <p:nvSpPr>
-          <p:cNvPr id="15" name="Rectangle 14"/>
-          <p:cNvSpPr/>
-          <p:nvPr/>
-        </p:nvSpPr>
-        <p:spPr>
-          <a:xfrm>
-            <a:off x="2884017" y="1920240"/>
-            <a:ext cx="73152" cy="3566160"/>
-          </a:xfrm>
-          <a:prstGeom prst="rect">
-            <a:avLst/>
-          </a:prstGeom>
-          <a:solidFill>
-            <a:srgbClr val="10B981"/>
-          </a:solidFill>
-          <a:ln>
-            <a:solidFill>
-              <a:srgbClr val="10B981"/>
-            </a:solidFill>
-          </a:ln>
-        </p:spPr>
-        <p:style>
-          <a:lnRef idx="1">
-            <a:schemeClr val="accent1"/>
-          </a:lnRef>
-          <a:fillRef idx="3">
-            <a:schemeClr val="accent1"/>
-          </a:fillRef>
-          <a:effectRef idx="2">
-            <a:schemeClr val="accent1"/>
-          </a:effectRef>
-          <a:fontRef idx="minor">
-            <a:schemeClr val="lt1"/>
-          </a:fontRef>
-        </p:style>
-        <p:txBody>
-          <a:bodyPr rtlCol="0" anchor="ctr"/>
-          <a:lstStyle/>
-          <a:p>
-            <a:pPr algn="ctr"/>
-          </a:p>
-        </p:txBody>
-      </p:sp>
-      <p:sp>
-        <p:nvSpPr>
-          <p:cNvPr id="16" name="Rounded Rectangle 15"/>
-          <p:cNvSpPr/>
-          <p:nvPr/>
-        </p:nvSpPr>
-        <p:spPr>
-          <a:xfrm>
-            <a:off x="3085185" y="2139696"/>
-            <a:ext cx="438912" cy="438912"/>
-          </a:xfrm>
-          <a:prstGeom prst="roundRect">
-            <a:avLst/>
-          </a:prstGeom>
-          <a:solidFill>
-            <a:srgbClr val="10B981"/>
-          </a:solidFill>
-          <a:ln>
-            <a:solidFill>
-              <a:srgbClr val="10B981"/>
-            </a:solidFill>
-          </a:ln>
-        </p:spPr>
-        <p:style>
-          <a:lnRef idx="1">
-            <a:schemeClr val="accent1"/>
-          </a:lnRef>
-          <a:fillRef idx="3">
-            <a:schemeClr val="accent1"/>
-          </a:fillRef>
-          <a:effectRef idx="2">
-            <a:schemeClr val="accent1"/>
-          </a:effectRef>
-          <a:fontRef idx="minor">
-            <a:schemeClr val="lt1"/>
-          </a:fontRef>
-        </p:style>
-        <p:txBody>
-          <a:bodyPr rtlCol="0" anchor="ctr"/>
-          <a:lstStyle/>
-          <a:p>
-            <a:pPr algn="ctr"/>
-          </a:p>
-        </p:txBody>
-      </p:sp>
-      <p:sp>
-        <p:nvSpPr>
-          <p:cNvPr id="17" name="TextBox 16"/>
-          <p:cNvSpPr txBox="1"/>
-          <p:nvPr/>
-        </p:nvSpPr>
-        <p:spPr>
-          <a:xfrm>
-            <a:off x="3085185" y="2148840"/>
-            <a:ext cx="438912" cy="420624"/>
-          </a:xfrm>
-          <a:prstGeom prst="rect">
-            <a:avLst/>
-          </a:prstGeom>
-          <a:noFill/>
-        </p:spPr>
-        <p:txBody>
-          <a:bodyPr wrap="square" anchor="ctr">
-            <a:spAutoFit/>
-          </a:bodyPr>
-          <a:lstStyle/>
-          <a:p>
-            <a:pPr algn="ctr"/>
-            <a:r>
-              <a:rPr sz="1400" b="1">
-                <a:solidFill>
-                  <a:srgbClr val="FFFFFF"/>
-                </a:solidFill>
-                <a:latin typeface="Arial"/>
-              </a:rPr>
-              <a:t>2</a:t>
-            </a:r>
-          </a:p>
-        </p:txBody>
-      </p:sp>
-      <p:sp>
-        <p:nvSpPr>
-          <p:cNvPr id="18" name="TextBox 17"/>
-          <p:cNvSpPr txBox="1"/>
-          <p:nvPr/>
-        </p:nvSpPr>
-        <p:spPr>
-          <a:xfrm>
-            <a:off x="3688689" y="2103120"/>
-            <a:ext cx="1009497" cy="329184"/>
-          </a:xfrm>
-          <a:prstGeom prst="rect">
-            <a:avLst/>
-          </a:prstGeom>
-          <a:noFill/>
-        </p:spPr>
-        <p:txBody>
-          <a:bodyPr wrap="square" anchor="t">
-            <a:spAutoFit/>
-          </a:bodyPr>
-          <a:lstStyle/>
-          <a:p>
-            <a:pPr algn="l"/>
-            <a:r>
-              <a:rPr sz="1400" b="1">
-                <a:solidFill>
-                  <a:srgbClr val="10B981"/>
-                </a:solidFill>
-                <a:latin typeface="Arial"/>
-              </a:rPr>
-              <a:t>Prepare</a:t>
-            </a:r>
-          </a:p>
-        </p:txBody>
-      </p:sp>
-      <p:sp>
-        <p:nvSpPr>
-          <p:cNvPr id="19" name="TextBox 18"/>
-          <p:cNvSpPr txBox="1"/>
-          <p:nvPr/>
-        </p:nvSpPr>
-        <p:spPr>
-          <a:xfrm>
-            <a:off x="3688689" y="2487168"/>
-            <a:ext cx="1009497" cy="2852928"/>
-          </a:xfrm>
-          <a:prstGeom prst="rect">
-            <a:avLst/>
-          </a:prstGeom>
-          <a:noFill/>
-        </p:spPr>
-        <p:txBody>
-          <a:bodyPr wrap="square" anchor="t">
-            <a:spAutoFit/>
-          </a:bodyPr>
-          <a:lstStyle/>
-          <a:p>
-            <a:pPr algn="l"/>
-            <a:r>
-              <a:rPr sz="1150" b="0">
-                <a:solidFill>
-                  <a:srgbClr val="161B26"/>
-                </a:solidFill>
-                <a:latin typeface="Arial"/>
-              </a:rPr>
-              <a:t>Check data types, missing values and consistent periods.</a:t>
-            </a:r>
-          </a:p>
-        </p:txBody>
-      </p:sp>
-      <p:sp>
-        <p:nvSpPr>
-          <p:cNvPr id="20" name="Rounded Rectangle 19"/>
-          <p:cNvSpPr/>
-          <p:nvPr/>
-        </p:nvSpPr>
-        <p:spPr>
-          <a:xfrm>
-            <a:off x="5082235" y="1920240"/>
-            <a:ext cx="1997049" cy="3566160"/>
-          </a:xfrm>
-          <a:prstGeom prst="roundRect">
-            <a:avLst/>
-          </a:prstGeom>
-          <a:solidFill>
-            <a:srgbClr val="F5F8FC"/>
-          </a:solidFill>
-          <a:ln>
-            <a:solidFill>
-              <a:srgbClr val="E2E8F0"/>
-            </a:solidFill>
-          </a:ln>
-        </p:spPr>
-        <p:style>
-          <a:lnRef idx="1">
-            <a:schemeClr val="accent1"/>
-          </a:lnRef>
-          <a:fillRef idx="3">
-            <a:schemeClr val="accent1"/>
-          </a:fillRef>
-          <a:effectRef idx="2">
-            <a:schemeClr val="accent1"/>
-          </a:effectRef>
-          <a:fontRef idx="minor">
-            <a:schemeClr val="lt1"/>
-          </a:fontRef>
-        </p:style>
-        <p:txBody>
-          <a:bodyPr rtlCol="0" anchor="ctr"/>
-          <a:lstStyle/>
-          <a:p>
-            <a:pPr algn="ctr"/>
-          </a:p>
-        </p:txBody>
-      </p:sp>
-      <p:sp>
-        <p:nvSpPr>
-          <p:cNvPr id="21" name="Rectangle 20"/>
-          <p:cNvSpPr/>
-          <p:nvPr/>
-        </p:nvSpPr>
-        <p:spPr>
-          <a:xfrm>
-            <a:off x="5082235" y="1920240"/>
-            <a:ext cx="73152" cy="3566160"/>
-          </a:xfrm>
-          <a:prstGeom prst="rect">
-            <a:avLst/>
-          </a:prstGeom>
-          <a:solidFill>
-            <a:srgbClr val="7C3AED"/>
-          </a:solidFill>
-          <a:ln>
-            <a:solidFill>
-              <a:srgbClr val="7C3AED"/>
-            </a:solidFill>
-          </a:ln>
-        </p:spPr>
-        <p:style>
-          <a:lnRef idx="1">
-            <a:schemeClr val="accent1"/>
-          </a:lnRef>
-          <a:fillRef idx="3">
-            <a:schemeClr val="accent1"/>
-          </a:fillRef>
-          <a:effectRef idx="2">
-            <a:schemeClr val="accent1"/>
-          </a:effectRef>
-          <a:fontRef idx="minor">
-            <a:schemeClr val="lt1"/>
-          </a:fontRef>
-        </p:style>
-        <p:txBody>
-          <a:bodyPr rtlCol="0" anchor="ctr"/>
-          <a:lstStyle/>
-          <a:p>
-            <a:pPr algn="ctr"/>
-          </a:p>
-        </p:txBody>
-      </p:sp>
-      <p:sp>
-        <p:nvSpPr>
-          <p:cNvPr id="22" name="Rounded Rectangle 21"/>
-          <p:cNvSpPr/>
-          <p:nvPr/>
-        </p:nvSpPr>
-        <p:spPr>
-          <a:xfrm>
-            <a:off x="5283403" y="2139696"/>
-            <a:ext cx="438912" cy="438912"/>
-          </a:xfrm>
-          <a:prstGeom prst="roundRect">
-            <a:avLst/>
-          </a:prstGeom>
-          <a:solidFill>
-            <a:srgbClr val="7C3AED"/>
-          </a:solidFill>
-          <a:ln>
-            <a:solidFill>
-              <a:srgbClr val="7C3AED"/>
-            </a:solidFill>
-          </a:ln>
-        </p:spPr>
-        <p:style>
-          <a:lnRef idx="1">
-            <a:schemeClr val="accent1"/>
-          </a:lnRef>
-          <a:fillRef idx="3">
-            <a:schemeClr val="accent1"/>
-          </a:fillRef>
-          <a:effectRef idx="2">
-            <a:schemeClr val="accent1"/>
-          </a:effectRef>
-          <a:fontRef idx="minor">
-            <a:schemeClr val="lt1"/>
-          </a:fontRef>
-        </p:style>
-        <p:txBody>
-          <a:bodyPr rtlCol="0" anchor="ctr"/>
-          <a:lstStyle/>
-          <a:p>
-            <a:pPr algn="ctr"/>
-          </a:p>
-        </p:txBody>
-      </p:sp>
-      <p:sp>
-        <p:nvSpPr>
-          <p:cNvPr id="23" name="TextBox 22"/>
-          <p:cNvSpPr txBox="1"/>
-          <p:nvPr/>
-        </p:nvSpPr>
-        <p:spPr>
-          <a:xfrm>
-            <a:off x="5283403" y="2148840"/>
-            <a:ext cx="438912" cy="420624"/>
-          </a:xfrm>
-          <a:prstGeom prst="rect">
-            <a:avLst/>
-          </a:prstGeom>
-          <a:noFill/>
-        </p:spPr>
-        <p:txBody>
-          <a:bodyPr wrap="square" anchor="ctr">
-            <a:spAutoFit/>
-          </a:bodyPr>
-          <a:lstStyle/>
-          <a:p>
-            <a:pPr algn="ctr"/>
-            <a:r>
-              <a:rPr sz="1400" b="1">
-                <a:solidFill>
-                  <a:srgbClr val="FFFFFF"/>
-                </a:solidFill>
-                <a:latin typeface="Arial"/>
-              </a:rPr>
-              <a:t>3</a:t>
-            </a:r>
-          </a:p>
-        </p:txBody>
-      </p:sp>
-      <p:sp>
-        <p:nvSpPr>
-          <p:cNvPr id="24" name="TextBox 23"/>
-          <p:cNvSpPr txBox="1"/>
-          <p:nvPr/>
-        </p:nvSpPr>
-        <p:spPr>
-          <a:xfrm>
-            <a:off x="5886907" y="2103120"/>
-            <a:ext cx="1009497" cy="329184"/>
-          </a:xfrm>
-          <a:prstGeom prst="rect">
-            <a:avLst/>
-          </a:prstGeom>
-          <a:noFill/>
-        </p:spPr>
-        <p:txBody>
-          <a:bodyPr wrap="square" anchor="t">
-            <a:spAutoFit/>
-          </a:bodyPr>
-          <a:lstStyle/>
-          <a:p>
-            <a:pPr algn="l"/>
-            <a:r>
-              <a:rPr sz="1400" b="1">
-                <a:solidFill>
-                  <a:srgbClr val="7C3AED"/>
-                </a:solidFill>
-                <a:latin typeface="Arial"/>
-              </a:rPr>
-              <a:t>Choose</a:t>
-            </a:r>
-          </a:p>
-        </p:txBody>
-      </p:sp>
-      <p:sp>
-        <p:nvSpPr>
-          <p:cNvPr id="25" name="TextBox 24"/>
-          <p:cNvSpPr txBox="1"/>
-          <p:nvPr/>
-        </p:nvSpPr>
-        <p:spPr>
-          <a:xfrm>
-            <a:off x="5886907" y="2487168"/>
-            <a:ext cx="1009497" cy="2852928"/>
-          </a:xfrm>
-          <a:prstGeom prst="rect">
-            <a:avLst/>
-          </a:prstGeom>
-          <a:noFill/>
-        </p:spPr>
-        <p:txBody>
-          <a:bodyPr wrap="square" anchor="t">
-            <a:spAutoFit/>
-          </a:bodyPr>
-          <a:lstStyle/>
-          <a:p>
-            <a:pPr algn="l"/>
-            <a:r>
-              <a:rPr sz="1150" b="0">
-                <a:solidFill>
-                  <a:srgbClr val="161B26"/>
-                </a:solidFill>
-                <a:latin typeface="Arial"/>
-              </a:rPr>
-              <a:t>Select metric and chart based on the relationship.</a:t>
-            </a:r>
-          </a:p>
-        </p:txBody>
-      </p:sp>
-      <p:sp>
-        <p:nvSpPr>
-          <p:cNvPr id="26" name="Rounded Rectangle 25"/>
-          <p:cNvSpPr/>
-          <p:nvPr/>
-        </p:nvSpPr>
-        <p:spPr>
-          <a:xfrm>
-            <a:off x="7280452" y="1920240"/>
-            <a:ext cx="1997049" cy="3566160"/>
-          </a:xfrm>
-          <a:prstGeom prst="roundRect">
-            <a:avLst/>
-          </a:prstGeom>
-          <a:solidFill>
-            <a:srgbClr val="F5F8FC"/>
-          </a:solidFill>
-          <a:ln>
-            <a:solidFill>
-              <a:srgbClr val="E2E8F0"/>
-            </a:solidFill>
-          </a:ln>
-        </p:spPr>
-        <p:style>
-          <a:lnRef idx="1">
-            <a:schemeClr val="accent1"/>
-          </a:lnRef>
-          <a:fillRef idx="3">
-            <a:schemeClr val="accent1"/>
-          </a:fillRef>
-          <a:effectRef idx="2">
-            <a:schemeClr val="accent1"/>
-          </a:effectRef>
-          <a:fontRef idx="minor">
-            <a:schemeClr val="lt1"/>
-          </a:fontRef>
-        </p:style>
-        <p:txBody>
-          <a:bodyPr rtlCol="0" anchor="ctr"/>
-          <a:lstStyle/>
-          <a:p>
-            <a:pPr algn="ctr"/>
-          </a:p>
-        </p:txBody>
-      </p:sp>
-      <p:sp>
-        <p:nvSpPr>
-          <p:cNvPr id="27" name="Rectangle 26"/>
-          <p:cNvSpPr/>
-          <p:nvPr/>
-        </p:nvSpPr>
-        <p:spPr>
-          <a:xfrm>
-            <a:off x="7280452" y="1920240"/>
-            <a:ext cx="73152" cy="3566160"/>
-          </a:xfrm>
-          <a:prstGeom prst="rect">
-            <a:avLst/>
-          </a:prstGeom>
-          <a:solidFill>
-            <a:srgbClr val="F59E0B"/>
-          </a:solidFill>
-          <a:ln>
-            <a:solidFill>
-              <a:srgbClr val="F59E0B"/>
-            </a:solidFill>
-          </a:ln>
-        </p:spPr>
-        <p:style>
-          <a:lnRef idx="1">
-            <a:schemeClr val="accent1"/>
-          </a:lnRef>
-          <a:fillRef idx="3">
-            <a:schemeClr val="accent1"/>
-          </a:fillRef>
-          <a:effectRef idx="2">
-            <a:schemeClr val="accent1"/>
-          </a:effectRef>
-          <a:fontRef idx="minor">
-            <a:schemeClr val="lt1"/>
-          </a:fontRef>
-        </p:style>
-        <p:txBody>
-          <a:bodyPr rtlCol="0" anchor="ctr"/>
-          <a:lstStyle/>
-          <a:p>
-            <a:pPr algn="ctr"/>
-          </a:p>
-        </p:txBody>
-      </p:sp>
-      <p:sp>
-        <p:nvSpPr>
-          <p:cNvPr id="28" name="Rounded Rectangle 27"/>
-          <p:cNvSpPr/>
-          <p:nvPr/>
-        </p:nvSpPr>
-        <p:spPr>
-          <a:xfrm>
-            <a:off x="7481620" y="2139696"/>
-            <a:ext cx="438912" cy="438912"/>
-          </a:xfrm>
-          <a:prstGeom prst="roundRect">
-            <a:avLst/>
-          </a:prstGeom>
-          <a:solidFill>
-            <a:srgbClr val="F59E0B"/>
-          </a:solidFill>
-          <a:ln>
-            <a:solidFill>
-              <a:srgbClr val="F59E0B"/>
-            </a:solidFill>
-          </a:ln>
-        </p:spPr>
-        <p:style>
-          <a:lnRef idx="1">
-            <a:schemeClr val="accent1"/>
-          </a:lnRef>
-          <a:fillRef idx="3">
-            <a:schemeClr val="accent1"/>
-          </a:fillRef>
-          <a:effectRef idx="2">
-            <a:schemeClr val="accent1"/>
-          </a:effectRef>
-          <a:fontRef idx="minor">
-            <a:schemeClr val="lt1"/>
-          </a:fontRef>
-        </p:style>
-        <p:txBody>
-          <a:bodyPr rtlCol="0" anchor="ctr"/>
-          <a:lstStyle/>
-          <a:p>
-            <a:pPr algn="ctr"/>
-          </a:p>
-        </p:txBody>
-      </p:sp>
-      <p:sp>
-        <p:nvSpPr>
-          <p:cNvPr id="29" name="TextBox 28"/>
-          <p:cNvSpPr txBox="1"/>
-          <p:nvPr/>
-        </p:nvSpPr>
-        <p:spPr>
-          <a:xfrm>
-            <a:off x="7481620" y="2148840"/>
-            <a:ext cx="438912" cy="420624"/>
-          </a:xfrm>
-          <a:prstGeom prst="rect">
-            <a:avLst/>
-          </a:prstGeom>
-          <a:noFill/>
-        </p:spPr>
-        <p:txBody>
-          <a:bodyPr wrap="square" anchor="ctr">
-            <a:spAutoFit/>
-          </a:bodyPr>
-          <a:lstStyle/>
-          <a:p>
-            <a:pPr algn="ctr"/>
-            <a:r>
-              <a:rPr sz="1400" b="1">
-                <a:solidFill>
-                  <a:srgbClr val="FFFFFF"/>
-                </a:solidFill>
-                <a:latin typeface="Arial"/>
-              </a:rPr>
-              <a:t>4</a:t>
-            </a:r>
-          </a:p>
-        </p:txBody>
-      </p:sp>
-      <p:sp>
-        <p:nvSpPr>
-          <p:cNvPr id="30" name="TextBox 29"/>
-          <p:cNvSpPr txBox="1"/>
-          <p:nvPr/>
-        </p:nvSpPr>
-        <p:spPr>
-          <a:xfrm>
-            <a:off x="8085124" y="2103120"/>
-            <a:ext cx="1009497" cy="329184"/>
-          </a:xfrm>
-          <a:prstGeom prst="rect">
-            <a:avLst/>
-          </a:prstGeom>
-          <a:noFill/>
-        </p:spPr>
-        <p:txBody>
-          <a:bodyPr wrap="square" anchor="t">
-            <a:spAutoFit/>
-          </a:bodyPr>
-          <a:lstStyle/>
-          <a:p>
-            <a:pPr algn="l"/>
-            <a:r>
-              <a:rPr sz="1400" b="1">
-                <a:solidFill>
-                  <a:srgbClr val="F59E0B"/>
-                </a:solidFill>
-                <a:latin typeface="Arial"/>
-              </a:rPr>
-              <a:t>Build</a:t>
-            </a:r>
-          </a:p>
-        </p:txBody>
-      </p:sp>
-      <p:sp>
-        <p:nvSpPr>
-          <p:cNvPr id="31" name="TextBox 30"/>
-          <p:cNvSpPr txBox="1"/>
-          <p:nvPr/>
-        </p:nvSpPr>
-        <p:spPr>
-          <a:xfrm>
-            <a:off x="8085124" y="2487168"/>
-            <a:ext cx="1009497" cy="2852928"/>
-          </a:xfrm>
-          <a:prstGeom prst="rect">
-            <a:avLst/>
-          </a:prstGeom>
-          <a:noFill/>
-        </p:spPr>
-        <p:txBody>
-          <a:bodyPr wrap="square" anchor="t">
-            <a:spAutoFit/>
-          </a:bodyPr>
-          <a:lstStyle/>
-          <a:p>
-            <a:pPr algn="l"/>
-            <a:r>
-              <a:rPr sz="1150" b="0">
-                <a:solidFill>
-                  <a:srgbClr val="161B26"/>
-                </a:solidFill>
-                <a:latin typeface="Arial"/>
-              </a:rPr>
-              <a:t>Create or paste a native editable PowerPoint chart.</a:t>
-            </a:r>
-          </a:p>
-        </p:txBody>
-      </p:sp>
-      <p:sp>
-        <p:nvSpPr>
-          <p:cNvPr id="32" name="Rounded Rectangle 31"/>
-          <p:cNvSpPr/>
-          <p:nvPr/>
-        </p:nvSpPr>
-        <p:spPr>
-          <a:xfrm>
-            <a:off x="9478670" y="1920240"/>
-            <a:ext cx="1997049" cy="3566160"/>
-          </a:xfrm>
-          <a:prstGeom prst="roundRect">
-            <a:avLst/>
-          </a:prstGeom>
-          <a:solidFill>
-            <a:srgbClr val="F5F8FC"/>
-          </a:solidFill>
-          <a:ln>
-            <a:solidFill>
-              <a:srgbClr val="E2E8F0"/>
-            </a:solidFill>
-          </a:ln>
-        </p:spPr>
-        <p:style>
-          <a:lnRef idx="1">
-            <a:schemeClr val="accent1"/>
-          </a:lnRef>
-          <a:fillRef idx="3">
-            <a:schemeClr val="accent1"/>
-          </a:fillRef>
-          <a:effectRef idx="2">
-            <a:schemeClr val="accent1"/>
-          </a:effectRef>
-          <a:fontRef idx="minor">
-            <a:schemeClr val="lt1"/>
-          </a:fontRef>
-        </p:style>
-        <p:txBody>
-          <a:bodyPr rtlCol="0" anchor="ctr"/>
-          <a:lstStyle/>
-          <a:p>
-            <a:pPr algn="ctr"/>
-          </a:p>
-        </p:txBody>
-      </p:sp>
-      <p:sp>
-        <p:nvSpPr>
-          <p:cNvPr id="33" name="Rectangle 32"/>
-          <p:cNvSpPr/>
-          <p:nvPr/>
-        </p:nvSpPr>
-        <p:spPr>
-          <a:xfrm>
-            <a:off x="9478670" y="1920240"/>
-            <a:ext cx="73152" cy="3566160"/>
-          </a:xfrm>
-          <a:prstGeom prst="rect">
-            <a:avLst/>
-          </a:prstGeom>
-          <a:solidFill>
-            <a:srgbClr val="1F6FEB"/>
-          </a:solidFill>
-          <a:ln>
-            <a:solidFill>
-              <a:srgbClr val="1F6FEB"/>
-            </a:solidFill>
-          </a:ln>
-        </p:spPr>
-        <p:style>
-          <a:lnRef idx="1">
-            <a:schemeClr val="accent1"/>
-          </a:lnRef>
-          <a:fillRef idx="3">
-            <a:schemeClr val="accent1"/>
-          </a:fillRef>
-          <a:effectRef idx="2">
-            <a:schemeClr val="accent1"/>
-          </a:effectRef>
-          <a:fontRef idx="minor">
-            <a:schemeClr val="lt1"/>
-          </a:fontRef>
-        </p:style>
-        <p:txBody>
-          <a:bodyPr rtlCol="0" anchor="ctr"/>
-          <a:lstStyle/>
-          <a:p>
-            <a:pPr algn="ctr"/>
-          </a:p>
-        </p:txBody>
-      </p:sp>
-      <p:sp>
-        <p:nvSpPr>
-          <p:cNvPr id="34" name="Rounded Rectangle 33"/>
-          <p:cNvSpPr/>
-          <p:nvPr/>
-        </p:nvSpPr>
-        <p:spPr>
-          <a:xfrm>
-            <a:off x="9679838" y="2139696"/>
-            <a:ext cx="438912" cy="438912"/>
-          </a:xfrm>
-          <a:prstGeom prst="roundRect">
-            <a:avLst/>
-          </a:prstGeom>
-          <a:solidFill>
-            <a:srgbClr val="1F6FEB"/>
-          </a:solidFill>
-          <a:ln>
-            <a:solidFill>
-              <a:srgbClr val="1F6FEB"/>
-            </a:solidFill>
-          </a:ln>
-        </p:spPr>
-        <p:style>
-          <a:lnRef idx="1">
-            <a:schemeClr val="accent1"/>
-          </a:lnRef>
-          <a:fillRef idx="3">
-            <a:schemeClr val="accent1"/>
-          </a:fillRef>
-          <a:effectRef idx="2">
-            <a:schemeClr val="accent1"/>
-          </a:effectRef>
-          <a:fontRef idx="minor">
-            <a:schemeClr val="lt1"/>
-          </a:fontRef>
-        </p:style>
-        <p:txBody>
-          <a:bodyPr rtlCol="0" anchor="ctr"/>
-          <a:lstStyle/>
-          <a:p>
-            <a:pPr algn="ctr"/>
-          </a:p>
-        </p:txBody>
-      </p:sp>
-      <p:sp>
-        <p:nvSpPr>
-          <p:cNvPr id="35" name="TextBox 34"/>
-          <p:cNvSpPr txBox="1"/>
-          <p:nvPr/>
-        </p:nvSpPr>
-        <p:spPr>
-          <a:xfrm>
-            <a:off x="9679838" y="2148840"/>
-            <a:ext cx="438912" cy="420624"/>
-          </a:xfrm>
-          <a:prstGeom prst="rect">
-            <a:avLst/>
-          </a:prstGeom>
-          <a:noFill/>
-        </p:spPr>
-        <p:txBody>
-          <a:bodyPr wrap="square" anchor="ctr">
-            <a:spAutoFit/>
-          </a:bodyPr>
-          <a:lstStyle/>
-          <a:p>
-            <a:pPr algn="ctr"/>
-            <a:r>
-              <a:rPr sz="1400" b="1">
-                <a:solidFill>
-                  <a:srgbClr val="FFFFFF"/>
-                </a:solidFill>
-                <a:latin typeface="Arial"/>
-              </a:rPr>
-              <a:t>5</a:t>
-            </a:r>
-          </a:p>
-        </p:txBody>
-      </p:sp>
-      <p:sp>
-        <p:nvSpPr>
-          <p:cNvPr id="36" name="TextBox 35"/>
-          <p:cNvSpPr txBox="1"/>
-          <p:nvPr/>
-        </p:nvSpPr>
-        <p:spPr>
-          <a:xfrm>
-            <a:off x="10283342" y="2103120"/>
-            <a:ext cx="1009497" cy="329184"/>
-          </a:xfrm>
-          <a:prstGeom prst="rect">
-            <a:avLst/>
-          </a:prstGeom>
-          <a:noFill/>
-        </p:spPr>
-        <p:txBody>
-          <a:bodyPr wrap="square" anchor="t">
-            <a:spAutoFit/>
-          </a:bodyPr>
-          <a:lstStyle/>
-          <a:p>
-            <a:pPr algn="l"/>
-            <a:r>
-              <a:rPr sz="1400" b="1">
-                <a:solidFill>
-                  <a:srgbClr val="1F6FEB"/>
-                </a:solidFill>
-                <a:latin typeface="Arial"/>
-              </a:rPr>
-              <a:t>Explain</a:t>
-            </a:r>
-          </a:p>
-        </p:txBody>
-      </p:sp>
-      <p:sp>
-        <p:nvSpPr>
-          <p:cNvPr id="37" name="TextBox 36"/>
-          <p:cNvSpPr txBox="1"/>
-          <p:nvPr/>
-        </p:nvSpPr>
-        <p:spPr>
-          <a:xfrm>
-            <a:off x="10283342" y="2487168"/>
-            <a:ext cx="1009497" cy="2852928"/>
-          </a:xfrm>
-          <a:prstGeom prst="rect">
-            <a:avLst/>
-          </a:prstGeom>
-          <a:noFill/>
-        </p:spPr>
-        <p:txBody>
-          <a:bodyPr wrap="square" anchor="t">
-            <a:spAutoFit/>
-          </a:bodyPr>
-          <a:lstStyle/>
-          <a:p>
-            <a:pPr algn="l"/>
-            <a:r>
-              <a:rPr sz="1150" b="0">
-                <a:solidFill>
-                  <a:srgbClr val="161B26"/>
-                </a:solidFill>
-                <a:latin typeface="Arial"/>
-              </a:rPr>
-              <a:t>Write the action title, annotation and implication.</a:t>
+              <a:t>Prompt an approved AI assistant to analyse the workbook and propose candidate insights. Reproduce the selected calculations in Excel, then create an editable PowerPoint chart with an explicit decision implication.</a:t>
             </a:r>
           </a:p>
         </p:txBody>
@@ -5721,6 +5644,726 @@
             <a:avLst/>
           </a:prstGeom>
           <a:solidFill>
+            <a:srgbClr val="10B981"/>
+          </a:solidFill>
+          <a:ln>
+            <a:solidFill>
+              <a:srgbClr val="10B981"/>
+            </a:solidFill>
+          </a:ln>
+        </p:spPr>
+        <p:style>
+          <a:lnRef idx="1">
+            <a:schemeClr val="accent1"/>
+          </a:lnRef>
+          <a:fillRef idx="3">
+            <a:schemeClr val="accent1"/>
+          </a:fillRef>
+          <a:effectRef idx="2">
+            <a:schemeClr val="accent1"/>
+          </a:effectRef>
+          <a:fontRef idx="minor">
+            <a:schemeClr val="lt1"/>
+          </a:fontRef>
+        </p:style>
+        <p:txBody>
+          <a:bodyPr rtlCol="0" anchor="ctr"/>
+          <a:lstStyle/>
+          <a:p>
+            <a:pPr algn="ctr"/>
+          </a:p>
+        </p:txBody>
+      </p:sp>
+      <p:sp>
+        <p:nvSpPr>
+          <p:cNvPr id="4" name="TextBox 3"/>
+          <p:cNvSpPr txBox="1"/>
+          <p:nvPr/>
+        </p:nvSpPr>
+        <p:spPr>
+          <a:xfrm>
+            <a:off x="658368" y="384048"/>
+            <a:ext cx="10789920" cy="320040"/>
+          </a:xfrm>
+          <a:prstGeom prst="rect">
+            <a:avLst/>
+          </a:prstGeom>
+          <a:noFill/>
+        </p:spPr>
+        <p:txBody>
+          <a:bodyPr wrap="square" anchor="t">
+            <a:spAutoFit/>
+          </a:bodyPr>
+          <a:lstStyle/>
+          <a:p>
+            <a:pPr algn="l"/>
+            <a:r>
+              <a:rPr sz="1100" b="1">
+                <a:solidFill>
+                  <a:srgbClr val="10B981"/>
+                </a:solidFill>
+                <a:latin typeface="Arial"/>
+              </a:rPr>
+              <a:t>ACTIVITY 05 · FRAMEWORK</a:t>
+            </a:r>
+          </a:p>
+        </p:txBody>
+      </p:sp>
+      <p:sp>
+        <p:nvSpPr>
+          <p:cNvPr id="5" name="TextBox 4"/>
+          <p:cNvSpPr txBox="1"/>
+          <p:nvPr/>
+        </p:nvSpPr>
+        <p:spPr>
+          <a:xfrm>
+            <a:off x="658368" y="749808"/>
+            <a:ext cx="10789920" cy="658368"/>
+          </a:xfrm>
+          <a:prstGeom prst="rect">
+            <a:avLst/>
+          </a:prstGeom>
+          <a:noFill/>
+        </p:spPr>
+        <p:txBody>
+          <a:bodyPr wrap="square" anchor="t">
+            <a:spAutoFit/>
+          </a:bodyPr>
+          <a:lstStyle/>
+          <a:p>
+            <a:pPr algn="l"/>
+            <a:r>
+              <a:rPr sz="2700" b="1">
+                <a:solidFill>
+                  <a:srgbClr val="161B26"/>
+                </a:solidFill>
+                <a:latin typeface="Arial"/>
+              </a:rPr>
+              <a:t>Data-to-Decision Chart</a:t>
+            </a:r>
+          </a:p>
+        </p:txBody>
+      </p:sp>
+      <p:sp>
+        <p:nvSpPr>
+          <p:cNvPr id="6" name="Rectangle 5"/>
+          <p:cNvSpPr/>
+          <p:nvPr/>
+        </p:nvSpPr>
+        <p:spPr>
+          <a:xfrm>
+            <a:off x="658368" y="1444752"/>
+            <a:ext cx="10881360" cy="18288"/>
+          </a:xfrm>
+          <a:prstGeom prst="rect">
+            <a:avLst/>
+          </a:prstGeom>
+          <a:solidFill>
+            <a:srgbClr val="E2E8F0"/>
+          </a:solidFill>
+          <a:ln>
+            <a:solidFill>
+              <a:srgbClr val="E2E8F0"/>
+            </a:solidFill>
+          </a:ln>
+        </p:spPr>
+        <p:style>
+          <a:lnRef idx="1">
+            <a:schemeClr val="accent1"/>
+          </a:lnRef>
+          <a:fillRef idx="3">
+            <a:schemeClr val="accent1"/>
+          </a:fillRef>
+          <a:effectRef idx="2">
+            <a:schemeClr val="accent1"/>
+          </a:effectRef>
+          <a:fontRef idx="minor">
+            <a:schemeClr val="lt1"/>
+          </a:fontRef>
+        </p:style>
+        <p:txBody>
+          <a:bodyPr rtlCol="0" anchor="ctr"/>
+          <a:lstStyle/>
+          <a:p>
+            <a:pPr algn="ctr"/>
+          </a:p>
+        </p:txBody>
+      </p:sp>
+      <p:sp>
+        <p:nvSpPr>
+          <p:cNvPr id="7" name="TextBox 6"/>
+          <p:cNvSpPr txBox="1"/>
+          <p:nvPr/>
+        </p:nvSpPr>
+        <p:spPr>
+          <a:xfrm>
+            <a:off x="658368" y="6473952"/>
+            <a:ext cx="9875520" cy="201168"/>
+          </a:xfrm>
+          <a:prstGeom prst="rect">
+            <a:avLst/>
+          </a:prstGeom>
+          <a:noFill/>
+        </p:spPr>
+        <p:txBody>
+          <a:bodyPr wrap="square" anchor="t">
+            <a:spAutoFit/>
+          </a:bodyPr>
+          <a:lstStyle/>
+          <a:p>
+            <a:pPr algn="l"/>
+            <a:r>
+              <a:rPr sz="800" b="0">
+                <a:solidFill>
+                  <a:srgbClr val="5B6372"/>
+                </a:solidFill>
+                <a:latin typeface="Arial"/>
+              </a:rPr>
+              <a:t>TGS-2026064178 · ACTIVITY PRACTICE · Tertiary Infotech Academy Pte Ltd</a:t>
+            </a:r>
+          </a:p>
+        </p:txBody>
+      </p:sp>
+      <p:sp>
+        <p:nvSpPr>
+          <p:cNvPr id="8" name="Rounded Rectangle 7"/>
+          <p:cNvSpPr/>
+          <p:nvPr/>
+        </p:nvSpPr>
+        <p:spPr>
+          <a:xfrm>
+            <a:off x="685800" y="1920240"/>
+            <a:ext cx="1997049" cy="3566160"/>
+          </a:xfrm>
+          <a:prstGeom prst="roundRect">
+            <a:avLst/>
+          </a:prstGeom>
+          <a:solidFill>
+            <a:srgbClr val="F5F8FC"/>
+          </a:solidFill>
+          <a:ln>
+            <a:solidFill>
+              <a:srgbClr val="E2E8F0"/>
+            </a:solidFill>
+          </a:ln>
+        </p:spPr>
+        <p:style>
+          <a:lnRef idx="1">
+            <a:schemeClr val="accent1"/>
+          </a:lnRef>
+          <a:fillRef idx="3">
+            <a:schemeClr val="accent1"/>
+          </a:fillRef>
+          <a:effectRef idx="2">
+            <a:schemeClr val="accent1"/>
+          </a:effectRef>
+          <a:fontRef idx="minor">
+            <a:schemeClr val="lt1"/>
+          </a:fontRef>
+        </p:style>
+        <p:txBody>
+          <a:bodyPr rtlCol="0" anchor="ctr"/>
+          <a:lstStyle/>
+          <a:p>
+            <a:pPr algn="ctr"/>
+          </a:p>
+        </p:txBody>
+      </p:sp>
+      <p:sp>
+        <p:nvSpPr>
+          <p:cNvPr id="9" name="Rectangle 8"/>
+          <p:cNvSpPr/>
+          <p:nvPr/>
+        </p:nvSpPr>
+        <p:spPr>
+          <a:xfrm>
+            <a:off x="685800" y="1920240"/>
+            <a:ext cx="73152" cy="3566160"/>
+          </a:xfrm>
+          <a:prstGeom prst="rect">
+            <a:avLst/>
+          </a:prstGeom>
+          <a:solidFill>
+            <a:srgbClr val="1F6FEB"/>
+          </a:solidFill>
+          <a:ln>
+            <a:solidFill>
+              <a:srgbClr val="1F6FEB"/>
+            </a:solidFill>
+          </a:ln>
+        </p:spPr>
+        <p:style>
+          <a:lnRef idx="1">
+            <a:schemeClr val="accent1"/>
+          </a:lnRef>
+          <a:fillRef idx="3">
+            <a:schemeClr val="accent1"/>
+          </a:fillRef>
+          <a:effectRef idx="2">
+            <a:schemeClr val="accent1"/>
+          </a:effectRef>
+          <a:fontRef idx="minor">
+            <a:schemeClr val="lt1"/>
+          </a:fontRef>
+        </p:style>
+        <p:txBody>
+          <a:bodyPr rtlCol="0" anchor="ctr"/>
+          <a:lstStyle/>
+          <a:p>
+            <a:pPr algn="ctr"/>
+          </a:p>
+        </p:txBody>
+      </p:sp>
+      <p:sp>
+        <p:nvSpPr>
+          <p:cNvPr id="10" name="Rounded Rectangle 9"/>
+          <p:cNvSpPr/>
+          <p:nvPr/>
+        </p:nvSpPr>
+        <p:spPr>
+          <a:xfrm>
+            <a:off x="886968" y="2139696"/>
+            <a:ext cx="438912" cy="438912"/>
+          </a:xfrm>
+          <a:prstGeom prst="roundRect">
+            <a:avLst/>
+          </a:prstGeom>
+          <a:solidFill>
+            <a:srgbClr val="1F6FEB"/>
+          </a:solidFill>
+          <a:ln>
+            <a:solidFill>
+              <a:srgbClr val="1F6FEB"/>
+            </a:solidFill>
+          </a:ln>
+        </p:spPr>
+        <p:style>
+          <a:lnRef idx="1">
+            <a:schemeClr val="accent1"/>
+          </a:lnRef>
+          <a:fillRef idx="3">
+            <a:schemeClr val="accent1"/>
+          </a:fillRef>
+          <a:effectRef idx="2">
+            <a:schemeClr val="accent1"/>
+          </a:effectRef>
+          <a:fontRef idx="minor">
+            <a:schemeClr val="lt1"/>
+          </a:fontRef>
+        </p:style>
+        <p:txBody>
+          <a:bodyPr rtlCol="0" anchor="ctr"/>
+          <a:lstStyle/>
+          <a:p>
+            <a:pPr algn="ctr"/>
+          </a:p>
+        </p:txBody>
+      </p:sp>
+      <p:sp>
+        <p:nvSpPr>
+          <p:cNvPr id="11" name="TextBox 10"/>
+          <p:cNvSpPr txBox="1"/>
+          <p:nvPr/>
+        </p:nvSpPr>
+        <p:spPr>
+          <a:xfrm>
+            <a:off x="886968" y="2148840"/>
+            <a:ext cx="438912" cy="420624"/>
+          </a:xfrm>
+          <a:prstGeom prst="rect">
+            <a:avLst/>
+          </a:prstGeom>
+          <a:noFill/>
+        </p:spPr>
+        <p:txBody>
+          <a:bodyPr wrap="square" anchor="ctr">
+            <a:spAutoFit/>
+          </a:bodyPr>
+          <a:lstStyle/>
+          <a:p>
+            <a:pPr algn="ctr"/>
+            <a:r>
+              <a:rPr sz="1400" b="1">
+                <a:solidFill>
+                  <a:srgbClr val="FFFFFF"/>
+                </a:solidFill>
+                <a:latin typeface="Arial"/>
+              </a:rPr>
+              <a:t>1</a:t>
+            </a:r>
+          </a:p>
+        </p:txBody>
+      </p:sp>
+      <p:sp>
+        <p:nvSpPr>
+          <p:cNvPr id="12" name="TextBox 11"/>
+          <p:cNvSpPr txBox="1"/>
+          <p:nvPr/>
+        </p:nvSpPr>
+        <p:spPr>
+          <a:xfrm>
+            <a:off x="1490472" y="2103120"/>
+            <a:ext cx="1009497" cy="329184"/>
+          </a:xfrm>
+          <a:prstGeom prst="rect">
+            <a:avLst/>
+          </a:prstGeom>
+          <a:noFill/>
+        </p:spPr>
+        <p:txBody>
+          <a:bodyPr wrap="square" anchor="t">
+            <a:spAutoFit/>
+          </a:bodyPr>
+          <a:lstStyle/>
+          <a:p>
+            <a:pPr algn="l"/>
+            <a:r>
+              <a:rPr sz="1400" b="1">
+                <a:solidFill>
+                  <a:srgbClr val="1F6FEB"/>
+                </a:solidFill>
+                <a:latin typeface="Arial"/>
+              </a:rPr>
+              <a:t>Question</a:t>
+            </a:r>
+          </a:p>
+        </p:txBody>
+      </p:sp>
+      <p:sp>
+        <p:nvSpPr>
+          <p:cNvPr id="13" name="TextBox 12"/>
+          <p:cNvSpPr txBox="1"/>
+          <p:nvPr/>
+        </p:nvSpPr>
+        <p:spPr>
+          <a:xfrm>
+            <a:off x="1490472" y="2487168"/>
+            <a:ext cx="1009497" cy="2852928"/>
+          </a:xfrm>
+          <a:prstGeom prst="rect">
+            <a:avLst/>
+          </a:prstGeom>
+          <a:noFill/>
+        </p:spPr>
+        <p:txBody>
+          <a:bodyPr wrap="square" anchor="t">
+            <a:spAutoFit/>
+          </a:bodyPr>
+          <a:lstStyle/>
+          <a:p>
+            <a:pPr algn="l"/>
+            <a:r>
+              <a:rPr sz="1150" b="0">
+                <a:solidFill>
+                  <a:srgbClr val="161B26"/>
+                </a:solidFill>
+                <a:latin typeface="Arial"/>
+              </a:rPr>
+              <a:t>Define which products to promote and why.</a:t>
+            </a:r>
+          </a:p>
+        </p:txBody>
+      </p:sp>
+      <p:sp>
+        <p:nvSpPr>
+          <p:cNvPr id="14" name="Rounded Rectangle 13"/>
+          <p:cNvSpPr/>
+          <p:nvPr/>
+        </p:nvSpPr>
+        <p:spPr>
+          <a:xfrm>
+            <a:off x="2884017" y="1920240"/>
+            <a:ext cx="1997049" cy="3566160"/>
+          </a:xfrm>
+          <a:prstGeom prst="roundRect">
+            <a:avLst/>
+          </a:prstGeom>
+          <a:solidFill>
+            <a:srgbClr val="F5F8FC"/>
+          </a:solidFill>
+          <a:ln>
+            <a:solidFill>
+              <a:srgbClr val="E2E8F0"/>
+            </a:solidFill>
+          </a:ln>
+        </p:spPr>
+        <p:style>
+          <a:lnRef idx="1">
+            <a:schemeClr val="accent1"/>
+          </a:lnRef>
+          <a:fillRef idx="3">
+            <a:schemeClr val="accent1"/>
+          </a:fillRef>
+          <a:effectRef idx="2">
+            <a:schemeClr val="accent1"/>
+          </a:effectRef>
+          <a:fontRef idx="minor">
+            <a:schemeClr val="lt1"/>
+          </a:fontRef>
+        </p:style>
+        <p:txBody>
+          <a:bodyPr rtlCol="0" anchor="ctr"/>
+          <a:lstStyle/>
+          <a:p>
+            <a:pPr algn="ctr"/>
+          </a:p>
+        </p:txBody>
+      </p:sp>
+      <p:sp>
+        <p:nvSpPr>
+          <p:cNvPr id="15" name="Rectangle 14"/>
+          <p:cNvSpPr/>
+          <p:nvPr/>
+        </p:nvSpPr>
+        <p:spPr>
+          <a:xfrm>
+            <a:off x="2884017" y="1920240"/>
+            <a:ext cx="73152" cy="3566160"/>
+          </a:xfrm>
+          <a:prstGeom prst="rect">
+            <a:avLst/>
+          </a:prstGeom>
+          <a:solidFill>
+            <a:srgbClr val="10B981"/>
+          </a:solidFill>
+          <a:ln>
+            <a:solidFill>
+              <a:srgbClr val="10B981"/>
+            </a:solidFill>
+          </a:ln>
+        </p:spPr>
+        <p:style>
+          <a:lnRef idx="1">
+            <a:schemeClr val="accent1"/>
+          </a:lnRef>
+          <a:fillRef idx="3">
+            <a:schemeClr val="accent1"/>
+          </a:fillRef>
+          <a:effectRef idx="2">
+            <a:schemeClr val="accent1"/>
+          </a:effectRef>
+          <a:fontRef idx="minor">
+            <a:schemeClr val="lt1"/>
+          </a:fontRef>
+        </p:style>
+        <p:txBody>
+          <a:bodyPr rtlCol="0" anchor="ctr"/>
+          <a:lstStyle/>
+          <a:p>
+            <a:pPr algn="ctr"/>
+          </a:p>
+        </p:txBody>
+      </p:sp>
+      <p:sp>
+        <p:nvSpPr>
+          <p:cNvPr id="16" name="Rounded Rectangle 15"/>
+          <p:cNvSpPr/>
+          <p:nvPr/>
+        </p:nvSpPr>
+        <p:spPr>
+          <a:xfrm>
+            <a:off x="3085185" y="2139696"/>
+            <a:ext cx="438912" cy="438912"/>
+          </a:xfrm>
+          <a:prstGeom prst="roundRect">
+            <a:avLst/>
+          </a:prstGeom>
+          <a:solidFill>
+            <a:srgbClr val="10B981"/>
+          </a:solidFill>
+          <a:ln>
+            <a:solidFill>
+              <a:srgbClr val="10B981"/>
+            </a:solidFill>
+          </a:ln>
+        </p:spPr>
+        <p:style>
+          <a:lnRef idx="1">
+            <a:schemeClr val="accent1"/>
+          </a:lnRef>
+          <a:fillRef idx="3">
+            <a:schemeClr val="accent1"/>
+          </a:fillRef>
+          <a:effectRef idx="2">
+            <a:schemeClr val="accent1"/>
+          </a:effectRef>
+          <a:fontRef idx="minor">
+            <a:schemeClr val="lt1"/>
+          </a:fontRef>
+        </p:style>
+        <p:txBody>
+          <a:bodyPr rtlCol="0" anchor="ctr"/>
+          <a:lstStyle/>
+          <a:p>
+            <a:pPr algn="ctr"/>
+          </a:p>
+        </p:txBody>
+      </p:sp>
+      <p:sp>
+        <p:nvSpPr>
+          <p:cNvPr id="17" name="TextBox 16"/>
+          <p:cNvSpPr txBox="1"/>
+          <p:nvPr/>
+        </p:nvSpPr>
+        <p:spPr>
+          <a:xfrm>
+            <a:off x="3085185" y="2148840"/>
+            <a:ext cx="438912" cy="420624"/>
+          </a:xfrm>
+          <a:prstGeom prst="rect">
+            <a:avLst/>
+          </a:prstGeom>
+          <a:noFill/>
+        </p:spPr>
+        <p:txBody>
+          <a:bodyPr wrap="square" anchor="ctr">
+            <a:spAutoFit/>
+          </a:bodyPr>
+          <a:lstStyle/>
+          <a:p>
+            <a:pPr algn="ctr"/>
+            <a:r>
+              <a:rPr sz="1400" b="1">
+                <a:solidFill>
+                  <a:srgbClr val="FFFFFF"/>
+                </a:solidFill>
+                <a:latin typeface="Arial"/>
+              </a:rPr>
+              <a:t>2</a:t>
+            </a:r>
+          </a:p>
+        </p:txBody>
+      </p:sp>
+      <p:sp>
+        <p:nvSpPr>
+          <p:cNvPr id="18" name="TextBox 17"/>
+          <p:cNvSpPr txBox="1"/>
+          <p:nvPr/>
+        </p:nvSpPr>
+        <p:spPr>
+          <a:xfrm>
+            <a:off x="3688689" y="2103120"/>
+            <a:ext cx="1009497" cy="329184"/>
+          </a:xfrm>
+          <a:prstGeom prst="rect">
+            <a:avLst/>
+          </a:prstGeom>
+          <a:noFill/>
+        </p:spPr>
+        <p:txBody>
+          <a:bodyPr wrap="square" anchor="t">
+            <a:spAutoFit/>
+          </a:bodyPr>
+          <a:lstStyle/>
+          <a:p>
+            <a:pPr algn="l"/>
+            <a:r>
+              <a:rPr sz="1400" b="1">
+                <a:solidFill>
+                  <a:srgbClr val="10B981"/>
+                </a:solidFill>
+                <a:latin typeface="Arial"/>
+              </a:rPr>
+              <a:t>Prepare</a:t>
+            </a:r>
+          </a:p>
+        </p:txBody>
+      </p:sp>
+      <p:sp>
+        <p:nvSpPr>
+          <p:cNvPr id="19" name="TextBox 18"/>
+          <p:cNvSpPr txBox="1"/>
+          <p:nvPr/>
+        </p:nvSpPr>
+        <p:spPr>
+          <a:xfrm>
+            <a:off x="3688689" y="2487168"/>
+            <a:ext cx="1009497" cy="2852928"/>
+          </a:xfrm>
+          <a:prstGeom prst="rect">
+            <a:avLst/>
+          </a:prstGeom>
+          <a:noFill/>
+        </p:spPr>
+        <p:txBody>
+          <a:bodyPr wrap="square" anchor="t">
+            <a:spAutoFit/>
+          </a:bodyPr>
+          <a:lstStyle/>
+          <a:p>
+            <a:pPr algn="l"/>
+            <a:r>
+              <a:rPr sz="1150" b="0">
+                <a:solidFill>
+                  <a:srgbClr val="161B26"/>
+                </a:solidFill>
+                <a:latin typeface="Arial"/>
+              </a:rPr>
+              <a:t>Ask AI to flag data types, missing values, duplicates and inconsistent periods.</a:t>
+            </a:r>
+          </a:p>
+        </p:txBody>
+      </p:sp>
+      <p:sp>
+        <p:nvSpPr>
+          <p:cNvPr id="20" name="Rounded Rectangle 19"/>
+          <p:cNvSpPr/>
+          <p:nvPr/>
+        </p:nvSpPr>
+        <p:spPr>
+          <a:xfrm>
+            <a:off x="5082235" y="1920240"/>
+            <a:ext cx="1997049" cy="3566160"/>
+          </a:xfrm>
+          <a:prstGeom prst="roundRect">
+            <a:avLst/>
+          </a:prstGeom>
+          <a:solidFill>
+            <a:srgbClr val="F5F8FC"/>
+          </a:solidFill>
+          <a:ln>
+            <a:solidFill>
+              <a:srgbClr val="E2E8F0"/>
+            </a:solidFill>
+          </a:ln>
+        </p:spPr>
+        <p:style>
+          <a:lnRef idx="1">
+            <a:schemeClr val="accent1"/>
+          </a:lnRef>
+          <a:fillRef idx="3">
+            <a:schemeClr val="accent1"/>
+          </a:fillRef>
+          <a:effectRef idx="2">
+            <a:schemeClr val="accent1"/>
+          </a:effectRef>
+          <a:fontRef idx="minor">
+            <a:schemeClr val="lt1"/>
+          </a:fontRef>
+        </p:style>
+        <p:txBody>
+          <a:bodyPr rtlCol="0" anchor="ctr"/>
+          <a:lstStyle/>
+          <a:p>
+            <a:pPr algn="ctr"/>
+          </a:p>
+        </p:txBody>
+      </p:sp>
+      <p:sp>
+        <p:nvSpPr>
+          <p:cNvPr id="21" name="Rectangle 20"/>
+          <p:cNvSpPr/>
+          <p:nvPr/>
+        </p:nvSpPr>
+        <p:spPr>
+          <a:xfrm>
+            <a:off x="5082235" y="1920240"/>
+            <a:ext cx="73152" cy="3566160"/>
+          </a:xfrm>
+          <a:prstGeom prst="rect">
+            <a:avLst/>
+          </a:prstGeom>
+          <a:solidFill>
             <a:srgbClr val="7C3AED"/>
           </a:solidFill>
           <a:ln>
@@ -5753,14 +6396,94 @@
       </p:sp>
       <p:sp>
         <p:nvSpPr>
-          <p:cNvPr id="4" name="TextBox 3"/>
+          <p:cNvPr id="22" name="Rounded Rectangle 21"/>
+          <p:cNvSpPr/>
+          <p:nvPr/>
+        </p:nvSpPr>
+        <p:spPr>
+          <a:xfrm>
+            <a:off x="5283403" y="2139696"/>
+            <a:ext cx="438912" cy="438912"/>
+          </a:xfrm>
+          <a:prstGeom prst="roundRect">
+            <a:avLst/>
+          </a:prstGeom>
+          <a:solidFill>
+            <a:srgbClr val="7C3AED"/>
+          </a:solidFill>
+          <a:ln>
+            <a:solidFill>
+              <a:srgbClr val="7C3AED"/>
+            </a:solidFill>
+          </a:ln>
+        </p:spPr>
+        <p:style>
+          <a:lnRef idx="1">
+            <a:schemeClr val="accent1"/>
+          </a:lnRef>
+          <a:fillRef idx="3">
+            <a:schemeClr val="accent1"/>
+          </a:fillRef>
+          <a:effectRef idx="2">
+            <a:schemeClr val="accent1"/>
+          </a:effectRef>
+          <a:fontRef idx="minor">
+            <a:schemeClr val="lt1"/>
+          </a:fontRef>
+        </p:style>
+        <p:txBody>
+          <a:bodyPr rtlCol="0" anchor="ctr"/>
+          <a:lstStyle/>
+          <a:p>
+            <a:pPr algn="ctr"/>
+          </a:p>
+        </p:txBody>
+      </p:sp>
+      <p:sp>
+        <p:nvSpPr>
+          <p:cNvPr id="23" name="TextBox 22"/>
           <p:cNvSpPr txBox="1"/>
           <p:nvPr/>
         </p:nvSpPr>
         <p:spPr>
           <a:xfrm>
-            <a:off x="658368" y="384048"/>
-            <a:ext cx="10789920" cy="320040"/>
+            <a:off x="5283403" y="2148840"/>
+            <a:ext cx="438912" cy="420624"/>
+          </a:xfrm>
+          <a:prstGeom prst="rect">
+            <a:avLst/>
+          </a:prstGeom>
+          <a:noFill/>
+        </p:spPr>
+        <p:txBody>
+          <a:bodyPr wrap="square" anchor="ctr">
+            <a:spAutoFit/>
+          </a:bodyPr>
+          <a:lstStyle/>
+          <a:p>
+            <a:pPr algn="ctr"/>
+            <a:r>
+              <a:rPr sz="1400" b="1">
+                <a:solidFill>
+                  <a:srgbClr val="FFFFFF"/>
+                </a:solidFill>
+                <a:latin typeface="Arial"/>
+              </a:rPr>
+              <a:t>3</a:t>
+            </a:r>
+          </a:p>
+        </p:txBody>
+      </p:sp>
+      <p:sp>
+        <p:nvSpPr>
+          <p:cNvPr id="24" name="TextBox 23"/>
+          <p:cNvSpPr txBox="1"/>
+          <p:nvPr/>
+        </p:nvSpPr>
+        <p:spPr>
+          <a:xfrm>
+            <a:off x="5886907" y="2103120"/>
+            <a:ext cx="1009497" cy="329184"/>
           </a:xfrm>
           <a:prstGeom prst="rect">
             <a:avLst/>
@@ -5775,27 +6498,27 @@
           <a:p>
             <a:pPr algn="l"/>
             <a:r>
-              <a:rPr sz="1100" b="1">
+              <a:rPr sz="1400" b="1">
                 <a:solidFill>
                   <a:srgbClr val="7C3AED"/>
                 </a:solidFill>
                 <a:latin typeface="Arial"/>
               </a:rPr>
-              <a:t>ACTIVITY 05 · EXAMPLE</a:t>
-            </a:r>
-          </a:p>
-        </p:txBody>
-      </p:sp>
-      <p:sp>
-        <p:nvSpPr>
-          <p:cNvPr id="5" name="TextBox 4"/>
+              <a:t>Choose</a:t>
+            </a:r>
+          </a:p>
+        </p:txBody>
+      </p:sp>
+      <p:sp>
+        <p:nvSpPr>
+          <p:cNvPr id="25" name="TextBox 24"/>
           <p:cNvSpPr txBox="1"/>
           <p:nvPr/>
         </p:nvSpPr>
         <p:spPr>
           <a:xfrm>
-            <a:off x="658368" y="749808"/>
-            <a:ext cx="10789920" cy="658368"/>
+            <a:off x="5886907" y="2487168"/>
+            <a:ext cx="1009497" cy="2852928"/>
           </a:xfrm>
           <a:prstGeom prst="rect">
             <a:avLst/>
@@ -5810,33 +6533,33 @@
           <a:p>
             <a:pPr algn="l"/>
             <a:r>
-              <a:rPr sz="2700" b="1">
+              <a:rPr sz="1150" b="0">
                 <a:solidFill>
                   <a:srgbClr val="161B26"/>
                 </a:solidFill>
                 <a:latin typeface="Arial"/>
               </a:rPr>
-              <a:t>Worked Output</a:t>
-            </a:r>
-          </a:p>
-        </p:txBody>
-      </p:sp>
-      <p:sp>
-        <p:nvSpPr>
-          <p:cNvPr id="6" name="Rectangle 5"/>
+              <a:t>Select metric and chart based on the relationship.</a:t>
+            </a:r>
+          </a:p>
+        </p:txBody>
+      </p:sp>
+      <p:sp>
+        <p:nvSpPr>
+          <p:cNvPr id="26" name="Rounded Rectangle 25"/>
           <p:cNvSpPr/>
           <p:nvPr/>
         </p:nvSpPr>
         <p:spPr>
           <a:xfrm>
-            <a:off x="658368" y="1444752"/>
-            <a:ext cx="10881360" cy="18288"/>
-          </a:xfrm>
-          <a:prstGeom prst="rect">
-            <a:avLst/>
-          </a:prstGeom>
-          <a:solidFill>
-            <a:srgbClr val="E2E8F0"/>
+            <a:off x="7280452" y="1920240"/>
+            <a:ext cx="1997049" cy="3566160"/>
+          </a:xfrm>
+          <a:prstGeom prst="roundRect">
+            <a:avLst/>
+          </a:prstGeom>
+          <a:solidFill>
+            <a:srgbClr val="F5F8FC"/>
           </a:solidFill>
           <a:ln>
             <a:solidFill>
@@ -5868,14 +6591,139 @@
       </p:sp>
       <p:sp>
         <p:nvSpPr>
-          <p:cNvPr id="7" name="TextBox 6"/>
+          <p:cNvPr id="27" name="Rectangle 26"/>
+          <p:cNvSpPr/>
+          <p:nvPr/>
+        </p:nvSpPr>
+        <p:spPr>
+          <a:xfrm>
+            <a:off x="7280452" y="1920240"/>
+            <a:ext cx="73152" cy="3566160"/>
+          </a:xfrm>
+          <a:prstGeom prst="rect">
+            <a:avLst/>
+          </a:prstGeom>
+          <a:solidFill>
+            <a:srgbClr val="F59E0B"/>
+          </a:solidFill>
+          <a:ln>
+            <a:solidFill>
+              <a:srgbClr val="F59E0B"/>
+            </a:solidFill>
+          </a:ln>
+        </p:spPr>
+        <p:style>
+          <a:lnRef idx="1">
+            <a:schemeClr val="accent1"/>
+          </a:lnRef>
+          <a:fillRef idx="3">
+            <a:schemeClr val="accent1"/>
+          </a:fillRef>
+          <a:effectRef idx="2">
+            <a:schemeClr val="accent1"/>
+          </a:effectRef>
+          <a:fontRef idx="minor">
+            <a:schemeClr val="lt1"/>
+          </a:fontRef>
+        </p:style>
+        <p:txBody>
+          <a:bodyPr rtlCol="0" anchor="ctr"/>
+          <a:lstStyle/>
+          <a:p>
+            <a:pPr algn="ctr"/>
+          </a:p>
+        </p:txBody>
+      </p:sp>
+      <p:sp>
+        <p:nvSpPr>
+          <p:cNvPr id="28" name="Rounded Rectangle 27"/>
+          <p:cNvSpPr/>
+          <p:nvPr/>
+        </p:nvSpPr>
+        <p:spPr>
+          <a:xfrm>
+            <a:off x="7481620" y="2139696"/>
+            <a:ext cx="438912" cy="438912"/>
+          </a:xfrm>
+          <a:prstGeom prst="roundRect">
+            <a:avLst/>
+          </a:prstGeom>
+          <a:solidFill>
+            <a:srgbClr val="F59E0B"/>
+          </a:solidFill>
+          <a:ln>
+            <a:solidFill>
+              <a:srgbClr val="F59E0B"/>
+            </a:solidFill>
+          </a:ln>
+        </p:spPr>
+        <p:style>
+          <a:lnRef idx="1">
+            <a:schemeClr val="accent1"/>
+          </a:lnRef>
+          <a:fillRef idx="3">
+            <a:schemeClr val="accent1"/>
+          </a:fillRef>
+          <a:effectRef idx="2">
+            <a:schemeClr val="accent1"/>
+          </a:effectRef>
+          <a:fontRef idx="minor">
+            <a:schemeClr val="lt1"/>
+          </a:fontRef>
+        </p:style>
+        <p:txBody>
+          <a:bodyPr rtlCol="0" anchor="ctr"/>
+          <a:lstStyle/>
+          <a:p>
+            <a:pPr algn="ctr"/>
+          </a:p>
+        </p:txBody>
+      </p:sp>
+      <p:sp>
+        <p:nvSpPr>
+          <p:cNvPr id="29" name="TextBox 28"/>
           <p:cNvSpPr txBox="1"/>
           <p:nvPr/>
         </p:nvSpPr>
         <p:spPr>
           <a:xfrm>
-            <a:off x="658368" y="6473952"/>
-            <a:ext cx="9875520" cy="201168"/>
+            <a:off x="7481620" y="2148840"/>
+            <a:ext cx="438912" cy="420624"/>
+          </a:xfrm>
+          <a:prstGeom prst="rect">
+            <a:avLst/>
+          </a:prstGeom>
+          <a:noFill/>
+        </p:spPr>
+        <p:txBody>
+          <a:bodyPr wrap="square" anchor="ctr">
+            <a:spAutoFit/>
+          </a:bodyPr>
+          <a:lstStyle/>
+          <a:p>
+            <a:pPr algn="ctr"/>
+            <a:r>
+              <a:rPr sz="1400" b="1">
+                <a:solidFill>
+                  <a:srgbClr val="FFFFFF"/>
+                </a:solidFill>
+                <a:latin typeface="Arial"/>
+              </a:rPr>
+              <a:t>4</a:t>
+            </a:r>
+          </a:p>
+        </p:txBody>
+      </p:sp>
+      <p:sp>
+        <p:nvSpPr>
+          <p:cNvPr id="30" name="TextBox 29"/>
+          <p:cNvSpPr txBox="1"/>
+          <p:nvPr/>
+        </p:nvSpPr>
+        <p:spPr>
+          <a:xfrm>
+            <a:off x="8085124" y="2103120"/>
+            <a:ext cx="1009497" cy="329184"/>
           </a:xfrm>
           <a:prstGeom prst="rect">
             <a:avLst/>
@@ -5890,27 +6738,62 @@
           <a:p>
             <a:pPr algn="l"/>
             <a:r>
-              <a:rPr sz="800" b="0">
-                <a:solidFill>
-                  <a:srgbClr val="5B6372"/>
+              <a:rPr sz="1400" b="1">
+                <a:solidFill>
+                  <a:srgbClr val="F59E0B"/>
                 </a:solidFill>
                 <a:latin typeface="Arial"/>
               </a:rPr>
-              <a:t>TGS-2024048310 · ACTIVITY PRACTICE · Tertiary Infotech Academy Pte Ltd</a:t>
-            </a:r>
-          </a:p>
-        </p:txBody>
-      </p:sp>
-      <p:sp>
-        <p:nvSpPr>
-          <p:cNvPr id="8" name="Rounded Rectangle 7"/>
+              <a:t>Build</a:t>
+            </a:r>
+          </a:p>
+        </p:txBody>
+      </p:sp>
+      <p:sp>
+        <p:nvSpPr>
+          <p:cNvPr id="31" name="TextBox 30"/>
+          <p:cNvSpPr txBox="1"/>
+          <p:nvPr/>
+        </p:nvSpPr>
+        <p:spPr>
+          <a:xfrm>
+            <a:off x="8085124" y="2487168"/>
+            <a:ext cx="1009497" cy="2852928"/>
+          </a:xfrm>
+          <a:prstGeom prst="rect">
+            <a:avLst/>
+          </a:prstGeom>
+          <a:noFill/>
+        </p:spPr>
+        <p:txBody>
+          <a:bodyPr wrap="square" anchor="t">
+            <a:spAutoFit/>
+          </a:bodyPr>
+          <a:lstStyle/>
+          <a:p>
+            <a:pPr algn="l"/>
+            <a:r>
+              <a:rPr sz="1150" b="0">
+                <a:solidFill>
+                  <a:srgbClr val="161B26"/>
+                </a:solidFill>
+                <a:latin typeface="Arial"/>
+              </a:rPr>
+              <a:t>Create or paste a native editable PowerPoint chart.</a:t>
+            </a:r>
+          </a:p>
+        </p:txBody>
+      </p:sp>
+      <p:sp>
+        <p:nvSpPr>
+          <p:cNvPr id="32" name="Rounded Rectangle 31"/>
           <p:cNvSpPr/>
           <p:nvPr/>
         </p:nvSpPr>
         <p:spPr>
           <a:xfrm>
-            <a:off x="731520" y="1783080"/>
-            <a:ext cx="3401568" cy="1719072"/>
+            <a:off x="9478670" y="1920240"/>
+            <a:ext cx="1997049" cy="3566160"/>
           </a:xfrm>
           <a:prstGeom prst="roundRect">
             <a:avLst/>
@@ -5948,14 +6831,14 @@
       </p:sp>
       <p:sp>
         <p:nvSpPr>
-          <p:cNvPr id="9" name="Rectangle 8"/>
+          <p:cNvPr id="33" name="Rectangle 32"/>
           <p:cNvSpPr/>
           <p:nvPr/>
         </p:nvSpPr>
         <p:spPr>
           <a:xfrm>
-            <a:off x="731520" y="1783080"/>
-            <a:ext cx="73152" cy="1719072"/>
+            <a:off x="9478670" y="1920240"/>
+            <a:ext cx="73152" cy="3566160"/>
           </a:xfrm>
           <a:prstGeom prst="rect">
             <a:avLst/>
@@ -5993,13 +6876,13 @@
       </p:sp>
       <p:sp>
         <p:nvSpPr>
-          <p:cNvPr id="10" name="Rounded Rectangle 9"/>
+          <p:cNvPr id="34" name="Rounded Rectangle 33"/>
           <p:cNvSpPr/>
           <p:nvPr/>
         </p:nvSpPr>
         <p:spPr>
           <a:xfrm>
-            <a:off x="932688" y="2002536"/>
+            <a:off x="9679838" y="2139696"/>
             <a:ext cx="438912" cy="438912"/>
           </a:xfrm>
           <a:prstGeom prst="roundRect">
@@ -6038,13 +6921,13 @@
       </p:sp>
       <p:sp>
         <p:nvSpPr>
-          <p:cNvPr id="11" name="TextBox 10"/>
+          <p:cNvPr id="35" name="TextBox 34"/>
           <p:cNvSpPr txBox="1"/>
           <p:nvPr/>
         </p:nvSpPr>
         <p:spPr>
           <a:xfrm>
-            <a:off x="932688" y="2011680"/>
+            <a:off x="9679838" y="2148840"/>
             <a:ext cx="438912" cy="420624"/>
           </a:xfrm>
           <a:prstGeom prst="rect">
@@ -6066,21 +6949,21 @@
                 </a:solidFill>
                 <a:latin typeface="Arial"/>
               </a:rPr>
-              <a:t>1</a:t>
-            </a:r>
-          </a:p>
-        </p:txBody>
-      </p:sp>
-      <p:sp>
-        <p:nvSpPr>
-          <p:cNvPr id="12" name="TextBox 11"/>
+              <a:t>5</a:t>
+            </a:r>
+          </a:p>
+        </p:txBody>
+      </p:sp>
+      <p:sp>
+        <p:nvSpPr>
+          <p:cNvPr id="36" name="TextBox 35"/>
           <p:cNvSpPr txBox="1"/>
           <p:nvPr/>
         </p:nvSpPr>
         <p:spPr>
           <a:xfrm>
-            <a:off x="1536192" y="1965960"/>
-            <a:ext cx="2414016" cy="329184"/>
+            <a:off x="10283342" y="2103120"/>
+            <a:ext cx="1009497" cy="329184"/>
           </a:xfrm>
           <a:prstGeom prst="rect">
             <a:avLst/>
@@ -6101,21 +6984,21 @@
                 </a:solidFill>
                 <a:latin typeface="Arial"/>
               </a:rPr>
-              <a:t>Beverages</a:t>
-            </a:r>
-          </a:p>
-        </p:txBody>
-      </p:sp>
-      <p:sp>
-        <p:nvSpPr>
-          <p:cNvPr id="13" name="TextBox 12"/>
+              <a:t>Explain</a:t>
+            </a:r>
+          </a:p>
+        </p:txBody>
+      </p:sp>
+      <p:sp>
+        <p:nvSpPr>
+          <p:cNvPr id="37" name="TextBox 36"/>
           <p:cNvSpPr txBox="1"/>
           <p:nvPr/>
         </p:nvSpPr>
         <p:spPr>
           <a:xfrm>
-            <a:off x="1536192" y="2350008"/>
-            <a:ext cx="2414016" cy="1005839"/>
+            <a:off x="10283342" y="2487168"/>
+            <a:ext cx="1009497" cy="2852928"/>
           </a:xfrm>
           <a:prstGeom prst="rect">
             <a:avLst/>
@@ -6136,1207 +7019,7 @@
                 </a:solidFill>
                 <a:latin typeface="Arial"/>
               </a:rPr>
-              <a:t>Highest revenue; stable margin</a:t>
-            </a:r>
-          </a:p>
-        </p:txBody>
-      </p:sp>
-      <p:sp>
-        <p:nvSpPr>
-          <p:cNvPr id="14" name="Rounded Rectangle 13"/>
-          <p:cNvSpPr/>
-          <p:nvPr/>
-        </p:nvSpPr>
-        <p:spPr>
-          <a:xfrm>
-            <a:off x="4315968" y="1783080"/>
-            <a:ext cx="3401568" cy="1719072"/>
-          </a:xfrm>
-          <a:prstGeom prst="roundRect">
-            <a:avLst/>
-          </a:prstGeom>
-          <a:solidFill>
-            <a:srgbClr val="F5F8FC"/>
-          </a:solidFill>
-          <a:ln>
-            <a:solidFill>
-              <a:srgbClr val="E2E8F0"/>
-            </a:solidFill>
-          </a:ln>
-        </p:spPr>
-        <p:style>
-          <a:lnRef idx="1">
-            <a:schemeClr val="accent1"/>
-          </a:lnRef>
-          <a:fillRef idx="3">
-            <a:schemeClr val="accent1"/>
-          </a:fillRef>
-          <a:effectRef idx="2">
-            <a:schemeClr val="accent1"/>
-          </a:effectRef>
-          <a:fontRef idx="minor">
-            <a:schemeClr val="lt1"/>
-          </a:fontRef>
-        </p:style>
-        <p:txBody>
-          <a:bodyPr rtlCol="0" anchor="ctr"/>
-          <a:lstStyle/>
-          <a:p>
-            <a:pPr algn="ctr"/>
-          </a:p>
-        </p:txBody>
-      </p:sp>
-      <p:sp>
-        <p:nvSpPr>
-          <p:cNvPr id="15" name="Rectangle 14"/>
-          <p:cNvSpPr/>
-          <p:nvPr/>
-        </p:nvSpPr>
-        <p:spPr>
-          <a:xfrm>
-            <a:off x="4315968" y="1783080"/>
-            <a:ext cx="73152" cy="1719072"/>
-          </a:xfrm>
-          <a:prstGeom prst="rect">
-            <a:avLst/>
-          </a:prstGeom>
-          <a:solidFill>
-            <a:srgbClr val="10B981"/>
-          </a:solidFill>
-          <a:ln>
-            <a:solidFill>
-              <a:srgbClr val="10B981"/>
-            </a:solidFill>
-          </a:ln>
-        </p:spPr>
-        <p:style>
-          <a:lnRef idx="1">
-            <a:schemeClr val="accent1"/>
-          </a:lnRef>
-          <a:fillRef idx="3">
-            <a:schemeClr val="accent1"/>
-          </a:fillRef>
-          <a:effectRef idx="2">
-            <a:schemeClr val="accent1"/>
-          </a:effectRef>
-          <a:fontRef idx="minor">
-            <a:schemeClr val="lt1"/>
-          </a:fontRef>
-        </p:style>
-        <p:txBody>
-          <a:bodyPr rtlCol="0" anchor="ctr"/>
-          <a:lstStyle/>
-          <a:p>
-            <a:pPr algn="ctr"/>
-          </a:p>
-        </p:txBody>
-      </p:sp>
-      <p:sp>
-        <p:nvSpPr>
-          <p:cNvPr id="16" name="Rounded Rectangle 15"/>
-          <p:cNvSpPr/>
-          <p:nvPr/>
-        </p:nvSpPr>
-        <p:spPr>
-          <a:xfrm>
-            <a:off x="4517136" y="2002536"/>
-            <a:ext cx="438912" cy="438912"/>
-          </a:xfrm>
-          <a:prstGeom prst="roundRect">
-            <a:avLst/>
-          </a:prstGeom>
-          <a:solidFill>
-            <a:srgbClr val="10B981"/>
-          </a:solidFill>
-          <a:ln>
-            <a:solidFill>
-              <a:srgbClr val="10B981"/>
-            </a:solidFill>
-          </a:ln>
-        </p:spPr>
-        <p:style>
-          <a:lnRef idx="1">
-            <a:schemeClr val="accent1"/>
-          </a:lnRef>
-          <a:fillRef idx="3">
-            <a:schemeClr val="accent1"/>
-          </a:fillRef>
-          <a:effectRef idx="2">
-            <a:schemeClr val="accent1"/>
-          </a:effectRef>
-          <a:fontRef idx="minor">
-            <a:schemeClr val="lt1"/>
-          </a:fontRef>
-        </p:style>
-        <p:txBody>
-          <a:bodyPr rtlCol="0" anchor="ctr"/>
-          <a:lstStyle/>
-          <a:p>
-            <a:pPr algn="ctr"/>
-          </a:p>
-        </p:txBody>
-      </p:sp>
-      <p:sp>
-        <p:nvSpPr>
-          <p:cNvPr id="17" name="TextBox 16"/>
-          <p:cNvSpPr txBox="1"/>
-          <p:nvPr/>
-        </p:nvSpPr>
-        <p:spPr>
-          <a:xfrm>
-            <a:off x="4517136" y="2011680"/>
-            <a:ext cx="438912" cy="420624"/>
-          </a:xfrm>
-          <a:prstGeom prst="rect">
-            <a:avLst/>
-          </a:prstGeom>
-          <a:noFill/>
-        </p:spPr>
-        <p:txBody>
-          <a:bodyPr wrap="square" anchor="ctr">
-            <a:spAutoFit/>
-          </a:bodyPr>
-          <a:lstStyle/>
-          <a:p>
-            <a:pPr algn="ctr"/>
-            <a:r>
-              <a:rPr sz="1400" b="1">
-                <a:solidFill>
-                  <a:srgbClr val="FFFFFF"/>
-                </a:solidFill>
-                <a:latin typeface="Arial"/>
-              </a:rPr>
-              <a:t>2</a:t>
-            </a:r>
-          </a:p>
-        </p:txBody>
-      </p:sp>
-      <p:sp>
-        <p:nvSpPr>
-          <p:cNvPr id="18" name="TextBox 17"/>
-          <p:cNvSpPr txBox="1"/>
-          <p:nvPr/>
-        </p:nvSpPr>
-        <p:spPr>
-          <a:xfrm>
-            <a:off x="5120640" y="1965960"/>
-            <a:ext cx="2414016" cy="329184"/>
-          </a:xfrm>
-          <a:prstGeom prst="rect">
-            <a:avLst/>
-          </a:prstGeom>
-          <a:noFill/>
-        </p:spPr>
-        <p:txBody>
-          <a:bodyPr wrap="square" anchor="t">
-            <a:spAutoFit/>
-          </a:bodyPr>
-          <a:lstStyle/>
-          <a:p>
-            <a:pPr algn="l"/>
-            <a:r>
-              <a:rPr sz="1400" b="1">
-                <a:solidFill>
-                  <a:srgbClr val="10B981"/>
-                </a:solidFill>
-                <a:latin typeface="Arial"/>
-              </a:rPr>
-              <a:t>Ready meals</a:t>
-            </a:r>
-          </a:p>
-        </p:txBody>
-      </p:sp>
-      <p:sp>
-        <p:nvSpPr>
-          <p:cNvPr id="19" name="TextBox 18"/>
-          <p:cNvSpPr txBox="1"/>
-          <p:nvPr/>
-        </p:nvSpPr>
-        <p:spPr>
-          <a:xfrm>
-            <a:off x="5120640" y="2350008"/>
-            <a:ext cx="2414016" cy="1005839"/>
-          </a:xfrm>
-          <a:prstGeom prst="rect">
-            <a:avLst/>
-          </a:prstGeom>
-          <a:noFill/>
-        </p:spPr>
-        <p:txBody>
-          <a:bodyPr wrap="square" anchor="t">
-            <a:spAutoFit/>
-          </a:bodyPr>
-          <a:lstStyle/>
-          <a:p>
-            <a:pPr algn="l"/>
-            <a:r>
-              <a:rPr sz="1150" b="0">
-                <a:solidFill>
-                  <a:srgbClr val="161B26"/>
-                </a:solidFill>
-                <a:latin typeface="Arial"/>
-              </a:rPr>
-              <a:t>Fastest Q2 growth; above-floor margin</a:t>
-            </a:r>
-          </a:p>
-        </p:txBody>
-      </p:sp>
-      <p:sp>
-        <p:nvSpPr>
-          <p:cNvPr id="20" name="Rounded Rectangle 19"/>
-          <p:cNvSpPr/>
-          <p:nvPr/>
-        </p:nvSpPr>
-        <p:spPr>
-          <a:xfrm>
-            <a:off x="7900416" y="1783080"/>
-            <a:ext cx="3401568" cy="1719072"/>
-          </a:xfrm>
-          <a:prstGeom prst="roundRect">
-            <a:avLst/>
-          </a:prstGeom>
-          <a:solidFill>
-            <a:srgbClr val="F5F8FC"/>
-          </a:solidFill>
-          <a:ln>
-            <a:solidFill>
-              <a:srgbClr val="E2E8F0"/>
-            </a:solidFill>
-          </a:ln>
-        </p:spPr>
-        <p:style>
-          <a:lnRef idx="1">
-            <a:schemeClr val="accent1"/>
-          </a:lnRef>
-          <a:fillRef idx="3">
-            <a:schemeClr val="accent1"/>
-          </a:fillRef>
-          <a:effectRef idx="2">
-            <a:schemeClr val="accent1"/>
-          </a:effectRef>
-          <a:fontRef idx="minor">
-            <a:schemeClr val="lt1"/>
-          </a:fontRef>
-        </p:style>
-        <p:txBody>
-          <a:bodyPr rtlCol="0" anchor="ctr"/>
-          <a:lstStyle/>
-          <a:p>
-            <a:pPr algn="ctr"/>
-          </a:p>
-        </p:txBody>
-      </p:sp>
-      <p:sp>
-        <p:nvSpPr>
-          <p:cNvPr id="21" name="Rectangle 20"/>
-          <p:cNvSpPr/>
-          <p:nvPr/>
-        </p:nvSpPr>
-        <p:spPr>
-          <a:xfrm>
-            <a:off x="7900416" y="1783080"/>
-            <a:ext cx="73152" cy="1719072"/>
-          </a:xfrm>
-          <a:prstGeom prst="rect">
-            <a:avLst/>
-          </a:prstGeom>
-          <a:solidFill>
-            <a:srgbClr val="7C3AED"/>
-          </a:solidFill>
-          <a:ln>
-            <a:solidFill>
-              <a:srgbClr val="7C3AED"/>
-            </a:solidFill>
-          </a:ln>
-        </p:spPr>
-        <p:style>
-          <a:lnRef idx="1">
-            <a:schemeClr val="accent1"/>
-          </a:lnRef>
-          <a:fillRef idx="3">
-            <a:schemeClr val="accent1"/>
-          </a:fillRef>
-          <a:effectRef idx="2">
-            <a:schemeClr val="accent1"/>
-          </a:effectRef>
-          <a:fontRef idx="minor">
-            <a:schemeClr val="lt1"/>
-          </a:fontRef>
-        </p:style>
-        <p:txBody>
-          <a:bodyPr rtlCol="0" anchor="ctr"/>
-          <a:lstStyle/>
-          <a:p>
-            <a:pPr algn="ctr"/>
-          </a:p>
-        </p:txBody>
-      </p:sp>
-      <p:sp>
-        <p:nvSpPr>
-          <p:cNvPr id="22" name="Rounded Rectangle 21"/>
-          <p:cNvSpPr/>
-          <p:nvPr/>
-        </p:nvSpPr>
-        <p:spPr>
-          <a:xfrm>
-            <a:off x="8101584" y="2002536"/>
-            <a:ext cx="438912" cy="438912"/>
-          </a:xfrm>
-          <a:prstGeom prst="roundRect">
-            <a:avLst/>
-          </a:prstGeom>
-          <a:solidFill>
-            <a:srgbClr val="7C3AED"/>
-          </a:solidFill>
-          <a:ln>
-            <a:solidFill>
-              <a:srgbClr val="7C3AED"/>
-            </a:solidFill>
-          </a:ln>
-        </p:spPr>
-        <p:style>
-          <a:lnRef idx="1">
-            <a:schemeClr val="accent1"/>
-          </a:lnRef>
-          <a:fillRef idx="3">
-            <a:schemeClr val="accent1"/>
-          </a:fillRef>
-          <a:effectRef idx="2">
-            <a:schemeClr val="accent1"/>
-          </a:effectRef>
-          <a:fontRef idx="minor">
-            <a:schemeClr val="lt1"/>
-          </a:fontRef>
-        </p:style>
-        <p:txBody>
-          <a:bodyPr rtlCol="0" anchor="ctr"/>
-          <a:lstStyle/>
-          <a:p>
-            <a:pPr algn="ctr"/>
-          </a:p>
-        </p:txBody>
-      </p:sp>
-      <p:sp>
-        <p:nvSpPr>
-          <p:cNvPr id="23" name="TextBox 22"/>
-          <p:cNvSpPr txBox="1"/>
-          <p:nvPr/>
-        </p:nvSpPr>
-        <p:spPr>
-          <a:xfrm>
-            <a:off x="8101584" y="2011680"/>
-            <a:ext cx="438912" cy="420624"/>
-          </a:xfrm>
-          <a:prstGeom prst="rect">
-            <a:avLst/>
-          </a:prstGeom>
-          <a:noFill/>
-        </p:spPr>
-        <p:txBody>
-          <a:bodyPr wrap="square" anchor="ctr">
-            <a:spAutoFit/>
-          </a:bodyPr>
-          <a:lstStyle/>
-          <a:p>
-            <a:pPr algn="ctr"/>
-            <a:r>
-              <a:rPr sz="1400" b="1">
-                <a:solidFill>
-                  <a:srgbClr val="FFFFFF"/>
-                </a:solidFill>
-                <a:latin typeface="Arial"/>
-              </a:rPr>
-              <a:t>3</a:t>
-            </a:r>
-          </a:p>
-        </p:txBody>
-      </p:sp>
-      <p:sp>
-        <p:nvSpPr>
-          <p:cNvPr id="24" name="TextBox 23"/>
-          <p:cNvSpPr txBox="1"/>
-          <p:nvPr/>
-        </p:nvSpPr>
-        <p:spPr>
-          <a:xfrm>
-            <a:off x="8705088" y="1965960"/>
-            <a:ext cx="2414016" cy="329184"/>
-          </a:xfrm>
-          <a:prstGeom prst="rect">
-            <a:avLst/>
-          </a:prstGeom>
-          <a:noFill/>
-        </p:spPr>
-        <p:txBody>
-          <a:bodyPr wrap="square" anchor="t">
-            <a:spAutoFit/>
-          </a:bodyPr>
-          <a:lstStyle/>
-          <a:p>
-            <a:pPr algn="l"/>
-            <a:r>
-              <a:rPr sz="1400" b="1">
-                <a:solidFill>
-                  <a:srgbClr val="7C3AED"/>
-                </a:solidFill>
-                <a:latin typeface="Arial"/>
-              </a:rPr>
-              <a:t>Snacks</a:t>
-            </a:r>
-          </a:p>
-        </p:txBody>
-      </p:sp>
-      <p:sp>
-        <p:nvSpPr>
-          <p:cNvPr id="25" name="TextBox 24"/>
-          <p:cNvSpPr txBox="1"/>
-          <p:nvPr/>
-        </p:nvSpPr>
-        <p:spPr>
-          <a:xfrm>
-            <a:off x="8705088" y="2350008"/>
-            <a:ext cx="2414016" cy="1005839"/>
-          </a:xfrm>
-          <a:prstGeom prst="rect">
-            <a:avLst/>
-          </a:prstGeom>
-          <a:noFill/>
-        </p:spPr>
-        <p:txBody>
-          <a:bodyPr wrap="square" anchor="t">
-            <a:spAutoFit/>
-          </a:bodyPr>
-          <a:lstStyle/>
-          <a:p>
-            <a:pPr algn="l"/>
-            <a:r>
-              <a:rPr sz="1150" b="0">
-                <a:solidFill>
-                  <a:srgbClr val="161B26"/>
-                </a:solidFill>
-                <a:latin typeface="Arial"/>
-              </a:rPr>
-              <a:t>High volume; lower margin</a:t>
-            </a:r>
-          </a:p>
-        </p:txBody>
-      </p:sp>
-      <p:sp>
-        <p:nvSpPr>
-          <p:cNvPr id="26" name="Rounded Rectangle 25"/>
-          <p:cNvSpPr/>
-          <p:nvPr/>
-        </p:nvSpPr>
-        <p:spPr>
-          <a:xfrm>
-            <a:off x="731520" y="3776472"/>
-            <a:ext cx="3401568" cy="1719072"/>
-          </a:xfrm>
-          <a:prstGeom prst="roundRect">
-            <a:avLst/>
-          </a:prstGeom>
-          <a:solidFill>
-            <a:srgbClr val="F5F8FC"/>
-          </a:solidFill>
-          <a:ln>
-            <a:solidFill>
-              <a:srgbClr val="E2E8F0"/>
-            </a:solidFill>
-          </a:ln>
-        </p:spPr>
-        <p:style>
-          <a:lnRef idx="1">
-            <a:schemeClr val="accent1"/>
-          </a:lnRef>
-          <a:fillRef idx="3">
-            <a:schemeClr val="accent1"/>
-          </a:fillRef>
-          <a:effectRef idx="2">
-            <a:schemeClr val="accent1"/>
-          </a:effectRef>
-          <a:fontRef idx="minor">
-            <a:schemeClr val="lt1"/>
-          </a:fontRef>
-        </p:style>
-        <p:txBody>
-          <a:bodyPr rtlCol="0" anchor="ctr"/>
-          <a:lstStyle/>
-          <a:p>
-            <a:pPr algn="ctr"/>
-          </a:p>
-        </p:txBody>
-      </p:sp>
-      <p:sp>
-        <p:nvSpPr>
-          <p:cNvPr id="27" name="Rectangle 26"/>
-          <p:cNvSpPr/>
-          <p:nvPr/>
-        </p:nvSpPr>
-        <p:spPr>
-          <a:xfrm>
-            <a:off x="731520" y="3776472"/>
-            <a:ext cx="73152" cy="1719072"/>
-          </a:xfrm>
-          <a:prstGeom prst="rect">
-            <a:avLst/>
-          </a:prstGeom>
-          <a:solidFill>
-            <a:srgbClr val="F59E0B"/>
-          </a:solidFill>
-          <a:ln>
-            <a:solidFill>
-              <a:srgbClr val="F59E0B"/>
-            </a:solidFill>
-          </a:ln>
-        </p:spPr>
-        <p:style>
-          <a:lnRef idx="1">
-            <a:schemeClr val="accent1"/>
-          </a:lnRef>
-          <a:fillRef idx="3">
-            <a:schemeClr val="accent1"/>
-          </a:fillRef>
-          <a:effectRef idx="2">
-            <a:schemeClr val="accent1"/>
-          </a:effectRef>
-          <a:fontRef idx="minor">
-            <a:schemeClr val="lt1"/>
-          </a:fontRef>
-        </p:style>
-        <p:txBody>
-          <a:bodyPr rtlCol="0" anchor="ctr"/>
-          <a:lstStyle/>
-          <a:p>
-            <a:pPr algn="ctr"/>
-          </a:p>
-        </p:txBody>
-      </p:sp>
-      <p:sp>
-        <p:nvSpPr>
-          <p:cNvPr id="28" name="Rounded Rectangle 27"/>
-          <p:cNvSpPr/>
-          <p:nvPr/>
-        </p:nvSpPr>
-        <p:spPr>
-          <a:xfrm>
-            <a:off x="932688" y="3995928"/>
-            <a:ext cx="438912" cy="438912"/>
-          </a:xfrm>
-          <a:prstGeom prst="roundRect">
-            <a:avLst/>
-          </a:prstGeom>
-          <a:solidFill>
-            <a:srgbClr val="F59E0B"/>
-          </a:solidFill>
-          <a:ln>
-            <a:solidFill>
-              <a:srgbClr val="F59E0B"/>
-            </a:solidFill>
-          </a:ln>
-        </p:spPr>
-        <p:style>
-          <a:lnRef idx="1">
-            <a:schemeClr val="accent1"/>
-          </a:lnRef>
-          <a:fillRef idx="3">
-            <a:schemeClr val="accent1"/>
-          </a:fillRef>
-          <a:effectRef idx="2">
-            <a:schemeClr val="accent1"/>
-          </a:effectRef>
-          <a:fontRef idx="minor">
-            <a:schemeClr val="lt1"/>
-          </a:fontRef>
-        </p:style>
-        <p:txBody>
-          <a:bodyPr rtlCol="0" anchor="ctr"/>
-          <a:lstStyle/>
-          <a:p>
-            <a:pPr algn="ctr"/>
-          </a:p>
-        </p:txBody>
-      </p:sp>
-      <p:sp>
-        <p:nvSpPr>
-          <p:cNvPr id="29" name="TextBox 28"/>
-          <p:cNvSpPr txBox="1"/>
-          <p:nvPr/>
-        </p:nvSpPr>
-        <p:spPr>
-          <a:xfrm>
-            <a:off x="932688" y="4005072"/>
-            <a:ext cx="438912" cy="420624"/>
-          </a:xfrm>
-          <a:prstGeom prst="rect">
-            <a:avLst/>
-          </a:prstGeom>
-          <a:noFill/>
-        </p:spPr>
-        <p:txBody>
-          <a:bodyPr wrap="square" anchor="ctr">
-            <a:spAutoFit/>
-          </a:bodyPr>
-          <a:lstStyle/>
-          <a:p>
-            <a:pPr algn="ctr"/>
-            <a:r>
-              <a:rPr sz="1400" b="1">
-                <a:solidFill>
-                  <a:srgbClr val="FFFFFF"/>
-                </a:solidFill>
-                <a:latin typeface="Arial"/>
-              </a:rPr>
-              <a:t>4</a:t>
-            </a:r>
-          </a:p>
-        </p:txBody>
-      </p:sp>
-      <p:sp>
-        <p:nvSpPr>
-          <p:cNvPr id="30" name="TextBox 29"/>
-          <p:cNvSpPr txBox="1"/>
-          <p:nvPr/>
-        </p:nvSpPr>
-        <p:spPr>
-          <a:xfrm>
-            <a:off x="1536192" y="3959352"/>
-            <a:ext cx="2414016" cy="329184"/>
-          </a:xfrm>
-          <a:prstGeom prst="rect">
-            <a:avLst/>
-          </a:prstGeom>
-          <a:noFill/>
-        </p:spPr>
-        <p:txBody>
-          <a:bodyPr wrap="square" anchor="t">
-            <a:spAutoFit/>
-          </a:bodyPr>
-          <a:lstStyle/>
-          <a:p>
-            <a:pPr algn="l"/>
-            <a:r>
-              <a:rPr sz="1400" b="1">
-                <a:solidFill>
-                  <a:srgbClr val="F59E0B"/>
-                </a:solidFill>
-                <a:latin typeface="Arial"/>
-              </a:rPr>
-              <a:t>Household</a:t>
-            </a:r>
-          </a:p>
-        </p:txBody>
-      </p:sp>
-      <p:sp>
-        <p:nvSpPr>
-          <p:cNvPr id="31" name="TextBox 30"/>
-          <p:cNvSpPr txBox="1"/>
-          <p:nvPr/>
-        </p:nvSpPr>
-        <p:spPr>
-          <a:xfrm>
-            <a:off x="1536192" y="4343400"/>
-            <a:ext cx="2414016" cy="1005839"/>
-          </a:xfrm>
-          <a:prstGeom prst="rect">
-            <a:avLst/>
-          </a:prstGeom>
-          <a:noFill/>
-        </p:spPr>
-        <p:txBody>
-          <a:bodyPr wrap="square" anchor="t">
-            <a:spAutoFit/>
-          </a:bodyPr>
-          <a:lstStyle/>
-          <a:p>
-            <a:pPr algn="l"/>
-            <a:r>
-              <a:rPr sz="1150" b="0">
-                <a:solidFill>
-                  <a:srgbClr val="161B26"/>
-                </a:solidFill>
-                <a:latin typeface="Arial"/>
-              </a:rPr>
-              <a:t>Seasonal spike; higher returns</a:t>
-            </a:r>
-          </a:p>
-        </p:txBody>
-      </p:sp>
-      <p:sp>
-        <p:nvSpPr>
-          <p:cNvPr id="32" name="Rounded Rectangle 31"/>
-          <p:cNvSpPr/>
-          <p:nvPr/>
-        </p:nvSpPr>
-        <p:spPr>
-          <a:xfrm>
-            <a:off x="4315968" y="3776472"/>
-            <a:ext cx="3401568" cy="1719072"/>
-          </a:xfrm>
-          <a:prstGeom prst="roundRect">
-            <a:avLst/>
-          </a:prstGeom>
-          <a:solidFill>
-            <a:srgbClr val="F5F8FC"/>
-          </a:solidFill>
-          <a:ln>
-            <a:solidFill>
-              <a:srgbClr val="E2E8F0"/>
-            </a:solidFill>
-          </a:ln>
-        </p:spPr>
-        <p:style>
-          <a:lnRef idx="1">
-            <a:schemeClr val="accent1"/>
-          </a:lnRef>
-          <a:fillRef idx="3">
-            <a:schemeClr val="accent1"/>
-          </a:fillRef>
-          <a:effectRef idx="2">
-            <a:schemeClr val="accent1"/>
-          </a:effectRef>
-          <a:fontRef idx="minor">
-            <a:schemeClr val="lt1"/>
-          </a:fontRef>
-        </p:style>
-        <p:txBody>
-          <a:bodyPr rtlCol="0" anchor="ctr"/>
-          <a:lstStyle/>
-          <a:p>
-            <a:pPr algn="ctr"/>
-          </a:p>
-        </p:txBody>
-      </p:sp>
-      <p:sp>
-        <p:nvSpPr>
-          <p:cNvPr id="33" name="Rectangle 32"/>
-          <p:cNvSpPr/>
-          <p:nvPr/>
-        </p:nvSpPr>
-        <p:spPr>
-          <a:xfrm>
-            <a:off x="4315968" y="3776472"/>
-            <a:ext cx="73152" cy="1719072"/>
-          </a:xfrm>
-          <a:prstGeom prst="rect">
-            <a:avLst/>
-          </a:prstGeom>
-          <a:solidFill>
-            <a:srgbClr val="1F6FEB"/>
-          </a:solidFill>
-          <a:ln>
-            <a:solidFill>
-              <a:srgbClr val="1F6FEB"/>
-            </a:solidFill>
-          </a:ln>
-        </p:spPr>
-        <p:style>
-          <a:lnRef idx="1">
-            <a:schemeClr val="accent1"/>
-          </a:lnRef>
-          <a:fillRef idx="3">
-            <a:schemeClr val="accent1"/>
-          </a:fillRef>
-          <a:effectRef idx="2">
-            <a:schemeClr val="accent1"/>
-          </a:effectRef>
-          <a:fontRef idx="minor">
-            <a:schemeClr val="lt1"/>
-          </a:fontRef>
-        </p:style>
-        <p:txBody>
-          <a:bodyPr rtlCol="0" anchor="ctr"/>
-          <a:lstStyle/>
-          <a:p>
-            <a:pPr algn="ctr"/>
-          </a:p>
-        </p:txBody>
-      </p:sp>
-      <p:sp>
-        <p:nvSpPr>
-          <p:cNvPr id="34" name="Rounded Rectangle 33"/>
-          <p:cNvSpPr/>
-          <p:nvPr/>
-        </p:nvSpPr>
-        <p:spPr>
-          <a:xfrm>
-            <a:off x="4517136" y="3995928"/>
-            <a:ext cx="438912" cy="438912"/>
-          </a:xfrm>
-          <a:prstGeom prst="roundRect">
-            <a:avLst/>
-          </a:prstGeom>
-          <a:solidFill>
-            <a:srgbClr val="1F6FEB"/>
-          </a:solidFill>
-          <a:ln>
-            <a:solidFill>
-              <a:srgbClr val="1F6FEB"/>
-            </a:solidFill>
-          </a:ln>
-        </p:spPr>
-        <p:style>
-          <a:lnRef idx="1">
-            <a:schemeClr val="accent1"/>
-          </a:lnRef>
-          <a:fillRef idx="3">
-            <a:schemeClr val="accent1"/>
-          </a:fillRef>
-          <a:effectRef idx="2">
-            <a:schemeClr val="accent1"/>
-          </a:effectRef>
-          <a:fontRef idx="minor">
-            <a:schemeClr val="lt1"/>
-          </a:fontRef>
-        </p:style>
-        <p:txBody>
-          <a:bodyPr rtlCol="0" anchor="ctr"/>
-          <a:lstStyle/>
-          <a:p>
-            <a:pPr algn="ctr"/>
-          </a:p>
-        </p:txBody>
-      </p:sp>
-      <p:sp>
-        <p:nvSpPr>
-          <p:cNvPr id="35" name="TextBox 34"/>
-          <p:cNvSpPr txBox="1"/>
-          <p:nvPr/>
-        </p:nvSpPr>
-        <p:spPr>
-          <a:xfrm>
-            <a:off x="4517136" y="4005072"/>
-            <a:ext cx="438912" cy="420624"/>
-          </a:xfrm>
-          <a:prstGeom prst="rect">
-            <a:avLst/>
-          </a:prstGeom>
-          <a:noFill/>
-        </p:spPr>
-        <p:txBody>
-          <a:bodyPr wrap="square" anchor="ctr">
-            <a:spAutoFit/>
-          </a:bodyPr>
-          <a:lstStyle/>
-          <a:p>
-            <a:pPr algn="ctr"/>
-            <a:r>
-              <a:rPr sz="1400" b="1">
-                <a:solidFill>
-                  <a:srgbClr val="FFFFFF"/>
-                </a:solidFill>
-                <a:latin typeface="Arial"/>
-              </a:rPr>
-              <a:t>5</a:t>
-            </a:r>
-          </a:p>
-        </p:txBody>
-      </p:sp>
-      <p:sp>
-        <p:nvSpPr>
-          <p:cNvPr id="36" name="TextBox 35"/>
-          <p:cNvSpPr txBox="1"/>
-          <p:nvPr/>
-        </p:nvSpPr>
-        <p:spPr>
-          <a:xfrm>
-            <a:off x="5120640" y="3959352"/>
-            <a:ext cx="2414016" cy="329184"/>
-          </a:xfrm>
-          <a:prstGeom prst="rect">
-            <a:avLst/>
-          </a:prstGeom>
-          <a:noFill/>
-        </p:spPr>
-        <p:txBody>
-          <a:bodyPr wrap="square" anchor="t">
-            <a:spAutoFit/>
-          </a:bodyPr>
-          <a:lstStyle/>
-          <a:p>
-            <a:pPr algn="l"/>
-            <a:r>
-              <a:rPr sz="1400" b="1">
-                <a:solidFill>
-                  <a:srgbClr val="1F6FEB"/>
-                </a:solidFill>
-                <a:latin typeface="Arial"/>
-              </a:rPr>
-              <a:t>Metric</a:t>
-            </a:r>
-          </a:p>
-        </p:txBody>
-      </p:sp>
-      <p:sp>
-        <p:nvSpPr>
-          <p:cNvPr id="37" name="TextBox 36"/>
-          <p:cNvSpPr txBox="1"/>
-          <p:nvPr/>
-        </p:nvSpPr>
-        <p:spPr>
-          <a:xfrm>
-            <a:off x="5120640" y="4343400"/>
-            <a:ext cx="2414016" cy="1005839"/>
-          </a:xfrm>
-          <a:prstGeom prst="rect">
-            <a:avLst/>
-          </a:prstGeom>
-          <a:noFill/>
-        </p:spPr>
-        <p:txBody>
-          <a:bodyPr wrap="square" anchor="t">
-            <a:spAutoFit/>
-          </a:bodyPr>
-          <a:lstStyle/>
-          <a:p>
-            <a:pPr algn="l"/>
-            <a:r>
-              <a:rPr sz="1150" b="0">
-                <a:solidFill>
-                  <a:srgbClr val="161B26"/>
-                </a:solidFill>
-                <a:latin typeface="Arial"/>
-              </a:rPr>
-              <a:t>Revenue + growth + margin, not volume alone</a:t>
-            </a:r>
-          </a:p>
-        </p:txBody>
-      </p:sp>
-      <p:sp>
-        <p:nvSpPr>
-          <p:cNvPr id="38" name="Rounded Rectangle 37"/>
-          <p:cNvSpPr/>
-          <p:nvPr/>
-        </p:nvSpPr>
-        <p:spPr>
-          <a:xfrm>
-            <a:off x="7900416" y="3776472"/>
-            <a:ext cx="3401568" cy="1719072"/>
-          </a:xfrm>
-          <a:prstGeom prst="roundRect">
-            <a:avLst/>
-          </a:prstGeom>
-          <a:solidFill>
-            <a:srgbClr val="F5F8FC"/>
-          </a:solidFill>
-          <a:ln>
-            <a:solidFill>
-              <a:srgbClr val="E2E8F0"/>
-            </a:solidFill>
-          </a:ln>
-        </p:spPr>
-        <p:style>
-          <a:lnRef idx="1">
-            <a:schemeClr val="accent1"/>
-          </a:lnRef>
-          <a:fillRef idx="3">
-            <a:schemeClr val="accent1"/>
-          </a:fillRef>
-          <a:effectRef idx="2">
-            <a:schemeClr val="accent1"/>
-          </a:effectRef>
-          <a:fontRef idx="minor">
-            <a:schemeClr val="lt1"/>
-          </a:fontRef>
-        </p:style>
-        <p:txBody>
-          <a:bodyPr rtlCol="0" anchor="ctr"/>
-          <a:lstStyle/>
-          <a:p>
-            <a:pPr algn="ctr"/>
-          </a:p>
-        </p:txBody>
-      </p:sp>
-      <p:sp>
-        <p:nvSpPr>
-          <p:cNvPr id="39" name="Rectangle 38"/>
-          <p:cNvSpPr/>
-          <p:nvPr/>
-        </p:nvSpPr>
-        <p:spPr>
-          <a:xfrm>
-            <a:off x="7900416" y="3776472"/>
-            <a:ext cx="73152" cy="1719072"/>
-          </a:xfrm>
-          <a:prstGeom prst="rect">
-            <a:avLst/>
-          </a:prstGeom>
-          <a:solidFill>
-            <a:srgbClr val="10B981"/>
-          </a:solidFill>
-          <a:ln>
-            <a:solidFill>
-              <a:srgbClr val="10B981"/>
-            </a:solidFill>
-          </a:ln>
-        </p:spPr>
-        <p:style>
-          <a:lnRef idx="1">
-            <a:schemeClr val="accent1"/>
-          </a:lnRef>
-          <a:fillRef idx="3">
-            <a:schemeClr val="accent1"/>
-          </a:fillRef>
-          <a:effectRef idx="2">
-            <a:schemeClr val="accent1"/>
-          </a:effectRef>
-          <a:fontRef idx="minor">
-            <a:schemeClr val="lt1"/>
-          </a:fontRef>
-        </p:style>
-        <p:txBody>
-          <a:bodyPr rtlCol="0" anchor="ctr"/>
-          <a:lstStyle/>
-          <a:p>
-            <a:pPr algn="ctr"/>
-          </a:p>
-        </p:txBody>
-      </p:sp>
-      <p:sp>
-        <p:nvSpPr>
-          <p:cNvPr id="40" name="Rounded Rectangle 39"/>
-          <p:cNvSpPr/>
-          <p:nvPr/>
-        </p:nvSpPr>
-        <p:spPr>
-          <a:xfrm>
-            <a:off x="8101584" y="3995928"/>
-            <a:ext cx="438912" cy="438912"/>
-          </a:xfrm>
-          <a:prstGeom prst="roundRect">
-            <a:avLst/>
-          </a:prstGeom>
-          <a:solidFill>
-            <a:srgbClr val="10B981"/>
-          </a:solidFill>
-          <a:ln>
-            <a:solidFill>
-              <a:srgbClr val="10B981"/>
-            </a:solidFill>
-          </a:ln>
-        </p:spPr>
-        <p:style>
-          <a:lnRef idx="1">
-            <a:schemeClr val="accent1"/>
-          </a:lnRef>
-          <a:fillRef idx="3">
-            <a:schemeClr val="accent1"/>
-          </a:fillRef>
-          <a:effectRef idx="2">
-            <a:schemeClr val="accent1"/>
-          </a:effectRef>
-          <a:fontRef idx="minor">
-            <a:schemeClr val="lt1"/>
-          </a:fontRef>
-        </p:style>
-        <p:txBody>
-          <a:bodyPr rtlCol="0" anchor="ctr"/>
-          <a:lstStyle/>
-          <a:p>
-            <a:pPr algn="ctr"/>
-          </a:p>
-        </p:txBody>
-      </p:sp>
-      <p:sp>
-        <p:nvSpPr>
-          <p:cNvPr id="41" name="TextBox 40"/>
-          <p:cNvSpPr txBox="1"/>
-          <p:nvPr/>
-        </p:nvSpPr>
-        <p:spPr>
-          <a:xfrm>
-            <a:off x="8101584" y="4005072"/>
-            <a:ext cx="438912" cy="420624"/>
-          </a:xfrm>
-          <a:prstGeom prst="rect">
-            <a:avLst/>
-          </a:prstGeom>
-          <a:noFill/>
-        </p:spPr>
-        <p:txBody>
-          <a:bodyPr wrap="square" anchor="ctr">
-            <a:spAutoFit/>
-          </a:bodyPr>
-          <a:lstStyle/>
-          <a:p>
-            <a:pPr algn="ctr"/>
-            <a:r>
-              <a:rPr sz="1400" b="1">
-                <a:solidFill>
-                  <a:srgbClr val="FFFFFF"/>
-                </a:solidFill>
-                <a:latin typeface="Arial"/>
-              </a:rPr>
-              <a:t>6</a:t>
-            </a:r>
-          </a:p>
-        </p:txBody>
-      </p:sp>
-      <p:sp>
-        <p:nvSpPr>
-          <p:cNvPr id="42" name="TextBox 41"/>
-          <p:cNvSpPr txBox="1"/>
-          <p:nvPr/>
-        </p:nvSpPr>
-        <p:spPr>
-          <a:xfrm>
-            <a:off x="8705088" y="3959352"/>
-            <a:ext cx="2414016" cy="329184"/>
-          </a:xfrm>
-          <a:prstGeom prst="rect">
-            <a:avLst/>
-          </a:prstGeom>
-          <a:noFill/>
-        </p:spPr>
-        <p:txBody>
-          <a:bodyPr wrap="square" anchor="t">
-            <a:spAutoFit/>
-          </a:bodyPr>
-          <a:lstStyle/>
-          <a:p>
-            <a:pPr algn="l"/>
-            <a:r>
-              <a:rPr sz="1400" b="1">
-                <a:solidFill>
-                  <a:srgbClr val="10B981"/>
-                </a:solidFill>
-                <a:latin typeface="Arial"/>
-              </a:rPr>
-              <a:t>Action</a:t>
-            </a:r>
-          </a:p>
-        </p:txBody>
-      </p:sp>
-      <p:sp>
-        <p:nvSpPr>
-          <p:cNvPr id="43" name="TextBox 42"/>
-          <p:cNvSpPr txBox="1"/>
-          <p:nvPr/>
-        </p:nvSpPr>
-        <p:spPr>
-          <a:xfrm>
-            <a:off x="8705088" y="4343400"/>
-            <a:ext cx="2414016" cy="1005839"/>
-          </a:xfrm>
-          <a:prstGeom prst="rect">
-            <a:avLst/>
-          </a:prstGeom>
-          <a:noFill/>
-        </p:spPr>
-        <p:txBody>
-          <a:bodyPr wrap="square" anchor="t">
-            <a:spAutoFit/>
-          </a:bodyPr>
-          <a:lstStyle/>
-          <a:p>
-            <a:pPr algn="l"/>
-            <a:r>
-              <a:rPr sz="1150" b="0">
-                <a:solidFill>
-                  <a:srgbClr val="161B26"/>
-                </a:solidFill>
-                <a:latin typeface="Arial"/>
-              </a:rPr>
-              <a:t>Test Ready Meals as the campaign hero</a:t>
+              <a:t>Write the action title, annotation and implication.</a:t>
             </a:r>
           </a:p>
         </p:txBody>
@@ -7419,6 +7102,246 @@
             <a:avLst/>
           </a:prstGeom>
           <a:solidFill>
+            <a:srgbClr val="7C3AED"/>
+          </a:solidFill>
+          <a:ln>
+            <a:solidFill>
+              <a:srgbClr val="7C3AED"/>
+            </a:solidFill>
+          </a:ln>
+        </p:spPr>
+        <p:style>
+          <a:lnRef idx="1">
+            <a:schemeClr val="accent1"/>
+          </a:lnRef>
+          <a:fillRef idx="3">
+            <a:schemeClr val="accent1"/>
+          </a:fillRef>
+          <a:effectRef idx="2">
+            <a:schemeClr val="accent1"/>
+          </a:effectRef>
+          <a:fontRef idx="minor">
+            <a:schemeClr val="lt1"/>
+          </a:fontRef>
+        </p:style>
+        <p:txBody>
+          <a:bodyPr rtlCol="0" anchor="ctr"/>
+          <a:lstStyle/>
+          <a:p>
+            <a:pPr algn="ctr"/>
+          </a:p>
+        </p:txBody>
+      </p:sp>
+      <p:sp>
+        <p:nvSpPr>
+          <p:cNvPr id="4" name="TextBox 3"/>
+          <p:cNvSpPr txBox="1"/>
+          <p:nvPr/>
+        </p:nvSpPr>
+        <p:spPr>
+          <a:xfrm>
+            <a:off x="658368" y="384048"/>
+            <a:ext cx="10789920" cy="320040"/>
+          </a:xfrm>
+          <a:prstGeom prst="rect">
+            <a:avLst/>
+          </a:prstGeom>
+          <a:noFill/>
+        </p:spPr>
+        <p:txBody>
+          <a:bodyPr wrap="square" anchor="t">
+            <a:spAutoFit/>
+          </a:bodyPr>
+          <a:lstStyle/>
+          <a:p>
+            <a:pPr algn="l"/>
+            <a:r>
+              <a:rPr sz="1100" b="1">
+                <a:solidFill>
+                  <a:srgbClr val="7C3AED"/>
+                </a:solidFill>
+                <a:latin typeface="Arial"/>
+              </a:rPr>
+              <a:t>ACTIVITY 05 · EXAMPLE</a:t>
+            </a:r>
+          </a:p>
+        </p:txBody>
+      </p:sp>
+      <p:sp>
+        <p:nvSpPr>
+          <p:cNvPr id="5" name="TextBox 4"/>
+          <p:cNvSpPr txBox="1"/>
+          <p:nvPr/>
+        </p:nvSpPr>
+        <p:spPr>
+          <a:xfrm>
+            <a:off x="658368" y="749808"/>
+            <a:ext cx="10789920" cy="658368"/>
+          </a:xfrm>
+          <a:prstGeom prst="rect">
+            <a:avLst/>
+          </a:prstGeom>
+          <a:noFill/>
+        </p:spPr>
+        <p:txBody>
+          <a:bodyPr wrap="square" anchor="t">
+            <a:spAutoFit/>
+          </a:bodyPr>
+          <a:lstStyle/>
+          <a:p>
+            <a:pPr algn="l"/>
+            <a:r>
+              <a:rPr sz="2700" b="1">
+                <a:solidFill>
+                  <a:srgbClr val="161B26"/>
+                </a:solidFill>
+                <a:latin typeface="Arial"/>
+              </a:rPr>
+              <a:t>Worked Output</a:t>
+            </a:r>
+          </a:p>
+        </p:txBody>
+      </p:sp>
+      <p:sp>
+        <p:nvSpPr>
+          <p:cNvPr id="6" name="Rectangle 5"/>
+          <p:cNvSpPr/>
+          <p:nvPr/>
+        </p:nvSpPr>
+        <p:spPr>
+          <a:xfrm>
+            <a:off x="658368" y="1444752"/>
+            <a:ext cx="10881360" cy="18288"/>
+          </a:xfrm>
+          <a:prstGeom prst="rect">
+            <a:avLst/>
+          </a:prstGeom>
+          <a:solidFill>
+            <a:srgbClr val="E2E8F0"/>
+          </a:solidFill>
+          <a:ln>
+            <a:solidFill>
+              <a:srgbClr val="E2E8F0"/>
+            </a:solidFill>
+          </a:ln>
+        </p:spPr>
+        <p:style>
+          <a:lnRef idx="1">
+            <a:schemeClr val="accent1"/>
+          </a:lnRef>
+          <a:fillRef idx="3">
+            <a:schemeClr val="accent1"/>
+          </a:fillRef>
+          <a:effectRef idx="2">
+            <a:schemeClr val="accent1"/>
+          </a:effectRef>
+          <a:fontRef idx="minor">
+            <a:schemeClr val="lt1"/>
+          </a:fontRef>
+        </p:style>
+        <p:txBody>
+          <a:bodyPr rtlCol="0" anchor="ctr"/>
+          <a:lstStyle/>
+          <a:p>
+            <a:pPr algn="ctr"/>
+          </a:p>
+        </p:txBody>
+      </p:sp>
+      <p:sp>
+        <p:nvSpPr>
+          <p:cNvPr id="7" name="TextBox 6"/>
+          <p:cNvSpPr txBox="1"/>
+          <p:nvPr/>
+        </p:nvSpPr>
+        <p:spPr>
+          <a:xfrm>
+            <a:off x="658368" y="6473952"/>
+            <a:ext cx="9875520" cy="201168"/>
+          </a:xfrm>
+          <a:prstGeom prst="rect">
+            <a:avLst/>
+          </a:prstGeom>
+          <a:noFill/>
+        </p:spPr>
+        <p:txBody>
+          <a:bodyPr wrap="square" anchor="t">
+            <a:spAutoFit/>
+          </a:bodyPr>
+          <a:lstStyle/>
+          <a:p>
+            <a:pPr algn="l"/>
+            <a:r>
+              <a:rPr sz="800" b="0">
+                <a:solidFill>
+                  <a:srgbClr val="5B6372"/>
+                </a:solidFill>
+                <a:latin typeface="Arial"/>
+              </a:rPr>
+              <a:t>TGS-2026064178 · ACTIVITY PRACTICE · Tertiary Infotech Academy Pte Ltd</a:t>
+            </a:r>
+          </a:p>
+        </p:txBody>
+      </p:sp>
+      <p:sp>
+        <p:nvSpPr>
+          <p:cNvPr id="8" name="Rounded Rectangle 7"/>
+          <p:cNvSpPr/>
+          <p:nvPr/>
+        </p:nvSpPr>
+        <p:spPr>
+          <a:xfrm>
+            <a:off x="731520" y="1783080"/>
+            <a:ext cx="3401568" cy="1719072"/>
+          </a:xfrm>
+          <a:prstGeom prst="roundRect">
+            <a:avLst/>
+          </a:prstGeom>
+          <a:solidFill>
+            <a:srgbClr val="F5F8FC"/>
+          </a:solidFill>
+          <a:ln>
+            <a:solidFill>
+              <a:srgbClr val="E2E8F0"/>
+            </a:solidFill>
+          </a:ln>
+        </p:spPr>
+        <p:style>
+          <a:lnRef idx="1">
+            <a:schemeClr val="accent1"/>
+          </a:lnRef>
+          <a:fillRef idx="3">
+            <a:schemeClr val="accent1"/>
+          </a:fillRef>
+          <a:effectRef idx="2">
+            <a:schemeClr val="accent1"/>
+          </a:effectRef>
+          <a:fontRef idx="minor">
+            <a:schemeClr val="lt1"/>
+          </a:fontRef>
+        </p:style>
+        <p:txBody>
+          <a:bodyPr rtlCol="0" anchor="ctr"/>
+          <a:lstStyle/>
+          <a:p>
+            <a:pPr algn="ctr"/>
+          </a:p>
+        </p:txBody>
+      </p:sp>
+      <p:sp>
+        <p:nvSpPr>
+          <p:cNvPr id="9" name="Rectangle 8"/>
+          <p:cNvSpPr/>
+          <p:nvPr/>
+        </p:nvSpPr>
+        <p:spPr>
+          <a:xfrm>
+            <a:off x="731520" y="1783080"/>
+            <a:ext cx="73152" cy="1719072"/>
+          </a:xfrm>
+          <a:prstGeom prst="rect">
+            <a:avLst/>
+          </a:prstGeom>
+          <a:solidFill>
             <a:srgbClr val="1F6FEB"/>
           </a:solidFill>
           <a:ln>
@@ -7451,14 +7374,94 @@
       </p:sp>
       <p:sp>
         <p:nvSpPr>
-          <p:cNvPr id="4" name="TextBox 3"/>
+          <p:cNvPr id="10" name="Rounded Rectangle 9"/>
+          <p:cNvSpPr/>
+          <p:nvPr/>
+        </p:nvSpPr>
+        <p:spPr>
+          <a:xfrm>
+            <a:off x="932688" y="2002536"/>
+            <a:ext cx="438912" cy="438912"/>
+          </a:xfrm>
+          <a:prstGeom prst="roundRect">
+            <a:avLst/>
+          </a:prstGeom>
+          <a:solidFill>
+            <a:srgbClr val="1F6FEB"/>
+          </a:solidFill>
+          <a:ln>
+            <a:solidFill>
+              <a:srgbClr val="1F6FEB"/>
+            </a:solidFill>
+          </a:ln>
+        </p:spPr>
+        <p:style>
+          <a:lnRef idx="1">
+            <a:schemeClr val="accent1"/>
+          </a:lnRef>
+          <a:fillRef idx="3">
+            <a:schemeClr val="accent1"/>
+          </a:fillRef>
+          <a:effectRef idx="2">
+            <a:schemeClr val="accent1"/>
+          </a:effectRef>
+          <a:fontRef idx="minor">
+            <a:schemeClr val="lt1"/>
+          </a:fontRef>
+        </p:style>
+        <p:txBody>
+          <a:bodyPr rtlCol="0" anchor="ctr"/>
+          <a:lstStyle/>
+          <a:p>
+            <a:pPr algn="ctr"/>
+          </a:p>
+        </p:txBody>
+      </p:sp>
+      <p:sp>
+        <p:nvSpPr>
+          <p:cNvPr id="11" name="TextBox 10"/>
           <p:cNvSpPr txBox="1"/>
           <p:nvPr/>
         </p:nvSpPr>
         <p:spPr>
           <a:xfrm>
-            <a:off x="658368" y="384048"/>
-            <a:ext cx="10789920" cy="320040"/>
+            <a:off x="932688" y="2011680"/>
+            <a:ext cx="438912" cy="420624"/>
+          </a:xfrm>
+          <a:prstGeom prst="rect">
+            <a:avLst/>
+          </a:prstGeom>
+          <a:noFill/>
+        </p:spPr>
+        <p:txBody>
+          <a:bodyPr wrap="square" anchor="ctr">
+            <a:spAutoFit/>
+          </a:bodyPr>
+          <a:lstStyle/>
+          <a:p>
+            <a:pPr algn="ctr"/>
+            <a:r>
+              <a:rPr sz="1400" b="1">
+                <a:solidFill>
+                  <a:srgbClr val="FFFFFF"/>
+                </a:solidFill>
+                <a:latin typeface="Arial"/>
+              </a:rPr>
+              <a:t>1</a:t>
+            </a:r>
+          </a:p>
+        </p:txBody>
+      </p:sp>
+      <p:sp>
+        <p:nvSpPr>
+          <p:cNvPr id="12" name="TextBox 11"/>
+          <p:cNvSpPr txBox="1"/>
+          <p:nvPr/>
+        </p:nvSpPr>
+        <p:spPr>
+          <a:xfrm>
+            <a:off x="1536192" y="1965960"/>
+            <a:ext cx="2414016" cy="329184"/>
           </a:xfrm>
           <a:prstGeom prst="rect">
             <a:avLst/>
@@ -7473,27 +7476,27 @@
           <a:p>
             <a:pPr algn="l"/>
             <a:r>
-              <a:rPr sz="1100" b="1">
+              <a:rPr sz="1400" b="1">
                 <a:solidFill>
                   <a:srgbClr val="1F6FEB"/>
                 </a:solidFill>
                 <a:latin typeface="Arial"/>
               </a:rPr>
-              <a:t>ACTIVITY 05 · ACCEPTANCE</a:t>
-            </a:r>
-          </a:p>
-        </p:txBody>
-      </p:sp>
-      <p:sp>
-        <p:nvSpPr>
-          <p:cNvPr id="5" name="TextBox 4"/>
+              <a:t>Beverages</a:t>
+            </a:r>
+          </a:p>
+        </p:txBody>
+      </p:sp>
+      <p:sp>
+        <p:nvSpPr>
+          <p:cNvPr id="13" name="TextBox 12"/>
           <p:cNvSpPr txBox="1"/>
           <p:nvPr/>
         </p:nvSpPr>
         <p:spPr>
           <a:xfrm>
-            <a:off x="658368" y="749808"/>
-            <a:ext cx="10789920" cy="658368"/>
+            <a:off x="1536192" y="2350008"/>
+            <a:ext cx="2414016" cy="1005839"/>
           </a:xfrm>
           <a:prstGeom prst="rect">
             <a:avLst/>
@@ -7508,33 +7511,33 @@
           <a:p>
             <a:pPr algn="l"/>
             <a:r>
-              <a:rPr sz="2700" b="1">
+              <a:rPr sz="1150" b="0">
                 <a:solidFill>
                   <a:srgbClr val="161B26"/>
                 </a:solidFill>
                 <a:latin typeface="Arial"/>
               </a:rPr>
-              <a:t>What Good Looks Like</a:t>
-            </a:r>
-          </a:p>
-        </p:txBody>
-      </p:sp>
-      <p:sp>
-        <p:nvSpPr>
-          <p:cNvPr id="6" name="Rectangle 5"/>
+              <a:t>Highest revenue; stable margin</a:t>
+            </a:r>
+          </a:p>
+        </p:txBody>
+      </p:sp>
+      <p:sp>
+        <p:nvSpPr>
+          <p:cNvPr id="14" name="Rounded Rectangle 13"/>
           <p:cNvSpPr/>
           <p:nvPr/>
         </p:nvSpPr>
         <p:spPr>
           <a:xfrm>
-            <a:off x="658368" y="1444752"/>
-            <a:ext cx="10881360" cy="18288"/>
-          </a:xfrm>
-          <a:prstGeom prst="rect">
-            <a:avLst/>
-          </a:prstGeom>
-          <a:solidFill>
-            <a:srgbClr val="E2E8F0"/>
+            <a:off x="4315968" y="1783080"/>
+            <a:ext cx="3401568" cy="1719072"/>
+          </a:xfrm>
+          <a:prstGeom prst="roundRect">
+            <a:avLst/>
+          </a:prstGeom>
+          <a:solidFill>
+            <a:srgbClr val="F5F8FC"/>
           </a:solidFill>
           <a:ln>
             <a:solidFill>
@@ -7566,14 +7569,139 @@
       </p:sp>
       <p:sp>
         <p:nvSpPr>
-          <p:cNvPr id="7" name="TextBox 6"/>
+          <p:cNvPr id="15" name="Rectangle 14"/>
+          <p:cNvSpPr/>
+          <p:nvPr/>
+        </p:nvSpPr>
+        <p:spPr>
+          <a:xfrm>
+            <a:off x="4315968" y="1783080"/>
+            <a:ext cx="73152" cy="1719072"/>
+          </a:xfrm>
+          <a:prstGeom prst="rect">
+            <a:avLst/>
+          </a:prstGeom>
+          <a:solidFill>
+            <a:srgbClr val="10B981"/>
+          </a:solidFill>
+          <a:ln>
+            <a:solidFill>
+              <a:srgbClr val="10B981"/>
+            </a:solidFill>
+          </a:ln>
+        </p:spPr>
+        <p:style>
+          <a:lnRef idx="1">
+            <a:schemeClr val="accent1"/>
+          </a:lnRef>
+          <a:fillRef idx="3">
+            <a:schemeClr val="accent1"/>
+          </a:fillRef>
+          <a:effectRef idx="2">
+            <a:schemeClr val="accent1"/>
+          </a:effectRef>
+          <a:fontRef idx="minor">
+            <a:schemeClr val="lt1"/>
+          </a:fontRef>
+        </p:style>
+        <p:txBody>
+          <a:bodyPr rtlCol="0" anchor="ctr"/>
+          <a:lstStyle/>
+          <a:p>
+            <a:pPr algn="ctr"/>
+          </a:p>
+        </p:txBody>
+      </p:sp>
+      <p:sp>
+        <p:nvSpPr>
+          <p:cNvPr id="16" name="Rounded Rectangle 15"/>
+          <p:cNvSpPr/>
+          <p:nvPr/>
+        </p:nvSpPr>
+        <p:spPr>
+          <a:xfrm>
+            <a:off x="4517136" y="2002536"/>
+            <a:ext cx="438912" cy="438912"/>
+          </a:xfrm>
+          <a:prstGeom prst="roundRect">
+            <a:avLst/>
+          </a:prstGeom>
+          <a:solidFill>
+            <a:srgbClr val="10B981"/>
+          </a:solidFill>
+          <a:ln>
+            <a:solidFill>
+              <a:srgbClr val="10B981"/>
+            </a:solidFill>
+          </a:ln>
+        </p:spPr>
+        <p:style>
+          <a:lnRef idx="1">
+            <a:schemeClr val="accent1"/>
+          </a:lnRef>
+          <a:fillRef idx="3">
+            <a:schemeClr val="accent1"/>
+          </a:fillRef>
+          <a:effectRef idx="2">
+            <a:schemeClr val="accent1"/>
+          </a:effectRef>
+          <a:fontRef idx="minor">
+            <a:schemeClr val="lt1"/>
+          </a:fontRef>
+        </p:style>
+        <p:txBody>
+          <a:bodyPr rtlCol="0" anchor="ctr"/>
+          <a:lstStyle/>
+          <a:p>
+            <a:pPr algn="ctr"/>
+          </a:p>
+        </p:txBody>
+      </p:sp>
+      <p:sp>
+        <p:nvSpPr>
+          <p:cNvPr id="17" name="TextBox 16"/>
           <p:cNvSpPr txBox="1"/>
           <p:nvPr/>
         </p:nvSpPr>
         <p:spPr>
           <a:xfrm>
-            <a:off x="658368" y="6473952"/>
-            <a:ext cx="9875520" cy="201168"/>
+            <a:off x="4517136" y="2011680"/>
+            <a:ext cx="438912" cy="420624"/>
+          </a:xfrm>
+          <a:prstGeom prst="rect">
+            <a:avLst/>
+          </a:prstGeom>
+          <a:noFill/>
+        </p:spPr>
+        <p:txBody>
+          <a:bodyPr wrap="square" anchor="ctr">
+            <a:spAutoFit/>
+          </a:bodyPr>
+          <a:lstStyle/>
+          <a:p>
+            <a:pPr algn="ctr"/>
+            <a:r>
+              <a:rPr sz="1400" b="1">
+                <a:solidFill>
+                  <a:srgbClr val="FFFFFF"/>
+                </a:solidFill>
+                <a:latin typeface="Arial"/>
+              </a:rPr>
+              <a:t>2</a:t>
+            </a:r>
+          </a:p>
+        </p:txBody>
+      </p:sp>
+      <p:sp>
+        <p:nvSpPr>
+          <p:cNvPr id="18" name="TextBox 17"/>
+          <p:cNvSpPr txBox="1"/>
+          <p:nvPr/>
+        </p:nvSpPr>
+        <p:spPr>
+          <a:xfrm>
+            <a:off x="5120640" y="1965960"/>
+            <a:ext cx="2414016" cy="329184"/>
           </a:xfrm>
           <a:prstGeom prst="rect">
             <a:avLst/>
@@ -7588,29 +7716,589 @@
           <a:p>
             <a:pPr algn="l"/>
             <a:r>
-              <a:rPr sz="800" b="0">
-                <a:solidFill>
-                  <a:srgbClr val="5B6372"/>
+              <a:rPr sz="1400" b="1">
+                <a:solidFill>
+                  <a:srgbClr val="10B981"/>
                 </a:solidFill>
                 <a:latin typeface="Arial"/>
               </a:rPr>
-              <a:t>TGS-2024048310 · ACTIVITY PRACTICE · Tertiary Infotech Academy Pte Ltd</a:t>
-            </a:r>
-          </a:p>
-        </p:txBody>
-      </p:sp>
-      <p:sp>
-        <p:nvSpPr>
-          <p:cNvPr id="8" name="Rounded Rectangle 7"/>
+              <a:t>Ready meals</a:t>
+            </a:r>
+          </a:p>
+        </p:txBody>
+      </p:sp>
+      <p:sp>
+        <p:nvSpPr>
+          <p:cNvPr id="19" name="TextBox 18"/>
+          <p:cNvSpPr txBox="1"/>
+          <p:nvPr/>
+        </p:nvSpPr>
+        <p:spPr>
+          <a:xfrm>
+            <a:off x="5120640" y="2350008"/>
+            <a:ext cx="2414016" cy="1005839"/>
+          </a:xfrm>
+          <a:prstGeom prst="rect">
+            <a:avLst/>
+          </a:prstGeom>
+          <a:noFill/>
+        </p:spPr>
+        <p:txBody>
+          <a:bodyPr wrap="square" anchor="t">
+            <a:spAutoFit/>
+          </a:bodyPr>
+          <a:lstStyle/>
+          <a:p>
+            <a:pPr algn="l"/>
+            <a:r>
+              <a:rPr sz="1150" b="0">
+                <a:solidFill>
+                  <a:srgbClr val="161B26"/>
+                </a:solidFill>
+                <a:latin typeface="Arial"/>
+              </a:rPr>
+              <a:t>Fastest Q2 growth; above-floor margin</a:t>
+            </a:r>
+          </a:p>
+        </p:txBody>
+      </p:sp>
+      <p:sp>
+        <p:nvSpPr>
+          <p:cNvPr id="20" name="Rounded Rectangle 19"/>
           <p:cNvSpPr/>
           <p:nvPr/>
         </p:nvSpPr>
         <p:spPr>
           <a:xfrm>
-            <a:off x="749808" y="1810512"/>
-            <a:ext cx="10652760" cy="1005840"/>
+            <a:off x="7900416" y="1783080"/>
+            <a:ext cx="3401568" cy="1719072"/>
           </a:xfrm>
           <a:prstGeom prst="roundRect">
+            <a:avLst/>
+          </a:prstGeom>
+          <a:solidFill>
+            <a:srgbClr val="F5F8FC"/>
+          </a:solidFill>
+          <a:ln>
+            <a:solidFill>
+              <a:srgbClr val="E2E8F0"/>
+            </a:solidFill>
+          </a:ln>
+        </p:spPr>
+        <p:style>
+          <a:lnRef idx="1">
+            <a:schemeClr val="accent1"/>
+          </a:lnRef>
+          <a:fillRef idx="3">
+            <a:schemeClr val="accent1"/>
+          </a:fillRef>
+          <a:effectRef idx="2">
+            <a:schemeClr val="accent1"/>
+          </a:effectRef>
+          <a:fontRef idx="minor">
+            <a:schemeClr val="lt1"/>
+          </a:fontRef>
+        </p:style>
+        <p:txBody>
+          <a:bodyPr rtlCol="0" anchor="ctr"/>
+          <a:lstStyle/>
+          <a:p>
+            <a:pPr algn="ctr"/>
+          </a:p>
+        </p:txBody>
+      </p:sp>
+      <p:sp>
+        <p:nvSpPr>
+          <p:cNvPr id="21" name="Rectangle 20"/>
+          <p:cNvSpPr/>
+          <p:nvPr/>
+        </p:nvSpPr>
+        <p:spPr>
+          <a:xfrm>
+            <a:off x="7900416" y="1783080"/>
+            <a:ext cx="73152" cy="1719072"/>
+          </a:xfrm>
+          <a:prstGeom prst="rect">
+            <a:avLst/>
+          </a:prstGeom>
+          <a:solidFill>
+            <a:srgbClr val="7C3AED"/>
+          </a:solidFill>
+          <a:ln>
+            <a:solidFill>
+              <a:srgbClr val="7C3AED"/>
+            </a:solidFill>
+          </a:ln>
+        </p:spPr>
+        <p:style>
+          <a:lnRef idx="1">
+            <a:schemeClr val="accent1"/>
+          </a:lnRef>
+          <a:fillRef idx="3">
+            <a:schemeClr val="accent1"/>
+          </a:fillRef>
+          <a:effectRef idx="2">
+            <a:schemeClr val="accent1"/>
+          </a:effectRef>
+          <a:fontRef idx="minor">
+            <a:schemeClr val="lt1"/>
+          </a:fontRef>
+        </p:style>
+        <p:txBody>
+          <a:bodyPr rtlCol="0" anchor="ctr"/>
+          <a:lstStyle/>
+          <a:p>
+            <a:pPr algn="ctr"/>
+          </a:p>
+        </p:txBody>
+      </p:sp>
+      <p:sp>
+        <p:nvSpPr>
+          <p:cNvPr id="22" name="Rounded Rectangle 21"/>
+          <p:cNvSpPr/>
+          <p:nvPr/>
+        </p:nvSpPr>
+        <p:spPr>
+          <a:xfrm>
+            <a:off x="8101584" y="2002536"/>
+            <a:ext cx="438912" cy="438912"/>
+          </a:xfrm>
+          <a:prstGeom prst="roundRect">
+            <a:avLst/>
+          </a:prstGeom>
+          <a:solidFill>
+            <a:srgbClr val="7C3AED"/>
+          </a:solidFill>
+          <a:ln>
+            <a:solidFill>
+              <a:srgbClr val="7C3AED"/>
+            </a:solidFill>
+          </a:ln>
+        </p:spPr>
+        <p:style>
+          <a:lnRef idx="1">
+            <a:schemeClr val="accent1"/>
+          </a:lnRef>
+          <a:fillRef idx="3">
+            <a:schemeClr val="accent1"/>
+          </a:fillRef>
+          <a:effectRef idx="2">
+            <a:schemeClr val="accent1"/>
+          </a:effectRef>
+          <a:fontRef idx="minor">
+            <a:schemeClr val="lt1"/>
+          </a:fontRef>
+        </p:style>
+        <p:txBody>
+          <a:bodyPr rtlCol="0" anchor="ctr"/>
+          <a:lstStyle/>
+          <a:p>
+            <a:pPr algn="ctr"/>
+          </a:p>
+        </p:txBody>
+      </p:sp>
+      <p:sp>
+        <p:nvSpPr>
+          <p:cNvPr id="23" name="TextBox 22"/>
+          <p:cNvSpPr txBox="1"/>
+          <p:nvPr/>
+        </p:nvSpPr>
+        <p:spPr>
+          <a:xfrm>
+            <a:off x="8101584" y="2011680"/>
+            <a:ext cx="438912" cy="420624"/>
+          </a:xfrm>
+          <a:prstGeom prst="rect">
+            <a:avLst/>
+          </a:prstGeom>
+          <a:noFill/>
+        </p:spPr>
+        <p:txBody>
+          <a:bodyPr wrap="square" anchor="ctr">
+            <a:spAutoFit/>
+          </a:bodyPr>
+          <a:lstStyle/>
+          <a:p>
+            <a:pPr algn="ctr"/>
+            <a:r>
+              <a:rPr sz="1400" b="1">
+                <a:solidFill>
+                  <a:srgbClr val="FFFFFF"/>
+                </a:solidFill>
+                <a:latin typeface="Arial"/>
+              </a:rPr>
+              <a:t>3</a:t>
+            </a:r>
+          </a:p>
+        </p:txBody>
+      </p:sp>
+      <p:sp>
+        <p:nvSpPr>
+          <p:cNvPr id="24" name="TextBox 23"/>
+          <p:cNvSpPr txBox="1"/>
+          <p:nvPr/>
+        </p:nvSpPr>
+        <p:spPr>
+          <a:xfrm>
+            <a:off x="8705088" y="1965960"/>
+            <a:ext cx="2414016" cy="329184"/>
+          </a:xfrm>
+          <a:prstGeom prst="rect">
+            <a:avLst/>
+          </a:prstGeom>
+          <a:noFill/>
+        </p:spPr>
+        <p:txBody>
+          <a:bodyPr wrap="square" anchor="t">
+            <a:spAutoFit/>
+          </a:bodyPr>
+          <a:lstStyle/>
+          <a:p>
+            <a:pPr algn="l"/>
+            <a:r>
+              <a:rPr sz="1400" b="1">
+                <a:solidFill>
+                  <a:srgbClr val="7C3AED"/>
+                </a:solidFill>
+                <a:latin typeface="Arial"/>
+              </a:rPr>
+              <a:t>Snacks</a:t>
+            </a:r>
+          </a:p>
+        </p:txBody>
+      </p:sp>
+      <p:sp>
+        <p:nvSpPr>
+          <p:cNvPr id="25" name="TextBox 24"/>
+          <p:cNvSpPr txBox="1"/>
+          <p:nvPr/>
+        </p:nvSpPr>
+        <p:spPr>
+          <a:xfrm>
+            <a:off x="8705088" y="2350008"/>
+            <a:ext cx="2414016" cy="1005839"/>
+          </a:xfrm>
+          <a:prstGeom prst="rect">
+            <a:avLst/>
+          </a:prstGeom>
+          <a:noFill/>
+        </p:spPr>
+        <p:txBody>
+          <a:bodyPr wrap="square" anchor="t">
+            <a:spAutoFit/>
+          </a:bodyPr>
+          <a:lstStyle/>
+          <a:p>
+            <a:pPr algn="l"/>
+            <a:r>
+              <a:rPr sz="1150" b="0">
+                <a:solidFill>
+                  <a:srgbClr val="161B26"/>
+                </a:solidFill>
+                <a:latin typeface="Arial"/>
+              </a:rPr>
+              <a:t>High volume; lower margin</a:t>
+            </a:r>
+          </a:p>
+        </p:txBody>
+      </p:sp>
+      <p:sp>
+        <p:nvSpPr>
+          <p:cNvPr id="26" name="Rounded Rectangle 25"/>
+          <p:cNvSpPr/>
+          <p:nvPr/>
+        </p:nvSpPr>
+        <p:spPr>
+          <a:xfrm>
+            <a:off x="731520" y="3776472"/>
+            <a:ext cx="3401568" cy="1719072"/>
+          </a:xfrm>
+          <a:prstGeom prst="roundRect">
+            <a:avLst/>
+          </a:prstGeom>
+          <a:solidFill>
+            <a:srgbClr val="F5F8FC"/>
+          </a:solidFill>
+          <a:ln>
+            <a:solidFill>
+              <a:srgbClr val="E2E8F0"/>
+            </a:solidFill>
+          </a:ln>
+        </p:spPr>
+        <p:style>
+          <a:lnRef idx="1">
+            <a:schemeClr val="accent1"/>
+          </a:lnRef>
+          <a:fillRef idx="3">
+            <a:schemeClr val="accent1"/>
+          </a:fillRef>
+          <a:effectRef idx="2">
+            <a:schemeClr val="accent1"/>
+          </a:effectRef>
+          <a:fontRef idx="minor">
+            <a:schemeClr val="lt1"/>
+          </a:fontRef>
+        </p:style>
+        <p:txBody>
+          <a:bodyPr rtlCol="0" anchor="ctr"/>
+          <a:lstStyle/>
+          <a:p>
+            <a:pPr algn="ctr"/>
+          </a:p>
+        </p:txBody>
+      </p:sp>
+      <p:sp>
+        <p:nvSpPr>
+          <p:cNvPr id="27" name="Rectangle 26"/>
+          <p:cNvSpPr/>
+          <p:nvPr/>
+        </p:nvSpPr>
+        <p:spPr>
+          <a:xfrm>
+            <a:off x="731520" y="3776472"/>
+            <a:ext cx="73152" cy="1719072"/>
+          </a:xfrm>
+          <a:prstGeom prst="rect">
+            <a:avLst/>
+          </a:prstGeom>
+          <a:solidFill>
+            <a:srgbClr val="F59E0B"/>
+          </a:solidFill>
+          <a:ln>
+            <a:solidFill>
+              <a:srgbClr val="F59E0B"/>
+            </a:solidFill>
+          </a:ln>
+        </p:spPr>
+        <p:style>
+          <a:lnRef idx="1">
+            <a:schemeClr val="accent1"/>
+          </a:lnRef>
+          <a:fillRef idx="3">
+            <a:schemeClr val="accent1"/>
+          </a:fillRef>
+          <a:effectRef idx="2">
+            <a:schemeClr val="accent1"/>
+          </a:effectRef>
+          <a:fontRef idx="minor">
+            <a:schemeClr val="lt1"/>
+          </a:fontRef>
+        </p:style>
+        <p:txBody>
+          <a:bodyPr rtlCol="0" anchor="ctr"/>
+          <a:lstStyle/>
+          <a:p>
+            <a:pPr algn="ctr"/>
+          </a:p>
+        </p:txBody>
+      </p:sp>
+      <p:sp>
+        <p:nvSpPr>
+          <p:cNvPr id="28" name="Rounded Rectangle 27"/>
+          <p:cNvSpPr/>
+          <p:nvPr/>
+        </p:nvSpPr>
+        <p:spPr>
+          <a:xfrm>
+            <a:off x="932688" y="3995928"/>
+            <a:ext cx="438912" cy="438912"/>
+          </a:xfrm>
+          <a:prstGeom prst="roundRect">
+            <a:avLst/>
+          </a:prstGeom>
+          <a:solidFill>
+            <a:srgbClr val="F59E0B"/>
+          </a:solidFill>
+          <a:ln>
+            <a:solidFill>
+              <a:srgbClr val="F59E0B"/>
+            </a:solidFill>
+          </a:ln>
+        </p:spPr>
+        <p:style>
+          <a:lnRef idx="1">
+            <a:schemeClr val="accent1"/>
+          </a:lnRef>
+          <a:fillRef idx="3">
+            <a:schemeClr val="accent1"/>
+          </a:fillRef>
+          <a:effectRef idx="2">
+            <a:schemeClr val="accent1"/>
+          </a:effectRef>
+          <a:fontRef idx="minor">
+            <a:schemeClr val="lt1"/>
+          </a:fontRef>
+        </p:style>
+        <p:txBody>
+          <a:bodyPr rtlCol="0" anchor="ctr"/>
+          <a:lstStyle/>
+          <a:p>
+            <a:pPr algn="ctr"/>
+          </a:p>
+        </p:txBody>
+      </p:sp>
+      <p:sp>
+        <p:nvSpPr>
+          <p:cNvPr id="29" name="TextBox 28"/>
+          <p:cNvSpPr txBox="1"/>
+          <p:nvPr/>
+        </p:nvSpPr>
+        <p:spPr>
+          <a:xfrm>
+            <a:off x="932688" y="4005072"/>
+            <a:ext cx="438912" cy="420624"/>
+          </a:xfrm>
+          <a:prstGeom prst="rect">
+            <a:avLst/>
+          </a:prstGeom>
+          <a:noFill/>
+        </p:spPr>
+        <p:txBody>
+          <a:bodyPr wrap="square" anchor="ctr">
+            <a:spAutoFit/>
+          </a:bodyPr>
+          <a:lstStyle/>
+          <a:p>
+            <a:pPr algn="ctr"/>
+            <a:r>
+              <a:rPr sz="1400" b="1">
+                <a:solidFill>
+                  <a:srgbClr val="FFFFFF"/>
+                </a:solidFill>
+                <a:latin typeface="Arial"/>
+              </a:rPr>
+              <a:t>4</a:t>
+            </a:r>
+          </a:p>
+        </p:txBody>
+      </p:sp>
+      <p:sp>
+        <p:nvSpPr>
+          <p:cNvPr id="30" name="TextBox 29"/>
+          <p:cNvSpPr txBox="1"/>
+          <p:nvPr/>
+        </p:nvSpPr>
+        <p:spPr>
+          <a:xfrm>
+            <a:off x="1536192" y="3959352"/>
+            <a:ext cx="2414016" cy="329184"/>
+          </a:xfrm>
+          <a:prstGeom prst="rect">
+            <a:avLst/>
+          </a:prstGeom>
+          <a:noFill/>
+        </p:spPr>
+        <p:txBody>
+          <a:bodyPr wrap="square" anchor="t">
+            <a:spAutoFit/>
+          </a:bodyPr>
+          <a:lstStyle/>
+          <a:p>
+            <a:pPr algn="l"/>
+            <a:r>
+              <a:rPr sz="1400" b="1">
+                <a:solidFill>
+                  <a:srgbClr val="F59E0B"/>
+                </a:solidFill>
+                <a:latin typeface="Arial"/>
+              </a:rPr>
+              <a:t>Household</a:t>
+            </a:r>
+          </a:p>
+        </p:txBody>
+      </p:sp>
+      <p:sp>
+        <p:nvSpPr>
+          <p:cNvPr id="31" name="TextBox 30"/>
+          <p:cNvSpPr txBox="1"/>
+          <p:nvPr/>
+        </p:nvSpPr>
+        <p:spPr>
+          <a:xfrm>
+            <a:off x="1536192" y="4343400"/>
+            <a:ext cx="2414016" cy="1005839"/>
+          </a:xfrm>
+          <a:prstGeom prst="rect">
+            <a:avLst/>
+          </a:prstGeom>
+          <a:noFill/>
+        </p:spPr>
+        <p:txBody>
+          <a:bodyPr wrap="square" anchor="t">
+            <a:spAutoFit/>
+          </a:bodyPr>
+          <a:lstStyle/>
+          <a:p>
+            <a:pPr algn="l"/>
+            <a:r>
+              <a:rPr sz="1150" b="0">
+                <a:solidFill>
+                  <a:srgbClr val="161B26"/>
+                </a:solidFill>
+                <a:latin typeface="Arial"/>
+              </a:rPr>
+              <a:t>Seasonal spike; higher returns</a:t>
+            </a:r>
+          </a:p>
+        </p:txBody>
+      </p:sp>
+      <p:sp>
+        <p:nvSpPr>
+          <p:cNvPr id="32" name="Rounded Rectangle 31"/>
+          <p:cNvSpPr/>
+          <p:nvPr/>
+        </p:nvSpPr>
+        <p:spPr>
+          <a:xfrm>
+            <a:off x="4315968" y="3776472"/>
+            <a:ext cx="3401568" cy="1719072"/>
+          </a:xfrm>
+          <a:prstGeom prst="roundRect">
+            <a:avLst/>
+          </a:prstGeom>
+          <a:solidFill>
+            <a:srgbClr val="F5F8FC"/>
+          </a:solidFill>
+          <a:ln>
+            <a:solidFill>
+              <a:srgbClr val="E2E8F0"/>
+            </a:solidFill>
+          </a:ln>
+        </p:spPr>
+        <p:style>
+          <a:lnRef idx="1">
+            <a:schemeClr val="accent1"/>
+          </a:lnRef>
+          <a:fillRef idx="3">
+            <a:schemeClr val="accent1"/>
+          </a:fillRef>
+          <a:effectRef idx="2">
+            <a:schemeClr val="accent1"/>
+          </a:effectRef>
+          <a:fontRef idx="minor">
+            <a:schemeClr val="lt1"/>
+          </a:fontRef>
+        </p:style>
+        <p:txBody>
+          <a:bodyPr rtlCol="0" anchor="ctr"/>
+          <a:lstStyle/>
+          <a:p>
+            <a:pPr algn="ctr"/>
+          </a:p>
+        </p:txBody>
+      </p:sp>
+      <p:sp>
+        <p:nvSpPr>
+          <p:cNvPr id="33" name="Rectangle 32"/>
+          <p:cNvSpPr/>
+          <p:nvPr/>
+        </p:nvSpPr>
+        <p:spPr>
+          <a:xfrm>
+            <a:off x="4315968" y="3776472"/>
+            <a:ext cx="73152" cy="1719072"/>
+          </a:xfrm>
+          <a:prstGeom prst="rect">
             <a:avLst/>
           </a:prstGeom>
           <a:solidFill>
@@ -7646,14 +8334,59 @@
       </p:sp>
       <p:sp>
         <p:nvSpPr>
-          <p:cNvPr id="9" name="TextBox 8"/>
+          <p:cNvPr id="34" name="Rounded Rectangle 33"/>
+          <p:cNvSpPr/>
+          <p:nvPr/>
+        </p:nvSpPr>
+        <p:spPr>
+          <a:xfrm>
+            <a:off x="4517136" y="3995928"/>
+            <a:ext cx="438912" cy="438912"/>
+          </a:xfrm>
+          <a:prstGeom prst="roundRect">
+            <a:avLst/>
+          </a:prstGeom>
+          <a:solidFill>
+            <a:srgbClr val="1F6FEB"/>
+          </a:solidFill>
+          <a:ln>
+            <a:solidFill>
+              <a:srgbClr val="1F6FEB"/>
+            </a:solidFill>
+          </a:ln>
+        </p:spPr>
+        <p:style>
+          <a:lnRef idx="1">
+            <a:schemeClr val="accent1"/>
+          </a:lnRef>
+          <a:fillRef idx="3">
+            <a:schemeClr val="accent1"/>
+          </a:fillRef>
+          <a:effectRef idx="2">
+            <a:schemeClr val="accent1"/>
+          </a:effectRef>
+          <a:fontRef idx="minor">
+            <a:schemeClr val="lt1"/>
+          </a:fontRef>
+        </p:style>
+        <p:txBody>
+          <a:bodyPr rtlCol="0" anchor="ctr"/>
+          <a:lstStyle/>
+          <a:p>
+            <a:pPr algn="ctr"/>
+          </a:p>
+        </p:txBody>
+      </p:sp>
+      <p:sp>
+        <p:nvSpPr>
+          <p:cNvPr id="35" name="TextBox 34"/>
           <p:cNvSpPr txBox="1"/>
           <p:nvPr/>
         </p:nvSpPr>
         <p:spPr>
           <a:xfrm>
-            <a:off x="1051560" y="2011680"/>
-            <a:ext cx="10058400" cy="566928"/>
+            <a:off x="4517136" y="4005072"/>
+            <a:ext cx="438912" cy="420624"/>
           </a:xfrm>
           <a:prstGeom prst="rect">
             <a:avLst/>
@@ -7668,13 +8401,1042 @@
           <a:p>
             <a:pPr algn="ctr"/>
             <a:r>
-              <a:rPr sz="1900" b="1">
+              <a:rPr sz="1400" b="1">
                 <a:solidFill>
                   <a:srgbClr val="FFFFFF"/>
                 </a:solidFill>
                 <a:latin typeface="Arial"/>
               </a:rPr>
-              <a:t>A native editable PowerPoint chart plus an annotated decision slide</a:t>
+              <a:t>5</a:t>
+            </a:r>
+          </a:p>
+        </p:txBody>
+      </p:sp>
+      <p:sp>
+        <p:nvSpPr>
+          <p:cNvPr id="36" name="TextBox 35"/>
+          <p:cNvSpPr txBox="1"/>
+          <p:nvPr/>
+        </p:nvSpPr>
+        <p:spPr>
+          <a:xfrm>
+            <a:off x="5120640" y="3959352"/>
+            <a:ext cx="2414016" cy="329184"/>
+          </a:xfrm>
+          <a:prstGeom prst="rect">
+            <a:avLst/>
+          </a:prstGeom>
+          <a:noFill/>
+        </p:spPr>
+        <p:txBody>
+          <a:bodyPr wrap="square" anchor="t">
+            <a:spAutoFit/>
+          </a:bodyPr>
+          <a:lstStyle/>
+          <a:p>
+            <a:pPr algn="l"/>
+            <a:r>
+              <a:rPr sz="1400" b="1">
+                <a:solidFill>
+                  <a:srgbClr val="1F6FEB"/>
+                </a:solidFill>
+                <a:latin typeface="Arial"/>
+              </a:rPr>
+              <a:t>Metric</a:t>
+            </a:r>
+          </a:p>
+        </p:txBody>
+      </p:sp>
+      <p:sp>
+        <p:nvSpPr>
+          <p:cNvPr id="37" name="TextBox 36"/>
+          <p:cNvSpPr txBox="1"/>
+          <p:nvPr/>
+        </p:nvSpPr>
+        <p:spPr>
+          <a:xfrm>
+            <a:off x="5120640" y="4343400"/>
+            <a:ext cx="2414016" cy="1005839"/>
+          </a:xfrm>
+          <a:prstGeom prst="rect">
+            <a:avLst/>
+          </a:prstGeom>
+          <a:noFill/>
+        </p:spPr>
+        <p:txBody>
+          <a:bodyPr wrap="square" anchor="t">
+            <a:spAutoFit/>
+          </a:bodyPr>
+          <a:lstStyle/>
+          <a:p>
+            <a:pPr algn="l"/>
+            <a:r>
+              <a:rPr sz="1150" b="0">
+                <a:solidFill>
+                  <a:srgbClr val="161B26"/>
+                </a:solidFill>
+                <a:latin typeface="Arial"/>
+              </a:rPr>
+              <a:t>Revenue + growth + margin, not volume alone</a:t>
+            </a:r>
+          </a:p>
+        </p:txBody>
+      </p:sp>
+      <p:sp>
+        <p:nvSpPr>
+          <p:cNvPr id="38" name="Rounded Rectangle 37"/>
+          <p:cNvSpPr/>
+          <p:nvPr/>
+        </p:nvSpPr>
+        <p:spPr>
+          <a:xfrm>
+            <a:off x="7900416" y="3776472"/>
+            <a:ext cx="3401568" cy="1719072"/>
+          </a:xfrm>
+          <a:prstGeom prst="roundRect">
+            <a:avLst/>
+          </a:prstGeom>
+          <a:solidFill>
+            <a:srgbClr val="F5F8FC"/>
+          </a:solidFill>
+          <a:ln>
+            <a:solidFill>
+              <a:srgbClr val="E2E8F0"/>
+            </a:solidFill>
+          </a:ln>
+        </p:spPr>
+        <p:style>
+          <a:lnRef idx="1">
+            <a:schemeClr val="accent1"/>
+          </a:lnRef>
+          <a:fillRef idx="3">
+            <a:schemeClr val="accent1"/>
+          </a:fillRef>
+          <a:effectRef idx="2">
+            <a:schemeClr val="accent1"/>
+          </a:effectRef>
+          <a:fontRef idx="minor">
+            <a:schemeClr val="lt1"/>
+          </a:fontRef>
+        </p:style>
+        <p:txBody>
+          <a:bodyPr rtlCol="0" anchor="ctr"/>
+          <a:lstStyle/>
+          <a:p>
+            <a:pPr algn="ctr"/>
+          </a:p>
+        </p:txBody>
+      </p:sp>
+      <p:sp>
+        <p:nvSpPr>
+          <p:cNvPr id="39" name="Rectangle 38"/>
+          <p:cNvSpPr/>
+          <p:nvPr/>
+        </p:nvSpPr>
+        <p:spPr>
+          <a:xfrm>
+            <a:off x="7900416" y="3776472"/>
+            <a:ext cx="73152" cy="1719072"/>
+          </a:xfrm>
+          <a:prstGeom prst="rect">
+            <a:avLst/>
+          </a:prstGeom>
+          <a:solidFill>
+            <a:srgbClr val="10B981"/>
+          </a:solidFill>
+          <a:ln>
+            <a:solidFill>
+              <a:srgbClr val="10B981"/>
+            </a:solidFill>
+          </a:ln>
+        </p:spPr>
+        <p:style>
+          <a:lnRef idx="1">
+            <a:schemeClr val="accent1"/>
+          </a:lnRef>
+          <a:fillRef idx="3">
+            <a:schemeClr val="accent1"/>
+          </a:fillRef>
+          <a:effectRef idx="2">
+            <a:schemeClr val="accent1"/>
+          </a:effectRef>
+          <a:fontRef idx="minor">
+            <a:schemeClr val="lt1"/>
+          </a:fontRef>
+        </p:style>
+        <p:txBody>
+          <a:bodyPr rtlCol="0" anchor="ctr"/>
+          <a:lstStyle/>
+          <a:p>
+            <a:pPr algn="ctr"/>
+          </a:p>
+        </p:txBody>
+      </p:sp>
+      <p:sp>
+        <p:nvSpPr>
+          <p:cNvPr id="40" name="Rounded Rectangle 39"/>
+          <p:cNvSpPr/>
+          <p:nvPr/>
+        </p:nvSpPr>
+        <p:spPr>
+          <a:xfrm>
+            <a:off x="8101584" y="3995928"/>
+            <a:ext cx="438912" cy="438912"/>
+          </a:xfrm>
+          <a:prstGeom prst="roundRect">
+            <a:avLst/>
+          </a:prstGeom>
+          <a:solidFill>
+            <a:srgbClr val="10B981"/>
+          </a:solidFill>
+          <a:ln>
+            <a:solidFill>
+              <a:srgbClr val="10B981"/>
+            </a:solidFill>
+          </a:ln>
+        </p:spPr>
+        <p:style>
+          <a:lnRef idx="1">
+            <a:schemeClr val="accent1"/>
+          </a:lnRef>
+          <a:fillRef idx="3">
+            <a:schemeClr val="accent1"/>
+          </a:fillRef>
+          <a:effectRef idx="2">
+            <a:schemeClr val="accent1"/>
+          </a:effectRef>
+          <a:fontRef idx="minor">
+            <a:schemeClr val="lt1"/>
+          </a:fontRef>
+        </p:style>
+        <p:txBody>
+          <a:bodyPr rtlCol="0" anchor="ctr"/>
+          <a:lstStyle/>
+          <a:p>
+            <a:pPr algn="ctr"/>
+          </a:p>
+        </p:txBody>
+      </p:sp>
+      <p:sp>
+        <p:nvSpPr>
+          <p:cNvPr id="41" name="TextBox 40"/>
+          <p:cNvSpPr txBox="1"/>
+          <p:nvPr/>
+        </p:nvSpPr>
+        <p:spPr>
+          <a:xfrm>
+            <a:off x="8101584" y="4005072"/>
+            <a:ext cx="438912" cy="420624"/>
+          </a:xfrm>
+          <a:prstGeom prst="rect">
+            <a:avLst/>
+          </a:prstGeom>
+          <a:noFill/>
+        </p:spPr>
+        <p:txBody>
+          <a:bodyPr wrap="square" anchor="ctr">
+            <a:spAutoFit/>
+          </a:bodyPr>
+          <a:lstStyle/>
+          <a:p>
+            <a:pPr algn="ctr"/>
+            <a:r>
+              <a:rPr sz="1400" b="1">
+                <a:solidFill>
+                  <a:srgbClr val="FFFFFF"/>
+                </a:solidFill>
+                <a:latin typeface="Arial"/>
+              </a:rPr>
+              <a:t>6</a:t>
+            </a:r>
+          </a:p>
+        </p:txBody>
+      </p:sp>
+      <p:sp>
+        <p:nvSpPr>
+          <p:cNvPr id="42" name="TextBox 41"/>
+          <p:cNvSpPr txBox="1"/>
+          <p:nvPr/>
+        </p:nvSpPr>
+        <p:spPr>
+          <a:xfrm>
+            <a:off x="8705088" y="3959352"/>
+            <a:ext cx="2414016" cy="329184"/>
+          </a:xfrm>
+          <a:prstGeom prst="rect">
+            <a:avLst/>
+          </a:prstGeom>
+          <a:noFill/>
+        </p:spPr>
+        <p:txBody>
+          <a:bodyPr wrap="square" anchor="t">
+            <a:spAutoFit/>
+          </a:bodyPr>
+          <a:lstStyle/>
+          <a:p>
+            <a:pPr algn="l"/>
+            <a:r>
+              <a:rPr sz="1400" b="1">
+                <a:solidFill>
+                  <a:srgbClr val="10B981"/>
+                </a:solidFill>
+                <a:latin typeface="Arial"/>
+              </a:rPr>
+              <a:t>Action</a:t>
+            </a:r>
+          </a:p>
+        </p:txBody>
+      </p:sp>
+      <p:sp>
+        <p:nvSpPr>
+          <p:cNvPr id="43" name="TextBox 42"/>
+          <p:cNvSpPr txBox="1"/>
+          <p:nvPr/>
+        </p:nvSpPr>
+        <p:spPr>
+          <a:xfrm>
+            <a:off x="8705088" y="4343400"/>
+            <a:ext cx="2414016" cy="1005839"/>
+          </a:xfrm>
+          <a:prstGeom prst="rect">
+            <a:avLst/>
+          </a:prstGeom>
+          <a:noFill/>
+        </p:spPr>
+        <p:txBody>
+          <a:bodyPr wrap="square" anchor="t">
+            <a:spAutoFit/>
+          </a:bodyPr>
+          <a:lstStyle/>
+          <a:p>
+            <a:pPr algn="l"/>
+            <a:r>
+              <a:rPr sz="1150" b="0">
+                <a:solidFill>
+                  <a:srgbClr val="161B26"/>
+                </a:solidFill>
+                <a:latin typeface="Arial"/>
+              </a:rPr>
+              <a:t>Test Ready Meals as the campaign hero</a:t>
+            </a:r>
+          </a:p>
+        </p:txBody>
+      </p:sp>
+    </p:spTree>
+  </p:cSld>
+  <p:clrMapOvr>
+    <a:masterClrMapping/>
+  </p:clrMapOvr>
+</p:sld>
+</file>
+
+<file path=ppt/slides/slide6.xml><?xml version="1.0" encoding="utf-8"?>
+<p:sld xmlns:a="http://schemas.openxmlformats.org/drawingml/2006/main" xmlns:p="http://schemas.openxmlformats.org/presentationml/2006/main" xmlns:r="http://schemas.openxmlformats.org/officeDocument/2006/relationships">
+  <p:cSld>
+    <p:spTree>
+      <p:nvGrpSpPr>
+        <p:cNvPr id="1" name=""/>
+        <p:cNvGrpSpPr/>
+        <p:nvPr/>
+      </p:nvGrpSpPr>
+      <p:grpSpPr/>
+      <p:sp>
+        <p:nvSpPr>
+          <p:cNvPr id="2" name="Rectangle 1"/>
+          <p:cNvSpPr/>
+          <p:nvPr/>
+        </p:nvSpPr>
+        <p:spPr>
+          <a:xfrm>
+            <a:off x="0" y="0"/>
+            <a:ext cx="12191695" cy="6858000"/>
+          </a:xfrm>
+          <a:prstGeom prst="rect">
+            <a:avLst/>
+          </a:prstGeom>
+          <a:solidFill>
+            <a:srgbClr val="FFFFFF"/>
+          </a:solidFill>
+          <a:ln>
+            <a:solidFill>
+              <a:srgbClr val="FFFFFF"/>
+            </a:solidFill>
+          </a:ln>
+        </p:spPr>
+        <p:style>
+          <a:lnRef idx="1">
+            <a:schemeClr val="accent1"/>
+          </a:lnRef>
+          <a:fillRef idx="3">
+            <a:schemeClr val="accent1"/>
+          </a:fillRef>
+          <a:effectRef idx="2">
+            <a:schemeClr val="accent1"/>
+          </a:effectRef>
+          <a:fontRef idx="minor">
+            <a:schemeClr val="lt1"/>
+          </a:fontRef>
+        </p:style>
+        <p:txBody>
+          <a:bodyPr rtlCol="0" anchor="ctr"/>
+          <a:lstStyle/>
+          <a:p>
+            <a:pPr algn="ctr"/>
+          </a:p>
+        </p:txBody>
+      </p:sp>
+      <p:sp>
+        <p:nvSpPr>
+          <p:cNvPr id="3" name="Rectangle 2"/>
+          <p:cNvSpPr/>
+          <p:nvPr/>
+        </p:nvSpPr>
+        <p:spPr>
+          <a:xfrm>
+            <a:off x="0" y="0"/>
+            <a:ext cx="164592" cy="6858000"/>
+          </a:xfrm>
+          <a:prstGeom prst="rect">
+            <a:avLst/>
+          </a:prstGeom>
+          <a:solidFill>
+            <a:srgbClr val="10B981"/>
+          </a:solidFill>
+          <a:ln>
+            <a:solidFill>
+              <a:srgbClr val="10B981"/>
+            </a:solidFill>
+          </a:ln>
+        </p:spPr>
+        <p:style>
+          <a:lnRef idx="1">
+            <a:schemeClr val="accent1"/>
+          </a:lnRef>
+          <a:fillRef idx="3">
+            <a:schemeClr val="accent1"/>
+          </a:fillRef>
+          <a:effectRef idx="2">
+            <a:schemeClr val="accent1"/>
+          </a:effectRef>
+          <a:fontRef idx="minor">
+            <a:schemeClr val="lt1"/>
+          </a:fontRef>
+        </p:style>
+        <p:txBody>
+          <a:bodyPr rtlCol="0" anchor="ctr"/>
+          <a:lstStyle/>
+          <a:p>
+            <a:pPr algn="ctr"/>
+          </a:p>
+        </p:txBody>
+      </p:sp>
+      <p:sp>
+        <p:nvSpPr>
+          <p:cNvPr id="4" name="TextBox 3"/>
+          <p:cNvSpPr txBox="1"/>
+          <p:nvPr/>
+        </p:nvSpPr>
+        <p:spPr>
+          <a:xfrm>
+            <a:off x="658368" y="384048"/>
+            <a:ext cx="10789920" cy="320040"/>
+          </a:xfrm>
+          <a:prstGeom prst="rect">
+            <a:avLst/>
+          </a:prstGeom>
+          <a:noFill/>
+        </p:spPr>
+        <p:txBody>
+          <a:bodyPr wrap="square" anchor="t">
+            <a:spAutoFit/>
+          </a:bodyPr>
+          <a:lstStyle/>
+          <a:p>
+            <a:pPr algn="l"/>
+            <a:r>
+              <a:rPr sz="1100" b="1">
+                <a:solidFill>
+                  <a:srgbClr val="10B981"/>
+                </a:solidFill>
+                <a:latin typeface="Arial"/>
+              </a:rPr>
+              <a:t>ACTIVITY 05 · WORKED POWERPOINT OUTPUT</a:t>
+            </a:r>
+          </a:p>
+        </p:txBody>
+      </p:sp>
+      <p:sp>
+        <p:nvSpPr>
+          <p:cNvPr id="5" name="TextBox 4"/>
+          <p:cNvSpPr txBox="1"/>
+          <p:nvPr/>
+        </p:nvSpPr>
+        <p:spPr>
+          <a:xfrm>
+            <a:off x="658368" y="749808"/>
+            <a:ext cx="10789920" cy="658368"/>
+          </a:xfrm>
+          <a:prstGeom prst="rect">
+            <a:avLst/>
+          </a:prstGeom>
+          <a:noFill/>
+        </p:spPr>
+        <p:txBody>
+          <a:bodyPr wrap="square" anchor="t">
+            <a:spAutoFit/>
+          </a:bodyPr>
+          <a:lstStyle/>
+          <a:p>
+            <a:pPr algn="l"/>
+            <a:r>
+              <a:rPr sz="2700" b="1">
+                <a:solidFill>
+                  <a:srgbClr val="161B26"/>
+                </a:solidFill>
+                <a:latin typeface="Arial"/>
+              </a:rPr>
+              <a:t>Native Editable Chart Example</a:t>
+            </a:r>
+          </a:p>
+        </p:txBody>
+      </p:sp>
+      <p:sp>
+        <p:nvSpPr>
+          <p:cNvPr id="6" name="Rectangle 5"/>
+          <p:cNvSpPr/>
+          <p:nvPr/>
+        </p:nvSpPr>
+        <p:spPr>
+          <a:xfrm>
+            <a:off x="658368" y="1444752"/>
+            <a:ext cx="10881360" cy="18288"/>
+          </a:xfrm>
+          <a:prstGeom prst="rect">
+            <a:avLst/>
+          </a:prstGeom>
+          <a:solidFill>
+            <a:srgbClr val="E2E8F0"/>
+          </a:solidFill>
+          <a:ln>
+            <a:solidFill>
+              <a:srgbClr val="E2E8F0"/>
+            </a:solidFill>
+          </a:ln>
+        </p:spPr>
+        <p:style>
+          <a:lnRef idx="1">
+            <a:schemeClr val="accent1"/>
+          </a:lnRef>
+          <a:fillRef idx="3">
+            <a:schemeClr val="accent1"/>
+          </a:fillRef>
+          <a:effectRef idx="2">
+            <a:schemeClr val="accent1"/>
+          </a:effectRef>
+          <a:fontRef idx="minor">
+            <a:schemeClr val="lt1"/>
+          </a:fontRef>
+        </p:style>
+        <p:txBody>
+          <a:bodyPr rtlCol="0" anchor="ctr"/>
+          <a:lstStyle/>
+          <a:p>
+            <a:pPr algn="ctr"/>
+          </a:p>
+        </p:txBody>
+      </p:sp>
+      <p:sp>
+        <p:nvSpPr>
+          <p:cNvPr id="7" name="TextBox 6"/>
+          <p:cNvSpPr txBox="1"/>
+          <p:nvPr/>
+        </p:nvSpPr>
+        <p:spPr>
+          <a:xfrm>
+            <a:off x="658368" y="6473952"/>
+            <a:ext cx="9875520" cy="201168"/>
+          </a:xfrm>
+          <a:prstGeom prst="rect">
+            <a:avLst/>
+          </a:prstGeom>
+          <a:noFill/>
+        </p:spPr>
+        <p:txBody>
+          <a:bodyPr wrap="square" anchor="t">
+            <a:spAutoFit/>
+          </a:bodyPr>
+          <a:lstStyle/>
+          <a:p>
+            <a:pPr algn="l"/>
+            <a:r>
+              <a:rPr sz="800" b="0">
+                <a:solidFill>
+                  <a:srgbClr val="5B6372"/>
+                </a:solidFill>
+                <a:latin typeface="Arial"/>
+              </a:rPr>
+              <a:t>TGS-2026064178 · ACTIVITY PRACTICE · Tertiary Infotech Academy Pte Ltd</a:t>
+            </a:r>
+          </a:p>
+        </p:txBody>
+      </p:sp>
+      <p:graphicFrame>
+        <p:nvGraphicFramePr>
+          <p:cNvPr id="8" name="Chart 7"/>
+          <p:cNvGraphicFramePr>
+            <a:graphicFrameLocks noGrp="1"/>
+          </p:cNvGraphicFramePr>
+          <p:nvPr/>
+        </p:nvGraphicFramePr>
+        <p:xfrm>
+          <a:off x="777240" y="1737360"/>
+          <a:ext cx="7406640" cy="4251960"/>
+        </p:xfrm>
+        <a:graphic>
+          <a:graphicData uri="http://schemas.openxmlformats.org/drawingml/2006/chart">
+            <c:chart xmlns:c="http://schemas.openxmlformats.org/drawingml/2006/chart" r:id="rId2"/>
+          </a:graphicData>
+        </a:graphic>
+      </p:graphicFrame>
+      <p:sp>
+        <p:nvSpPr>
+          <p:cNvPr id="9" name="TextBox 8"/>
+          <p:cNvSpPr txBox="1"/>
+          <p:nvPr/>
+        </p:nvSpPr>
+        <p:spPr>
+          <a:xfrm>
+            <a:off x="8485632" y="1874519"/>
+            <a:ext cx="2834640" cy="502920"/>
+          </a:xfrm>
+          <a:prstGeom prst="rect">
+            <a:avLst/>
+          </a:prstGeom>
+          <a:noFill/>
+        </p:spPr>
+        <p:txBody>
+          <a:bodyPr wrap="square" anchor="t">
+            <a:spAutoFit/>
+          </a:bodyPr>
+          <a:lstStyle/>
+          <a:p>
+            <a:pPr algn="l"/>
+            <a:r>
+              <a:rPr sz="1100" b="1">
+                <a:solidFill>
+                  <a:srgbClr val="10B981"/>
+                </a:solidFill>
+                <a:latin typeface="Arial"/>
+              </a:rPr>
+              <a:t>DECISION INSIGHT</a:t>
+            </a:r>
+          </a:p>
+        </p:txBody>
+      </p:sp>
+      <p:sp>
+        <p:nvSpPr>
+          <p:cNvPr id="10" name="TextBox 9"/>
+          <p:cNvSpPr txBox="1"/>
+          <p:nvPr/>
+        </p:nvSpPr>
+        <p:spPr>
+          <a:xfrm>
+            <a:off x="8485632" y="2359152"/>
+            <a:ext cx="2880360" cy="1188720"/>
+          </a:xfrm>
+          <a:prstGeom prst="rect">
+            <a:avLst/>
+          </a:prstGeom>
+          <a:noFill/>
+        </p:spPr>
+        <p:txBody>
+          <a:bodyPr wrap="square" anchor="t">
+            <a:spAutoFit/>
+          </a:bodyPr>
+          <a:lstStyle/>
+          <a:p>
+            <a:pPr algn="l"/>
+            <a:r>
+              <a:rPr sz="1500" b="1">
+                <a:solidFill>
+                  <a:srgbClr val="161B26"/>
+                </a:solidFill>
+                <a:latin typeface="Arial"/>
+              </a:rPr>
+              <a:t>Ready Meals is the strongest growth story; retain category context and verify seasonality before reallocating promotion spend.</a:t>
+            </a:r>
+          </a:p>
+        </p:txBody>
+      </p:sp>
+      <p:sp>
+        <p:nvSpPr>
+          <p:cNvPr id="11" name="TextBox 10"/>
+          <p:cNvSpPr txBox="1"/>
+          <p:nvPr/>
+        </p:nvSpPr>
+        <p:spPr>
+          <a:xfrm>
+            <a:off x="8485632" y="3858768"/>
+            <a:ext cx="2880360" cy="1097280"/>
+          </a:xfrm>
+          <a:prstGeom prst="rect">
+            <a:avLst/>
+          </a:prstGeom>
+          <a:noFill/>
+        </p:spPr>
+        <p:txBody>
+          <a:bodyPr wrap="square" anchor="t">
+            <a:spAutoFit/>
+          </a:bodyPr>
+          <a:lstStyle/>
+          <a:p>
+            <a:pPr algn="l"/>
+            <a:r>
+              <a:rPr sz="1000" b="0">
+                <a:solidFill>
+                  <a:srgbClr val="5B6372"/>
+                </a:solidFill>
+                <a:latin typeface="Arial"/>
+              </a:rPr>
+              <a:t>Synthetic Northstar data · Jan–Jun 2026 · native chart remains editable</a:t>
+            </a:r>
+          </a:p>
+        </p:txBody>
+      </p:sp>
+    </p:spTree>
+  </p:cSld>
+  <p:clrMapOvr>
+    <a:masterClrMapping/>
+  </p:clrMapOvr>
+</p:sld>
+</file>
+
+<file path=ppt/slides/slide7.xml><?xml version="1.0" encoding="utf-8"?>
+<p:sld xmlns:a="http://schemas.openxmlformats.org/drawingml/2006/main" xmlns:p="http://schemas.openxmlformats.org/presentationml/2006/main" xmlns:r="http://schemas.openxmlformats.org/officeDocument/2006/relationships">
+  <p:cSld>
+    <p:spTree>
+      <p:nvGrpSpPr>
+        <p:cNvPr id="1" name=""/>
+        <p:cNvGrpSpPr/>
+        <p:nvPr/>
+      </p:nvGrpSpPr>
+      <p:grpSpPr/>
+      <p:sp>
+        <p:nvSpPr>
+          <p:cNvPr id="2" name="Rectangle 1"/>
+          <p:cNvSpPr/>
+          <p:nvPr/>
+        </p:nvSpPr>
+        <p:spPr>
+          <a:xfrm>
+            <a:off x="0" y="0"/>
+            <a:ext cx="12191695" cy="6858000"/>
+          </a:xfrm>
+          <a:prstGeom prst="rect">
+            <a:avLst/>
+          </a:prstGeom>
+          <a:solidFill>
+            <a:srgbClr val="FFFFFF"/>
+          </a:solidFill>
+          <a:ln>
+            <a:solidFill>
+              <a:srgbClr val="FFFFFF"/>
+            </a:solidFill>
+          </a:ln>
+        </p:spPr>
+        <p:style>
+          <a:lnRef idx="1">
+            <a:schemeClr val="accent1"/>
+          </a:lnRef>
+          <a:fillRef idx="3">
+            <a:schemeClr val="accent1"/>
+          </a:fillRef>
+          <a:effectRef idx="2">
+            <a:schemeClr val="accent1"/>
+          </a:effectRef>
+          <a:fontRef idx="minor">
+            <a:schemeClr val="lt1"/>
+          </a:fontRef>
+        </p:style>
+        <p:txBody>
+          <a:bodyPr rtlCol="0" anchor="ctr"/>
+          <a:lstStyle/>
+          <a:p>
+            <a:pPr algn="ctr"/>
+          </a:p>
+        </p:txBody>
+      </p:sp>
+      <p:sp>
+        <p:nvSpPr>
+          <p:cNvPr id="3" name="Rectangle 2"/>
+          <p:cNvSpPr/>
+          <p:nvPr/>
+        </p:nvSpPr>
+        <p:spPr>
+          <a:xfrm>
+            <a:off x="0" y="0"/>
+            <a:ext cx="164592" cy="6858000"/>
+          </a:xfrm>
+          <a:prstGeom prst="rect">
+            <a:avLst/>
+          </a:prstGeom>
+          <a:solidFill>
+            <a:srgbClr val="1F6FEB"/>
+          </a:solidFill>
+          <a:ln>
+            <a:solidFill>
+              <a:srgbClr val="1F6FEB"/>
+            </a:solidFill>
+          </a:ln>
+        </p:spPr>
+        <p:style>
+          <a:lnRef idx="1">
+            <a:schemeClr val="accent1"/>
+          </a:lnRef>
+          <a:fillRef idx="3">
+            <a:schemeClr val="accent1"/>
+          </a:fillRef>
+          <a:effectRef idx="2">
+            <a:schemeClr val="accent1"/>
+          </a:effectRef>
+          <a:fontRef idx="minor">
+            <a:schemeClr val="lt1"/>
+          </a:fontRef>
+        </p:style>
+        <p:txBody>
+          <a:bodyPr rtlCol="0" anchor="ctr"/>
+          <a:lstStyle/>
+          <a:p>
+            <a:pPr algn="ctr"/>
+          </a:p>
+        </p:txBody>
+      </p:sp>
+      <p:sp>
+        <p:nvSpPr>
+          <p:cNvPr id="4" name="TextBox 3"/>
+          <p:cNvSpPr txBox="1"/>
+          <p:nvPr/>
+        </p:nvSpPr>
+        <p:spPr>
+          <a:xfrm>
+            <a:off x="658368" y="384048"/>
+            <a:ext cx="10789920" cy="320040"/>
+          </a:xfrm>
+          <a:prstGeom prst="rect">
+            <a:avLst/>
+          </a:prstGeom>
+          <a:noFill/>
+        </p:spPr>
+        <p:txBody>
+          <a:bodyPr wrap="square" anchor="t">
+            <a:spAutoFit/>
+          </a:bodyPr>
+          <a:lstStyle/>
+          <a:p>
+            <a:pPr algn="l"/>
+            <a:r>
+              <a:rPr sz="1100" b="1">
+                <a:solidFill>
+                  <a:srgbClr val="1F6FEB"/>
+                </a:solidFill>
+                <a:latin typeface="Arial"/>
+              </a:rPr>
+              <a:t>ACTIVITY 05 · ACCEPTANCE</a:t>
+            </a:r>
+          </a:p>
+        </p:txBody>
+      </p:sp>
+      <p:sp>
+        <p:nvSpPr>
+          <p:cNvPr id="5" name="TextBox 4"/>
+          <p:cNvSpPr txBox="1"/>
+          <p:nvPr/>
+        </p:nvSpPr>
+        <p:spPr>
+          <a:xfrm>
+            <a:off x="658368" y="749808"/>
+            <a:ext cx="10789920" cy="658368"/>
+          </a:xfrm>
+          <a:prstGeom prst="rect">
+            <a:avLst/>
+          </a:prstGeom>
+          <a:noFill/>
+        </p:spPr>
+        <p:txBody>
+          <a:bodyPr wrap="square" anchor="t">
+            <a:spAutoFit/>
+          </a:bodyPr>
+          <a:lstStyle/>
+          <a:p>
+            <a:pPr algn="l"/>
+            <a:r>
+              <a:rPr sz="2700" b="1">
+                <a:solidFill>
+                  <a:srgbClr val="161B26"/>
+                </a:solidFill>
+                <a:latin typeface="Arial"/>
+              </a:rPr>
+              <a:t>What Good Looks Like</a:t>
+            </a:r>
+          </a:p>
+        </p:txBody>
+      </p:sp>
+      <p:sp>
+        <p:nvSpPr>
+          <p:cNvPr id="6" name="Rectangle 5"/>
+          <p:cNvSpPr/>
+          <p:nvPr/>
+        </p:nvSpPr>
+        <p:spPr>
+          <a:xfrm>
+            <a:off x="658368" y="1444752"/>
+            <a:ext cx="10881360" cy="18288"/>
+          </a:xfrm>
+          <a:prstGeom prst="rect">
+            <a:avLst/>
+          </a:prstGeom>
+          <a:solidFill>
+            <a:srgbClr val="E2E8F0"/>
+          </a:solidFill>
+          <a:ln>
+            <a:solidFill>
+              <a:srgbClr val="E2E8F0"/>
+            </a:solidFill>
+          </a:ln>
+        </p:spPr>
+        <p:style>
+          <a:lnRef idx="1">
+            <a:schemeClr val="accent1"/>
+          </a:lnRef>
+          <a:fillRef idx="3">
+            <a:schemeClr val="accent1"/>
+          </a:fillRef>
+          <a:effectRef idx="2">
+            <a:schemeClr val="accent1"/>
+          </a:effectRef>
+          <a:fontRef idx="minor">
+            <a:schemeClr val="lt1"/>
+          </a:fontRef>
+        </p:style>
+        <p:txBody>
+          <a:bodyPr rtlCol="0" anchor="ctr"/>
+          <a:lstStyle/>
+          <a:p>
+            <a:pPr algn="ctr"/>
+          </a:p>
+        </p:txBody>
+      </p:sp>
+      <p:sp>
+        <p:nvSpPr>
+          <p:cNvPr id="7" name="TextBox 6"/>
+          <p:cNvSpPr txBox="1"/>
+          <p:nvPr/>
+        </p:nvSpPr>
+        <p:spPr>
+          <a:xfrm>
+            <a:off x="658368" y="6473952"/>
+            <a:ext cx="9875520" cy="201168"/>
+          </a:xfrm>
+          <a:prstGeom prst="rect">
+            <a:avLst/>
+          </a:prstGeom>
+          <a:noFill/>
+        </p:spPr>
+        <p:txBody>
+          <a:bodyPr wrap="square" anchor="t">
+            <a:spAutoFit/>
+          </a:bodyPr>
+          <a:lstStyle/>
+          <a:p>
+            <a:pPr algn="l"/>
+            <a:r>
+              <a:rPr sz="800" b="0">
+                <a:solidFill>
+                  <a:srgbClr val="5B6372"/>
+                </a:solidFill>
+                <a:latin typeface="Arial"/>
+              </a:rPr>
+              <a:t>TGS-2026064178 · ACTIVITY PRACTICE · Tertiary Infotech Academy Pte Ltd</a:t>
+            </a:r>
+          </a:p>
+        </p:txBody>
+      </p:sp>
+      <p:sp>
+        <p:nvSpPr>
+          <p:cNvPr id="8" name="Rounded Rectangle 7"/>
+          <p:cNvSpPr/>
+          <p:nvPr/>
+        </p:nvSpPr>
+        <p:spPr>
+          <a:xfrm>
+            <a:off x="749808" y="1810512"/>
+            <a:ext cx="10652760" cy="1005840"/>
+          </a:xfrm>
+          <a:prstGeom prst="roundRect">
+            <a:avLst/>
+          </a:prstGeom>
+          <a:solidFill>
+            <a:srgbClr val="1F6FEB"/>
+          </a:solidFill>
+          <a:ln>
+            <a:solidFill>
+              <a:srgbClr val="1F6FEB"/>
+            </a:solidFill>
+          </a:ln>
+        </p:spPr>
+        <p:style>
+          <a:lnRef idx="1">
+            <a:schemeClr val="accent1"/>
+          </a:lnRef>
+          <a:fillRef idx="3">
+            <a:schemeClr val="accent1"/>
+          </a:fillRef>
+          <a:effectRef idx="2">
+            <a:schemeClr val="accent1"/>
+          </a:effectRef>
+          <a:fontRef idx="minor">
+            <a:schemeClr val="lt1"/>
+          </a:fontRef>
+        </p:style>
+        <p:txBody>
+          <a:bodyPr rtlCol="0" anchor="ctr"/>
+          <a:lstStyle/>
+          <a:p>
+            <a:pPr algn="ctr"/>
+          </a:p>
+        </p:txBody>
+      </p:sp>
+      <p:sp>
+        <p:nvSpPr>
+          <p:cNvPr id="9" name="TextBox 8"/>
+          <p:cNvSpPr txBox="1"/>
+          <p:nvPr/>
+        </p:nvSpPr>
+        <p:spPr>
+          <a:xfrm>
+            <a:off x="1051560" y="2011680"/>
+            <a:ext cx="10058400" cy="566928"/>
+          </a:xfrm>
+          <a:prstGeom prst="rect">
+            <a:avLst/>
+          </a:prstGeom>
+          <a:noFill/>
+        </p:spPr>
+        <p:txBody>
+          <a:bodyPr wrap="square" anchor="ctr">
+            <a:spAutoFit/>
+          </a:bodyPr>
+          <a:lstStyle/>
+          <a:p>
+            <a:pPr algn="ctr"/>
+            <a:r>
+              <a:rPr sz="1900" b="1">
+                <a:solidFill>
+                  <a:srgbClr val="FFFFFF"/>
+                </a:solidFill>
+                <a:latin typeface="Arial"/>
+              </a:rPr>
+              <a:t>An AI analysis log, verified formula workbook, native editable PowerPoint chart and annotated decision slide</a:t>
             </a:r>
           </a:p>
         </p:txBody>

--- a/activities/Activity-05-Transform-Excel-Data-into-a-Native-PowerPoint-Story/A05-Transform-Excel-Data-into-a-Native-PowerPoint-Story-Sample.pptx
+++ b/activities/Activity-05-Transform-Excel-Data-into-a-Native-PowerPoint-Story/A05-Transform-Excel-Data-into-a-Native-PowerPoint-Story-Sample.pptx
@@ -12,6 +12,7 @@
     <p:sldId id="260" r:id="rId11"/>
     <p:sldId id="261" r:id="rId12"/>
     <p:sldId id="262" r:id="rId13"/>
+    <p:sldId id="263" r:id="rId14"/>
   </p:sldIdLst>
   <p:sldSz cx="12191695" cy="6858000" type="screen4x3"/>
   <p:notesSz cx="6858000" cy="9144000"/>
@@ -3455,7 +3456,7 @@
                 </a:solidFill>
                 <a:latin typeface="Arial"/>
               </a:rPr>
-              <a:t>Use AI Analysis to Build a Native PowerPoint Data Story</a:t>
+              <a:t>Create a Comparison Data Story with Copilot and PowerPoint</a:t>
             </a:r>
           </a:p>
         </p:txBody>
@@ -3605,7 +3606,7 @@
                 </a:solidFill>
                 <a:latin typeface="Arial"/>
               </a:rPr>
-              <a:t>Approved AI assistant + Excel + native PowerPoint chart</a:t>
+              <a:t>Microsoft 365 Copilot + Excel + native PowerPoint chart</a:t>
             </a:r>
           </a:p>
         </p:txBody>
@@ -4068,7 +4069,7 @@
                 </a:solidFill>
                 <a:latin typeface="Arial"/>
               </a:rPr>
-              <a:t>Data analyst</a:t>
+              <a:t>Analyse the evidence</a:t>
             </a:r>
           </a:p>
         </p:txBody>
@@ -4103,7 +4104,7 @@
                 </a:solidFill>
                 <a:latin typeface="Arial"/>
               </a:rPr>
-              <a:t>Using only the attached approved sources, create a source register, identify duplicates or conflicting definitions, clean the table, show formulas or transformations, and return five candidate insights with citations, caveats and a con…</a:t>
+              <a:t>Using only the attached approved source, identify the three strongest patterns, the denominator for each metric, one limitation and one proportionate business action. Cite the source field or row for every number. Do not invent missing…</a:t>
             </a:r>
           </a:p>
         </p:txBody>
@@ -4308,7 +4309,7 @@
                 </a:solidFill>
                 <a:latin typeface="Arial"/>
               </a:rPr>
-              <a:t>Infographic</a:t>
+              <a:t>Create the infographic</a:t>
             </a:r>
           </a:p>
         </p:txBody>
@@ -4343,7 +4344,7 @@
                 </a:solidFill>
                 <a:latin typeface="Arial"/>
               </a:rPr>
-              <a:t>Create a one-page executive infographic for Singapore retail managers. Lead with one decision insight, show three supporting metrics, include a five-stage flow and a source footer. Use a clean professional style, strong hierarchy and n…</a:t>
+              <a:t>Create a one-page [TYPE] infographic about [TOPIC]. Sections: 1. [SECTION ONE] 2. [SECTION TWO] 3. [SECTION THREE] 4. [SECTION FOUR] 5. [SECTION FIVE]. Audience: [AUDIENCE]. Decision: [DECISION]. Style: professional, high contrast, con…</a:t>
             </a:r>
           </a:p>
         </p:txBody>
@@ -4548,7 +4549,7 @@
                 </a:solidFill>
                 <a:latin typeface="Arial"/>
               </a:rPr>
-              <a:t>Text to image</a:t>
+              <a:t>Refine in PowerPoint</a:t>
             </a:r>
           </a:p>
         </p:txBody>
@@ -4583,7 +4584,7 @@
                 </a:solidFill>
                 <a:latin typeface="Arial"/>
               </a:rPr>
-              <a:t>Create a clean vector-like sustainability delivery illustration for a PowerPoint infographic: one electric van, one reusable parcel, a simple route and a feedback symbol. Transparent background, consistent blue/teal/violet/amber palett…</a:t>
+              <a:t>Turn the selected infographic direction into one editable PowerPoint slide. Keep the action title, labels, numbers, chart or process, source footer and accessibility notes editable. Remove decoration that does not support the message. …</a:t>
             </a:r>
           </a:p>
         </p:txBody>
@@ -4788,7 +4789,7 @@
                 </a:solidFill>
                 <a:latin typeface="Arial"/>
               </a:rPr>
-              <a:t>Gemini Notebook deck</a:t>
+              <a:t>Quality review</a:t>
             </a:r>
           </a:p>
         </p:txBody>
@@ -4823,7 +4824,7 @@
                 </a:solidFill>
                 <a:latin typeface="Arial"/>
               </a:rPr>
-              <a:t>Create Presenter Slides for business stakeholders. Focus on the verified decision insight, use a concise professional style, include source-grounded comparisons and a final recommendation. Avoid claims not supported by selected sources…</a:t>
+              <a:t>Review this infographic against message clarity, data accuracy, visual hierarchy, audience fit, accessibility, editability and business goal. List each issue with evidence, its impact, the proposed change and a pass/fail acceptance che…</a:t>
             </a:r>
           </a:p>
         </p:txBody>
@@ -4906,11 +4907,11 @@
             <a:avLst/>
           </a:prstGeom>
           <a:solidFill>
-            <a:srgbClr val="1F6FEB"/>
+            <a:srgbClr val="7C3AED"/>
           </a:solidFill>
           <a:ln>
             <a:solidFill>
-              <a:srgbClr val="1F6FEB"/>
+              <a:srgbClr val="7C3AED"/>
             </a:solidFill>
           </a:ln>
         </p:spPr>
@@ -4962,11 +4963,11 @@
             <a:r>
               <a:rPr sz="1100" b="1">
                 <a:solidFill>
-                  <a:srgbClr val="1F6FEB"/>
+                  <a:srgbClr val="7C3AED"/>
                 </a:solidFill>
                 <a:latin typeface="Arial"/>
               </a:rPr>
-              <a:t>ACTIVITY 05 · CONTEXT</a:t>
+              <a:t>ACTIVITY 05 · COPY, ADAPT AND VERIFY</a:t>
             </a:r>
           </a:p>
         </p:txBody>
@@ -5001,7 +5002,7 @@
                 </a:solidFill>
                 <a:latin typeface="Arial"/>
               </a:rPr>
-              <a:t>The Scenario</a:t>
+              <a:t>Structured Microsoft 365 Copilot Prompt</a:t>
             </a:r>
           </a:p>
         </p:txBody>
@@ -5094,8 +5095,8 @@
         </p:nvSpPr>
         <p:spPr>
           <a:xfrm>
-            <a:off x="731520" y="1783080"/>
-            <a:ext cx="10698480" cy="1691640"/>
+            <a:off x="749808" y="1700784"/>
+            <a:ext cx="10698480" cy="4370832"/>
           </a:xfrm>
           <a:prstGeom prst="roundRect">
             <a:avLst/>
@@ -5133,104 +5134,14 @@
       </p:sp>
       <p:sp>
         <p:nvSpPr>
-          <p:cNvPr id="9" name="Rectangle 8"/>
-          <p:cNvSpPr/>
-          <p:nvPr/>
-        </p:nvSpPr>
-        <p:spPr>
-          <a:xfrm>
-            <a:off x="731520" y="1783080"/>
-            <a:ext cx="73152" cy="1691640"/>
-          </a:xfrm>
-          <a:prstGeom prst="rect">
-            <a:avLst/>
-          </a:prstGeom>
-          <a:solidFill>
-            <a:srgbClr val="1F6FEB"/>
-          </a:solidFill>
-          <a:ln>
-            <a:solidFill>
-              <a:srgbClr val="1F6FEB"/>
-            </a:solidFill>
-          </a:ln>
-        </p:spPr>
-        <p:style>
-          <a:lnRef idx="1">
-            <a:schemeClr val="accent1"/>
-          </a:lnRef>
-          <a:fillRef idx="3">
-            <a:schemeClr val="accent1"/>
-          </a:fillRef>
-          <a:effectRef idx="2">
-            <a:schemeClr val="accent1"/>
-          </a:effectRef>
-          <a:fontRef idx="minor">
-            <a:schemeClr val="lt1"/>
-          </a:fontRef>
-        </p:style>
-        <p:txBody>
-          <a:bodyPr rtlCol="0" anchor="ctr"/>
-          <a:lstStyle/>
-          <a:p>
-            <a:pPr algn="ctr"/>
-          </a:p>
-        </p:txBody>
-      </p:sp>
-      <p:sp>
-        <p:nvSpPr>
-          <p:cNvPr id="10" name="Rounded Rectangle 9"/>
-          <p:cNvSpPr/>
-          <p:nvPr/>
-        </p:nvSpPr>
-        <p:spPr>
-          <a:xfrm>
-            <a:off x="932688" y="2002536"/>
-            <a:ext cx="438912" cy="438912"/>
-          </a:xfrm>
-          <a:prstGeom prst="roundRect">
-            <a:avLst/>
-          </a:prstGeom>
-          <a:solidFill>
-            <a:srgbClr val="1F6FEB"/>
-          </a:solidFill>
-          <a:ln>
-            <a:solidFill>
-              <a:srgbClr val="1F6FEB"/>
-            </a:solidFill>
-          </a:ln>
-        </p:spPr>
-        <p:style>
-          <a:lnRef idx="1">
-            <a:schemeClr val="accent1"/>
-          </a:lnRef>
-          <a:fillRef idx="3">
-            <a:schemeClr val="accent1"/>
-          </a:fillRef>
-          <a:effectRef idx="2">
-            <a:schemeClr val="accent1"/>
-          </a:effectRef>
-          <a:fontRef idx="minor">
-            <a:schemeClr val="lt1"/>
-          </a:fontRef>
-        </p:style>
-        <p:txBody>
-          <a:bodyPr rtlCol="0" anchor="ctr"/>
-          <a:lstStyle/>
-          <a:p>
-            <a:pPr algn="ctr"/>
-          </a:p>
-        </p:txBody>
-      </p:sp>
-      <p:sp>
-        <p:nvSpPr>
-          <p:cNvPr id="11" name="TextBox 10"/>
+          <p:cNvPr id="9" name="TextBox 8"/>
           <p:cNvSpPr txBox="1"/>
           <p:nvPr/>
         </p:nvSpPr>
         <p:spPr>
           <a:xfrm>
-            <a:off x="932688" y="2011680"/>
-            <a:ext cx="438912" cy="420624"/>
+            <a:off x="960120" y="1874519"/>
+            <a:ext cx="384048" cy="246888"/>
           </a:xfrm>
           <a:prstGeom prst="rect">
             <a:avLst/>
@@ -5238,16 +5149,16 @@
           <a:noFill/>
         </p:spPr>
         <p:txBody>
-          <a:bodyPr wrap="square" anchor="ctr">
+          <a:bodyPr wrap="square" anchor="t">
             <a:spAutoFit/>
           </a:bodyPr>
           <a:lstStyle/>
           <a:p>
-            <a:pPr algn="ctr"/>
-            <a:r>
-              <a:rPr sz="1400" b="1">
-                <a:solidFill>
-                  <a:srgbClr val="FFFFFF"/>
+            <a:pPr algn="r"/>
+            <a:r>
+              <a:rPr sz="900" b="0">
+                <a:solidFill>
+                  <a:srgbClr val="5B6372"/>
                 </a:solidFill>
                 <a:latin typeface="Arial"/>
               </a:rPr>
@@ -5258,14 +5169,14 @@
       </p:sp>
       <p:sp>
         <p:nvSpPr>
-          <p:cNvPr id="12" name="TextBox 11"/>
+          <p:cNvPr id="10" name="TextBox 9"/>
           <p:cNvSpPr txBox="1"/>
           <p:nvPr/>
         </p:nvSpPr>
         <p:spPr>
           <a:xfrm>
-            <a:off x="1536192" y="1965960"/>
-            <a:ext cx="9710928" cy="329184"/>
+            <a:off x="1554480" y="1874519"/>
+            <a:ext cx="9418320" cy="256032"/>
           </a:xfrm>
           <a:prstGeom prst="rect">
             <a:avLst/>
@@ -5280,27 +5191,27 @@
           <a:p>
             <a:pPr algn="l"/>
             <a:r>
-              <a:rPr sz="1400" b="1">
-                <a:solidFill>
-                  <a:srgbClr val="1F6FEB"/>
+              <a:rPr sz="1050" b="0">
+                <a:solidFill>
+                  <a:srgbClr val="161B26"/>
                 </a:solidFill>
                 <a:latin typeface="Arial"/>
               </a:rPr>
-              <a:t>Context</a:t>
-            </a:r>
-          </a:p>
-        </p:txBody>
-      </p:sp>
-      <p:sp>
-        <p:nvSpPr>
-          <p:cNvPr id="13" name="TextBox 12"/>
+              <a:t>Create a one-page comparison data-story infographic about Create a Comparison Data Story with Copilot and PowerPoint.</a:t>
+            </a:r>
+          </a:p>
+        </p:txBody>
+      </p:sp>
+      <p:sp>
+        <p:nvSpPr>
+          <p:cNvPr id="11" name="TextBox 10"/>
           <p:cNvSpPr txBox="1"/>
           <p:nvPr/>
         </p:nvSpPr>
         <p:spPr>
           <a:xfrm>
-            <a:off x="1536192" y="2350008"/>
-            <a:ext cx="9710928" cy="978408"/>
+            <a:off x="960120" y="2157984"/>
+            <a:ext cx="384048" cy="246888"/>
           </a:xfrm>
           <a:prstGeom prst="rect">
             <a:avLst/>
@@ -5313,181 +5224,11 @@
           </a:bodyPr>
           <a:lstStyle/>
           <a:p>
-            <a:pPr algn="l"/>
-            <a:r>
-              <a:rPr sz="1150" b="0">
-                <a:solidFill>
-                  <a:srgbClr val="161B26"/>
-                </a:solidFill>
-                <a:latin typeface="Arial"/>
-              </a:rPr>
-              <a:t>Northstar's marketing team must choose one product family for the next promotion. The supplied workbook contains monthly revenue, units, margin and returns for four categories.</a:t>
-            </a:r>
-          </a:p>
-        </p:txBody>
-      </p:sp>
-      <p:sp>
-        <p:nvSpPr>
-          <p:cNvPr id="14" name="Rounded Rectangle 13"/>
-          <p:cNvSpPr/>
-          <p:nvPr/>
-        </p:nvSpPr>
-        <p:spPr>
-          <a:xfrm>
-            <a:off x="731520" y="3776472"/>
-            <a:ext cx="10698480" cy="1691640"/>
-          </a:xfrm>
-          <a:prstGeom prst="roundRect">
-            <a:avLst/>
-          </a:prstGeom>
-          <a:solidFill>
-            <a:srgbClr val="F5F8FC"/>
-          </a:solidFill>
-          <a:ln>
-            <a:solidFill>
-              <a:srgbClr val="E2E8F0"/>
-            </a:solidFill>
-          </a:ln>
-        </p:spPr>
-        <p:style>
-          <a:lnRef idx="1">
-            <a:schemeClr val="accent1"/>
-          </a:lnRef>
-          <a:fillRef idx="3">
-            <a:schemeClr val="accent1"/>
-          </a:fillRef>
-          <a:effectRef idx="2">
-            <a:schemeClr val="accent1"/>
-          </a:effectRef>
-          <a:fontRef idx="minor">
-            <a:schemeClr val="lt1"/>
-          </a:fontRef>
-        </p:style>
-        <p:txBody>
-          <a:bodyPr rtlCol="0" anchor="ctr"/>
-          <a:lstStyle/>
-          <a:p>
-            <a:pPr algn="ctr"/>
-          </a:p>
-        </p:txBody>
-      </p:sp>
-      <p:sp>
-        <p:nvSpPr>
-          <p:cNvPr id="15" name="Rectangle 14"/>
-          <p:cNvSpPr/>
-          <p:nvPr/>
-        </p:nvSpPr>
-        <p:spPr>
-          <a:xfrm>
-            <a:off x="731520" y="3776472"/>
-            <a:ext cx="73152" cy="1691640"/>
-          </a:xfrm>
-          <a:prstGeom prst="rect">
-            <a:avLst/>
-          </a:prstGeom>
-          <a:solidFill>
-            <a:srgbClr val="10B981"/>
-          </a:solidFill>
-          <a:ln>
-            <a:solidFill>
-              <a:srgbClr val="10B981"/>
-            </a:solidFill>
-          </a:ln>
-        </p:spPr>
-        <p:style>
-          <a:lnRef idx="1">
-            <a:schemeClr val="accent1"/>
-          </a:lnRef>
-          <a:fillRef idx="3">
-            <a:schemeClr val="accent1"/>
-          </a:fillRef>
-          <a:effectRef idx="2">
-            <a:schemeClr val="accent1"/>
-          </a:effectRef>
-          <a:fontRef idx="minor">
-            <a:schemeClr val="lt1"/>
-          </a:fontRef>
-        </p:style>
-        <p:txBody>
-          <a:bodyPr rtlCol="0" anchor="ctr"/>
-          <a:lstStyle/>
-          <a:p>
-            <a:pPr algn="ctr"/>
-          </a:p>
-        </p:txBody>
-      </p:sp>
-      <p:sp>
-        <p:nvSpPr>
-          <p:cNvPr id="16" name="Rounded Rectangle 15"/>
-          <p:cNvSpPr/>
-          <p:nvPr/>
-        </p:nvSpPr>
-        <p:spPr>
-          <a:xfrm>
-            <a:off x="932688" y="3995928"/>
-            <a:ext cx="438912" cy="438912"/>
-          </a:xfrm>
-          <a:prstGeom prst="roundRect">
-            <a:avLst/>
-          </a:prstGeom>
-          <a:solidFill>
-            <a:srgbClr val="10B981"/>
-          </a:solidFill>
-          <a:ln>
-            <a:solidFill>
-              <a:srgbClr val="10B981"/>
-            </a:solidFill>
-          </a:ln>
-        </p:spPr>
-        <p:style>
-          <a:lnRef idx="1">
-            <a:schemeClr val="accent1"/>
-          </a:lnRef>
-          <a:fillRef idx="3">
-            <a:schemeClr val="accent1"/>
-          </a:fillRef>
-          <a:effectRef idx="2">
-            <a:schemeClr val="accent1"/>
-          </a:effectRef>
-          <a:fontRef idx="minor">
-            <a:schemeClr val="lt1"/>
-          </a:fontRef>
-        </p:style>
-        <p:txBody>
-          <a:bodyPr rtlCol="0" anchor="ctr"/>
-          <a:lstStyle/>
-          <a:p>
-            <a:pPr algn="ctr"/>
-          </a:p>
-        </p:txBody>
-      </p:sp>
-      <p:sp>
-        <p:nvSpPr>
-          <p:cNvPr id="17" name="TextBox 16"/>
-          <p:cNvSpPr txBox="1"/>
-          <p:nvPr/>
-        </p:nvSpPr>
-        <p:spPr>
-          <a:xfrm>
-            <a:off x="932688" y="4005072"/>
-            <a:ext cx="438912" cy="420624"/>
-          </a:xfrm>
-          <a:prstGeom prst="rect">
-            <a:avLst/>
-          </a:prstGeom>
-          <a:noFill/>
-        </p:spPr>
-        <p:txBody>
-          <a:bodyPr wrap="square" anchor="ctr">
-            <a:spAutoFit/>
-          </a:bodyPr>
-          <a:lstStyle/>
-          <a:p>
-            <a:pPr algn="ctr"/>
-            <a:r>
-              <a:rPr sz="1400" b="1">
-                <a:solidFill>
-                  <a:srgbClr val="FFFFFF"/>
+            <a:pPr algn="r"/>
+            <a:r>
+              <a:rPr sz="900" b="0">
+                <a:solidFill>
+                  <a:srgbClr val="5B6372"/>
                 </a:solidFill>
                 <a:latin typeface="Arial"/>
               </a:rPr>
@@ -5498,14 +5239,14 @@
       </p:sp>
       <p:sp>
         <p:nvSpPr>
-          <p:cNvPr id="18" name="TextBox 17"/>
+          <p:cNvPr id="12" name="TextBox 11"/>
           <p:cNvSpPr txBox="1"/>
           <p:nvPr/>
         </p:nvSpPr>
         <p:spPr>
           <a:xfrm>
-            <a:off x="1536192" y="3959352"/>
-            <a:ext cx="9710928" cy="329184"/>
+            <a:off x="1554480" y="2157984"/>
+            <a:ext cx="9418320" cy="256032"/>
           </a:xfrm>
           <a:prstGeom prst="rect">
             <a:avLst/>
@@ -5520,27 +5261,27 @@
           <a:p>
             <a:pPr algn="l"/>
             <a:r>
-              <a:rPr sz="1400" b="1">
-                <a:solidFill>
-                  <a:srgbClr val="10B981"/>
+              <a:rPr sz="1050" b="1">
+                <a:solidFill>
+                  <a:srgbClr val="161B26"/>
                 </a:solidFill>
                 <a:latin typeface="Arial"/>
               </a:rPr>
-              <a:t>Decision pressure</a:t>
-            </a:r>
-          </a:p>
-        </p:txBody>
-      </p:sp>
-      <p:sp>
-        <p:nvSpPr>
-          <p:cNvPr id="19" name="TextBox 18"/>
+              <a:t>Sections:</a:t>
+            </a:r>
+          </a:p>
+        </p:txBody>
+      </p:sp>
+      <p:sp>
+        <p:nvSpPr>
+          <p:cNvPr id="13" name="TextBox 12"/>
           <p:cNvSpPr txBox="1"/>
           <p:nvPr/>
         </p:nvSpPr>
         <p:spPr>
           <a:xfrm>
-            <a:off x="1536192" y="4343400"/>
-            <a:ext cx="9710928" cy="978408"/>
+            <a:off x="960120" y="2441448"/>
+            <a:ext cx="384048" cy="246888"/>
           </a:xfrm>
           <a:prstGeom prst="rect">
             <a:avLst/>
@@ -5553,15 +5294,680 @@
           </a:bodyPr>
           <a:lstStyle/>
           <a:p>
-            <a:pPr algn="l"/>
-            <a:r>
-              <a:rPr sz="1150" b="0">
-                <a:solidFill>
-                  <a:srgbClr val="161B26"/>
+            <a:pPr algn="r"/>
+            <a:r>
+              <a:rPr sz="900" b="0">
+                <a:solidFill>
+                  <a:srgbClr val="5B6372"/>
                 </a:solidFill>
                 <a:latin typeface="Arial"/>
               </a:rPr>
-              <a:t>Prompt an approved AI assistant to analyse the workbook and propose candidate insights. Reproduce the selected calculations in Excel, then create an editable PowerPoint chart with an explicit decision implication.</a:t>
+              <a:t>3</a:t>
+            </a:r>
+          </a:p>
+        </p:txBody>
+      </p:sp>
+      <p:sp>
+        <p:nvSpPr>
+          <p:cNvPr id="14" name="TextBox 13"/>
+          <p:cNvSpPr txBox="1"/>
+          <p:nvPr/>
+        </p:nvSpPr>
+        <p:spPr>
+          <a:xfrm>
+            <a:off x="1554480" y="2441448"/>
+            <a:ext cx="9418320" cy="256032"/>
+          </a:xfrm>
+          <a:prstGeom prst="rect">
+            <a:avLst/>
+          </a:prstGeom>
+          <a:noFill/>
+        </p:spPr>
+        <p:txBody>
+          <a:bodyPr wrap="square" anchor="t">
+            <a:spAutoFit/>
+          </a:bodyPr>
+          <a:lstStyle/>
+          <a:p>
+            <a:pPr algn="l"/>
+            <a:r>
+              <a:rPr sz="1050" b="0">
+                <a:solidFill>
+                  <a:srgbClr val="161B26"/>
+                </a:solidFill>
+                <a:latin typeface="Arial"/>
+              </a:rPr>
+              <a:t>1. Beverages</a:t>
+            </a:r>
+          </a:p>
+        </p:txBody>
+      </p:sp>
+      <p:sp>
+        <p:nvSpPr>
+          <p:cNvPr id="15" name="TextBox 14"/>
+          <p:cNvSpPr txBox="1"/>
+          <p:nvPr/>
+        </p:nvSpPr>
+        <p:spPr>
+          <a:xfrm>
+            <a:off x="960120" y="2724911"/>
+            <a:ext cx="384048" cy="246888"/>
+          </a:xfrm>
+          <a:prstGeom prst="rect">
+            <a:avLst/>
+          </a:prstGeom>
+          <a:noFill/>
+        </p:spPr>
+        <p:txBody>
+          <a:bodyPr wrap="square" anchor="t">
+            <a:spAutoFit/>
+          </a:bodyPr>
+          <a:lstStyle/>
+          <a:p>
+            <a:pPr algn="r"/>
+            <a:r>
+              <a:rPr sz="900" b="0">
+                <a:solidFill>
+                  <a:srgbClr val="5B6372"/>
+                </a:solidFill>
+                <a:latin typeface="Arial"/>
+              </a:rPr>
+              <a:t>4</a:t>
+            </a:r>
+          </a:p>
+        </p:txBody>
+      </p:sp>
+      <p:sp>
+        <p:nvSpPr>
+          <p:cNvPr id="16" name="TextBox 15"/>
+          <p:cNvSpPr txBox="1"/>
+          <p:nvPr/>
+        </p:nvSpPr>
+        <p:spPr>
+          <a:xfrm>
+            <a:off x="1554480" y="2724911"/>
+            <a:ext cx="9418320" cy="256032"/>
+          </a:xfrm>
+          <a:prstGeom prst="rect">
+            <a:avLst/>
+          </a:prstGeom>
+          <a:noFill/>
+        </p:spPr>
+        <p:txBody>
+          <a:bodyPr wrap="square" anchor="t">
+            <a:spAutoFit/>
+          </a:bodyPr>
+          <a:lstStyle/>
+          <a:p>
+            <a:pPr algn="l"/>
+            <a:r>
+              <a:rPr sz="1050" b="0">
+                <a:solidFill>
+                  <a:srgbClr val="161B26"/>
+                </a:solidFill>
+                <a:latin typeface="Arial"/>
+              </a:rPr>
+              <a:t>2. Ready meals</a:t>
+            </a:r>
+          </a:p>
+        </p:txBody>
+      </p:sp>
+      <p:sp>
+        <p:nvSpPr>
+          <p:cNvPr id="17" name="TextBox 16"/>
+          <p:cNvSpPr txBox="1"/>
+          <p:nvPr/>
+        </p:nvSpPr>
+        <p:spPr>
+          <a:xfrm>
+            <a:off x="960120" y="3008376"/>
+            <a:ext cx="384048" cy="246888"/>
+          </a:xfrm>
+          <a:prstGeom prst="rect">
+            <a:avLst/>
+          </a:prstGeom>
+          <a:noFill/>
+        </p:spPr>
+        <p:txBody>
+          <a:bodyPr wrap="square" anchor="t">
+            <a:spAutoFit/>
+          </a:bodyPr>
+          <a:lstStyle/>
+          <a:p>
+            <a:pPr algn="r"/>
+            <a:r>
+              <a:rPr sz="900" b="0">
+                <a:solidFill>
+                  <a:srgbClr val="5B6372"/>
+                </a:solidFill>
+                <a:latin typeface="Arial"/>
+              </a:rPr>
+              <a:t>5</a:t>
+            </a:r>
+          </a:p>
+        </p:txBody>
+      </p:sp>
+      <p:sp>
+        <p:nvSpPr>
+          <p:cNvPr id="18" name="TextBox 17"/>
+          <p:cNvSpPr txBox="1"/>
+          <p:nvPr/>
+        </p:nvSpPr>
+        <p:spPr>
+          <a:xfrm>
+            <a:off x="1554480" y="3008376"/>
+            <a:ext cx="9418320" cy="256032"/>
+          </a:xfrm>
+          <a:prstGeom prst="rect">
+            <a:avLst/>
+          </a:prstGeom>
+          <a:noFill/>
+        </p:spPr>
+        <p:txBody>
+          <a:bodyPr wrap="square" anchor="t">
+            <a:spAutoFit/>
+          </a:bodyPr>
+          <a:lstStyle/>
+          <a:p>
+            <a:pPr algn="l"/>
+            <a:r>
+              <a:rPr sz="1050" b="0">
+                <a:solidFill>
+                  <a:srgbClr val="161B26"/>
+                </a:solidFill>
+                <a:latin typeface="Arial"/>
+              </a:rPr>
+              <a:t>3. Snacks</a:t>
+            </a:r>
+          </a:p>
+        </p:txBody>
+      </p:sp>
+      <p:sp>
+        <p:nvSpPr>
+          <p:cNvPr id="19" name="TextBox 18"/>
+          <p:cNvSpPr txBox="1"/>
+          <p:nvPr/>
+        </p:nvSpPr>
+        <p:spPr>
+          <a:xfrm>
+            <a:off x="960120" y="3291839"/>
+            <a:ext cx="384048" cy="246888"/>
+          </a:xfrm>
+          <a:prstGeom prst="rect">
+            <a:avLst/>
+          </a:prstGeom>
+          <a:noFill/>
+        </p:spPr>
+        <p:txBody>
+          <a:bodyPr wrap="square" anchor="t">
+            <a:spAutoFit/>
+          </a:bodyPr>
+          <a:lstStyle/>
+          <a:p>
+            <a:pPr algn="r"/>
+            <a:r>
+              <a:rPr sz="900" b="0">
+                <a:solidFill>
+                  <a:srgbClr val="5B6372"/>
+                </a:solidFill>
+                <a:latin typeface="Arial"/>
+              </a:rPr>
+              <a:t>6</a:t>
+            </a:r>
+          </a:p>
+        </p:txBody>
+      </p:sp>
+      <p:sp>
+        <p:nvSpPr>
+          <p:cNvPr id="20" name="TextBox 19"/>
+          <p:cNvSpPr txBox="1"/>
+          <p:nvPr/>
+        </p:nvSpPr>
+        <p:spPr>
+          <a:xfrm>
+            <a:off x="1554480" y="3291839"/>
+            <a:ext cx="9418320" cy="256032"/>
+          </a:xfrm>
+          <a:prstGeom prst="rect">
+            <a:avLst/>
+          </a:prstGeom>
+          <a:noFill/>
+        </p:spPr>
+        <p:txBody>
+          <a:bodyPr wrap="square" anchor="t">
+            <a:spAutoFit/>
+          </a:bodyPr>
+          <a:lstStyle/>
+          <a:p>
+            <a:pPr algn="l"/>
+            <a:r>
+              <a:rPr sz="1050" b="0">
+                <a:solidFill>
+                  <a:srgbClr val="161B26"/>
+                </a:solidFill>
+                <a:latin typeface="Arial"/>
+              </a:rPr>
+              <a:t>4. Household</a:t>
+            </a:r>
+          </a:p>
+        </p:txBody>
+      </p:sp>
+      <p:sp>
+        <p:nvSpPr>
+          <p:cNvPr id="21" name="TextBox 20"/>
+          <p:cNvSpPr txBox="1"/>
+          <p:nvPr/>
+        </p:nvSpPr>
+        <p:spPr>
+          <a:xfrm>
+            <a:off x="960120" y="3575303"/>
+            <a:ext cx="384048" cy="246888"/>
+          </a:xfrm>
+          <a:prstGeom prst="rect">
+            <a:avLst/>
+          </a:prstGeom>
+          <a:noFill/>
+        </p:spPr>
+        <p:txBody>
+          <a:bodyPr wrap="square" anchor="t">
+            <a:spAutoFit/>
+          </a:bodyPr>
+          <a:lstStyle/>
+          <a:p>
+            <a:pPr algn="r"/>
+            <a:r>
+              <a:rPr sz="900" b="0">
+                <a:solidFill>
+                  <a:srgbClr val="5B6372"/>
+                </a:solidFill>
+                <a:latin typeface="Arial"/>
+              </a:rPr>
+              <a:t>7</a:t>
+            </a:r>
+          </a:p>
+        </p:txBody>
+      </p:sp>
+      <p:sp>
+        <p:nvSpPr>
+          <p:cNvPr id="22" name="TextBox 21"/>
+          <p:cNvSpPr txBox="1"/>
+          <p:nvPr/>
+        </p:nvSpPr>
+        <p:spPr>
+          <a:xfrm>
+            <a:off x="1554480" y="3575303"/>
+            <a:ext cx="9418320" cy="256032"/>
+          </a:xfrm>
+          <a:prstGeom prst="rect">
+            <a:avLst/>
+          </a:prstGeom>
+          <a:noFill/>
+        </p:spPr>
+        <p:txBody>
+          <a:bodyPr wrap="square" anchor="t">
+            <a:spAutoFit/>
+          </a:bodyPr>
+          <a:lstStyle/>
+          <a:p>
+            <a:pPr algn="l"/>
+            <a:r>
+              <a:rPr sz="1050" b="0">
+                <a:solidFill>
+                  <a:srgbClr val="161B26"/>
+                </a:solidFill>
+                <a:latin typeface="Arial"/>
+              </a:rPr>
+              <a:t>5. Metric</a:t>
+            </a:r>
+          </a:p>
+        </p:txBody>
+      </p:sp>
+      <p:sp>
+        <p:nvSpPr>
+          <p:cNvPr id="23" name="TextBox 22"/>
+          <p:cNvSpPr txBox="1"/>
+          <p:nvPr/>
+        </p:nvSpPr>
+        <p:spPr>
+          <a:xfrm>
+            <a:off x="960120" y="3858768"/>
+            <a:ext cx="384048" cy="246888"/>
+          </a:xfrm>
+          <a:prstGeom prst="rect">
+            <a:avLst/>
+          </a:prstGeom>
+          <a:noFill/>
+        </p:spPr>
+        <p:txBody>
+          <a:bodyPr wrap="square" anchor="t">
+            <a:spAutoFit/>
+          </a:bodyPr>
+          <a:lstStyle/>
+          <a:p>
+            <a:pPr algn="r"/>
+            <a:r>
+              <a:rPr sz="900" b="0">
+                <a:solidFill>
+                  <a:srgbClr val="5B6372"/>
+                </a:solidFill>
+                <a:latin typeface="Arial"/>
+              </a:rPr>
+              <a:t>8</a:t>
+            </a:r>
+          </a:p>
+        </p:txBody>
+      </p:sp>
+      <p:sp>
+        <p:nvSpPr>
+          <p:cNvPr id="24" name="TextBox 23"/>
+          <p:cNvSpPr txBox="1"/>
+          <p:nvPr/>
+        </p:nvSpPr>
+        <p:spPr>
+          <a:xfrm>
+            <a:off x="1554480" y="3858768"/>
+            <a:ext cx="9418320" cy="256032"/>
+          </a:xfrm>
+          <a:prstGeom prst="rect">
+            <a:avLst/>
+          </a:prstGeom>
+          <a:noFill/>
+        </p:spPr>
+        <p:txBody>
+          <a:bodyPr wrap="square" anchor="t">
+            <a:spAutoFit/>
+          </a:bodyPr>
+          <a:lstStyle/>
+          <a:p>
+            <a:pPr algn="l"/>
+            <a:r>
+              <a:rPr sz="1050" b="0">
+                <a:solidFill>
+                  <a:srgbClr val="7C3AED"/>
+                </a:solidFill>
+                <a:latin typeface="Arial"/>
+              </a:rPr>
+              <a:t>Audience: marketing leadership team</a:t>
+            </a:r>
+          </a:p>
+        </p:txBody>
+      </p:sp>
+      <p:sp>
+        <p:nvSpPr>
+          <p:cNvPr id="25" name="TextBox 24"/>
+          <p:cNvSpPr txBox="1"/>
+          <p:nvPr/>
+        </p:nvSpPr>
+        <p:spPr>
+          <a:xfrm>
+            <a:off x="960120" y="4142231"/>
+            <a:ext cx="384048" cy="246888"/>
+          </a:xfrm>
+          <a:prstGeom prst="rect">
+            <a:avLst/>
+          </a:prstGeom>
+          <a:noFill/>
+        </p:spPr>
+        <p:txBody>
+          <a:bodyPr wrap="square" anchor="t">
+            <a:spAutoFit/>
+          </a:bodyPr>
+          <a:lstStyle/>
+          <a:p>
+            <a:pPr algn="r"/>
+            <a:r>
+              <a:rPr sz="900" b="0">
+                <a:solidFill>
+                  <a:srgbClr val="5B6372"/>
+                </a:solidFill>
+                <a:latin typeface="Arial"/>
+              </a:rPr>
+              <a:t>9</a:t>
+            </a:r>
+          </a:p>
+        </p:txBody>
+      </p:sp>
+      <p:sp>
+        <p:nvSpPr>
+          <p:cNvPr id="26" name="TextBox 25"/>
+          <p:cNvSpPr txBox="1"/>
+          <p:nvPr/>
+        </p:nvSpPr>
+        <p:spPr>
+          <a:xfrm>
+            <a:off x="1554480" y="4142231"/>
+            <a:ext cx="9418320" cy="256032"/>
+          </a:xfrm>
+          <a:prstGeom prst="rect">
+            <a:avLst/>
+          </a:prstGeom>
+          <a:noFill/>
+        </p:spPr>
+        <p:txBody>
+          <a:bodyPr wrap="square" anchor="t">
+            <a:spAutoFit/>
+          </a:bodyPr>
+          <a:lstStyle/>
+          <a:p>
+            <a:pPr algn="l"/>
+            <a:r>
+              <a:rPr sz="1050" b="0">
+                <a:solidFill>
+                  <a:srgbClr val="7C3AED"/>
+                </a:solidFill>
+                <a:latin typeface="Arial"/>
+              </a:rPr>
+              <a:t>Decision: The chart is native/editable, uses an appropriate form, retains source context and makes a proportionate product-promotion recommendation.</a:t>
+            </a:r>
+          </a:p>
+        </p:txBody>
+      </p:sp>
+      <p:sp>
+        <p:nvSpPr>
+          <p:cNvPr id="27" name="TextBox 26"/>
+          <p:cNvSpPr txBox="1"/>
+          <p:nvPr/>
+        </p:nvSpPr>
+        <p:spPr>
+          <a:xfrm>
+            <a:off x="960120" y="4425696"/>
+            <a:ext cx="384048" cy="246888"/>
+          </a:xfrm>
+          <a:prstGeom prst="rect">
+            <a:avLst/>
+          </a:prstGeom>
+          <a:noFill/>
+        </p:spPr>
+        <p:txBody>
+          <a:bodyPr wrap="square" anchor="t">
+            <a:spAutoFit/>
+          </a:bodyPr>
+          <a:lstStyle/>
+          <a:p>
+            <a:pPr algn="r"/>
+            <a:r>
+              <a:rPr sz="900" b="0">
+                <a:solidFill>
+                  <a:srgbClr val="5B6372"/>
+                </a:solidFill>
+                <a:latin typeface="Arial"/>
+              </a:rPr>
+              <a:t>10</a:t>
+            </a:r>
+          </a:p>
+        </p:txBody>
+      </p:sp>
+      <p:sp>
+        <p:nvSpPr>
+          <p:cNvPr id="28" name="TextBox 27"/>
+          <p:cNvSpPr txBox="1"/>
+          <p:nvPr/>
+        </p:nvSpPr>
+        <p:spPr>
+          <a:xfrm>
+            <a:off x="1554480" y="4425696"/>
+            <a:ext cx="9418320" cy="256032"/>
+          </a:xfrm>
+          <a:prstGeom prst="rect">
+            <a:avLst/>
+          </a:prstGeom>
+          <a:noFill/>
+        </p:spPr>
+        <p:txBody>
+          <a:bodyPr wrap="square" anchor="t">
+            <a:spAutoFit/>
+          </a:bodyPr>
+          <a:lstStyle/>
+          <a:p>
+            <a:pPr algn="l"/>
+            <a:r>
+              <a:rPr sz="1050" b="0">
+                <a:solidFill>
+                  <a:srgbClr val="7C3AED"/>
+                </a:solidFill>
+                <a:latin typeface="Arial"/>
+              </a:rPr>
+              <a:t>Style: professional, concise, high contrast and accessible</a:t>
+            </a:r>
+          </a:p>
+        </p:txBody>
+      </p:sp>
+      <p:sp>
+        <p:nvSpPr>
+          <p:cNvPr id="29" name="TextBox 28"/>
+          <p:cNvSpPr txBox="1"/>
+          <p:nvPr/>
+        </p:nvSpPr>
+        <p:spPr>
+          <a:xfrm>
+            <a:off x="960120" y="4709160"/>
+            <a:ext cx="384048" cy="246888"/>
+          </a:xfrm>
+          <a:prstGeom prst="rect">
+            <a:avLst/>
+          </a:prstGeom>
+          <a:noFill/>
+        </p:spPr>
+        <p:txBody>
+          <a:bodyPr wrap="square" anchor="t">
+            <a:spAutoFit/>
+          </a:bodyPr>
+          <a:lstStyle/>
+          <a:p>
+            <a:pPr algn="r"/>
+            <a:r>
+              <a:rPr sz="900" b="0">
+                <a:solidFill>
+                  <a:srgbClr val="5B6372"/>
+                </a:solidFill>
+                <a:latin typeface="Arial"/>
+              </a:rPr>
+              <a:t>11</a:t>
+            </a:r>
+          </a:p>
+        </p:txBody>
+      </p:sp>
+      <p:sp>
+        <p:nvSpPr>
+          <p:cNvPr id="30" name="TextBox 29"/>
+          <p:cNvSpPr txBox="1"/>
+          <p:nvPr/>
+        </p:nvSpPr>
+        <p:spPr>
+          <a:xfrm>
+            <a:off x="1554480" y="4709160"/>
+            <a:ext cx="9418320" cy="256032"/>
+          </a:xfrm>
+          <a:prstGeom prst="rect">
+            <a:avLst/>
+          </a:prstGeom>
+          <a:noFill/>
+        </p:spPr>
+        <p:txBody>
+          <a:bodyPr wrap="square" anchor="t">
+            <a:spAutoFit/>
+          </a:bodyPr>
+          <a:lstStyle/>
+          <a:p>
+            <a:pPr algn="l"/>
+            <a:r>
+              <a:rPr sz="1050" b="0">
+                <a:solidFill>
+                  <a:srgbClr val="7C3AED"/>
+                </a:solidFill>
+                <a:latin typeface="Arial"/>
+              </a:rPr>
+              <a:t>Format: Wide for PowerPoint unless the brief requires Portrait</a:t>
+            </a:r>
+          </a:p>
+        </p:txBody>
+      </p:sp>
+      <p:sp>
+        <p:nvSpPr>
+          <p:cNvPr id="31" name="TextBox 30"/>
+          <p:cNvSpPr txBox="1"/>
+          <p:nvPr/>
+        </p:nvSpPr>
+        <p:spPr>
+          <a:xfrm>
+            <a:off x="960120" y="4992624"/>
+            <a:ext cx="384048" cy="246888"/>
+          </a:xfrm>
+          <a:prstGeom prst="rect">
+            <a:avLst/>
+          </a:prstGeom>
+          <a:noFill/>
+        </p:spPr>
+        <p:txBody>
+          <a:bodyPr wrap="square" anchor="t">
+            <a:spAutoFit/>
+          </a:bodyPr>
+          <a:lstStyle/>
+          <a:p>
+            <a:pPr algn="r"/>
+            <a:r>
+              <a:rPr sz="900" b="0">
+                <a:solidFill>
+                  <a:srgbClr val="5B6372"/>
+                </a:solidFill>
+                <a:latin typeface="Arial"/>
+              </a:rPr>
+              <a:t>12</a:t>
+            </a:r>
+          </a:p>
+        </p:txBody>
+      </p:sp>
+      <p:sp>
+        <p:nvSpPr>
+          <p:cNvPr id="32" name="TextBox 31"/>
+          <p:cNvSpPr txBox="1"/>
+          <p:nvPr/>
+        </p:nvSpPr>
+        <p:spPr>
+          <a:xfrm>
+            <a:off x="1554480" y="4992624"/>
+            <a:ext cx="9418320" cy="256032"/>
+          </a:xfrm>
+          <a:prstGeom prst="rect">
+            <a:avLst/>
+          </a:prstGeom>
+          <a:noFill/>
+        </p:spPr>
+        <p:txBody>
+          <a:bodyPr wrap="square" anchor="t">
+            <a:spAutoFit/>
+          </a:bodyPr>
+          <a:lstStyle/>
+          <a:p>
+            <a:pPr algn="l"/>
+            <a:r>
+              <a:rPr sz="1050" b="0">
+                <a:solidFill>
+                  <a:srgbClr val="7C3AED"/>
+                </a:solidFill>
+                <a:latin typeface="Arial"/>
+              </a:rPr>
+              <a:t>Source rule: use only the attached approved or synthetic course data; include period and source; do not invent facts</a:t>
             </a:r>
           </a:p>
         </p:txBody>
@@ -5644,11 +6050,11 @@
             <a:avLst/>
           </a:prstGeom>
           <a:solidFill>
-            <a:srgbClr val="10B981"/>
+            <a:srgbClr val="1F6FEB"/>
           </a:solidFill>
           <a:ln>
             <a:solidFill>
-              <a:srgbClr val="10B981"/>
+              <a:srgbClr val="1F6FEB"/>
             </a:solidFill>
           </a:ln>
         </p:spPr>
@@ -5700,11 +6106,11 @@
             <a:r>
               <a:rPr sz="1100" b="1">
                 <a:solidFill>
-                  <a:srgbClr val="10B981"/>
+                  <a:srgbClr val="1F6FEB"/>
                 </a:solidFill>
                 <a:latin typeface="Arial"/>
               </a:rPr>
-              <a:t>ACTIVITY 05 · FRAMEWORK</a:t>
+              <a:t>ACTIVITY 05 · CONTEXT</a:t>
             </a:r>
           </a:p>
         </p:txBody>
@@ -5739,7 +6145,7 @@
                 </a:solidFill>
                 <a:latin typeface="Arial"/>
               </a:rPr>
-              <a:t>Data-to-Decision Chart</a:t>
+              <a:t>The Scenario</a:t>
             </a:r>
           </a:p>
         </p:txBody>
@@ -5832,8 +6238,8 @@
         </p:nvSpPr>
         <p:spPr>
           <a:xfrm>
-            <a:off x="685800" y="1920240"/>
-            <a:ext cx="1997049" cy="3566160"/>
+            <a:off x="731520" y="1783080"/>
+            <a:ext cx="10698480" cy="1691640"/>
           </a:xfrm>
           <a:prstGeom prst="roundRect">
             <a:avLst/>
@@ -5877,8 +6283,8 @@
         </p:nvSpPr>
         <p:spPr>
           <a:xfrm>
-            <a:off x="685800" y="1920240"/>
-            <a:ext cx="73152" cy="3566160"/>
+            <a:off x="731520" y="1783080"/>
+            <a:ext cx="73152" cy="1691640"/>
           </a:xfrm>
           <a:prstGeom prst="rect">
             <a:avLst/>
@@ -5922,7 +6328,7 @@
         </p:nvSpPr>
         <p:spPr>
           <a:xfrm>
-            <a:off x="886968" y="2139696"/>
+            <a:off x="932688" y="2002536"/>
             <a:ext cx="438912" cy="438912"/>
           </a:xfrm>
           <a:prstGeom prst="roundRect">
@@ -5967,7 +6373,7 @@
         </p:nvSpPr>
         <p:spPr>
           <a:xfrm>
-            <a:off x="886968" y="2148840"/>
+            <a:off x="932688" y="2011680"/>
             <a:ext cx="438912" cy="420624"/>
           </a:xfrm>
           <a:prstGeom prst="rect">
@@ -6002,8 +6408,8 @@
         </p:nvSpPr>
         <p:spPr>
           <a:xfrm>
-            <a:off x="1490472" y="2103120"/>
-            <a:ext cx="1009497" cy="329184"/>
+            <a:off x="1536192" y="1965960"/>
+            <a:ext cx="9710928" cy="329184"/>
           </a:xfrm>
           <a:prstGeom prst="rect">
             <a:avLst/>
@@ -6024,7 +6430,7 @@
                 </a:solidFill>
                 <a:latin typeface="Arial"/>
               </a:rPr>
-              <a:t>Question</a:t>
+              <a:t>Context</a:t>
             </a:r>
           </a:p>
         </p:txBody>
@@ -6037,8 +6443,8 @@
         </p:nvSpPr>
         <p:spPr>
           <a:xfrm>
-            <a:off x="1490472" y="2487168"/>
-            <a:ext cx="1009497" cy="2852928"/>
+            <a:off x="1536192" y="2350008"/>
+            <a:ext cx="9710928" cy="978408"/>
           </a:xfrm>
           <a:prstGeom prst="rect">
             <a:avLst/>
@@ -6059,7 +6465,7 @@
                 </a:solidFill>
                 <a:latin typeface="Arial"/>
               </a:rPr>
-              <a:t>Define which products to promote and why.</a:t>
+              <a:t>Northstar's marketing team must choose one product family for the next promotion. The supplied workbook contains monthly revenue, units, margin and returns for four categories.</a:t>
             </a:r>
           </a:p>
         </p:txBody>
@@ -6072,8 +6478,8 @@
         </p:nvSpPr>
         <p:spPr>
           <a:xfrm>
-            <a:off x="2884017" y="1920240"/>
-            <a:ext cx="1997049" cy="3566160"/>
+            <a:off x="731520" y="3776472"/>
+            <a:ext cx="10698480" cy="1691640"/>
           </a:xfrm>
           <a:prstGeom prst="roundRect">
             <a:avLst/>
@@ -6117,8 +6523,8 @@
         </p:nvSpPr>
         <p:spPr>
           <a:xfrm>
-            <a:off x="2884017" y="1920240"/>
-            <a:ext cx="73152" cy="3566160"/>
+            <a:off x="731520" y="3776472"/>
+            <a:ext cx="73152" cy="1691640"/>
           </a:xfrm>
           <a:prstGeom prst="rect">
             <a:avLst/>
@@ -6162,7 +6568,7 @@
         </p:nvSpPr>
         <p:spPr>
           <a:xfrm>
-            <a:off x="3085185" y="2139696"/>
+            <a:off x="932688" y="3995928"/>
             <a:ext cx="438912" cy="438912"/>
           </a:xfrm>
           <a:prstGeom prst="roundRect">
@@ -6207,7 +6613,7 @@
         </p:nvSpPr>
         <p:spPr>
           <a:xfrm>
-            <a:off x="3085185" y="2148840"/>
+            <a:off x="932688" y="4005072"/>
             <a:ext cx="438912" cy="420624"/>
           </a:xfrm>
           <a:prstGeom prst="rect">
@@ -6242,8 +6648,8 @@
         </p:nvSpPr>
         <p:spPr>
           <a:xfrm>
-            <a:off x="3688689" y="2103120"/>
-            <a:ext cx="1009497" cy="329184"/>
+            <a:off x="1536192" y="3959352"/>
+            <a:ext cx="9710928" cy="329184"/>
           </a:xfrm>
           <a:prstGeom prst="rect">
             <a:avLst/>
@@ -6264,7 +6670,7 @@
                 </a:solidFill>
                 <a:latin typeface="Arial"/>
               </a:rPr>
-              <a:t>Prepare</a:t>
+              <a:t>Decision pressure</a:t>
             </a:r>
           </a:p>
         </p:txBody>
@@ -6277,8 +6683,8 @@
         </p:nvSpPr>
         <p:spPr>
           <a:xfrm>
-            <a:off x="3688689" y="2487168"/>
-            <a:ext cx="1009497" cy="2852928"/>
+            <a:off x="1536192" y="4343400"/>
+            <a:ext cx="9710928" cy="978408"/>
           </a:xfrm>
           <a:prstGeom prst="rect">
             <a:avLst/>
@@ -6299,727 +6705,7 @@
                 </a:solidFill>
                 <a:latin typeface="Arial"/>
               </a:rPr>
-              <a:t>Ask AI to flag data types, missing values, duplicates and inconsistent periods.</a:t>
-            </a:r>
-          </a:p>
-        </p:txBody>
-      </p:sp>
-      <p:sp>
-        <p:nvSpPr>
-          <p:cNvPr id="20" name="Rounded Rectangle 19"/>
-          <p:cNvSpPr/>
-          <p:nvPr/>
-        </p:nvSpPr>
-        <p:spPr>
-          <a:xfrm>
-            <a:off x="5082235" y="1920240"/>
-            <a:ext cx="1997049" cy="3566160"/>
-          </a:xfrm>
-          <a:prstGeom prst="roundRect">
-            <a:avLst/>
-          </a:prstGeom>
-          <a:solidFill>
-            <a:srgbClr val="F5F8FC"/>
-          </a:solidFill>
-          <a:ln>
-            <a:solidFill>
-              <a:srgbClr val="E2E8F0"/>
-            </a:solidFill>
-          </a:ln>
-        </p:spPr>
-        <p:style>
-          <a:lnRef idx="1">
-            <a:schemeClr val="accent1"/>
-          </a:lnRef>
-          <a:fillRef idx="3">
-            <a:schemeClr val="accent1"/>
-          </a:fillRef>
-          <a:effectRef idx="2">
-            <a:schemeClr val="accent1"/>
-          </a:effectRef>
-          <a:fontRef idx="minor">
-            <a:schemeClr val="lt1"/>
-          </a:fontRef>
-        </p:style>
-        <p:txBody>
-          <a:bodyPr rtlCol="0" anchor="ctr"/>
-          <a:lstStyle/>
-          <a:p>
-            <a:pPr algn="ctr"/>
-          </a:p>
-        </p:txBody>
-      </p:sp>
-      <p:sp>
-        <p:nvSpPr>
-          <p:cNvPr id="21" name="Rectangle 20"/>
-          <p:cNvSpPr/>
-          <p:nvPr/>
-        </p:nvSpPr>
-        <p:spPr>
-          <a:xfrm>
-            <a:off x="5082235" y="1920240"/>
-            <a:ext cx="73152" cy="3566160"/>
-          </a:xfrm>
-          <a:prstGeom prst="rect">
-            <a:avLst/>
-          </a:prstGeom>
-          <a:solidFill>
-            <a:srgbClr val="7C3AED"/>
-          </a:solidFill>
-          <a:ln>
-            <a:solidFill>
-              <a:srgbClr val="7C3AED"/>
-            </a:solidFill>
-          </a:ln>
-        </p:spPr>
-        <p:style>
-          <a:lnRef idx="1">
-            <a:schemeClr val="accent1"/>
-          </a:lnRef>
-          <a:fillRef idx="3">
-            <a:schemeClr val="accent1"/>
-          </a:fillRef>
-          <a:effectRef idx="2">
-            <a:schemeClr val="accent1"/>
-          </a:effectRef>
-          <a:fontRef idx="minor">
-            <a:schemeClr val="lt1"/>
-          </a:fontRef>
-        </p:style>
-        <p:txBody>
-          <a:bodyPr rtlCol="0" anchor="ctr"/>
-          <a:lstStyle/>
-          <a:p>
-            <a:pPr algn="ctr"/>
-          </a:p>
-        </p:txBody>
-      </p:sp>
-      <p:sp>
-        <p:nvSpPr>
-          <p:cNvPr id="22" name="Rounded Rectangle 21"/>
-          <p:cNvSpPr/>
-          <p:nvPr/>
-        </p:nvSpPr>
-        <p:spPr>
-          <a:xfrm>
-            <a:off x="5283403" y="2139696"/>
-            <a:ext cx="438912" cy="438912"/>
-          </a:xfrm>
-          <a:prstGeom prst="roundRect">
-            <a:avLst/>
-          </a:prstGeom>
-          <a:solidFill>
-            <a:srgbClr val="7C3AED"/>
-          </a:solidFill>
-          <a:ln>
-            <a:solidFill>
-              <a:srgbClr val="7C3AED"/>
-            </a:solidFill>
-          </a:ln>
-        </p:spPr>
-        <p:style>
-          <a:lnRef idx="1">
-            <a:schemeClr val="accent1"/>
-          </a:lnRef>
-          <a:fillRef idx="3">
-            <a:schemeClr val="accent1"/>
-          </a:fillRef>
-          <a:effectRef idx="2">
-            <a:schemeClr val="accent1"/>
-          </a:effectRef>
-          <a:fontRef idx="minor">
-            <a:schemeClr val="lt1"/>
-          </a:fontRef>
-        </p:style>
-        <p:txBody>
-          <a:bodyPr rtlCol="0" anchor="ctr"/>
-          <a:lstStyle/>
-          <a:p>
-            <a:pPr algn="ctr"/>
-          </a:p>
-        </p:txBody>
-      </p:sp>
-      <p:sp>
-        <p:nvSpPr>
-          <p:cNvPr id="23" name="TextBox 22"/>
-          <p:cNvSpPr txBox="1"/>
-          <p:nvPr/>
-        </p:nvSpPr>
-        <p:spPr>
-          <a:xfrm>
-            <a:off x="5283403" y="2148840"/>
-            <a:ext cx="438912" cy="420624"/>
-          </a:xfrm>
-          <a:prstGeom prst="rect">
-            <a:avLst/>
-          </a:prstGeom>
-          <a:noFill/>
-        </p:spPr>
-        <p:txBody>
-          <a:bodyPr wrap="square" anchor="ctr">
-            <a:spAutoFit/>
-          </a:bodyPr>
-          <a:lstStyle/>
-          <a:p>
-            <a:pPr algn="ctr"/>
-            <a:r>
-              <a:rPr sz="1400" b="1">
-                <a:solidFill>
-                  <a:srgbClr val="FFFFFF"/>
-                </a:solidFill>
-                <a:latin typeface="Arial"/>
-              </a:rPr>
-              <a:t>3</a:t>
-            </a:r>
-          </a:p>
-        </p:txBody>
-      </p:sp>
-      <p:sp>
-        <p:nvSpPr>
-          <p:cNvPr id="24" name="TextBox 23"/>
-          <p:cNvSpPr txBox="1"/>
-          <p:nvPr/>
-        </p:nvSpPr>
-        <p:spPr>
-          <a:xfrm>
-            <a:off x="5886907" y="2103120"/>
-            <a:ext cx="1009497" cy="329184"/>
-          </a:xfrm>
-          <a:prstGeom prst="rect">
-            <a:avLst/>
-          </a:prstGeom>
-          <a:noFill/>
-        </p:spPr>
-        <p:txBody>
-          <a:bodyPr wrap="square" anchor="t">
-            <a:spAutoFit/>
-          </a:bodyPr>
-          <a:lstStyle/>
-          <a:p>
-            <a:pPr algn="l"/>
-            <a:r>
-              <a:rPr sz="1400" b="1">
-                <a:solidFill>
-                  <a:srgbClr val="7C3AED"/>
-                </a:solidFill>
-                <a:latin typeface="Arial"/>
-              </a:rPr>
-              <a:t>Choose</a:t>
-            </a:r>
-          </a:p>
-        </p:txBody>
-      </p:sp>
-      <p:sp>
-        <p:nvSpPr>
-          <p:cNvPr id="25" name="TextBox 24"/>
-          <p:cNvSpPr txBox="1"/>
-          <p:nvPr/>
-        </p:nvSpPr>
-        <p:spPr>
-          <a:xfrm>
-            <a:off x="5886907" y="2487168"/>
-            <a:ext cx="1009497" cy="2852928"/>
-          </a:xfrm>
-          <a:prstGeom prst="rect">
-            <a:avLst/>
-          </a:prstGeom>
-          <a:noFill/>
-        </p:spPr>
-        <p:txBody>
-          <a:bodyPr wrap="square" anchor="t">
-            <a:spAutoFit/>
-          </a:bodyPr>
-          <a:lstStyle/>
-          <a:p>
-            <a:pPr algn="l"/>
-            <a:r>
-              <a:rPr sz="1150" b="0">
-                <a:solidFill>
-                  <a:srgbClr val="161B26"/>
-                </a:solidFill>
-                <a:latin typeface="Arial"/>
-              </a:rPr>
-              <a:t>Select metric and chart based on the relationship.</a:t>
-            </a:r>
-          </a:p>
-        </p:txBody>
-      </p:sp>
-      <p:sp>
-        <p:nvSpPr>
-          <p:cNvPr id="26" name="Rounded Rectangle 25"/>
-          <p:cNvSpPr/>
-          <p:nvPr/>
-        </p:nvSpPr>
-        <p:spPr>
-          <a:xfrm>
-            <a:off x="7280452" y="1920240"/>
-            <a:ext cx="1997049" cy="3566160"/>
-          </a:xfrm>
-          <a:prstGeom prst="roundRect">
-            <a:avLst/>
-          </a:prstGeom>
-          <a:solidFill>
-            <a:srgbClr val="F5F8FC"/>
-          </a:solidFill>
-          <a:ln>
-            <a:solidFill>
-              <a:srgbClr val="E2E8F0"/>
-            </a:solidFill>
-          </a:ln>
-        </p:spPr>
-        <p:style>
-          <a:lnRef idx="1">
-            <a:schemeClr val="accent1"/>
-          </a:lnRef>
-          <a:fillRef idx="3">
-            <a:schemeClr val="accent1"/>
-          </a:fillRef>
-          <a:effectRef idx="2">
-            <a:schemeClr val="accent1"/>
-          </a:effectRef>
-          <a:fontRef idx="minor">
-            <a:schemeClr val="lt1"/>
-          </a:fontRef>
-        </p:style>
-        <p:txBody>
-          <a:bodyPr rtlCol="0" anchor="ctr"/>
-          <a:lstStyle/>
-          <a:p>
-            <a:pPr algn="ctr"/>
-          </a:p>
-        </p:txBody>
-      </p:sp>
-      <p:sp>
-        <p:nvSpPr>
-          <p:cNvPr id="27" name="Rectangle 26"/>
-          <p:cNvSpPr/>
-          <p:nvPr/>
-        </p:nvSpPr>
-        <p:spPr>
-          <a:xfrm>
-            <a:off x="7280452" y="1920240"/>
-            <a:ext cx="73152" cy="3566160"/>
-          </a:xfrm>
-          <a:prstGeom prst="rect">
-            <a:avLst/>
-          </a:prstGeom>
-          <a:solidFill>
-            <a:srgbClr val="F59E0B"/>
-          </a:solidFill>
-          <a:ln>
-            <a:solidFill>
-              <a:srgbClr val="F59E0B"/>
-            </a:solidFill>
-          </a:ln>
-        </p:spPr>
-        <p:style>
-          <a:lnRef idx="1">
-            <a:schemeClr val="accent1"/>
-          </a:lnRef>
-          <a:fillRef idx="3">
-            <a:schemeClr val="accent1"/>
-          </a:fillRef>
-          <a:effectRef idx="2">
-            <a:schemeClr val="accent1"/>
-          </a:effectRef>
-          <a:fontRef idx="minor">
-            <a:schemeClr val="lt1"/>
-          </a:fontRef>
-        </p:style>
-        <p:txBody>
-          <a:bodyPr rtlCol="0" anchor="ctr"/>
-          <a:lstStyle/>
-          <a:p>
-            <a:pPr algn="ctr"/>
-          </a:p>
-        </p:txBody>
-      </p:sp>
-      <p:sp>
-        <p:nvSpPr>
-          <p:cNvPr id="28" name="Rounded Rectangle 27"/>
-          <p:cNvSpPr/>
-          <p:nvPr/>
-        </p:nvSpPr>
-        <p:spPr>
-          <a:xfrm>
-            <a:off x="7481620" y="2139696"/>
-            <a:ext cx="438912" cy="438912"/>
-          </a:xfrm>
-          <a:prstGeom prst="roundRect">
-            <a:avLst/>
-          </a:prstGeom>
-          <a:solidFill>
-            <a:srgbClr val="F59E0B"/>
-          </a:solidFill>
-          <a:ln>
-            <a:solidFill>
-              <a:srgbClr val="F59E0B"/>
-            </a:solidFill>
-          </a:ln>
-        </p:spPr>
-        <p:style>
-          <a:lnRef idx="1">
-            <a:schemeClr val="accent1"/>
-          </a:lnRef>
-          <a:fillRef idx="3">
-            <a:schemeClr val="accent1"/>
-          </a:fillRef>
-          <a:effectRef idx="2">
-            <a:schemeClr val="accent1"/>
-          </a:effectRef>
-          <a:fontRef idx="minor">
-            <a:schemeClr val="lt1"/>
-          </a:fontRef>
-        </p:style>
-        <p:txBody>
-          <a:bodyPr rtlCol="0" anchor="ctr"/>
-          <a:lstStyle/>
-          <a:p>
-            <a:pPr algn="ctr"/>
-          </a:p>
-        </p:txBody>
-      </p:sp>
-      <p:sp>
-        <p:nvSpPr>
-          <p:cNvPr id="29" name="TextBox 28"/>
-          <p:cNvSpPr txBox="1"/>
-          <p:nvPr/>
-        </p:nvSpPr>
-        <p:spPr>
-          <a:xfrm>
-            <a:off x="7481620" y="2148840"/>
-            <a:ext cx="438912" cy="420624"/>
-          </a:xfrm>
-          <a:prstGeom prst="rect">
-            <a:avLst/>
-          </a:prstGeom>
-          <a:noFill/>
-        </p:spPr>
-        <p:txBody>
-          <a:bodyPr wrap="square" anchor="ctr">
-            <a:spAutoFit/>
-          </a:bodyPr>
-          <a:lstStyle/>
-          <a:p>
-            <a:pPr algn="ctr"/>
-            <a:r>
-              <a:rPr sz="1400" b="1">
-                <a:solidFill>
-                  <a:srgbClr val="FFFFFF"/>
-                </a:solidFill>
-                <a:latin typeface="Arial"/>
-              </a:rPr>
-              <a:t>4</a:t>
-            </a:r>
-          </a:p>
-        </p:txBody>
-      </p:sp>
-      <p:sp>
-        <p:nvSpPr>
-          <p:cNvPr id="30" name="TextBox 29"/>
-          <p:cNvSpPr txBox="1"/>
-          <p:nvPr/>
-        </p:nvSpPr>
-        <p:spPr>
-          <a:xfrm>
-            <a:off x="8085124" y="2103120"/>
-            <a:ext cx="1009497" cy="329184"/>
-          </a:xfrm>
-          <a:prstGeom prst="rect">
-            <a:avLst/>
-          </a:prstGeom>
-          <a:noFill/>
-        </p:spPr>
-        <p:txBody>
-          <a:bodyPr wrap="square" anchor="t">
-            <a:spAutoFit/>
-          </a:bodyPr>
-          <a:lstStyle/>
-          <a:p>
-            <a:pPr algn="l"/>
-            <a:r>
-              <a:rPr sz="1400" b="1">
-                <a:solidFill>
-                  <a:srgbClr val="F59E0B"/>
-                </a:solidFill>
-                <a:latin typeface="Arial"/>
-              </a:rPr>
-              <a:t>Build</a:t>
-            </a:r>
-          </a:p>
-        </p:txBody>
-      </p:sp>
-      <p:sp>
-        <p:nvSpPr>
-          <p:cNvPr id="31" name="TextBox 30"/>
-          <p:cNvSpPr txBox="1"/>
-          <p:nvPr/>
-        </p:nvSpPr>
-        <p:spPr>
-          <a:xfrm>
-            <a:off x="8085124" y="2487168"/>
-            <a:ext cx="1009497" cy="2852928"/>
-          </a:xfrm>
-          <a:prstGeom prst="rect">
-            <a:avLst/>
-          </a:prstGeom>
-          <a:noFill/>
-        </p:spPr>
-        <p:txBody>
-          <a:bodyPr wrap="square" anchor="t">
-            <a:spAutoFit/>
-          </a:bodyPr>
-          <a:lstStyle/>
-          <a:p>
-            <a:pPr algn="l"/>
-            <a:r>
-              <a:rPr sz="1150" b="0">
-                <a:solidFill>
-                  <a:srgbClr val="161B26"/>
-                </a:solidFill>
-                <a:latin typeface="Arial"/>
-              </a:rPr>
-              <a:t>Create or paste a native editable PowerPoint chart.</a:t>
-            </a:r>
-          </a:p>
-        </p:txBody>
-      </p:sp>
-      <p:sp>
-        <p:nvSpPr>
-          <p:cNvPr id="32" name="Rounded Rectangle 31"/>
-          <p:cNvSpPr/>
-          <p:nvPr/>
-        </p:nvSpPr>
-        <p:spPr>
-          <a:xfrm>
-            <a:off x="9478670" y="1920240"/>
-            <a:ext cx="1997049" cy="3566160"/>
-          </a:xfrm>
-          <a:prstGeom prst="roundRect">
-            <a:avLst/>
-          </a:prstGeom>
-          <a:solidFill>
-            <a:srgbClr val="F5F8FC"/>
-          </a:solidFill>
-          <a:ln>
-            <a:solidFill>
-              <a:srgbClr val="E2E8F0"/>
-            </a:solidFill>
-          </a:ln>
-        </p:spPr>
-        <p:style>
-          <a:lnRef idx="1">
-            <a:schemeClr val="accent1"/>
-          </a:lnRef>
-          <a:fillRef idx="3">
-            <a:schemeClr val="accent1"/>
-          </a:fillRef>
-          <a:effectRef idx="2">
-            <a:schemeClr val="accent1"/>
-          </a:effectRef>
-          <a:fontRef idx="minor">
-            <a:schemeClr val="lt1"/>
-          </a:fontRef>
-        </p:style>
-        <p:txBody>
-          <a:bodyPr rtlCol="0" anchor="ctr"/>
-          <a:lstStyle/>
-          <a:p>
-            <a:pPr algn="ctr"/>
-          </a:p>
-        </p:txBody>
-      </p:sp>
-      <p:sp>
-        <p:nvSpPr>
-          <p:cNvPr id="33" name="Rectangle 32"/>
-          <p:cNvSpPr/>
-          <p:nvPr/>
-        </p:nvSpPr>
-        <p:spPr>
-          <a:xfrm>
-            <a:off x="9478670" y="1920240"/>
-            <a:ext cx="73152" cy="3566160"/>
-          </a:xfrm>
-          <a:prstGeom prst="rect">
-            <a:avLst/>
-          </a:prstGeom>
-          <a:solidFill>
-            <a:srgbClr val="1F6FEB"/>
-          </a:solidFill>
-          <a:ln>
-            <a:solidFill>
-              <a:srgbClr val="1F6FEB"/>
-            </a:solidFill>
-          </a:ln>
-        </p:spPr>
-        <p:style>
-          <a:lnRef idx="1">
-            <a:schemeClr val="accent1"/>
-          </a:lnRef>
-          <a:fillRef idx="3">
-            <a:schemeClr val="accent1"/>
-          </a:fillRef>
-          <a:effectRef idx="2">
-            <a:schemeClr val="accent1"/>
-          </a:effectRef>
-          <a:fontRef idx="minor">
-            <a:schemeClr val="lt1"/>
-          </a:fontRef>
-        </p:style>
-        <p:txBody>
-          <a:bodyPr rtlCol="0" anchor="ctr"/>
-          <a:lstStyle/>
-          <a:p>
-            <a:pPr algn="ctr"/>
-          </a:p>
-        </p:txBody>
-      </p:sp>
-      <p:sp>
-        <p:nvSpPr>
-          <p:cNvPr id="34" name="Rounded Rectangle 33"/>
-          <p:cNvSpPr/>
-          <p:nvPr/>
-        </p:nvSpPr>
-        <p:spPr>
-          <a:xfrm>
-            <a:off x="9679838" y="2139696"/>
-            <a:ext cx="438912" cy="438912"/>
-          </a:xfrm>
-          <a:prstGeom prst="roundRect">
-            <a:avLst/>
-          </a:prstGeom>
-          <a:solidFill>
-            <a:srgbClr val="1F6FEB"/>
-          </a:solidFill>
-          <a:ln>
-            <a:solidFill>
-              <a:srgbClr val="1F6FEB"/>
-            </a:solidFill>
-          </a:ln>
-        </p:spPr>
-        <p:style>
-          <a:lnRef idx="1">
-            <a:schemeClr val="accent1"/>
-          </a:lnRef>
-          <a:fillRef idx="3">
-            <a:schemeClr val="accent1"/>
-          </a:fillRef>
-          <a:effectRef idx="2">
-            <a:schemeClr val="accent1"/>
-          </a:effectRef>
-          <a:fontRef idx="minor">
-            <a:schemeClr val="lt1"/>
-          </a:fontRef>
-        </p:style>
-        <p:txBody>
-          <a:bodyPr rtlCol="0" anchor="ctr"/>
-          <a:lstStyle/>
-          <a:p>
-            <a:pPr algn="ctr"/>
-          </a:p>
-        </p:txBody>
-      </p:sp>
-      <p:sp>
-        <p:nvSpPr>
-          <p:cNvPr id="35" name="TextBox 34"/>
-          <p:cNvSpPr txBox="1"/>
-          <p:nvPr/>
-        </p:nvSpPr>
-        <p:spPr>
-          <a:xfrm>
-            <a:off x="9679838" y="2148840"/>
-            <a:ext cx="438912" cy="420624"/>
-          </a:xfrm>
-          <a:prstGeom prst="rect">
-            <a:avLst/>
-          </a:prstGeom>
-          <a:noFill/>
-        </p:spPr>
-        <p:txBody>
-          <a:bodyPr wrap="square" anchor="ctr">
-            <a:spAutoFit/>
-          </a:bodyPr>
-          <a:lstStyle/>
-          <a:p>
-            <a:pPr algn="ctr"/>
-            <a:r>
-              <a:rPr sz="1400" b="1">
-                <a:solidFill>
-                  <a:srgbClr val="FFFFFF"/>
-                </a:solidFill>
-                <a:latin typeface="Arial"/>
-              </a:rPr>
-              <a:t>5</a:t>
-            </a:r>
-          </a:p>
-        </p:txBody>
-      </p:sp>
-      <p:sp>
-        <p:nvSpPr>
-          <p:cNvPr id="36" name="TextBox 35"/>
-          <p:cNvSpPr txBox="1"/>
-          <p:nvPr/>
-        </p:nvSpPr>
-        <p:spPr>
-          <a:xfrm>
-            <a:off x="10283342" y="2103120"/>
-            <a:ext cx="1009497" cy="329184"/>
-          </a:xfrm>
-          <a:prstGeom prst="rect">
-            <a:avLst/>
-          </a:prstGeom>
-          <a:noFill/>
-        </p:spPr>
-        <p:txBody>
-          <a:bodyPr wrap="square" anchor="t">
-            <a:spAutoFit/>
-          </a:bodyPr>
-          <a:lstStyle/>
-          <a:p>
-            <a:pPr algn="l"/>
-            <a:r>
-              <a:rPr sz="1400" b="1">
-                <a:solidFill>
-                  <a:srgbClr val="1F6FEB"/>
-                </a:solidFill>
-                <a:latin typeface="Arial"/>
-              </a:rPr>
-              <a:t>Explain</a:t>
-            </a:r>
-          </a:p>
-        </p:txBody>
-      </p:sp>
-      <p:sp>
-        <p:nvSpPr>
-          <p:cNvPr id="37" name="TextBox 36"/>
-          <p:cNvSpPr txBox="1"/>
-          <p:nvPr/>
-        </p:nvSpPr>
-        <p:spPr>
-          <a:xfrm>
-            <a:off x="10283342" y="2487168"/>
-            <a:ext cx="1009497" cy="2852928"/>
-          </a:xfrm>
-          <a:prstGeom prst="rect">
-            <a:avLst/>
-          </a:prstGeom>
-          <a:noFill/>
-        </p:spPr>
-        <p:txBody>
-          <a:bodyPr wrap="square" anchor="t">
-            <a:spAutoFit/>
-          </a:bodyPr>
-          <a:lstStyle/>
-          <a:p>
-            <a:pPr algn="l"/>
-            <a:r>
-              <a:rPr sz="1150" b="0">
-                <a:solidFill>
-                  <a:srgbClr val="161B26"/>
-                </a:solidFill>
-                <a:latin typeface="Arial"/>
-              </a:rPr>
-              <a:t>Write the action title, annotation and implication.</a:t>
+              <a:t>Prompt an approved AI assistant to analyse the workbook and propose candidate insights. Reproduce the selected calculations in Excel, then create an editable PowerPoint chart with an explicit decision implication.</a:t>
             </a:r>
           </a:p>
         </p:txBody>
@@ -7102,11 +6788,11 @@
             <a:avLst/>
           </a:prstGeom>
           <a:solidFill>
-            <a:srgbClr val="7C3AED"/>
+            <a:srgbClr val="10B981"/>
           </a:solidFill>
           <a:ln>
             <a:solidFill>
-              <a:srgbClr val="7C3AED"/>
+              <a:srgbClr val="10B981"/>
             </a:solidFill>
           </a:ln>
         </p:spPr>
@@ -7158,11 +6844,11 @@
             <a:r>
               <a:rPr sz="1100" b="1">
                 <a:solidFill>
-                  <a:srgbClr val="7C3AED"/>
+                  <a:srgbClr val="10B981"/>
                 </a:solidFill>
                 <a:latin typeface="Arial"/>
               </a:rPr>
-              <a:t>ACTIVITY 05 · EXAMPLE</a:t>
+              <a:t>ACTIVITY 05 · FRAMEWORK</a:t>
             </a:r>
           </a:p>
         </p:txBody>
@@ -7197,7 +6883,7 @@
                 </a:solidFill>
                 <a:latin typeface="Arial"/>
               </a:rPr>
-              <a:t>Worked Output</a:t>
+              <a:t>Data-to-Decision Chart</a:t>
             </a:r>
           </a:p>
         </p:txBody>
@@ -7290,8 +6976,8 @@
         </p:nvSpPr>
         <p:spPr>
           <a:xfrm>
-            <a:off x="731520" y="1783080"/>
-            <a:ext cx="3401568" cy="1719072"/>
+            <a:off x="685800" y="1920240"/>
+            <a:ext cx="1997049" cy="3566160"/>
           </a:xfrm>
           <a:prstGeom prst="roundRect">
             <a:avLst/>
@@ -7335,8 +7021,8 @@
         </p:nvSpPr>
         <p:spPr>
           <a:xfrm>
-            <a:off x="731520" y="1783080"/>
-            <a:ext cx="73152" cy="1719072"/>
+            <a:off x="685800" y="1920240"/>
+            <a:ext cx="73152" cy="3566160"/>
           </a:xfrm>
           <a:prstGeom prst="rect">
             <a:avLst/>
@@ -7380,7 +7066,7 @@
         </p:nvSpPr>
         <p:spPr>
           <a:xfrm>
-            <a:off x="932688" y="2002536"/>
+            <a:off x="886968" y="2139696"/>
             <a:ext cx="438912" cy="438912"/>
           </a:xfrm>
           <a:prstGeom prst="roundRect">
@@ -7425,7 +7111,7 @@
         </p:nvSpPr>
         <p:spPr>
           <a:xfrm>
-            <a:off x="932688" y="2011680"/>
+            <a:off x="886968" y="2148840"/>
             <a:ext cx="438912" cy="420624"/>
           </a:xfrm>
           <a:prstGeom prst="rect">
@@ -7460,8 +7146,8 @@
         </p:nvSpPr>
         <p:spPr>
           <a:xfrm>
-            <a:off x="1536192" y="1965960"/>
-            <a:ext cx="2414016" cy="329184"/>
+            <a:off x="1490472" y="2103120"/>
+            <a:ext cx="1009497" cy="329184"/>
           </a:xfrm>
           <a:prstGeom prst="rect">
             <a:avLst/>
@@ -7482,7 +7168,7 @@
                 </a:solidFill>
                 <a:latin typeface="Arial"/>
               </a:rPr>
-              <a:t>Beverages</a:t>
+              <a:t>Question</a:t>
             </a:r>
           </a:p>
         </p:txBody>
@@ -7495,8 +7181,8 @@
         </p:nvSpPr>
         <p:spPr>
           <a:xfrm>
-            <a:off x="1536192" y="2350008"/>
-            <a:ext cx="2414016" cy="1005839"/>
+            <a:off x="1490472" y="2487168"/>
+            <a:ext cx="1009497" cy="2852928"/>
           </a:xfrm>
           <a:prstGeom prst="rect">
             <a:avLst/>
@@ -7517,7 +7203,7 @@
                 </a:solidFill>
                 <a:latin typeface="Arial"/>
               </a:rPr>
-              <a:t>Highest revenue; stable margin</a:t>
+              <a:t>Define which products to promote and why.</a:t>
             </a:r>
           </a:p>
         </p:txBody>
@@ -7530,8 +7216,8 @@
         </p:nvSpPr>
         <p:spPr>
           <a:xfrm>
-            <a:off x="4315968" y="1783080"/>
-            <a:ext cx="3401568" cy="1719072"/>
+            <a:off x="2884017" y="1920240"/>
+            <a:ext cx="1997049" cy="3566160"/>
           </a:xfrm>
           <a:prstGeom prst="roundRect">
             <a:avLst/>
@@ -7575,8 +7261,8 @@
         </p:nvSpPr>
         <p:spPr>
           <a:xfrm>
-            <a:off x="4315968" y="1783080"/>
-            <a:ext cx="73152" cy="1719072"/>
+            <a:off x="2884017" y="1920240"/>
+            <a:ext cx="73152" cy="3566160"/>
           </a:xfrm>
           <a:prstGeom prst="rect">
             <a:avLst/>
@@ -7620,7 +7306,7 @@
         </p:nvSpPr>
         <p:spPr>
           <a:xfrm>
-            <a:off x="4517136" y="2002536"/>
+            <a:off x="3085185" y="2139696"/>
             <a:ext cx="438912" cy="438912"/>
           </a:xfrm>
           <a:prstGeom prst="roundRect">
@@ -7665,7 +7351,7 @@
         </p:nvSpPr>
         <p:spPr>
           <a:xfrm>
-            <a:off x="4517136" y="2011680"/>
+            <a:off x="3085185" y="2148840"/>
             <a:ext cx="438912" cy="420624"/>
           </a:xfrm>
           <a:prstGeom prst="rect">
@@ -7700,8 +7386,8 @@
         </p:nvSpPr>
         <p:spPr>
           <a:xfrm>
-            <a:off x="5120640" y="1965960"/>
-            <a:ext cx="2414016" cy="329184"/>
+            <a:off x="3688689" y="2103120"/>
+            <a:ext cx="1009497" cy="329184"/>
           </a:xfrm>
           <a:prstGeom prst="rect">
             <a:avLst/>
@@ -7722,7 +7408,7 @@
                 </a:solidFill>
                 <a:latin typeface="Arial"/>
               </a:rPr>
-              <a:t>Ready meals</a:t>
+              <a:t>Prepare</a:t>
             </a:r>
           </a:p>
         </p:txBody>
@@ -7735,8 +7421,8 @@
         </p:nvSpPr>
         <p:spPr>
           <a:xfrm>
-            <a:off x="5120640" y="2350008"/>
-            <a:ext cx="2414016" cy="1005839"/>
+            <a:off x="3688689" y="2487168"/>
+            <a:ext cx="1009497" cy="2852928"/>
           </a:xfrm>
           <a:prstGeom prst="rect">
             <a:avLst/>
@@ -7757,7 +7443,7 @@
                 </a:solidFill>
                 <a:latin typeface="Arial"/>
               </a:rPr>
-              <a:t>Fastest Q2 growth; above-floor margin</a:t>
+              <a:t>Ask AI to flag data types, missing values, duplicates and inconsistent periods.</a:t>
             </a:r>
           </a:p>
         </p:txBody>
@@ -7770,8 +7456,8 @@
         </p:nvSpPr>
         <p:spPr>
           <a:xfrm>
-            <a:off x="7900416" y="1783080"/>
-            <a:ext cx="3401568" cy="1719072"/>
+            <a:off x="5082235" y="1920240"/>
+            <a:ext cx="1997049" cy="3566160"/>
           </a:xfrm>
           <a:prstGeom prst="roundRect">
             <a:avLst/>
@@ -7815,8 +7501,8 @@
         </p:nvSpPr>
         <p:spPr>
           <a:xfrm>
-            <a:off x="7900416" y="1783080"/>
-            <a:ext cx="73152" cy="1719072"/>
+            <a:off x="5082235" y="1920240"/>
+            <a:ext cx="73152" cy="3566160"/>
           </a:xfrm>
           <a:prstGeom prst="rect">
             <a:avLst/>
@@ -7860,7 +7546,7 @@
         </p:nvSpPr>
         <p:spPr>
           <a:xfrm>
-            <a:off x="8101584" y="2002536"/>
+            <a:off x="5283403" y="2139696"/>
             <a:ext cx="438912" cy="438912"/>
           </a:xfrm>
           <a:prstGeom prst="roundRect">
@@ -7905,7 +7591,7 @@
         </p:nvSpPr>
         <p:spPr>
           <a:xfrm>
-            <a:off x="8101584" y="2011680"/>
+            <a:off x="5283403" y="2148840"/>
             <a:ext cx="438912" cy="420624"/>
           </a:xfrm>
           <a:prstGeom prst="rect">
@@ -7940,8 +7626,8 @@
         </p:nvSpPr>
         <p:spPr>
           <a:xfrm>
-            <a:off x="8705088" y="1965960"/>
-            <a:ext cx="2414016" cy="329184"/>
+            <a:off x="5886907" y="2103120"/>
+            <a:ext cx="1009497" cy="329184"/>
           </a:xfrm>
           <a:prstGeom prst="rect">
             <a:avLst/>
@@ -7962,7 +7648,7 @@
                 </a:solidFill>
                 <a:latin typeface="Arial"/>
               </a:rPr>
-              <a:t>Snacks</a:t>
+              <a:t>Choose</a:t>
             </a:r>
           </a:p>
         </p:txBody>
@@ -7975,8 +7661,8 @@
         </p:nvSpPr>
         <p:spPr>
           <a:xfrm>
-            <a:off x="8705088" y="2350008"/>
-            <a:ext cx="2414016" cy="1005839"/>
+            <a:off x="5886907" y="2487168"/>
+            <a:ext cx="1009497" cy="2852928"/>
           </a:xfrm>
           <a:prstGeom prst="rect">
             <a:avLst/>
@@ -7997,7 +7683,7 @@
                 </a:solidFill>
                 <a:latin typeface="Arial"/>
               </a:rPr>
-              <a:t>High volume; lower margin</a:t>
+              <a:t>Select metric and chart based on the relationship.</a:t>
             </a:r>
           </a:p>
         </p:txBody>
@@ -8010,8 +7696,8 @@
         </p:nvSpPr>
         <p:spPr>
           <a:xfrm>
-            <a:off x="731520" y="3776472"/>
-            <a:ext cx="3401568" cy="1719072"/>
+            <a:off x="7280452" y="1920240"/>
+            <a:ext cx="1997049" cy="3566160"/>
           </a:xfrm>
           <a:prstGeom prst="roundRect">
             <a:avLst/>
@@ -8055,8 +7741,8 @@
         </p:nvSpPr>
         <p:spPr>
           <a:xfrm>
-            <a:off x="731520" y="3776472"/>
-            <a:ext cx="73152" cy="1719072"/>
+            <a:off x="7280452" y="1920240"/>
+            <a:ext cx="73152" cy="3566160"/>
           </a:xfrm>
           <a:prstGeom prst="rect">
             <a:avLst/>
@@ -8100,7 +7786,7 @@
         </p:nvSpPr>
         <p:spPr>
           <a:xfrm>
-            <a:off x="932688" y="3995928"/>
+            <a:off x="7481620" y="2139696"/>
             <a:ext cx="438912" cy="438912"/>
           </a:xfrm>
           <a:prstGeom prst="roundRect">
@@ -8145,7 +7831,7 @@
         </p:nvSpPr>
         <p:spPr>
           <a:xfrm>
-            <a:off x="932688" y="4005072"/>
+            <a:off x="7481620" y="2148840"/>
             <a:ext cx="438912" cy="420624"/>
           </a:xfrm>
           <a:prstGeom prst="rect">
@@ -8180,8 +7866,8 @@
         </p:nvSpPr>
         <p:spPr>
           <a:xfrm>
-            <a:off x="1536192" y="3959352"/>
-            <a:ext cx="2414016" cy="329184"/>
+            <a:off x="8085124" y="2103120"/>
+            <a:ext cx="1009497" cy="329184"/>
           </a:xfrm>
           <a:prstGeom prst="rect">
             <a:avLst/>
@@ -8202,7 +7888,7 @@
                 </a:solidFill>
                 <a:latin typeface="Arial"/>
               </a:rPr>
-              <a:t>Household</a:t>
+              <a:t>Build</a:t>
             </a:r>
           </a:p>
         </p:txBody>
@@ -8215,8 +7901,8 @@
         </p:nvSpPr>
         <p:spPr>
           <a:xfrm>
-            <a:off x="1536192" y="4343400"/>
-            <a:ext cx="2414016" cy="1005839"/>
+            <a:off x="8085124" y="2487168"/>
+            <a:ext cx="1009497" cy="2852928"/>
           </a:xfrm>
           <a:prstGeom prst="rect">
             <a:avLst/>
@@ -8237,7 +7923,7 @@
                 </a:solidFill>
                 <a:latin typeface="Arial"/>
               </a:rPr>
-              <a:t>Seasonal spike; higher returns</a:t>
+              <a:t>Create or paste a native editable PowerPoint chart.</a:t>
             </a:r>
           </a:p>
         </p:txBody>
@@ -8250,8 +7936,8 @@
         </p:nvSpPr>
         <p:spPr>
           <a:xfrm>
-            <a:off x="4315968" y="3776472"/>
-            <a:ext cx="3401568" cy="1719072"/>
+            <a:off x="9478670" y="1920240"/>
+            <a:ext cx="1997049" cy="3566160"/>
           </a:xfrm>
           <a:prstGeom prst="roundRect">
             <a:avLst/>
@@ -8295,8 +7981,8 @@
         </p:nvSpPr>
         <p:spPr>
           <a:xfrm>
-            <a:off x="4315968" y="3776472"/>
-            <a:ext cx="73152" cy="1719072"/>
+            <a:off x="9478670" y="1920240"/>
+            <a:ext cx="73152" cy="3566160"/>
           </a:xfrm>
           <a:prstGeom prst="rect">
             <a:avLst/>
@@ -8340,7 +8026,7 @@
         </p:nvSpPr>
         <p:spPr>
           <a:xfrm>
-            <a:off x="4517136" y="3995928"/>
+            <a:off x="9679838" y="2139696"/>
             <a:ext cx="438912" cy="438912"/>
           </a:xfrm>
           <a:prstGeom prst="roundRect">
@@ -8385,7 +8071,7 @@
         </p:nvSpPr>
         <p:spPr>
           <a:xfrm>
-            <a:off x="4517136" y="4005072"/>
+            <a:off x="9679838" y="2148840"/>
             <a:ext cx="438912" cy="420624"/>
           </a:xfrm>
           <a:prstGeom prst="rect">
@@ -8420,8 +8106,8 @@
         </p:nvSpPr>
         <p:spPr>
           <a:xfrm>
-            <a:off x="5120640" y="3959352"/>
-            <a:ext cx="2414016" cy="329184"/>
+            <a:off x="10283342" y="2103120"/>
+            <a:ext cx="1009497" cy="329184"/>
           </a:xfrm>
           <a:prstGeom prst="rect">
             <a:avLst/>
@@ -8442,7 +8128,7 @@
                 </a:solidFill>
                 <a:latin typeface="Arial"/>
               </a:rPr>
-              <a:t>Metric</a:t>
+              <a:t>Explain</a:t>
             </a:r>
           </a:p>
         </p:txBody>
@@ -8455,8 +8141,8 @@
         </p:nvSpPr>
         <p:spPr>
           <a:xfrm>
-            <a:off x="5120640" y="4343400"/>
-            <a:ext cx="2414016" cy="1005839"/>
+            <a:off x="10283342" y="2487168"/>
+            <a:ext cx="1009497" cy="2852928"/>
           </a:xfrm>
           <a:prstGeom prst="rect">
             <a:avLst/>
@@ -8477,247 +8163,7 @@
                 </a:solidFill>
                 <a:latin typeface="Arial"/>
               </a:rPr>
-              <a:t>Revenue + growth + margin, not volume alone</a:t>
-            </a:r>
-          </a:p>
-        </p:txBody>
-      </p:sp>
-      <p:sp>
-        <p:nvSpPr>
-          <p:cNvPr id="38" name="Rounded Rectangle 37"/>
-          <p:cNvSpPr/>
-          <p:nvPr/>
-        </p:nvSpPr>
-        <p:spPr>
-          <a:xfrm>
-            <a:off x="7900416" y="3776472"/>
-            <a:ext cx="3401568" cy="1719072"/>
-          </a:xfrm>
-          <a:prstGeom prst="roundRect">
-            <a:avLst/>
-          </a:prstGeom>
-          <a:solidFill>
-            <a:srgbClr val="F5F8FC"/>
-          </a:solidFill>
-          <a:ln>
-            <a:solidFill>
-              <a:srgbClr val="E2E8F0"/>
-            </a:solidFill>
-          </a:ln>
-        </p:spPr>
-        <p:style>
-          <a:lnRef idx="1">
-            <a:schemeClr val="accent1"/>
-          </a:lnRef>
-          <a:fillRef idx="3">
-            <a:schemeClr val="accent1"/>
-          </a:fillRef>
-          <a:effectRef idx="2">
-            <a:schemeClr val="accent1"/>
-          </a:effectRef>
-          <a:fontRef idx="minor">
-            <a:schemeClr val="lt1"/>
-          </a:fontRef>
-        </p:style>
-        <p:txBody>
-          <a:bodyPr rtlCol="0" anchor="ctr"/>
-          <a:lstStyle/>
-          <a:p>
-            <a:pPr algn="ctr"/>
-          </a:p>
-        </p:txBody>
-      </p:sp>
-      <p:sp>
-        <p:nvSpPr>
-          <p:cNvPr id="39" name="Rectangle 38"/>
-          <p:cNvSpPr/>
-          <p:nvPr/>
-        </p:nvSpPr>
-        <p:spPr>
-          <a:xfrm>
-            <a:off x="7900416" y="3776472"/>
-            <a:ext cx="73152" cy="1719072"/>
-          </a:xfrm>
-          <a:prstGeom prst="rect">
-            <a:avLst/>
-          </a:prstGeom>
-          <a:solidFill>
-            <a:srgbClr val="10B981"/>
-          </a:solidFill>
-          <a:ln>
-            <a:solidFill>
-              <a:srgbClr val="10B981"/>
-            </a:solidFill>
-          </a:ln>
-        </p:spPr>
-        <p:style>
-          <a:lnRef idx="1">
-            <a:schemeClr val="accent1"/>
-          </a:lnRef>
-          <a:fillRef idx="3">
-            <a:schemeClr val="accent1"/>
-          </a:fillRef>
-          <a:effectRef idx="2">
-            <a:schemeClr val="accent1"/>
-          </a:effectRef>
-          <a:fontRef idx="minor">
-            <a:schemeClr val="lt1"/>
-          </a:fontRef>
-        </p:style>
-        <p:txBody>
-          <a:bodyPr rtlCol="0" anchor="ctr"/>
-          <a:lstStyle/>
-          <a:p>
-            <a:pPr algn="ctr"/>
-          </a:p>
-        </p:txBody>
-      </p:sp>
-      <p:sp>
-        <p:nvSpPr>
-          <p:cNvPr id="40" name="Rounded Rectangle 39"/>
-          <p:cNvSpPr/>
-          <p:nvPr/>
-        </p:nvSpPr>
-        <p:spPr>
-          <a:xfrm>
-            <a:off x="8101584" y="3995928"/>
-            <a:ext cx="438912" cy="438912"/>
-          </a:xfrm>
-          <a:prstGeom prst="roundRect">
-            <a:avLst/>
-          </a:prstGeom>
-          <a:solidFill>
-            <a:srgbClr val="10B981"/>
-          </a:solidFill>
-          <a:ln>
-            <a:solidFill>
-              <a:srgbClr val="10B981"/>
-            </a:solidFill>
-          </a:ln>
-        </p:spPr>
-        <p:style>
-          <a:lnRef idx="1">
-            <a:schemeClr val="accent1"/>
-          </a:lnRef>
-          <a:fillRef idx="3">
-            <a:schemeClr val="accent1"/>
-          </a:fillRef>
-          <a:effectRef idx="2">
-            <a:schemeClr val="accent1"/>
-          </a:effectRef>
-          <a:fontRef idx="minor">
-            <a:schemeClr val="lt1"/>
-          </a:fontRef>
-        </p:style>
-        <p:txBody>
-          <a:bodyPr rtlCol="0" anchor="ctr"/>
-          <a:lstStyle/>
-          <a:p>
-            <a:pPr algn="ctr"/>
-          </a:p>
-        </p:txBody>
-      </p:sp>
-      <p:sp>
-        <p:nvSpPr>
-          <p:cNvPr id="41" name="TextBox 40"/>
-          <p:cNvSpPr txBox="1"/>
-          <p:nvPr/>
-        </p:nvSpPr>
-        <p:spPr>
-          <a:xfrm>
-            <a:off x="8101584" y="4005072"/>
-            <a:ext cx="438912" cy="420624"/>
-          </a:xfrm>
-          <a:prstGeom prst="rect">
-            <a:avLst/>
-          </a:prstGeom>
-          <a:noFill/>
-        </p:spPr>
-        <p:txBody>
-          <a:bodyPr wrap="square" anchor="ctr">
-            <a:spAutoFit/>
-          </a:bodyPr>
-          <a:lstStyle/>
-          <a:p>
-            <a:pPr algn="ctr"/>
-            <a:r>
-              <a:rPr sz="1400" b="1">
-                <a:solidFill>
-                  <a:srgbClr val="FFFFFF"/>
-                </a:solidFill>
-                <a:latin typeface="Arial"/>
-              </a:rPr>
-              <a:t>6</a:t>
-            </a:r>
-          </a:p>
-        </p:txBody>
-      </p:sp>
-      <p:sp>
-        <p:nvSpPr>
-          <p:cNvPr id="42" name="TextBox 41"/>
-          <p:cNvSpPr txBox="1"/>
-          <p:nvPr/>
-        </p:nvSpPr>
-        <p:spPr>
-          <a:xfrm>
-            <a:off x="8705088" y="3959352"/>
-            <a:ext cx="2414016" cy="329184"/>
-          </a:xfrm>
-          <a:prstGeom prst="rect">
-            <a:avLst/>
-          </a:prstGeom>
-          <a:noFill/>
-        </p:spPr>
-        <p:txBody>
-          <a:bodyPr wrap="square" anchor="t">
-            <a:spAutoFit/>
-          </a:bodyPr>
-          <a:lstStyle/>
-          <a:p>
-            <a:pPr algn="l"/>
-            <a:r>
-              <a:rPr sz="1400" b="1">
-                <a:solidFill>
-                  <a:srgbClr val="10B981"/>
-                </a:solidFill>
-                <a:latin typeface="Arial"/>
-              </a:rPr>
-              <a:t>Action</a:t>
-            </a:r>
-          </a:p>
-        </p:txBody>
-      </p:sp>
-      <p:sp>
-        <p:nvSpPr>
-          <p:cNvPr id="43" name="TextBox 42"/>
-          <p:cNvSpPr txBox="1"/>
-          <p:nvPr/>
-        </p:nvSpPr>
-        <p:spPr>
-          <a:xfrm>
-            <a:off x="8705088" y="4343400"/>
-            <a:ext cx="2414016" cy="1005839"/>
-          </a:xfrm>
-          <a:prstGeom prst="rect">
-            <a:avLst/>
-          </a:prstGeom>
-          <a:noFill/>
-        </p:spPr>
-        <p:txBody>
-          <a:bodyPr wrap="square" anchor="t">
-            <a:spAutoFit/>
-          </a:bodyPr>
-          <a:lstStyle/>
-          <a:p>
-            <a:pPr algn="l"/>
-            <a:r>
-              <a:rPr sz="1150" b="0">
-                <a:solidFill>
-                  <a:srgbClr val="161B26"/>
-                </a:solidFill>
-                <a:latin typeface="Arial"/>
-              </a:rPr>
-              <a:t>Test Ready Meals as the campaign hero</a:t>
+              <a:t>Write the action title, annotation and implication.</a:t>
             </a:r>
           </a:p>
         </p:txBody>
@@ -8800,11 +8246,11 @@
             <a:avLst/>
           </a:prstGeom>
           <a:solidFill>
-            <a:srgbClr val="10B981"/>
+            <a:srgbClr val="7C3AED"/>
           </a:solidFill>
           <a:ln>
             <a:solidFill>
-              <a:srgbClr val="10B981"/>
+              <a:srgbClr val="7C3AED"/>
             </a:solidFill>
           </a:ln>
         </p:spPr>
@@ -8856,11 +8302,11 @@
             <a:r>
               <a:rPr sz="1100" b="1">
                 <a:solidFill>
-                  <a:srgbClr val="10B981"/>
+                  <a:srgbClr val="7C3AED"/>
                 </a:solidFill>
                 <a:latin typeface="Arial"/>
               </a:rPr>
-              <a:t>ACTIVITY 05 · WORKED POWERPOINT OUTPUT</a:t>
+              <a:t>ACTIVITY 05 · EXAMPLE</a:t>
             </a:r>
           </a:p>
         </p:txBody>
@@ -8895,7 +8341,7 @@
                 </a:solidFill>
                 <a:latin typeface="Arial"/>
               </a:rPr>
-              <a:t>Native Editable Chart Example</a:t>
+              <a:t>Worked Output</a:t>
             </a:r>
           </a:p>
         </p:txBody>
@@ -8980,34 +8426,186 @@
           </a:p>
         </p:txBody>
       </p:sp>
-      <p:graphicFrame>
-        <p:nvGraphicFramePr>
-          <p:cNvPr id="8" name="Chart 7"/>
-          <p:cNvGraphicFramePr>
-            <a:graphicFrameLocks noGrp="1"/>
-          </p:cNvGraphicFramePr>
-          <p:nvPr/>
-        </p:nvGraphicFramePr>
-        <p:xfrm>
-          <a:off x="777240" y="1737360"/>
-          <a:ext cx="7406640" cy="4251960"/>
-        </p:xfrm>
-        <a:graphic>
-          <a:graphicData uri="http://schemas.openxmlformats.org/drawingml/2006/chart">
-            <c:chart xmlns:c="http://schemas.openxmlformats.org/drawingml/2006/chart" r:id="rId2"/>
-          </a:graphicData>
-        </a:graphic>
-      </p:graphicFrame>
-      <p:sp>
-        <p:nvSpPr>
-          <p:cNvPr id="9" name="TextBox 8"/>
+      <p:sp>
+        <p:nvSpPr>
+          <p:cNvPr id="8" name="Rounded Rectangle 7"/>
+          <p:cNvSpPr/>
+          <p:nvPr/>
+        </p:nvSpPr>
+        <p:spPr>
+          <a:xfrm>
+            <a:off x="731520" y="1783080"/>
+            <a:ext cx="3401568" cy="1719072"/>
+          </a:xfrm>
+          <a:prstGeom prst="roundRect">
+            <a:avLst/>
+          </a:prstGeom>
+          <a:solidFill>
+            <a:srgbClr val="F5F8FC"/>
+          </a:solidFill>
+          <a:ln>
+            <a:solidFill>
+              <a:srgbClr val="E2E8F0"/>
+            </a:solidFill>
+          </a:ln>
+        </p:spPr>
+        <p:style>
+          <a:lnRef idx="1">
+            <a:schemeClr val="accent1"/>
+          </a:lnRef>
+          <a:fillRef idx="3">
+            <a:schemeClr val="accent1"/>
+          </a:fillRef>
+          <a:effectRef idx="2">
+            <a:schemeClr val="accent1"/>
+          </a:effectRef>
+          <a:fontRef idx="minor">
+            <a:schemeClr val="lt1"/>
+          </a:fontRef>
+        </p:style>
+        <p:txBody>
+          <a:bodyPr rtlCol="0" anchor="ctr"/>
+          <a:lstStyle/>
+          <a:p>
+            <a:pPr algn="ctr"/>
+          </a:p>
+        </p:txBody>
+      </p:sp>
+      <p:sp>
+        <p:nvSpPr>
+          <p:cNvPr id="9" name="Rectangle 8"/>
+          <p:cNvSpPr/>
+          <p:nvPr/>
+        </p:nvSpPr>
+        <p:spPr>
+          <a:xfrm>
+            <a:off x="731520" y="1783080"/>
+            <a:ext cx="73152" cy="1719072"/>
+          </a:xfrm>
+          <a:prstGeom prst="rect">
+            <a:avLst/>
+          </a:prstGeom>
+          <a:solidFill>
+            <a:srgbClr val="1F6FEB"/>
+          </a:solidFill>
+          <a:ln>
+            <a:solidFill>
+              <a:srgbClr val="1F6FEB"/>
+            </a:solidFill>
+          </a:ln>
+        </p:spPr>
+        <p:style>
+          <a:lnRef idx="1">
+            <a:schemeClr val="accent1"/>
+          </a:lnRef>
+          <a:fillRef idx="3">
+            <a:schemeClr val="accent1"/>
+          </a:fillRef>
+          <a:effectRef idx="2">
+            <a:schemeClr val="accent1"/>
+          </a:effectRef>
+          <a:fontRef idx="minor">
+            <a:schemeClr val="lt1"/>
+          </a:fontRef>
+        </p:style>
+        <p:txBody>
+          <a:bodyPr rtlCol="0" anchor="ctr"/>
+          <a:lstStyle/>
+          <a:p>
+            <a:pPr algn="ctr"/>
+          </a:p>
+        </p:txBody>
+      </p:sp>
+      <p:sp>
+        <p:nvSpPr>
+          <p:cNvPr id="10" name="Rounded Rectangle 9"/>
+          <p:cNvSpPr/>
+          <p:nvPr/>
+        </p:nvSpPr>
+        <p:spPr>
+          <a:xfrm>
+            <a:off x="932688" y="2002536"/>
+            <a:ext cx="438912" cy="438912"/>
+          </a:xfrm>
+          <a:prstGeom prst="roundRect">
+            <a:avLst/>
+          </a:prstGeom>
+          <a:solidFill>
+            <a:srgbClr val="1F6FEB"/>
+          </a:solidFill>
+          <a:ln>
+            <a:solidFill>
+              <a:srgbClr val="1F6FEB"/>
+            </a:solidFill>
+          </a:ln>
+        </p:spPr>
+        <p:style>
+          <a:lnRef idx="1">
+            <a:schemeClr val="accent1"/>
+          </a:lnRef>
+          <a:fillRef idx="3">
+            <a:schemeClr val="accent1"/>
+          </a:fillRef>
+          <a:effectRef idx="2">
+            <a:schemeClr val="accent1"/>
+          </a:effectRef>
+          <a:fontRef idx="minor">
+            <a:schemeClr val="lt1"/>
+          </a:fontRef>
+        </p:style>
+        <p:txBody>
+          <a:bodyPr rtlCol="0" anchor="ctr"/>
+          <a:lstStyle/>
+          <a:p>
+            <a:pPr algn="ctr"/>
+          </a:p>
+        </p:txBody>
+      </p:sp>
+      <p:sp>
+        <p:nvSpPr>
+          <p:cNvPr id="11" name="TextBox 10"/>
           <p:cNvSpPr txBox="1"/>
           <p:nvPr/>
         </p:nvSpPr>
         <p:spPr>
           <a:xfrm>
-            <a:off x="8485632" y="1874519"/>
-            <a:ext cx="2834640" cy="502920"/>
+            <a:off x="932688" y="2011680"/>
+            <a:ext cx="438912" cy="420624"/>
+          </a:xfrm>
+          <a:prstGeom prst="rect">
+            <a:avLst/>
+          </a:prstGeom>
+          <a:noFill/>
+        </p:spPr>
+        <p:txBody>
+          <a:bodyPr wrap="square" anchor="ctr">
+            <a:spAutoFit/>
+          </a:bodyPr>
+          <a:lstStyle/>
+          <a:p>
+            <a:pPr algn="ctr"/>
+            <a:r>
+              <a:rPr sz="1400" b="1">
+                <a:solidFill>
+                  <a:srgbClr val="FFFFFF"/>
+                </a:solidFill>
+                <a:latin typeface="Arial"/>
+              </a:rPr>
+              <a:t>1</a:t>
+            </a:r>
+          </a:p>
+        </p:txBody>
+      </p:sp>
+      <p:sp>
+        <p:nvSpPr>
+          <p:cNvPr id="12" name="TextBox 11"/>
+          <p:cNvSpPr txBox="1"/>
+          <p:nvPr/>
+        </p:nvSpPr>
+        <p:spPr>
+          <a:xfrm>
+            <a:off x="1536192" y="1965960"/>
+            <a:ext cx="2414016" cy="329184"/>
           </a:xfrm>
           <a:prstGeom prst="rect">
             <a:avLst/>
@@ -9022,27 +8620,27 @@
           <a:p>
             <a:pPr algn="l"/>
             <a:r>
-              <a:rPr sz="1100" b="1">
-                <a:solidFill>
-                  <a:srgbClr val="10B981"/>
+              <a:rPr sz="1400" b="1">
+                <a:solidFill>
+                  <a:srgbClr val="1F6FEB"/>
                 </a:solidFill>
                 <a:latin typeface="Arial"/>
               </a:rPr>
-              <a:t>DECISION INSIGHT</a:t>
-            </a:r>
-          </a:p>
-        </p:txBody>
-      </p:sp>
-      <p:sp>
-        <p:nvSpPr>
-          <p:cNvPr id="10" name="TextBox 9"/>
+              <a:t>Beverages</a:t>
+            </a:r>
+          </a:p>
+        </p:txBody>
+      </p:sp>
+      <p:sp>
+        <p:nvSpPr>
+          <p:cNvPr id="13" name="TextBox 12"/>
           <p:cNvSpPr txBox="1"/>
           <p:nvPr/>
         </p:nvSpPr>
         <p:spPr>
           <a:xfrm>
-            <a:off x="8485632" y="2359152"/>
-            <a:ext cx="2880360" cy="1188720"/>
+            <a:off x="1536192" y="2350008"/>
+            <a:ext cx="2414016" cy="1005839"/>
           </a:xfrm>
           <a:prstGeom prst="rect">
             <a:avLst/>
@@ -9057,27 +8655,197 @@
           <a:p>
             <a:pPr algn="l"/>
             <a:r>
-              <a:rPr sz="1500" b="1">
+              <a:rPr sz="1150" b="0">
                 <a:solidFill>
                   <a:srgbClr val="161B26"/>
                 </a:solidFill>
                 <a:latin typeface="Arial"/>
               </a:rPr>
-              <a:t>Ready Meals is the strongest growth story; retain category context and verify seasonality before reallocating promotion spend.</a:t>
-            </a:r>
-          </a:p>
-        </p:txBody>
-      </p:sp>
-      <p:sp>
-        <p:nvSpPr>
-          <p:cNvPr id="11" name="TextBox 10"/>
+              <a:t>Highest revenue; stable margin</a:t>
+            </a:r>
+          </a:p>
+        </p:txBody>
+      </p:sp>
+      <p:sp>
+        <p:nvSpPr>
+          <p:cNvPr id="14" name="Rounded Rectangle 13"/>
+          <p:cNvSpPr/>
+          <p:nvPr/>
+        </p:nvSpPr>
+        <p:spPr>
+          <a:xfrm>
+            <a:off x="4315968" y="1783080"/>
+            <a:ext cx="3401568" cy="1719072"/>
+          </a:xfrm>
+          <a:prstGeom prst="roundRect">
+            <a:avLst/>
+          </a:prstGeom>
+          <a:solidFill>
+            <a:srgbClr val="F5F8FC"/>
+          </a:solidFill>
+          <a:ln>
+            <a:solidFill>
+              <a:srgbClr val="E2E8F0"/>
+            </a:solidFill>
+          </a:ln>
+        </p:spPr>
+        <p:style>
+          <a:lnRef idx="1">
+            <a:schemeClr val="accent1"/>
+          </a:lnRef>
+          <a:fillRef idx="3">
+            <a:schemeClr val="accent1"/>
+          </a:fillRef>
+          <a:effectRef idx="2">
+            <a:schemeClr val="accent1"/>
+          </a:effectRef>
+          <a:fontRef idx="minor">
+            <a:schemeClr val="lt1"/>
+          </a:fontRef>
+        </p:style>
+        <p:txBody>
+          <a:bodyPr rtlCol="0" anchor="ctr"/>
+          <a:lstStyle/>
+          <a:p>
+            <a:pPr algn="ctr"/>
+          </a:p>
+        </p:txBody>
+      </p:sp>
+      <p:sp>
+        <p:nvSpPr>
+          <p:cNvPr id="15" name="Rectangle 14"/>
+          <p:cNvSpPr/>
+          <p:nvPr/>
+        </p:nvSpPr>
+        <p:spPr>
+          <a:xfrm>
+            <a:off x="4315968" y="1783080"/>
+            <a:ext cx="73152" cy="1719072"/>
+          </a:xfrm>
+          <a:prstGeom prst="rect">
+            <a:avLst/>
+          </a:prstGeom>
+          <a:solidFill>
+            <a:srgbClr val="10B981"/>
+          </a:solidFill>
+          <a:ln>
+            <a:solidFill>
+              <a:srgbClr val="10B981"/>
+            </a:solidFill>
+          </a:ln>
+        </p:spPr>
+        <p:style>
+          <a:lnRef idx="1">
+            <a:schemeClr val="accent1"/>
+          </a:lnRef>
+          <a:fillRef idx="3">
+            <a:schemeClr val="accent1"/>
+          </a:fillRef>
+          <a:effectRef idx="2">
+            <a:schemeClr val="accent1"/>
+          </a:effectRef>
+          <a:fontRef idx="minor">
+            <a:schemeClr val="lt1"/>
+          </a:fontRef>
+        </p:style>
+        <p:txBody>
+          <a:bodyPr rtlCol="0" anchor="ctr"/>
+          <a:lstStyle/>
+          <a:p>
+            <a:pPr algn="ctr"/>
+          </a:p>
+        </p:txBody>
+      </p:sp>
+      <p:sp>
+        <p:nvSpPr>
+          <p:cNvPr id="16" name="Rounded Rectangle 15"/>
+          <p:cNvSpPr/>
+          <p:nvPr/>
+        </p:nvSpPr>
+        <p:spPr>
+          <a:xfrm>
+            <a:off x="4517136" y="2002536"/>
+            <a:ext cx="438912" cy="438912"/>
+          </a:xfrm>
+          <a:prstGeom prst="roundRect">
+            <a:avLst/>
+          </a:prstGeom>
+          <a:solidFill>
+            <a:srgbClr val="10B981"/>
+          </a:solidFill>
+          <a:ln>
+            <a:solidFill>
+              <a:srgbClr val="10B981"/>
+            </a:solidFill>
+          </a:ln>
+        </p:spPr>
+        <p:style>
+          <a:lnRef idx="1">
+            <a:schemeClr val="accent1"/>
+          </a:lnRef>
+          <a:fillRef idx="3">
+            <a:schemeClr val="accent1"/>
+          </a:fillRef>
+          <a:effectRef idx="2">
+            <a:schemeClr val="accent1"/>
+          </a:effectRef>
+          <a:fontRef idx="minor">
+            <a:schemeClr val="lt1"/>
+          </a:fontRef>
+        </p:style>
+        <p:txBody>
+          <a:bodyPr rtlCol="0" anchor="ctr"/>
+          <a:lstStyle/>
+          <a:p>
+            <a:pPr algn="ctr"/>
+          </a:p>
+        </p:txBody>
+      </p:sp>
+      <p:sp>
+        <p:nvSpPr>
+          <p:cNvPr id="17" name="TextBox 16"/>
           <p:cNvSpPr txBox="1"/>
           <p:nvPr/>
         </p:nvSpPr>
         <p:spPr>
           <a:xfrm>
-            <a:off x="8485632" y="3858768"/>
-            <a:ext cx="2880360" cy="1097280"/>
+            <a:off x="4517136" y="2011680"/>
+            <a:ext cx="438912" cy="420624"/>
+          </a:xfrm>
+          <a:prstGeom prst="rect">
+            <a:avLst/>
+          </a:prstGeom>
+          <a:noFill/>
+        </p:spPr>
+        <p:txBody>
+          <a:bodyPr wrap="square" anchor="ctr">
+            <a:spAutoFit/>
+          </a:bodyPr>
+          <a:lstStyle/>
+          <a:p>
+            <a:pPr algn="ctr"/>
+            <a:r>
+              <a:rPr sz="1400" b="1">
+                <a:solidFill>
+                  <a:srgbClr val="FFFFFF"/>
+                </a:solidFill>
+                <a:latin typeface="Arial"/>
+              </a:rPr>
+              <a:t>2</a:t>
+            </a:r>
+          </a:p>
+        </p:txBody>
+      </p:sp>
+      <p:sp>
+        <p:nvSpPr>
+          <p:cNvPr id="18" name="TextBox 17"/>
+          <p:cNvSpPr txBox="1"/>
+          <p:nvPr/>
+        </p:nvSpPr>
+        <p:spPr>
+          <a:xfrm>
+            <a:off x="5120640" y="1965960"/>
+            <a:ext cx="2414016" cy="329184"/>
           </a:xfrm>
           <a:prstGeom prst="rect">
             <a:avLst/>
@@ -9092,13 +8860,1008 @@
           <a:p>
             <a:pPr algn="l"/>
             <a:r>
-              <a:rPr sz="1000" b="0">
-                <a:solidFill>
-                  <a:srgbClr val="5B6372"/>
+              <a:rPr sz="1400" b="1">
+                <a:solidFill>
+                  <a:srgbClr val="10B981"/>
                 </a:solidFill>
                 <a:latin typeface="Arial"/>
               </a:rPr>
-              <a:t>Synthetic Northstar data · Jan–Jun 2026 · native chart remains editable</a:t>
+              <a:t>Ready meals</a:t>
+            </a:r>
+          </a:p>
+        </p:txBody>
+      </p:sp>
+      <p:sp>
+        <p:nvSpPr>
+          <p:cNvPr id="19" name="TextBox 18"/>
+          <p:cNvSpPr txBox="1"/>
+          <p:nvPr/>
+        </p:nvSpPr>
+        <p:spPr>
+          <a:xfrm>
+            <a:off x="5120640" y="2350008"/>
+            <a:ext cx="2414016" cy="1005839"/>
+          </a:xfrm>
+          <a:prstGeom prst="rect">
+            <a:avLst/>
+          </a:prstGeom>
+          <a:noFill/>
+        </p:spPr>
+        <p:txBody>
+          <a:bodyPr wrap="square" anchor="t">
+            <a:spAutoFit/>
+          </a:bodyPr>
+          <a:lstStyle/>
+          <a:p>
+            <a:pPr algn="l"/>
+            <a:r>
+              <a:rPr sz="1150" b="0">
+                <a:solidFill>
+                  <a:srgbClr val="161B26"/>
+                </a:solidFill>
+                <a:latin typeface="Arial"/>
+              </a:rPr>
+              <a:t>Fastest Q2 growth; above-floor margin</a:t>
+            </a:r>
+          </a:p>
+        </p:txBody>
+      </p:sp>
+      <p:sp>
+        <p:nvSpPr>
+          <p:cNvPr id="20" name="Rounded Rectangle 19"/>
+          <p:cNvSpPr/>
+          <p:nvPr/>
+        </p:nvSpPr>
+        <p:spPr>
+          <a:xfrm>
+            <a:off x="7900416" y="1783080"/>
+            <a:ext cx="3401568" cy="1719072"/>
+          </a:xfrm>
+          <a:prstGeom prst="roundRect">
+            <a:avLst/>
+          </a:prstGeom>
+          <a:solidFill>
+            <a:srgbClr val="F5F8FC"/>
+          </a:solidFill>
+          <a:ln>
+            <a:solidFill>
+              <a:srgbClr val="E2E8F0"/>
+            </a:solidFill>
+          </a:ln>
+        </p:spPr>
+        <p:style>
+          <a:lnRef idx="1">
+            <a:schemeClr val="accent1"/>
+          </a:lnRef>
+          <a:fillRef idx="3">
+            <a:schemeClr val="accent1"/>
+          </a:fillRef>
+          <a:effectRef idx="2">
+            <a:schemeClr val="accent1"/>
+          </a:effectRef>
+          <a:fontRef idx="minor">
+            <a:schemeClr val="lt1"/>
+          </a:fontRef>
+        </p:style>
+        <p:txBody>
+          <a:bodyPr rtlCol="0" anchor="ctr"/>
+          <a:lstStyle/>
+          <a:p>
+            <a:pPr algn="ctr"/>
+          </a:p>
+        </p:txBody>
+      </p:sp>
+      <p:sp>
+        <p:nvSpPr>
+          <p:cNvPr id="21" name="Rectangle 20"/>
+          <p:cNvSpPr/>
+          <p:nvPr/>
+        </p:nvSpPr>
+        <p:spPr>
+          <a:xfrm>
+            <a:off x="7900416" y="1783080"/>
+            <a:ext cx="73152" cy="1719072"/>
+          </a:xfrm>
+          <a:prstGeom prst="rect">
+            <a:avLst/>
+          </a:prstGeom>
+          <a:solidFill>
+            <a:srgbClr val="7C3AED"/>
+          </a:solidFill>
+          <a:ln>
+            <a:solidFill>
+              <a:srgbClr val="7C3AED"/>
+            </a:solidFill>
+          </a:ln>
+        </p:spPr>
+        <p:style>
+          <a:lnRef idx="1">
+            <a:schemeClr val="accent1"/>
+          </a:lnRef>
+          <a:fillRef idx="3">
+            <a:schemeClr val="accent1"/>
+          </a:fillRef>
+          <a:effectRef idx="2">
+            <a:schemeClr val="accent1"/>
+          </a:effectRef>
+          <a:fontRef idx="minor">
+            <a:schemeClr val="lt1"/>
+          </a:fontRef>
+        </p:style>
+        <p:txBody>
+          <a:bodyPr rtlCol="0" anchor="ctr"/>
+          <a:lstStyle/>
+          <a:p>
+            <a:pPr algn="ctr"/>
+          </a:p>
+        </p:txBody>
+      </p:sp>
+      <p:sp>
+        <p:nvSpPr>
+          <p:cNvPr id="22" name="Rounded Rectangle 21"/>
+          <p:cNvSpPr/>
+          <p:nvPr/>
+        </p:nvSpPr>
+        <p:spPr>
+          <a:xfrm>
+            <a:off x="8101584" y="2002536"/>
+            <a:ext cx="438912" cy="438912"/>
+          </a:xfrm>
+          <a:prstGeom prst="roundRect">
+            <a:avLst/>
+          </a:prstGeom>
+          <a:solidFill>
+            <a:srgbClr val="7C3AED"/>
+          </a:solidFill>
+          <a:ln>
+            <a:solidFill>
+              <a:srgbClr val="7C3AED"/>
+            </a:solidFill>
+          </a:ln>
+        </p:spPr>
+        <p:style>
+          <a:lnRef idx="1">
+            <a:schemeClr val="accent1"/>
+          </a:lnRef>
+          <a:fillRef idx="3">
+            <a:schemeClr val="accent1"/>
+          </a:fillRef>
+          <a:effectRef idx="2">
+            <a:schemeClr val="accent1"/>
+          </a:effectRef>
+          <a:fontRef idx="minor">
+            <a:schemeClr val="lt1"/>
+          </a:fontRef>
+        </p:style>
+        <p:txBody>
+          <a:bodyPr rtlCol="0" anchor="ctr"/>
+          <a:lstStyle/>
+          <a:p>
+            <a:pPr algn="ctr"/>
+          </a:p>
+        </p:txBody>
+      </p:sp>
+      <p:sp>
+        <p:nvSpPr>
+          <p:cNvPr id="23" name="TextBox 22"/>
+          <p:cNvSpPr txBox="1"/>
+          <p:nvPr/>
+        </p:nvSpPr>
+        <p:spPr>
+          <a:xfrm>
+            <a:off x="8101584" y="2011680"/>
+            <a:ext cx="438912" cy="420624"/>
+          </a:xfrm>
+          <a:prstGeom prst="rect">
+            <a:avLst/>
+          </a:prstGeom>
+          <a:noFill/>
+        </p:spPr>
+        <p:txBody>
+          <a:bodyPr wrap="square" anchor="ctr">
+            <a:spAutoFit/>
+          </a:bodyPr>
+          <a:lstStyle/>
+          <a:p>
+            <a:pPr algn="ctr"/>
+            <a:r>
+              <a:rPr sz="1400" b="1">
+                <a:solidFill>
+                  <a:srgbClr val="FFFFFF"/>
+                </a:solidFill>
+                <a:latin typeface="Arial"/>
+              </a:rPr>
+              <a:t>3</a:t>
+            </a:r>
+          </a:p>
+        </p:txBody>
+      </p:sp>
+      <p:sp>
+        <p:nvSpPr>
+          <p:cNvPr id="24" name="TextBox 23"/>
+          <p:cNvSpPr txBox="1"/>
+          <p:nvPr/>
+        </p:nvSpPr>
+        <p:spPr>
+          <a:xfrm>
+            <a:off x="8705088" y="1965960"/>
+            <a:ext cx="2414016" cy="329184"/>
+          </a:xfrm>
+          <a:prstGeom prst="rect">
+            <a:avLst/>
+          </a:prstGeom>
+          <a:noFill/>
+        </p:spPr>
+        <p:txBody>
+          <a:bodyPr wrap="square" anchor="t">
+            <a:spAutoFit/>
+          </a:bodyPr>
+          <a:lstStyle/>
+          <a:p>
+            <a:pPr algn="l"/>
+            <a:r>
+              <a:rPr sz="1400" b="1">
+                <a:solidFill>
+                  <a:srgbClr val="7C3AED"/>
+                </a:solidFill>
+                <a:latin typeface="Arial"/>
+              </a:rPr>
+              <a:t>Snacks</a:t>
+            </a:r>
+          </a:p>
+        </p:txBody>
+      </p:sp>
+      <p:sp>
+        <p:nvSpPr>
+          <p:cNvPr id="25" name="TextBox 24"/>
+          <p:cNvSpPr txBox="1"/>
+          <p:nvPr/>
+        </p:nvSpPr>
+        <p:spPr>
+          <a:xfrm>
+            <a:off x="8705088" y="2350008"/>
+            <a:ext cx="2414016" cy="1005839"/>
+          </a:xfrm>
+          <a:prstGeom prst="rect">
+            <a:avLst/>
+          </a:prstGeom>
+          <a:noFill/>
+        </p:spPr>
+        <p:txBody>
+          <a:bodyPr wrap="square" anchor="t">
+            <a:spAutoFit/>
+          </a:bodyPr>
+          <a:lstStyle/>
+          <a:p>
+            <a:pPr algn="l"/>
+            <a:r>
+              <a:rPr sz="1150" b="0">
+                <a:solidFill>
+                  <a:srgbClr val="161B26"/>
+                </a:solidFill>
+                <a:latin typeface="Arial"/>
+              </a:rPr>
+              <a:t>High volume; lower margin</a:t>
+            </a:r>
+          </a:p>
+        </p:txBody>
+      </p:sp>
+      <p:sp>
+        <p:nvSpPr>
+          <p:cNvPr id="26" name="Rounded Rectangle 25"/>
+          <p:cNvSpPr/>
+          <p:nvPr/>
+        </p:nvSpPr>
+        <p:spPr>
+          <a:xfrm>
+            <a:off x="731520" y="3776472"/>
+            <a:ext cx="3401568" cy="1719072"/>
+          </a:xfrm>
+          <a:prstGeom prst="roundRect">
+            <a:avLst/>
+          </a:prstGeom>
+          <a:solidFill>
+            <a:srgbClr val="F5F8FC"/>
+          </a:solidFill>
+          <a:ln>
+            <a:solidFill>
+              <a:srgbClr val="E2E8F0"/>
+            </a:solidFill>
+          </a:ln>
+        </p:spPr>
+        <p:style>
+          <a:lnRef idx="1">
+            <a:schemeClr val="accent1"/>
+          </a:lnRef>
+          <a:fillRef idx="3">
+            <a:schemeClr val="accent1"/>
+          </a:fillRef>
+          <a:effectRef idx="2">
+            <a:schemeClr val="accent1"/>
+          </a:effectRef>
+          <a:fontRef idx="minor">
+            <a:schemeClr val="lt1"/>
+          </a:fontRef>
+        </p:style>
+        <p:txBody>
+          <a:bodyPr rtlCol="0" anchor="ctr"/>
+          <a:lstStyle/>
+          <a:p>
+            <a:pPr algn="ctr"/>
+          </a:p>
+        </p:txBody>
+      </p:sp>
+      <p:sp>
+        <p:nvSpPr>
+          <p:cNvPr id="27" name="Rectangle 26"/>
+          <p:cNvSpPr/>
+          <p:nvPr/>
+        </p:nvSpPr>
+        <p:spPr>
+          <a:xfrm>
+            <a:off x="731520" y="3776472"/>
+            <a:ext cx="73152" cy="1719072"/>
+          </a:xfrm>
+          <a:prstGeom prst="rect">
+            <a:avLst/>
+          </a:prstGeom>
+          <a:solidFill>
+            <a:srgbClr val="F59E0B"/>
+          </a:solidFill>
+          <a:ln>
+            <a:solidFill>
+              <a:srgbClr val="F59E0B"/>
+            </a:solidFill>
+          </a:ln>
+        </p:spPr>
+        <p:style>
+          <a:lnRef idx="1">
+            <a:schemeClr val="accent1"/>
+          </a:lnRef>
+          <a:fillRef idx="3">
+            <a:schemeClr val="accent1"/>
+          </a:fillRef>
+          <a:effectRef idx="2">
+            <a:schemeClr val="accent1"/>
+          </a:effectRef>
+          <a:fontRef idx="minor">
+            <a:schemeClr val="lt1"/>
+          </a:fontRef>
+        </p:style>
+        <p:txBody>
+          <a:bodyPr rtlCol="0" anchor="ctr"/>
+          <a:lstStyle/>
+          <a:p>
+            <a:pPr algn="ctr"/>
+          </a:p>
+        </p:txBody>
+      </p:sp>
+      <p:sp>
+        <p:nvSpPr>
+          <p:cNvPr id="28" name="Rounded Rectangle 27"/>
+          <p:cNvSpPr/>
+          <p:nvPr/>
+        </p:nvSpPr>
+        <p:spPr>
+          <a:xfrm>
+            <a:off x="932688" y="3995928"/>
+            <a:ext cx="438912" cy="438912"/>
+          </a:xfrm>
+          <a:prstGeom prst="roundRect">
+            <a:avLst/>
+          </a:prstGeom>
+          <a:solidFill>
+            <a:srgbClr val="F59E0B"/>
+          </a:solidFill>
+          <a:ln>
+            <a:solidFill>
+              <a:srgbClr val="F59E0B"/>
+            </a:solidFill>
+          </a:ln>
+        </p:spPr>
+        <p:style>
+          <a:lnRef idx="1">
+            <a:schemeClr val="accent1"/>
+          </a:lnRef>
+          <a:fillRef idx="3">
+            <a:schemeClr val="accent1"/>
+          </a:fillRef>
+          <a:effectRef idx="2">
+            <a:schemeClr val="accent1"/>
+          </a:effectRef>
+          <a:fontRef idx="minor">
+            <a:schemeClr val="lt1"/>
+          </a:fontRef>
+        </p:style>
+        <p:txBody>
+          <a:bodyPr rtlCol="0" anchor="ctr"/>
+          <a:lstStyle/>
+          <a:p>
+            <a:pPr algn="ctr"/>
+          </a:p>
+        </p:txBody>
+      </p:sp>
+      <p:sp>
+        <p:nvSpPr>
+          <p:cNvPr id="29" name="TextBox 28"/>
+          <p:cNvSpPr txBox="1"/>
+          <p:nvPr/>
+        </p:nvSpPr>
+        <p:spPr>
+          <a:xfrm>
+            <a:off x="932688" y="4005072"/>
+            <a:ext cx="438912" cy="420624"/>
+          </a:xfrm>
+          <a:prstGeom prst="rect">
+            <a:avLst/>
+          </a:prstGeom>
+          <a:noFill/>
+        </p:spPr>
+        <p:txBody>
+          <a:bodyPr wrap="square" anchor="ctr">
+            <a:spAutoFit/>
+          </a:bodyPr>
+          <a:lstStyle/>
+          <a:p>
+            <a:pPr algn="ctr"/>
+            <a:r>
+              <a:rPr sz="1400" b="1">
+                <a:solidFill>
+                  <a:srgbClr val="FFFFFF"/>
+                </a:solidFill>
+                <a:latin typeface="Arial"/>
+              </a:rPr>
+              <a:t>4</a:t>
+            </a:r>
+          </a:p>
+        </p:txBody>
+      </p:sp>
+      <p:sp>
+        <p:nvSpPr>
+          <p:cNvPr id="30" name="TextBox 29"/>
+          <p:cNvSpPr txBox="1"/>
+          <p:nvPr/>
+        </p:nvSpPr>
+        <p:spPr>
+          <a:xfrm>
+            <a:off x="1536192" y="3959352"/>
+            <a:ext cx="2414016" cy="329184"/>
+          </a:xfrm>
+          <a:prstGeom prst="rect">
+            <a:avLst/>
+          </a:prstGeom>
+          <a:noFill/>
+        </p:spPr>
+        <p:txBody>
+          <a:bodyPr wrap="square" anchor="t">
+            <a:spAutoFit/>
+          </a:bodyPr>
+          <a:lstStyle/>
+          <a:p>
+            <a:pPr algn="l"/>
+            <a:r>
+              <a:rPr sz="1400" b="1">
+                <a:solidFill>
+                  <a:srgbClr val="F59E0B"/>
+                </a:solidFill>
+                <a:latin typeface="Arial"/>
+              </a:rPr>
+              <a:t>Household</a:t>
+            </a:r>
+          </a:p>
+        </p:txBody>
+      </p:sp>
+      <p:sp>
+        <p:nvSpPr>
+          <p:cNvPr id="31" name="TextBox 30"/>
+          <p:cNvSpPr txBox="1"/>
+          <p:nvPr/>
+        </p:nvSpPr>
+        <p:spPr>
+          <a:xfrm>
+            <a:off x="1536192" y="4343400"/>
+            <a:ext cx="2414016" cy="1005839"/>
+          </a:xfrm>
+          <a:prstGeom prst="rect">
+            <a:avLst/>
+          </a:prstGeom>
+          <a:noFill/>
+        </p:spPr>
+        <p:txBody>
+          <a:bodyPr wrap="square" anchor="t">
+            <a:spAutoFit/>
+          </a:bodyPr>
+          <a:lstStyle/>
+          <a:p>
+            <a:pPr algn="l"/>
+            <a:r>
+              <a:rPr sz="1150" b="0">
+                <a:solidFill>
+                  <a:srgbClr val="161B26"/>
+                </a:solidFill>
+                <a:latin typeface="Arial"/>
+              </a:rPr>
+              <a:t>Seasonal spike; higher returns</a:t>
+            </a:r>
+          </a:p>
+        </p:txBody>
+      </p:sp>
+      <p:sp>
+        <p:nvSpPr>
+          <p:cNvPr id="32" name="Rounded Rectangle 31"/>
+          <p:cNvSpPr/>
+          <p:nvPr/>
+        </p:nvSpPr>
+        <p:spPr>
+          <a:xfrm>
+            <a:off x="4315968" y="3776472"/>
+            <a:ext cx="3401568" cy="1719072"/>
+          </a:xfrm>
+          <a:prstGeom prst="roundRect">
+            <a:avLst/>
+          </a:prstGeom>
+          <a:solidFill>
+            <a:srgbClr val="F5F8FC"/>
+          </a:solidFill>
+          <a:ln>
+            <a:solidFill>
+              <a:srgbClr val="E2E8F0"/>
+            </a:solidFill>
+          </a:ln>
+        </p:spPr>
+        <p:style>
+          <a:lnRef idx="1">
+            <a:schemeClr val="accent1"/>
+          </a:lnRef>
+          <a:fillRef idx="3">
+            <a:schemeClr val="accent1"/>
+          </a:fillRef>
+          <a:effectRef idx="2">
+            <a:schemeClr val="accent1"/>
+          </a:effectRef>
+          <a:fontRef idx="minor">
+            <a:schemeClr val="lt1"/>
+          </a:fontRef>
+        </p:style>
+        <p:txBody>
+          <a:bodyPr rtlCol="0" anchor="ctr"/>
+          <a:lstStyle/>
+          <a:p>
+            <a:pPr algn="ctr"/>
+          </a:p>
+        </p:txBody>
+      </p:sp>
+      <p:sp>
+        <p:nvSpPr>
+          <p:cNvPr id="33" name="Rectangle 32"/>
+          <p:cNvSpPr/>
+          <p:nvPr/>
+        </p:nvSpPr>
+        <p:spPr>
+          <a:xfrm>
+            <a:off x="4315968" y="3776472"/>
+            <a:ext cx="73152" cy="1719072"/>
+          </a:xfrm>
+          <a:prstGeom prst="rect">
+            <a:avLst/>
+          </a:prstGeom>
+          <a:solidFill>
+            <a:srgbClr val="1F6FEB"/>
+          </a:solidFill>
+          <a:ln>
+            <a:solidFill>
+              <a:srgbClr val="1F6FEB"/>
+            </a:solidFill>
+          </a:ln>
+        </p:spPr>
+        <p:style>
+          <a:lnRef idx="1">
+            <a:schemeClr val="accent1"/>
+          </a:lnRef>
+          <a:fillRef idx="3">
+            <a:schemeClr val="accent1"/>
+          </a:fillRef>
+          <a:effectRef idx="2">
+            <a:schemeClr val="accent1"/>
+          </a:effectRef>
+          <a:fontRef idx="minor">
+            <a:schemeClr val="lt1"/>
+          </a:fontRef>
+        </p:style>
+        <p:txBody>
+          <a:bodyPr rtlCol="0" anchor="ctr"/>
+          <a:lstStyle/>
+          <a:p>
+            <a:pPr algn="ctr"/>
+          </a:p>
+        </p:txBody>
+      </p:sp>
+      <p:sp>
+        <p:nvSpPr>
+          <p:cNvPr id="34" name="Rounded Rectangle 33"/>
+          <p:cNvSpPr/>
+          <p:nvPr/>
+        </p:nvSpPr>
+        <p:spPr>
+          <a:xfrm>
+            <a:off x="4517136" y="3995928"/>
+            <a:ext cx="438912" cy="438912"/>
+          </a:xfrm>
+          <a:prstGeom prst="roundRect">
+            <a:avLst/>
+          </a:prstGeom>
+          <a:solidFill>
+            <a:srgbClr val="1F6FEB"/>
+          </a:solidFill>
+          <a:ln>
+            <a:solidFill>
+              <a:srgbClr val="1F6FEB"/>
+            </a:solidFill>
+          </a:ln>
+        </p:spPr>
+        <p:style>
+          <a:lnRef idx="1">
+            <a:schemeClr val="accent1"/>
+          </a:lnRef>
+          <a:fillRef idx="3">
+            <a:schemeClr val="accent1"/>
+          </a:fillRef>
+          <a:effectRef idx="2">
+            <a:schemeClr val="accent1"/>
+          </a:effectRef>
+          <a:fontRef idx="minor">
+            <a:schemeClr val="lt1"/>
+          </a:fontRef>
+        </p:style>
+        <p:txBody>
+          <a:bodyPr rtlCol="0" anchor="ctr"/>
+          <a:lstStyle/>
+          <a:p>
+            <a:pPr algn="ctr"/>
+          </a:p>
+        </p:txBody>
+      </p:sp>
+      <p:sp>
+        <p:nvSpPr>
+          <p:cNvPr id="35" name="TextBox 34"/>
+          <p:cNvSpPr txBox="1"/>
+          <p:nvPr/>
+        </p:nvSpPr>
+        <p:spPr>
+          <a:xfrm>
+            <a:off x="4517136" y="4005072"/>
+            <a:ext cx="438912" cy="420624"/>
+          </a:xfrm>
+          <a:prstGeom prst="rect">
+            <a:avLst/>
+          </a:prstGeom>
+          <a:noFill/>
+        </p:spPr>
+        <p:txBody>
+          <a:bodyPr wrap="square" anchor="ctr">
+            <a:spAutoFit/>
+          </a:bodyPr>
+          <a:lstStyle/>
+          <a:p>
+            <a:pPr algn="ctr"/>
+            <a:r>
+              <a:rPr sz="1400" b="1">
+                <a:solidFill>
+                  <a:srgbClr val="FFFFFF"/>
+                </a:solidFill>
+                <a:latin typeface="Arial"/>
+              </a:rPr>
+              <a:t>5</a:t>
+            </a:r>
+          </a:p>
+        </p:txBody>
+      </p:sp>
+      <p:sp>
+        <p:nvSpPr>
+          <p:cNvPr id="36" name="TextBox 35"/>
+          <p:cNvSpPr txBox="1"/>
+          <p:nvPr/>
+        </p:nvSpPr>
+        <p:spPr>
+          <a:xfrm>
+            <a:off x="5120640" y="3959352"/>
+            <a:ext cx="2414016" cy="329184"/>
+          </a:xfrm>
+          <a:prstGeom prst="rect">
+            <a:avLst/>
+          </a:prstGeom>
+          <a:noFill/>
+        </p:spPr>
+        <p:txBody>
+          <a:bodyPr wrap="square" anchor="t">
+            <a:spAutoFit/>
+          </a:bodyPr>
+          <a:lstStyle/>
+          <a:p>
+            <a:pPr algn="l"/>
+            <a:r>
+              <a:rPr sz="1400" b="1">
+                <a:solidFill>
+                  <a:srgbClr val="1F6FEB"/>
+                </a:solidFill>
+                <a:latin typeface="Arial"/>
+              </a:rPr>
+              <a:t>Metric</a:t>
+            </a:r>
+          </a:p>
+        </p:txBody>
+      </p:sp>
+      <p:sp>
+        <p:nvSpPr>
+          <p:cNvPr id="37" name="TextBox 36"/>
+          <p:cNvSpPr txBox="1"/>
+          <p:nvPr/>
+        </p:nvSpPr>
+        <p:spPr>
+          <a:xfrm>
+            <a:off x="5120640" y="4343400"/>
+            <a:ext cx="2414016" cy="1005839"/>
+          </a:xfrm>
+          <a:prstGeom prst="rect">
+            <a:avLst/>
+          </a:prstGeom>
+          <a:noFill/>
+        </p:spPr>
+        <p:txBody>
+          <a:bodyPr wrap="square" anchor="t">
+            <a:spAutoFit/>
+          </a:bodyPr>
+          <a:lstStyle/>
+          <a:p>
+            <a:pPr algn="l"/>
+            <a:r>
+              <a:rPr sz="1150" b="0">
+                <a:solidFill>
+                  <a:srgbClr val="161B26"/>
+                </a:solidFill>
+                <a:latin typeface="Arial"/>
+              </a:rPr>
+              <a:t>Revenue + growth + margin, not volume alone</a:t>
+            </a:r>
+          </a:p>
+        </p:txBody>
+      </p:sp>
+      <p:sp>
+        <p:nvSpPr>
+          <p:cNvPr id="38" name="Rounded Rectangle 37"/>
+          <p:cNvSpPr/>
+          <p:nvPr/>
+        </p:nvSpPr>
+        <p:spPr>
+          <a:xfrm>
+            <a:off x="7900416" y="3776472"/>
+            <a:ext cx="3401568" cy="1719072"/>
+          </a:xfrm>
+          <a:prstGeom prst="roundRect">
+            <a:avLst/>
+          </a:prstGeom>
+          <a:solidFill>
+            <a:srgbClr val="F5F8FC"/>
+          </a:solidFill>
+          <a:ln>
+            <a:solidFill>
+              <a:srgbClr val="E2E8F0"/>
+            </a:solidFill>
+          </a:ln>
+        </p:spPr>
+        <p:style>
+          <a:lnRef idx="1">
+            <a:schemeClr val="accent1"/>
+          </a:lnRef>
+          <a:fillRef idx="3">
+            <a:schemeClr val="accent1"/>
+          </a:fillRef>
+          <a:effectRef idx="2">
+            <a:schemeClr val="accent1"/>
+          </a:effectRef>
+          <a:fontRef idx="minor">
+            <a:schemeClr val="lt1"/>
+          </a:fontRef>
+        </p:style>
+        <p:txBody>
+          <a:bodyPr rtlCol="0" anchor="ctr"/>
+          <a:lstStyle/>
+          <a:p>
+            <a:pPr algn="ctr"/>
+          </a:p>
+        </p:txBody>
+      </p:sp>
+      <p:sp>
+        <p:nvSpPr>
+          <p:cNvPr id="39" name="Rectangle 38"/>
+          <p:cNvSpPr/>
+          <p:nvPr/>
+        </p:nvSpPr>
+        <p:spPr>
+          <a:xfrm>
+            <a:off x="7900416" y="3776472"/>
+            <a:ext cx="73152" cy="1719072"/>
+          </a:xfrm>
+          <a:prstGeom prst="rect">
+            <a:avLst/>
+          </a:prstGeom>
+          <a:solidFill>
+            <a:srgbClr val="10B981"/>
+          </a:solidFill>
+          <a:ln>
+            <a:solidFill>
+              <a:srgbClr val="10B981"/>
+            </a:solidFill>
+          </a:ln>
+        </p:spPr>
+        <p:style>
+          <a:lnRef idx="1">
+            <a:schemeClr val="accent1"/>
+          </a:lnRef>
+          <a:fillRef idx="3">
+            <a:schemeClr val="accent1"/>
+          </a:fillRef>
+          <a:effectRef idx="2">
+            <a:schemeClr val="accent1"/>
+          </a:effectRef>
+          <a:fontRef idx="minor">
+            <a:schemeClr val="lt1"/>
+          </a:fontRef>
+        </p:style>
+        <p:txBody>
+          <a:bodyPr rtlCol="0" anchor="ctr"/>
+          <a:lstStyle/>
+          <a:p>
+            <a:pPr algn="ctr"/>
+          </a:p>
+        </p:txBody>
+      </p:sp>
+      <p:sp>
+        <p:nvSpPr>
+          <p:cNvPr id="40" name="Rounded Rectangle 39"/>
+          <p:cNvSpPr/>
+          <p:nvPr/>
+        </p:nvSpPr>
+        <p:spPr>
+          <a:xfrm>
+            <a:off x="8101584" y="3995928"/>
+            <a:ext cx="438912" cy="438912"/>
+          </a:xfrm>
+          <a:prstGeom prst="roundRect">
+            <a:avLst/>
+          </a:prstGeom>
+          <a:solidFill>
+            <a:srgbClr val="10B981"/>
+          </a:solidFill>
+          <a:ln>
+            <a:solidFill>
+              <a:srgbClr val="10B981"/>
+            </a:solidFill>
+          </a:ln>
+        </p:spPr>
+        <p:style>
+          <a:lnRef idx="1">
+            <a:schemeClr val="accent1"/>
+          </a:lnRef>
+          <a:fillRef idx="3">
+            <a:schemeClr val="accent1"/>
+          </a:fillRef>
+          <a:effectRef idx="2">
+            <a:schemeClr val="accent1"/>
+          </a:effectRef>
+          <a:fontRef idx="minor">
+            <a:schemeClr val="lt1"/>
+          </a:fontRef>
+        </p:style>
+        <p:txBody>
+          <a:bodyPr rtlCol="0" anchor="ctr"/>
+          <a:lstStyle/>
+          <a:p>
+            <a:pPr algn="ctr"/>
+          </a:p>
+        </p:txBody>
+      </p:sp>
+      <p:sp>
+        <p:nvSpPr>
+          <p:cNvPr id="41" name="TextBox 40"/>
+          <p:cNvSpPr txBox="1"/>
+          <p:nvPr/>
+        </p:nvSpPr>
+        <p:spPr>
+          <a:xfrm>
+            <a:off x="8101584" y="4005072"/>
+            <a:ext cx="438912" cy="420624"/>
+          </a:xfrm>
+          <a:prstGeom prst="rect">
+            <a:avLst/>
+          </a:prstGeom>
+          <a:noFill/>
+        </p:spPr>
+        <p:txBody>
+          <a:bodyPr wrap="square" anchor="ctr">
+            <a:spAutoFit/>
+          </a:bodyPr>
+          <a:lstStyle/>
+          <a:p>
+            <a:pPr algn="ctr"/>
+            <a:r>
+              <a:rPr sz="1400" b="1">
+                <a:solidFill>
+                  <a:srgbClr val="FFFFFF"/>
+                </a:solidFill>
+                <a:latin typeface="Arial"/>
+              </a:rPr>
+              <a:t>6</a:t>
+            </a:r>
+          </a:p>
+        </p:txBody>
+      </p:sp>
+      <p:sp>
+        <p:nvSpPr>
+          <p:cNvPr id="42" name="TextBox 41"/>
+          <p:cNvSpPr txBox="1"/>
+          <p:nvPr/>
+        </p:nvSpPr>
+        <p:spPr>
+          <a:xfrm>
+            <a:off x="8705088" y="3959352"/>
+            <a:ext cx="2414016" cy="329184"/>
+          </a:xfrm>
+          <a:prstGeom prst="rect">
+            <a:avLst/>
+          </a:prstGeom>
+          <a:noFill/>
+        </p:spPr>
+        <p:txBody>
+          <a:bodyPr wrap="square" anchor="t">
+            <a:spAutoFit/>
+          </a:bodyPr>
+          <a:lstStyle/>
+          <a:p>
+            <a:pPr algn="l"/>
+            <a:r>
+              <a:rPr sz="1400" b="1">
+                <a:solidFill>
+                  <a:srgbClr val="10B981"/>
+                </a:solidFill>
+                <a:latin typeface="Arial"/>
+              </a:rPr>
+              <a:t>Action</a:t>
+            </a:r>
+          </a:p>
+        </p:txBody>
+      </p:sp>
+      <p:sp>
+        <p:nvSpPr>
+          <p:cNvPr id="43" name="TextBox 42"/>
+          <p:cNvSpPr txBox="1"/>
+          <p:nvPr/>
+        </p:nvSpPr>
+        <p:spPr>
+          <a:xfrm>
+            <a:off x="8705088" y="4343400"/>
+            <a:ext cx="2414016" cy="1005839"/>
+          </a:xfrm>
+          <a:prstGeom prst="rect">
+            <a:avLst/>
+          </a:prstGeom>
+          <a:noFill/>
+        </p:spPr>
+        <p:txBody>
+          <a:bodyPr wrap="square" anchor="t">
+            <a:spAutoFit/>
+          </a:bodyPr>
+          <a:lstStyle/>
+          <a:p>
+            <a:pPr algn="l"/>
+            <a:r>
+              <a:rPr sz="1150" b="0">
+                <a:solidFill>
+                  <a:srgbClr val="161B26"/>
+                </a:solidFill>
+                <a:latin typeface="Arial"/>
+              </a:rPr>
+              <a:t>Test Ready Meals as the campaign hero</a:t>
             </a:r>
           </a:p>
         </p:txBody>
@@ -9181,11 +9944,11 @@
             <a:avLst/>
           </a:prstGeom>
           <a:solidFill>
-            <a:srgbClr val="1F6FEB"/>
+            <a:srgbClr val="10B981"/>
           </a:solidFill>
           <a:ln>
             <a:solidFill>
-              <a:srgbClr val="1F6FEB"/>
+              <a:srgbClr val="10B981"/>
             </a:solidFill>
           </a:ln>
         </p:spPr>
@@ -9237,11 +10000,11 @@
             <a:r>
               <a:rPr sz="1100" b="1">
                 <a:solidFill>
-                  <a:srgbClr val="1F6FEB"/>
+                  <a:srgbClr val="10B981"/>
                 </a:solidFill>
                 <a:latin typeface="Arial"/>
               </a:rPr>
-              <a:t>ACTIVITY 05 · ACCEPTANCE</a:t>
+              <a:t>ACTIVITY 05 · WORKED POWERPOINT OUTPUT</a:t>
             </a:r>
           </a:p>
         </p:txBody>
@@ -9276,7 +10039,7 @@
                 </a:solidFill>
                 <a:latin typeface="Arial"/>
               </a:rPr>
-              <a:t>What Good Looks Like</a:t>
+              <a:t>Native Editable Chart Example</a:t>
             </a:r>
           </a:p>
         </p:txBody>
@@ -9361,18 +10124,204 @@
           </a:p>
         </p:txBody>
       </p:sp>
-      <p:sp>
-        <p:nvSpPr>
-          <p:cNvPr id="8" name="Rounded Rectangle 7"/>
+      <p:graphicFrame>
+        <p:nvGraphicFramePr>
+          <p:cNvPr id="8" name="Chart 7"/>
+          <p:cNvGraphicFramePr>
+            <a:graphicFrameLocks noGrp="1"/>
+          </p:cNvGraphicFramePr>
+          <p:nvPr/>
+        </p:nvGraphicFramePr>
+        <p:xfrm>
+          <a:off x="777240" y="1737360"/>
+          <a:ext cx="7406640" cy="4251960"/>
+        </p:xfrm>
+        <a:graphic>
+          <a:graphicData uri="http://schemas.openxmlformats.org/drawingml/2006/chart">
+            <c:chart xmlns:c="http://schemas.openxmlformats.org/drawingml/2006/chart" r:id="rId2"/>
+          </a:graphicData>
+        </a:graphic>
+      </p:graphicFrame>
+      <p:sp>
+        <p:nvSpPr>
+          <p:cNvPr id="9" name="TextBox 8"/>
+          <p:cNvSpPr txBox="1"/>
+          <p:nvPr/>
+        </p:nvSpPr>
+        <p:spPr>
+          <a:xfrm>
+            <a:off x="8485632" y="1874519"/>
+            <a:ext cx="2834640" cy="502920"/>
+          </a:xfrm>
+          <a:prstGeom prst="rect">
+            <a:avLst/>
+          </a:prstGeom>
+          <a:noFill/>
+        </p:spPr>
+        <p:txBody>
+          <a:bodyPr wrap="square" anchor="t">
+            <a:spAutoFit/>
+          </a:bodyPr>
+          <a:lstStyle/>
+          <a:p>
+            <a:pPr algn="l"/>
+            <a:r>
+              <a:rPr sz="1100" b="1">
+                <a:solidFill>
+                  <a:srgbClr val="10B981"/>
+                </a:solidFill>
+                <a:latin typeface="Arial"/>
+              </a:rPr>
+              <a:t>DECISION INSIGHT</a:t>
+            </a:r>
+          </a:p>
+        </p:txBody>
+      </p:sp>
+      <p:sp>
+        <p:nvSpPr>
+          <p:cNvPr id="10" name="TextBox 9"/>
+          <p:cNvSpPr txBox="1"/>
+          <p:nvPr/>
+        </p:nvSpPr>
+        <p:spPr>
+          <a:xfrm>
+            <a:off x="8485632" y="2359152"/>
+            <a:ext cx="2880360" cy="1188720"/>
+          </a:xfrm>
+          <a:prstGeom prst="rect">
+            <a:avLst/>
+          </a:prstGeom>
+          <a:noFill/>
+        </p:spPr>
+        <p:txBody>
+          <a:bodyPr wrap="square" anchor="t">
+            <a:spAutoFit/>
+          </a:bodyPr>
+          <a:lstStyle/>
+          <a:p>
+            <a:pPr algn="l"/>
+            <a:r>
+              <a:rPr sz="1500" b="1">
+                <a:solidFill>
+                  <a:srgbClr val="161B26"/>
+                </a:solidFill>
+                <a:latin typeface="Arial"/>
+              </a:rPr>
+              <a:t>Ready Meals is the strongest growth story; retain category context and verify seasonality before reallocating promotion spend.</a:t>
+            </a:r>
+          </a:p>
+        </p:txBody>
+      </p:sp>
+      <p:sp>
+        <p:nvSpPr>
+          <p:cNvPr id="11" name="TextBox 10"/>
+          <p:cNvSpPr txBox="1"/>
+          <p:nvPr/>
+        </p:nvSpPr>
+        <p:spPr>
+          <a:xfrm>
+            <a:off x="8485632" y="3858768"/>
+            <a:ext cx="2880360" cy="1097280"/>
+          </a:xfrm>
+          <a:prstGeom prst="rect">
+            <a:avLst/>
+          </a:prstGeom>
+          <a:noFill/>
+        </p:spPr>
+        <p:txBody>
+          <a:bodyPr wrap="square" anchor="t">
+            <a:spAutoFit/>
+          </a:bodyPr>
+          <a:lstStyle/>
+          <a:p>
+            <a:pPr algn="l"/>
+            <a:r>
+              <a:rPr sz="1000" b="0">
+                <a:solidFill>
+                  <a:srgbClr val="5B6372"/>
+                </a:solidFill>
+                <a:latin typeface="Arial"/>
+              </a:rPr>
+              <a:t>Synthetic Northstar data · Jan–Jun 2026 · native chart remains editable</a:t>
+            </a:r>
+          </a:p>
+        </p:txBody>
+      </p:sp>
+    </p:spTree>
+  </p:cSld>
+  <p:clrMapOvr>
+    <a:masterClrMapping/>
+  </p:clrMapOvr>
+</p:sld>
+</file>
+
+<file path=ppt/slides/slide8.xml><?xml version="1.0" encoding="utf-8"?>
+<p:sld xmlns:a="http://schemas.openxmlformats.org/drawingml/2006/main" xmlns:p="http://schemas.openxmlformats.org/presentationml/2006/main" xmlns:r="http://schemas.openxmlformats.org/officeDocument/2006/relationships">
+  <p:cSld>
+    <p:spTree>
+      <p:nvGrpSpPr>
+        <p:cNvPr id="1" name=""/>
+        <p:cNvGrpSpPr/>
+        <p:nvPr/>
+      </p:nvGrpSpPr>
+      <p:grpSpPr/>
+      <p:sp>
+        <p:nvSpPr>
+          <p:cNvPr id="2" name="Rectangle 1"/>
           <p:cNvSpPr/>
           <p:nvPr/>
         </p:nvSpPr>
         <p:spPr>
           <a:xfrm>
-            <a:off x="749808" y="1810512"/>
-            <a:ext cx="10652760" cy="1005840"/>
-          </a:xfrm>
-          <a:prstGeom prst="roundRect">
+            <a:off x="0" y="0"/>
+            <a:ext cx="12191695" cy="6858000"/>
+          </a:xfrm>
+          <a:prstGeom prst="rect">
+            <a:avLst/>
+          </a:prstGeom>
+          <a:solidFill>
+            <a:srgbClr val="FFFFFF"/>
+          </a:solidFill>
+          <a:ln>
+            <a:solidFill>
+              <a:srgbClr val="FFFFFF"/>
+            </a:solidFill>
+          </a:ln>
+        </p:spPr>
+        <p:style>
+          <a:lnRef idx="1">
+            <a:schemeClr val="accent1"/>
+          </a:lnRef>
+          <a:fillRef idx="3">
+            <a:schemeClr val="accent1"/>
+          </a:fillRef>
+          <a:effectRef idx="2">
+            <a:schemeClr val="accent1"/>
+          </a:effectRef>
+          <a:fontRef idx="minor">
+            <a:schemeClr val="lt1"/>
+          </a:fontRef>
+        </p:style>
+        <p:txBody>
+          <a:bodyPr rtlCol="0" anchor="ctr"/>
+          <a:lstStyle/>
+          <a:p>
+            <a:pPr algn="ctr"/>
+          </a:p>
+        </p:txBody>
+      </p:sp>
+      <p:sp>
+        <p:nvSpPr>
+          <p:cNvPr id="3" name="Rectangle 2"/>
+          <p:cNvSpPr/>
+          <p:nvPr/>
+        </p:nvSpPr>
+        <p:spPr>
+          <a:xfrm>
+            <a:off x="0" y="0"/>
+            <a:ext cx="164592" cy="6858000"/>
+          </a:xfrm>
+          <a:prstGeom prst="rect">
             <a:avLst/>
           </a:prstGeom>
           <a:solidFill>
@@ -9408,6 +10357,201 @@
       </p:sp>
       <p:sp>
         <p:nvSpPr>
+          <p:cNvPr id="4" name="TextBox 3"/>
+          <p:cNvSpPr txBox="1"/>
+          <p:nvPr/>
+        </p:nvSpPr>
+        <p:spPr>
+          <a:xfrm>
+            <a:off x="658368" y="384048"/>
+            <a:ext cx="10789920" cy="320040"/>
+          </a:xfrm>
+          <a:prstGeom prst="rect">
+            <a:avLst/>
+          </a:prstGeom>
+          <a:noFill/>
+        </p:spPr>
+        <p:txBody>
+          <a:bodyPr wrap="square" anchor="t">
+            <a:spAutoFit/>
+          </a:bodyPr>
+          <a:lstStyle/>
+          <a:p>
+            <a:pPr algn="l"/>
+            <a:r>
+              <a:rPr sz="1100" b="1">
+                <a:solidFill>
+                  <a:srgbClr val="1F6FEB"/>
+                </a:solidFill>
+                <a:latin typeface="Arial"/>
+              </a:rPr>
+              <a:t>ACTIVITY 05 · ACCEPTANCE</a:t>
+            </a:r>
+          </a:p>
+        </p:txBody>
+      </p:sp>
+      <p:sp>
+        <p:nvSpPr>
+          <p:cNvPr id="5" name="TextBox 4"/>
+          <p:cNvSpPr txBox="1"/>
+          <p:nvPr/>
+        </p:nvSpPr>
+        <p:spPr>
+          <a:xfrm>
+            <a:off x="658368" y="749808"/>
+            <a:ext cx="10789920" cy="658368"/>
+          </a:xfrm>
+          <a:prstGeom prst="rect">
+            <a:avLst/>
+          </a:prstGeom>
+          <a:noFill/>
+        </p:spPr>
+        <p:txBody>
+          <a:bodyPr wrap="square" anchor="t">
+            <a:spAutoFit/>
+          </a:bodyPr>
+          <a:lstStyle/>
+          <a:p>
+            <a:pPr algn="l"/>
+            <a:r>
+              <a:rPr sz="2700" b="1">
+                <a:solidFill>
+                  <a:srgbClr val="161B26"/>
+                </a:solidFill>
+                <a:latin typeface="Arial"/>
+              </a:rPr>
+              <a:t>What Good Looks Like</a:t>
+            </a:r>
+          </a:p>
+        </p:txBody>
+      </p:sp>
+      <p:sp>
+        <p:nvSpPr>
+          <p:cNvPr id="6" name="Rectangle 5"/>
+          <p:cNvSpPr/>
+          <p:nvPr/>
+        </p:nvSpPr>
+        <p:spPr>
+          <a:xfrm>
+            <a:off x="658368" y="1444752"/>
+            <a:ext cx="10881360" cy="18288"/>
+          </a:xfrm>
+          <a:prstGeom prst="rect">
+            <a:avLst/>
+          </a:prstGeom>
+          <a:solidFill>
+            <a:srgbClr val="E2E8F0"/>
+          </a:solidFill>
+          <a:ln>
+            <a:solidFill>
+              <a:srgbClr val="E2E8F0"/>
+            </a:solidFill>
+          </a:ln>
+        </p:spPr>
+        <p:style>
+          <a:lnRef idx="1">
+            <a:schemeClr val="accent1"/>
+          </a:lnRef>
+          <a:fillRef idx="3">
+            <a:schemeClr val="accent1"/>
+          </a:fillRef>
+          <a:effectRef idx="2">
+            <a:schemeClr val="accent1"/>
+          </a:effectRef>
+          <a:fontRef idx="minor">
+            <a:schemeClr val="lt1"/>
+          </a:fontRef>
+        </p:style>
+        <p:txBody>
+          <a:bodyPr rtlCol="0" anchor="ctr"/>
+          <a:lstStyle/>
+          <a:p>
+            <a:pPr algn="ctr"/>
+          </a:p>
+        </p:txBody>
+      </p:sp>
+      <p:sp>
+        <p:nvSpPr>
+          <p:cNvPr id="7" name="TextBox 6"/>
+          <p:cNvSpPr txBox="1"/>
+          <p:nvPr/>
+        </p:nvSpPr>
+        <p:spPr>
+          <a:xfrm>
+            <a:off x="658368" y="6473952"/>
+            <a:ext cx="9875520" cy="201168"/>
+          </a:xfrm>
+          <a:prstGeom prst="rect">
+            <a:avLst/>
+          </a:prstGeom>
+          <a:noFill/>
+        </p:spPr>
+        <p:txBody>
+          <a:bodyPr wrap="square" anchor="t">
+            <a:spAutoFit/>
+          </a:bodyPr>
+          <a:lstStyle/>
+          <a:p>
+            <a:pPr algn="l"/>
+            <a:r>
+              <a:rPr sz="800" b="0">
+                <a:solidFill>
+                  <a:srgbClr val="5B6372"/>
+                </a:solidFill>
+                <a:latin typeface="Arial"/>
+              </a:rPr>
+              <a:t>TGS-2026064178 · ACTIVITY PRACTICE · Tertiary Infotech Academy Pte Ltd</a:t>
+            </a:r>
+          </a:p>
+        </p:txBody>
+      </p:sp>
+      <p:sp>
+        <p:nvSpPr>
+          <p:cNvPr id="8" name="Rounded Rectangle 7"/>
+          <p:cNvSpPr/>
+          <p:nvPr/>
+        </p:nvSpPr>
+        <p:spPr>
+          <a:xfrm>
+            <a:off x="749808" y="1810512"/>
+            <a:ext cx="10652760" cy="1005840"/>
+          </a:xfrm>
+          <a:prstGeom prst="roundRect">
+            <a:avLst/>
+          </a:prstGeom>
+          <a:solidFill>
+            <a:srgbClr val="1F6FEB"/>
+          </a:solidFill>
+          <a:ln>
+            <a:solidFill>
+              <a:srgbClr val="1F6FEB"/>
+            </a:solidFill>
+          </a:ln>
+        </p:spPr>
+        <p:style>
+          <a:lnRef idx="1">
+            <a:schemeClr val="accent1"/>
+          </a:lnRef>
+          <a:fillRef idx="3">
+            <a:schemeClr val="accent1"/>
+          </a:fillRef>
+          <a:effectRef idx="2">
+            <a:schemeClr val="accent1"/>
+          </a:effectRef>
+          <a:fontRef idx="minor">
+            <a:schemeClr val="lt1"/>
+          </a:fontRef>
+        </p:style>
+        <p:txBody>
+          <a:bodyPr rtlCol="0" anchor="ctr"/>
+          <a:lstStyle/>
+          <a:p>
+            <a:pPr algn="ctr"/>
+          </a:p>
+        </p:txBody>
+      </p:sp>
+      <p:sp>
+        <p:nvSpPr>
           <p:cNvPr id="9" name="TextBox 8"/>
           <p:cNvSpPr txBox="1"/>
           <p:nvPr/>
@@ -9436,7 +10580,7 @@
                 </a:solidFill>
                 <a:latin typeface="Arial"/>
               </a:rPr>
-              <a:t>An AI analysis log, verified formula workbook, native editable PowerPoint chart and annotated decision slide</a:t>
+              <a:t>A Copilot analysis log, verified formula workbook, comparison infographic and annotated decision slide</a:t>
             </a:r>
           </a:p>
         </p:txBody>
